--- a/lessons/btli101_xrw5fg/btli1_l5_slides.pptx
+++ b/lessons/btli101_xrw5fg/btli1_l5_slides.pptx
@@ -7,17 +7,23 @@
   <p:sldIdLst>
     <p:sldId id="256" r:id="rId2"/>
     <p:sldId id="257" r:id="rId3"/>
+    <p:sldId id="272" r:id="rId23"/>
+    <p:sldId id="259" r:id="rId5"/>
     <p:sldId id="258" r:id="rId4"/>
-    <p:sldId id="259" r:id="rId5"/>
     <p:sldId id="260" r:id="rId6"/>
     <p:sldId id="261" r:id="rId7"/>
+    <p:sldId id="273" r:id="rId24"/>
     <p:sldId id="262" r:id="rId8"/>
     <p:sldId id="263" r:id="rId9"/>
     <p:sldId id="264" r:id="rId10"/>
+    <p:sldId id="277" r:id="rId28"/>
     <p:sldId id="265" r:id="rId11"/>
+    <p:sldId id="275" r:id="rId26"/>
+    <p:sldId id="276" r:id="rId27"/>
     <p:sldId id="266" r:id="rId12"/>
     <p:sldId id="267" r:id="rId13"/>
     <p:sldId id="268" r:id="rId14"/>
+    <p:sldId id="274" r:id="rId25"/>
     <p:sldId id="269" r:id="rId15"/>
     <p:sldId id="270" r:id="rId16"/>
     <p:sldId id="271" r:id="rId17"/>
@@ -516,10 +522,14 @@
           <a:lstStyle/>
           <a:p>
             <a:r>
-              <a:rPr lang="en-US" dirty="0"/>
               <a:t>Welcome session. Set the tone: We are not here to fix anyone's hardship today. We are here to learn to FACE it well. Estimated 60 min total: PUKAW 8 · TUKLAS 15 · TALAKAY 12 · TUGON 15 · DALHIN 10. Memory verse: John 16:33. Character anchor: PATIENCE (Pagtitiis). Open in prayer asking for honest hearts and safe space.</a:t>
             </a:r>
-            <a:endParaRPr lang="en-US" dirty="0"/>
+          </a:p>
+          <a:p/>
+          <a:p>
+            <a:r>
+              <a:t>FLOW CHECKPOINTS (cumulative): PUKAW ends 8:00 | TUKLAS 23:00 | TALAKAY 35:00 | TUGON 50:00 | DALHIN 60:00. The gold pill on every slide is the pace-keeper: '⏱ slide minutes · ⌛cumulative target'. If the room is behind at a checkpoint, reclaim time from Spafford (5-&gt;4) or sharing (5-&gt;4), never from safe-space or silent writing.</a:t>
+            </a:r>
           </a:p>
         </p:txBody>
       </p:sp>
@@ -604,10 +614,14 @@
           <a:lstStyle/>
           <a:p>
             <a:r>
-              <a:rPr lang="en-US" dirty="0"/>
               <a:t>TALAKAY (~12 min). CRITICAL: facilitator must enforce safe-space rules BEFORE anyone shares: (1) no rushing to fix, (2) no 'I have a worse story' comparisons, (3) no advice unless asked, (4) what's shared here stays here. Use the safe-space framing card from facilitator guide. Limit to 2 sharers max — quality over quantity. Discernment drill is the load-bearing exercise: each person silently classifies one current hardship as T/T/T. Don't force them to share which one — just the classification.</a:t>
             </a:r>
-            <a:endParaRPr lang="en-US" dirty="0"/>
+          </a:p>
+          <a:p/>
+          <a:p>
+            <a:r>
+              <a:t>PITFALL (from guide): huwag mag-'ako rin kasi noon...' -- imbis na affirm, nagiging usapan-tungkol-sa'yo. Pati 'kaya mo yan!' minsan tumatama bilang dismissal. Facilitator says ONLY: 'Salamat sa pagshare. Naririnig ka namin.' Walang payo. Walang follow-up questions.</a:t>
+            </a:r>
           </a:p>
         </p:txBody>
       </p:sp>
@@ -780,10 +794,14 @@
           <a:lstStyle/>
           <a:p>
             <a:r>
-              <a:rPr lang="en-US" dirty="0"/>
               <a:t>Spafford — tell slowly. Three losses: business (1871), son (1873), four daughters (Nov 1873). His wife Anna survived; the cable she sent him from Wales read just two words: 'Saved alone.' He sailed to meet her. The captain pointed out the spot where the Ville du Havre went down. Spafford wrote 'It Is Well' there — or shortly after. The hymn is not denial of grief. It is faith in the midst of grief. Both real at once.</a:t>
             </a:r>
-            <a:endParaRPr lang="en-US" dirty="0"/>
+          </a:p>
+          <a:p/>
+          <a:p>
+            <a:r>
+              <a:t>Spafford detail from guide: si Ann lang ang nakaligtas; ang cable niya mula Wales, dalawang salita lang -- 'Saved alone.' Ikuwento, huwag basahin. Tatlong pagkawala: negosyo (1871), anak na lalaki (1873), apat na anak na babae (Nov 1873).</a:t>
+            </a:r>
           </a:p>
         </p:txBody>
       </p:sp>
@@ -868,10 +886,14 @@
           <a:lstStyle/>
           <a:p>
             <a:r>
-              <a:rPr lang="en-US" dirty="0"/>
               <a:t>Play Anthem Lights cover (YouTube jcp6w4zaW7U) — ~4 min. Display lyrics on screen if possible. Facilitator's call: sing along OR silent listen. While playing, participants write in the in-group GAWIN box: (a) what God is teaching you through current hardship, OR (b) prayer for someone you know in hardship + commitment to encourage that person this week. End with 60 sec silence after the hymn closes — no rushed transition.</a:t>
             </a:r>
-            <a:endParaRPr lang="en-US" dirty="0"/>
+          </a:p>
+          <a:p/>
+          <a:p>
+            <a:r>
+              <a:t>Facilitator's call: silent listen O sing along softly. Karaniwan, SILENT LISTEN ang pinakamabigat at pinaka-naghahanap-loob. Display lyrics. 60 sec silence after the hymn -- no rushed transition.</a:t>
+            </a:r>
           </a:p>
         </p:txBody>
       </p:sp>
@@ -956,10 +978,14 @@
           <a:lstStyle/>
           <a:p>
             <a:r>
-              <a:rPr lang="en-US" dirty="0"/>
               <a:t>DALHIN (~10 min). Three concrete carry-homes. Walk through each: (1) 3-Trial Watch — 7-day journal. Honor the rhythm: nightly is fine; morning + night is better. (2) EOLO bridge — 48 hours. Make it specific. 'I will message _____ by Saturday night.' Patience isn't only enduring my own pain — it's STAYING PRESENT with someone else's. (3) John 16:33 memorize — by next LCG. Note: end-of-lesson 1-10 snapshot in participant guide; revisit start vs end.</a:t>
             </a:r>
-            <a:endParaRPr lang="en-US" dirty="0"/>
+          </a:p>
+          <a:p/>
+          <a:p>
+            <a:r>
+              <a:t>Covers DALHIN steps 5.1-5.3 (6 min): verse lock (recite together once) + 7-day 3-Trial Watch grid (isang hirap bawat araw: pangalanan, uriin T/T/T, response, verse) + EOLO 48-hour bridge ('tawagan/textan/chat-an ang taong isinulat mo sa writing box -- sa loob ng 48 oras. Hindi magpapayo. Maglilingap. Presence muna.')</a:t>
+            </a:r>
           </a:p>
         </p:txBody>
       </p:sp>
@@ -1044,10 +1070,14 @@
           <a:lstStyle/>
           <a:p>
             <a:r>
-              <a:rPr lang="en-US" dirty="0"/>
               <a:t>Pangako Ko — Filipino disciple-making convention. Spoken commitment in front of witnesses binds the disciple socially in addition to spiritually. Each participant says the 3-line pangako aloud. Witness affirms with 'Amen' or 'I will pray for you, kapatid.' Don't make it long or theatrical — short and serious.</a:t>
             </a:r>
-            <a:endParaRPr lang="en-US" dirty="0"/>
+          </a:p>
+          <a:p/>
+          <a:p>
+            <a:r>
+              <a:t>Round-robin format from guide: 'Sa darating na linggo, susubukan kong ...' Sa kulturang Filipino, mas binding ang sinasabi nang malakas kaysa nasusulat lang. Short and serious -- hindi theatrical.</a:t>
+            </a:r>
           </a:p>
         </p:txBody>
       </p:sp>
@@ -1132,10 +1162,14 @@
           <a:lstStyle/>
           <a:p>
             <a:r>
-              <a:rPr lang="en-US" dirty="0"/>
               <a:t>Closing. Preview L6 — Christian Fellowship. The bridge: 'Hindi mo dapat haharapin ang hirap nang mag-isa. Yan ang topic next week — community as God's main way of carrying us through.' Close with John 16:33 recited together aloud. End with prayer of blessing — thank God for honest sharing, ask for strength for those carrying current hardship, dismiss in peace.</a:t>
             </a:r>
-            <a:endParaRPr lang="en-US" dirty="0"/>
+          </a:p>
+          <a:p/>
+          <a:p>
+            <a:r>
+              <a:t>Closing beats (1 min): snapshot 'Saang puntos ka na ngayon, 1-10?' quick check vs start-of-lesson; closing prayer (volunteer o ikaw); L6 preview line: 'Hindi ka dapat mag-isa sa hirap -- may community ka.'</a:t>
+            </a:r>
           </a:p>
         </p:txBody>
       </p:sp>
@@ -1168,6 +1202,216 @@
         <p14:creationId xmlns:p14="http://schemas.microsoft.com/office/powerpoint/2010/main" val="1024086991"/>
       </p:ext>
     </p:extLst>
+  </p:cSld>
+  <p:clrMapOvr>
+    <a:masterClrMapping/>
+  </p:clrMapOvr>
+</p:notes>
+</file>
+
+<file path=ppt/notesSlides/notesSlide17.xml><?xml version="1.0" encoding="utf-8"?>
+<p:notes xmlns:a="http://schemas.openxmlformats.org/drawingml/2006/main" xmlns:p="http://schemas.openxmlformats.org/presentationml/2006/main" xmlns:r="http://schemas.openxmlformats.org/officeDocument/2006/relationships">
+  <p:cSld>
+    <p:spTree>
+      <p:nvGrpSpPr>
+        <p:cNvPr id="1" name=""/>
+        <p:cNvGrpSpPr/>
+        <p:nvPr/>
+      </p:nvGrpSpPr>
+      <p:grpSpPr>
+        <a:xfrm>
+          <a:off x="0" y="0"/>
+          <a:ext cx="0" cy="0"/>
+          <a:chOff x="0" y="0"/>
+          <a:chExt cx="0" cy="0"/>
+        </a:xfrm>
+      </p:grpSpPr>
+      <p:sp>
+        <p:nvSpPr>
+          <p:cNvPr id="2" name="Slide Image Placeholder 1"/>
+          <p:cNvSpPr>
+            <a:spLocks noGrp="1"/>
+          </p:cNvSpPr>
+          <p:nvPr>
+            <p:ph type="sldImg" idx="2"/>
+          </p:nvPr>
+        </p:nvSpPr>
+        <p:spPr/>
+      </p:sp>
+      <p:sp>
+        <p:nvSpPr>
+          <p:cNvPr id="3" name="Notes Placeholder 2"/>
+          <p:cNvSpPr>
+            <a:spLocks noGrp="1"/>
+          </p:cNvSpPr>
+          <p:nvPr>
+            <p:ph type="body" idx="3" sz="quarter"/>
+          </p:nvPr>
+        </p:nvSpPr>
+        <p:spPr/>
+        <p:txBody>
+          <a:bodyPr/>
+          <a:lstStyle/>
+          <a:p>
+            <a:r>
+              <a:t>L4 CALLBACK ~2 min (target 3:00). Maikling kumustahan lang -- hindi ito ang focus. Pumili ng 2 volunteers, HUWAG i-pressure. Celebration culture: kahit isang panalo, papalakpakan. Pitfall: don't let this stretch past 2 min; the monarch video needs its full window.</a:t>
+            </a:r>
+          </a:p>
+        </p:txBody>
+      </p:sp>
+      <p:sp>
+        <p:nvSpPr>
+          <p:cNvPr id="4" name="Slide Number Placeholder 3"/>
+          <p:cNvSpPr>
+            <a:spLocks noGrp="1"/>
+          </p:cNvSpPr>
+          <p:nvPr>
+            <p:ph type="sldNum" idx="5" sz="quarter"/>
+          </p:nvPr>
+        </p:nvSpPr>
+        <p:spPr/>
+      </p:sp>
+    </p:spTree>
+  </p:cSld>
+  <p:clrMapOvr>
+    <a:masterClrMapping/>
+  </p:clrMapOvr>
+</p:notes>
+</file>
+
+<file path=ppt/notesSlides/notesSlide18.xml><?xml version="1.0" encoding="utf-8"?>
+<p:notes xmlns:a="http://schemas.openxmlformats.org/drawingml/2006/main" xmlns:p="http://schemas.openxmlformats.org/presentationml/2006/main" xmlns:r="http://schemas.openxmlformats.org/officeDocument/2006/relationships">
+  <p:cSld>
+    <p:spTree>
+      <p:nvGrpSpPr>
+        <p:cNvPr id="1" name=""/>
+        <p:cNvGrpSpPr/>
+        <p:nvPr/>
+      </p:nvGrpSpPr>
+      <p:grpSpPr>
+        <a:xfrm>
+          <a:off x="0" y="0"/>
+          <a:ext cx="0" cy="0"/>
+          <a:chOff x="0" y="0"/>
+          <a:chExt cx="0" cy="0"/>
+        </a:xfrm>
+      </p:grpSpPr>
+      <p:sp>
+        <p:nvSpPr>
+          <p:cNvPr id="2" name="Slide Image Placeholder 1"/>
+          <p:cNvSpPr>
+            <a:spLocks noGrp="1"/>
+          </p:cNvSpPr>
+          <p:nvPr>
+            <p:ph type="sldImg" idx="2"/>
+          </p:nvPr>
+        </p:nvSpPr>
+        <p:spPr/>
+      </p:sp>
+      <p:sp>
+        <p:nvSpPr>
+          <p:cNvPr id="3" name="Notes Placeholder 2"/>
+          <p:cNvSpPr>
+            <a:spLocks noGrp="1"/>
+          </p:cNvSpPr>
+          <p:nvPr>
+            <p:ph type="body" idx="3" sz="quarter"/>
+          </p:nvPr>
+        </p:nvSpPr>
+        <p:spPr/>
+        <p:txBody>
+          <a:bodyPr/>
+          <a:lstStyle/>
+          <a:p>
+            <a:r>
+              <a:t>PERSONAL REFLECTION ~3 min (target 17:00). 1 minuto ganap na katahimikan muna -- bantayan sa timer, huwag putulin nang maaga. Pagkatapos, 2-3 volunteers. Mas dadami ang nag-she-share kapag nakita nilang walang nahuhusgahan. Testimony prompt: challenge AT blessing sa iisang kuwento.</a:t>
+            </a:r>
+          </a:p>
+        </p:txBody>
+      </p:sp>
+      <p:sp>
+        <p:nvSpPr>
+          <p:cNvPr id="4" name="Slide Number Placeholder 3"/>
+          <p:cNvSpPr>
+            <a:spLocks noGrp="1"/>
+          </p:cNvSpPr>
+          <p:nvPr>
+            <p:ph type="sldNum" idx="5" sz="quarter"/>
+          </p:nvPr>
+        </p:nvSpPr>
+        <p:spPr/>
+      </p:sp>
+    </p:spTree>
+  </p:cSld>
+  <p:clrMapOvr>
+    <a:masterClrMapping/>
+  </p:clrMapOvr>
+</p:notes>
+</file>
+
+<file path=ppt/notesSlides/notesSlide19.xml><?xml version="1.0" encoding="utf-8"?>
+<p:notes xmlns:a="http://schemas.openxmlformats.org/drawingml/2006/main" xmlns:p="http://schemas.openxmlformats.org/presentationml/2006/main" xmlns:r="http://schemas.openxmlformats.org/officeDocument/2006/relationships">
+  <p:cSld>
+    <p:spTree>
+      <p:nvGrpSpPr>
+        <p:cNvPr id="1" name=""/>
+        <p:cNvGrpSpPr/>
+        <p:nvPr/>
+      </p:nvGrpSpPr>
+      <p:grpSpPr>
+        <a:xfrm>
+          <a:off x="0" y="0"/>
+          <a:ext cx="0" cy="0"/>
+          <a:chOff x="0" y="0"/>
+          <a:chExt cx="0" cy="0"/>
+        </a:xfrm>
+      </p:grpSpPr>
+      <p:sp>
+        <p:nvSpPr>
+          <p:cNvPr id="2" name="Slide Image Placeholder 1"/>
+          <p:cNvSpPr>
+            <a:spLocks noGrp="1"/>
+          </p:cNvSpPr>
+          <p:nvPr>
+            <p:ph type="sldImg" idx="2"/>
+          </p:nvPr>
+        </p:nvSpPr>
+        <p:spPr/>
+      </p:sp>
+      <p:sp>
+        <p:nvSpPr>
+          <p:cNvPr id="3" name="Notes Placeholder 2"/>
+          <p:cNvSpPr>
+            <a:spLocks noGrp="1"/>
+          </p:cNvSpPr>
+          <p:nvPr>
+            <p:ph type="body" idx="3" sz="quarter"/>
+          </p:nvPr>
+        </p:nvSpPr>
+        <p:spPr/>
+        <p:txBody>
+          <a:bodyPr/>
+          <a:lstStyle/>
+          <a:p>
+            <a:r>
+              <a:t>PERSONAL WRITING BOX ~4 min (target 50:00 -- TUGON ends here). SILENT writing -- walang music, walang background talk, 3-4 minutes. Then ONE volunteer shares one line. The name written here is the EOLO-bridge person for DALHIN -- point that out gently.</a:t>
+            </a:r>
+          </a:p>
+        </p:txBody>
+      </p:sp>
+      <p:sp>
+        <p:nvSpPr>
+          <p:cNvPr id="4" name="Slide Number Placeholder 3"/>
+          <p:cNvSpPr>
+            <a:spLocks noGrp="1"/>
+          </p:cNvSpPr>
+          <p:nvPr>
+            <p:ph type="sldNum" idx="5" sz="quarter"/>
+          </p:nvPr>
+        </p:nvSpPr>
+        <p:spPr/>
+      </p:sp>
+    </p:spTree>
   </p:cSld>
   <p:clrMapOvr>
     <a:masterClrMapping/>
@@ -1220,10 +1464,14 @@
           <a:lstStyle/>
           <a:p>
             <a:r>
-              <a:rPr lang="en-US" dirty="0"/>
               <a:t>Read John 16:33 aloud — slowly. Note Jesus said 'magkakaroon' (will have) not 'baka magkaroon' (might have). Hardship is promised. But the second clause is also promised: 'dinaig ko na.' Past tense. Already won. This frames everything we'll discuss.</a:t>
             </a:r>
-            <a:endParaRPr lang="en-US" dirty="0"/>
+          </a:p>
+          <a:p/>
+          <a:p>
+            <a:r>
+              <a:t>Pace note: 1 min only -- read slowly ONCE, no exposition yet; the exposition returns at DALHIN verse lock.</a:t>
+            </a:r>
           </a:p>
         </p:txBody>
       </p:sp>
@@ -1256,6 +1504,216 @@
         <p14:creationId xmlns:p14="http://schemas.microsoft.com/office/powerpoint/2010/main" val="1024086991"/>
       </p:ext>
     </p:extLst>
+  </p:cSld>
+  <p:clrMapOvr>
+    <a:masterClrMapping/>
+  </p:clrMapOvr>
+</p:notes>
+</file>
+
+<file path=ppt/notesSlides/notesSlide20.xml><?xml version="1.0" encoding="utf-8"?>
+<p:notes xmlns:a="http://schemas.openxmlformats.org/drawingml/2006/main" xmlns:p="http://schemas.openxmlformats.org/presentationml/2006/main" xmlns:r="http://schemas.openxmlformats.org/officeDocument/2006/relationships">
+  <p:cSld>
+    <p:spTree>
+      <p:nvGrpSpPr>
+        <p:cNvPr id="1" name=""/>
+        <p:cNvGrpSpPr/>
+        <p:nvPr/>
+      </p:nvGrpSpPr>
+      <p:grpSpPr>
+        <a:xfrm>
+          <a:off x="0" y="0"/>
+          <a:ext cx="0" cy="0"/>
+          <a:chOff x="0" y="0"/>
+          <a:chExt cx="0" cy="0"/>
+        </a:xfrm>
+      </p:grpSpPr>
+      <p:sp>
+        <p:nvSpPr>
+          <p:cNvPr id="2" name="Slide Image Placeholder 1"/>
+          <p:cNvSpPr>
+            <a:spLocks noGrp="1"/>
+          </p:cNvSpPr>
+          <p:nvPr>
+            <p:ph type="sldImg" idx="2"/>
+          </p:nvPr>
+        </p:nvSpPr>
+        <p:spPr/>
+      </p:sp>
+      <p:sp>
+        <p:nvSpPr>
+          <p:cNvPr id="3" name="Notes Placeholder 2"/>
+          <p:cNvSpPr>
+            <a:spLocks noGrp="1"/>
+          </p:cNvSpPr>
+          <p:nvPr>
+            <p:ph type="body" idx="3" sz="quarter"/>
+          </p:nvPr>
+        </p:nvSpPr>
+        <p:spPr/>
+        <p:txBody>
+          <a:bodyPr/>
+          <a:lstStyle/>
+          <a:p>
+            <a:r>
+              <a:t>"BAKIT AKO?" ~3 min (target 32:00). Round-robin, isang pangungusap. Ang tanong ay NORMAL at BIBLICAL -- Job, David, Asaph, at si Jesus mismo ("Ama, bakit Mo Ako pinabayaan?"). Hindi kasalanan ang magtanong. CRITICAL: bilang facilitator, HUWAG sasagutin ang tanong. I-validate lang na valid ito.</a:t>
+            </a:r>
+          </a:p>
+        </p:txBody>
+      </p:sp>
+      <p:sp>
+        <p:nvSpPr>
+          <p:cNvPr id="4" name="Slide Number Placeholder 3"/>
+          <p:cNvSpPr>
+            <a:spLocks noGrp="1"/>
+          </p:cNvSpPr>
+          <p:nvPr>
+            <p:ph type="sldNum" idx="5" sz="quarter"/>
+          </p:nvPr>
+        </p:nvSpPr>
+        <p:spPr/>
+      </p:sp>
+    </p:spTree>
+  </p:cSld>
+  <p:clrMapOvr>
+    <a:masterClrMapping/>
+  </p:clrMapOvr>
+</p:notes>
+</file>
+
+<file path=ppt/notesSlides/notesSlide21.xml><?xml version="1.0" encoding="utf-8"?>
+<p:notes xmlns:a="http://schemas.openxmlformats.org/drawingml/2006/main" xmlns:p="http://schemas.openxmlformats.org/presentationml/2006/main" xmlns:r="http://schemas.openxmlformats.org/officeDocument/2006/relationships">
+  <p:cSld>
+    <p:spTree>
+      <p:nvGrpSpPr>
+        <p:cNvPr id="1" name=""/>
+        <p:cNvGrpSpPr/>
+        <p:nvPr/>
+      </p:nvGrpSpPr>
+      <p:grpSpPr>
+        <a:xfrm>
+          <a:off x="0" y="0"/>
+          <a:ext cx="0" cy="0"/>
+          <a:chOff x="0" y="0"/>
+          <a:chExt cx="0" cy="0"/>
+        </a:xfrm>
+      </p:grpSpPr>
+      <p:sp>
+        <p:nvSpPr>
+          <p:cNvPr id="2" name="Slide Image Placeholder 1"/>
+          <p:cNvSpPr>
+            <a:spLocks noGrp="1"/>
+          </p:cNvSpPr>
+          <p:nvPr>
+            <p:ph type="sldImg" idx="2"/>
+          </p:nvPr>
+        </p:nvSpPr>
+        <p:spPr/>
+      </p:sp>
+      <p:sp>
+        <p:nvSpPr>
+          <p:cNvPr id="3" name="Notes Placeholder 2"/>
+          <p:cNvSpPr>
+            <a:spLocks noGrp="1"/>
+          </p:cNvSpPr>
+          <p:nvPr>
+            <p:ph type="body" idx="3" sz="quarter"/>
+          </p:nvPr>
+        </p:nvSpPr>
+        <p:spPr/>
+        <p:txBody>
+          <a:bodyPr/>
+          <a:lstStyle/>
+          <a:p>
+            <a:r>
+              <a:t>DISCERNMENT DRILL ~3 min (target 35:00 -- TALAKAY ends here). Everyone classifies silently; 2 sharers state only the CLASSIFICATION, not the details. Facilitator note: madami ang magsasabing 'trial' -- at minsan trial nga lang talaga (sakit, accident). Hindi lahat may hidden meaning. Kapag hindi malinaw: 'Manatili at Sumamba. Hindi ko maintindihan, pero pinupuri pa rin Kita.'</a:t>
+            </a:r>
+          </a:p>
+        </p:txBody>
+      </p:sp>
+      <p:sp>
+        <p:nvSpPr>
+          <p:cNvPr id="4" name="Slide Number Placeholder 3"/>
+          <p:cNvSpPr>
+            <a:spLocks noGrp="1"/>
+          </p:cNvSpPr>
+          <p:nvPr>
+            <p:ph type="sldNum" idx="5" sz="quarter"/>
+          </p:nvPr>
+        </p:nvSpPr>
+        <p:spPr/>
+      </p:sp>
+    </p:spTree>
+  </p:cSld>
+  <p:clrMapOvr>
+    <a:masterClrMapping/>
+  </p:clrMapOvr>
+</p:notes>
+</file>
+
+<file path=ppt/notesSlides/notesSlide22.xml><?xml version="1.0" encoding="utf-8"?>
+<p:notes xmlns:a="http://schemas.openxmlformats.org/drawingml/2006/main" xmlns:p="http://schemas.openxmlformats.org/presentationml/2006/main" xmlns:r="http://schemas.openxmlformats.org/officeDocument/2006/relationships">
+  <p:cSld>
+    <p:spTree>
+      <p:nvGrpSpPr>
+        <p:cNvPr id="1" name=""/>
+        <p:cNvGrpSpPr/>
+        <p:nvPr/>
+      </p:nvGrpSpPr>
+      <p:grpSpPr>
+        <a:xfrm>
+          <a:off x="0" y="0"/>
+          <a:ext cx="0" cy="0"/>
+          <a:chOff x="0" y="0"/>
+          <a:chExt cx="0" cy="0"/>
+        </a:xfrm>
+      </p:grpSpPr>
+      <p:sp>
+        <p:nvSpPr>
+          <p:cNvPr id="2" name="Slide Image Placeholder 1"/>
+          <p:cNvSpPr>
+            <a:spLocks noGrp="1"/>
+          </p:cNvSpPr>
+          <p:nvPr>
+            <p:ph type="sldImg" idx="2"/>
+          </p:nvPr>
+        </p:nvSpPr>
+        <p:spPr/>
+      </p:sp>
+      <p:sp>
+        <p:nvSpPr>
+          <p:cNvPr id="3" name="Notes Placeholder 2"/>
+          <p:cNvSpPr>
+            <a:spLocks noGrp="1"/>
+          </p:cNvSpPr>
+          <p:nvPr>
+            <p:ph type="body" idx="3" sz="quarter"/>
+          </p:nvPr>
+        </p:nvSpPr>
+        <p:spPr/>
+        <p:txBody>
+          <a:bodyPr/>
+          <a:lstStyle/>
+          <a:p>
+            <a:r>
+              <a:t>SAFE-SPACE FRAMING ~1 min (target 24:00). SABIHIN BEFORE anyone shares -- basahin ang 4 rules mula sa slide, dahan-dahan. Ito ang protective act ng facilitator; dito nakasalalay ang lalim ng susunod na 11 minuto. Tissue ready (pre-session checklist).</a:t>
+            </a:r>
+          </a:p>
+        </p:txBody>
+      </p:sp>
+      <p:sp>
+        <p:nvSpPr>
+          <p:cNvPr id="4" name="Slide Number Placeholder 3"/>
+          <p:cNvSpPr>
+            <a:spLocks noGrp="1"/>
+          </p:cNvSpPr>
+          <p:nvPr>
+            <p:ph type="sldNum" idx="5" sz="quarter"/>
+          </p:nvPr>
+        </p:nvSpPr>
+        <p:spPr/>
+      </p:sp>
+    </p:spTree>
   </p:cSld>
   <p:clrMapOvr>
     <a:masterClrMapping/>
@@ -1308,10 +1766,14 @@
           <a:lstStyle/>
           <a:p>
             <a:r>
-              <a:rPr lang="en-US" dirty="0"/>
               <a:t>PUKAW (~3 of 8 min). Open with last week's L4 SRPIU follow-up first — 'Kumusta ang Pananalita / Pag-iisip / Sekswalidad watch ninyo?' — celebrate honest answers. Then transition: 'Now, totoo na holiness is hard. But may isa pang klase ng hirap — yung hindi mo pinili. Yan ang topic natin ngayon.' Let 2-3 share briefly. Don't force consensus.</a:t>
             </a:r>
-            <a:endParaRPr lang="en-US" dirty="0"/>
+          </a:p>
+          <a:p/>
+          <a:p>
+            <a:r>
+              <a:t>Round-robin (1 sentence each) o volunteer-based depende sa laki ng grupo. Walang fix mode -- tumitingin at tumatango lang. PUKAW ends here: check the pill -- 8:00.</a:t>
+            </a:r>
           </a:p>
         </p:txBody>
       </p:sp>
@@ -1396,10 +1858,14 @@
           <a:lstStyle/>
           <a:p>
             <a:r>
-              <a:rPr lang="en-US" dirty="0"/>
               <a:t>TANAW story from USAD p.36. If possible, play YouTube pgtmlVqCKxc (Monarch butterfly time-lapse) for ~60 seconds. Then tell the bata-gunting story: a child saw a butterfly struggling in its cocoon and cut it open to help. The butterfly emerged — but never flew. The struggle WAS the strengthening. The pressure pushes the fluid into the wings. Spiritual application: hindi lahat ng kaginhawaan ay biyaya. Hindi lahat ng hirap ay sumpa.</a:t>
             </a:r>
-            <a:endParaRPr lang="en-US" dirty="0"/>
+          </a:p>
+          <a:p/>
+          <a:p>
+            <a:r>
+              <a:t>Combined window 4 min: Monarch video ~2.5 (walang commentary habang tumutugtog; highlight AFTER: 'Ang fluids na nagpupuno sa pakpak ay nailalabas lang sa PAGPILIT. Walang shortcut.') + bata-gunting story ~1.5 (IKUWENTO, huwag basahin). Punchline: 'Ang well-intentioned na tulong, pwedeng masamang dulot -- kung sira ang process.'</a:t>
+            </a:r>
           </a:p>
         </p:txBody>
       </p:sp>
@@ -1484,10 +1950,14 @@
           <a:lstStyle/>
           <a:p>
             <a:r>
-              <a:rPr lang="en-US" dirty="0"/>
               <a:t>TUKLAS opening. Read the Big Idea slowly. Pause. Then deliver the punch line: 'pag-USAD ay nakadepende sa response, HINDI sa danas.' This is the thesis of the entire lesson. Every storm is real. But every response is a CHOICE. The disciple cannot control the weather; can only choose the posture under it.</a:t>
             </a:r>
-            <a:endParaRPr lang="en-US" dirty="0"/>
+          </a:p>
+          <a:p/>
+          <a:p>
+            <a:r>
+              <a:t>Frame with the USAD saying: 'SANGKAP ng pag-USAD ang DUSA.' Hindi mo kayang takasan ang hirap; kayang i-respond lang nang tama.</a:t>
+            </a:r>
           </a:p>
         </p:txBody>
       </p:sp>
@@ -1572,10 +2042,14 @@
           <a:lstStyle/>
           <a:p>
             <a:r>
-              <a:rPr lang="en-US" dirty="0"/>
               <a:t>This is the load-bearing framework of TUKLAS. Walk through all three. EMPHASIS: the wrong diagnosis leads to the wrong response. If you treat a TEMPTATION like a TRIAL ('endure it patiently'), you fall. If you treat a TRIAL like a TEMPTATION ('this is from the devil so rebuke it'), you miss the formation. James 1:13 is critical: God does not tempt anyone. The devil tempts; God tests; the world wounds. Three different sources, three different responses.</a:t>
             </a:r>
-            <a:endParaRPr lang="en-US" dirty="0"/>
+          </a:p>
+          <a:p/>
+          <a:p>
+            <a:r>
+              <a:t>USAD emphasis: HINDI lahat ng hirap ay test. Minsan trial lang -- bahagi ng pagiging tao sa nawasak na mundo. Minsan temptation -- galing kay Satanas, never sa Dios (Jas 1:13). Ibang klase, ibang tamang tugon.</a:t>
+            </a:r>
           </a:p>
         </p:txBody>
       </p:sp>
@@ -1748,10 +2222,14 @@
           <a:lstStyle/>
           <a:p>
             <a:r>
-              <a:rPr lang="en-US" dirty="0"/>
               <a:t>Walk through each of the 4. (1) JOB - read Job 1:20-21 aloud; note the 5 verbs: lumuhod, sumamba, hinubad, hinubdan, sinabi. He didn't deny pain — he worshipped through it. (2) PAUL - the thorn was NOT removed; the grace was sufficient. The hardship didn't end; Paul got new strength inside it. (3) PETER - 'magalak kayo' is shocking. Not 'magtiis kayo.' REJOICE. Why? Because sharing Christ's sufferings. (4) JESUS - the ultimate model. He asked for the cup to pass. Then surrendered. Patience includes asking honestly + then surrendering wholly.</a:t>
             </a:r>
-            <a:endParaRPr lang="en-US" dirty="0"/>
+          </a:p>
+          <a:p/>
+          <a:p>
+            <a:r>
+              <a:t>Guide amplifications: JOB -- hindi sumuko, SUMUKOB; naglaksa pero nagpuri; sumamba imbis na sumumpa. PABLO -- hindi pinapayagang gumaan ang problema; pinapayagang DUMAMI ang biyaya. PEDRO -- karangalan ang ma-identify sa Kaniya; hindi pa permanenteng tahanan ang lupa. JESUS -- pagtitiwala + pagsuko, kahit sa pinakamatinding hirap.</a:t>
+            </a:r>
           </a:p>
         </p:txBody>
       </p:sp>
@@ -2409,6 +2887,59 @@
           </a:p>
         </p:txBody>
       </p:sp>
+      <p:sp>
+        <p:nvSpPr>
+          <p:cNvPr id="7" name="Rounded Rectangle 6"/>
+          <p:cNvSpPr/>
+          <p:nvPr/>
+        </p:nvSpPr>
+        <p:spPr>
+          <a:xfrm>
+            <a:off x="8763000" y="137160"/>
+            <a:ext cx="3200400" cy="548640"/>
+          </a:xfrm>
+          <a:prstGeom prst="roundRect">
+            <a:avLst/>
+          </a:prstGeom>
+          <a:solidFill>
+            <a:srgbClr val="D4AF37"/>
+          </a:solidFill>
+          <a:ln>
+            <a:noFill/>
+          </a:ln>
+          <a:effectLst/>
+        </p:spPr>
+        <p:style>
+          <a:lnRef idx="1">
+            <a:schemeClr val="accent1"/>
+          </a:lnRef>
+          <a:fillRef idx="3">
+            <a:schemeClr val="accent1"/>
+          </a:fillRef>
+          <a:effectRef idx="2">
+            <a:schemeClr val="accent1"/>
+          </a:effectRef>
+          <a:fontRef idx="minor">
+            <a:schemeClr val="lt1"/>
+          </a:fontRef>
+        </p:style>
+        <p:txBody>
+          <a:bodyPr rtlCol="0" anchor="ctr" wrap="none" tIns="0" bIns="0"/>
+          <a:lstStyle/>
+          <a:p>
+            <a:pPr algn="ctr"/>
+            <a:r>
+              <a:rPr sz="2000" b="1">
+                <a:solidFill>
+                  <a:srgbClr val="141628"/>
+                </a:solidFill>
+                <a:latin typeface="Calibri"/>
+              </a:rPr>
+              <a:t>⏱ 60-min lesson</a:t>
+            </a:r>
+          </a:p>
+        </p:txBody>
+      </p:sp>
     </p:spTree>
   </p:cSld>
   <p:clrMapOvr>
@@ -2418,6 +2949,1201 @@
 </file>
 
 <file path=ppt/slides/slide10.xml><?xml version="1.0" encoding="utf-8"?>
+<p:sld xmlns:a="http://schemas.openxmlformats.org/drawingml/2006/main" xmlns:r="http://schemas.openxmlformats.org/officeDocument/2006/relationships" xmlns:p="http://schemas.openxmlformats.org/presentationml/2006/main">
+  <p:cSld name="Slide 8">
+    <p:bg>
+      <p:bgPr>
+        <a:solidFill>
+          <a:srgbClr val="1F4830"/>
+        </a:solidFill>
+      </p:bgPr>
+    </p:bg>
+    <p:spTree>
+      <p:nvGrpSpPr>
+        <p:cNvPr id="1" name=""/>
+        <p:cNvGrpSpPr/>
+        <p:nvPr/>
+      </p:nvGrpSpPr>
+      <p:grpSpPr>
+        <a:xfrm>
+          <a:off x="0" y="0"/>
+          <a:ext cx="0" cy="0"/>
+          <a:chOff x="0" y="0"/>
+          <a:chExt cx="0" cy="0"/>
+        </a:xfrm>
+      </p:grpSpPr>
+      <p:sp>
+        <p:nvSpPr>
+          <p:cNvPr id="2" name="Text 0"/>
+          <p:cNvSpPr/>
+          <p:nvPr/>
+        </p:nvSpPr>
+        <p:spPr>
+          <a:xfrm>
+            <a:off x="365760" y="228600"/>
+            <a:ext cx="5486400" cy="274320"/>
+          </a:xfrm>
+          <a:prstGeom prst="rect">
+            <a:avLst/>
+          </a:prstGeom>
+          <a:noFill/>
+          <a:ln/>
+        </p:spPr>
+        <p:txBody>
+          <a:bodyPr wrap="square" rtlCol="0" anchor="ctr"/>
+          <a:lstStyle/>
+          <a:p>
+            <a:pPr indent="0" marL="0">
+              <a:buNone/>
+            </a:pPr>
+            <a:r>
+              <a:rPr lang="en-US" sz="1000" b="1" spc="500" kern="0" dirty="0">
+                <a:solidFill>
+                  <a:srgbClr val="FFFFFF">
+                    <a:alpha val="50000"/>
+                  </a:srgbClr>
+                </a:solidFill>
+                <a:latin typeface="DM Sans" pitchFamily="34" charset="0"/>
+                <a:ea typeface="DM Sans" pitchFamily="34" charset="-122"/>
+                <a:cs typeface="DM Sans" pitchFamily="34" charset="-120"/>
+              </a:rPr>
+              <a:t>TUKLAS · APAT NA TUGON</a:t>
+            </a:r>
+            <a:endParaRPr lang="en-US" sz="1000" dirty="0"/>
+          </a:p>
+        </p:txBody>
+      </p:sp>
+      <p:sp>
+        <p:nvSpPr>
+          <p:cNvPr id="3" name="Text 1"/>
+          <p:cNvSpPr/>
+          <p:nvPr/>
+        </p:nvSpPr>
+        <p:spPr>
+          <a:xfrm>
+            <a:off x="457200" y="731520"/>
+            <a:ext cx="11247120" cy="640080"/>
+          </a:xfrm>
+          <a:prstGeom prst="rect">
+            <a:avLst/>
+          </a:prstGeom>
+          <a:noFill/>
+          <a:ln/>
+        </p:spPr>
+        <p:txBody>
+          <a:bodyPr wrap="square" rtlCol="0" anchor="ctr"/>
+          <a:lstStyle/>
+          <a:p>
+            <a:pPr algn="ctr" indent="0" marL="0">
+              <a:buNone/>
+            </a:pPr>
+            <a:r>
+              <a:rPr lang="en-US" sz="3400" b="1" dirty="0">
+                <a:solidFill>
+                  <a:srgbClr val="FFFFFF"/>
+                </a:solidFill>
+                <a:latin typeface="Playfair Display" pitchFamily="34" charset="0"/>
+                <a:ea typeface="Playfair Display" pitchFamily="34" charset="-122"/>
+                <a:cs typeface="Playfair Display" pitchFamily="34" charset="-120"/>
+              </a:rPr>
+              <a:t>Apat na Biblikal na Tugon</a:t>
+            </a:r>
+            <a:endParaRPr lang="en-US" sz="3400" dirty="0"/>
+          </a:p>
+        </p:txBody>
+      </p:sp>
+      <p:sp>
+        <p:nvSpPr>
+          <p:cNvPr id="4" name="Text 2"/>
+          <p:cNvSpPr/>
+          <p:nvPr/>
+        </p:nvSpPr>
+        <p:spPr>
+          <a:xfrm>
+            <a:off x="457200" y="1463040"/>
+            <a:ext cx="11247120" cy="365760"/>
+          </a:xfrm>
+          <a:prstGeom prst="rect">
+            <a:avLst/>
+          </a:prstGeom>
+          <a:noFill/>
+          <a:ln/>
+        </p:spPr>
+        <p:txBody>
+          <a:bodyPr wrap="square" rtlCol="0" anchor="ctr"/>
+          <a:lstStyle/>
+          <a:p>
+            <a:pPr algn="ctr" indent="0" marL="0">
+              <a:buNone/>
+            </a:pPr>
+            <a:r>
+              <a:rPr lang="en-US" sz="1500" dirty="0">
+                <a:solidFill>
+                  <a:srgbClr val="FFFFFF">
+                    <a:alpha val="80000"/>
+                  </a:srgbClr>
+                </a:solidFill>
+                <a:latin typeface="DM Sans" pitchFamily="34" charset="0"/>
+                <a:ea typeface="DM Sans" pitchFamily="34" charset="-122"/>
+                <a:cs typeface="DM Sans" pitchFamily="34" charset="-120"/>
+              </a:rPr>
+              <a:t>Apat na tao. Apat na karanasan. Iisang fruit: Pagtitiis (hypomonē).</a:t>
+            </a:r>
+            <a:endParaRPr lang="en-US" sz="1500" dirty="0"/>
+          </a:p>
+        </p:txBody>
+      </p:sp>
+      <p:sp>
+        <p:nvSpPr>
+          <p:cNvPr id="5" name="Shape 3"/>
+          <p:cNvSpPr/>
+          <p:nvPr/>
+        </p:nvSpPr>
+        <p:spPr>
+          <a:xfrm>
+            <a:off x="457200" y="2011680"/>
+            <a:ext cx="5486400" cy="2286000"/>
+          </a:xfrm>
+          <a:prstGeom prst="roundRect">
+            <a:avLst>
+              <a:gd name="adj" fmla="val 3200"/>
+            </a:avLst>
+          </a:prstGeom>
+          <a:solidFill>
+            <a:srgbClr val="1A3A28"/>
+          </a:solidFill>
+          <a:ln w="6350">
+            <a:solidFill>
+              <a:srgbClr val="D4A838"/>
+            </a:solidFill>
+            <a:prstDash val="solid"/>
+          </a:ln>
+        </p:spPr>
+      </p:sp>
+      <p:sp>
+        <p:nvSpPr>
+          <p:cNvPr id="6" name="Shape 4"/>
+          <p:cNvSpPr/>
+          <p:nvPr/>
+        </p:nvSpPr>
+        <p:spPr>
+          <a:xfrm>
+            <a:off x="457200" y="2011680"/>
+            <a:ext cx="73152" cy="2286000"/>
+          </a:xfrm>
+          <a:prstGeom prst="rect">
+            <a:avLst/>
+          </a:prstGeom>
+          <a:solidFill>
+            <a:srgbClr val="D4A838"/>
+          </a:solidFill>
+          <a:ln/>
+        </p:spPr>
+      </p:sp>
+      <p:sp>
+        <p:nvSpPr>
+          <p:cNvPr id="7" name="Text 5"/>
+          <p:cNvSpPr/>
+          <p:nvPr/>
+        </p:nvSpPr>
+        <p:spPr>
+          <a:xfrm>
+            <a:off x="731520" y="2148840"/>
+            <a:ext cx="5120640" cy="457200"/>
+          </a:xfrm>
+          <a:prstGeom prst="rect">
+            <a:avLst/>
+          </a:prstGeom>
+          <a:noFill/>
+          <a:ln/>
+        </p:spPr>
+        <p:txBody>
+          <a:bodyPr wrap="square" rtlCol="0" anchor="ctr"/>
+          <a:lstStyle/>
+          <a:p>
+            <a:pPr indent="0" marL="0">
+              <a:buNone/>
+            </a:pPr>
+            <a:r>
+              <a:rPr lang="en-US" sz="2400" b="1" dirty="0">
+                <a:solidFill>
+                  <a:srgbClr val="FFFFFF"/>
+                </a:solidFill>
+                <a:latin typeface="Playfair Display" pitchFamily="34" charset="0"/>
+                <a:ea typeface="Playfair Display" pitchFamily="34" charset="-122"/>
+                <a:cs typeface="Playfair Display" pitchFamily="34" charset="-120"/>
+              </a:rPr>
+              <a:t>Job</a:t>
+            </a:r>
+            <a:endParaRPr lang="en-US" sz="2400" dirty="0"/>
+          </a:p>
+        </p:txBody>
+      </p:sp>
+      <p:sp>
+        <p:nvSpPr>
+          <p:cNvPr id="8" name="Text 6"/>
+          <p:cNvSpPr/>
+          <p:nvPr/>
+        </p:nvSpPr>
+        <p:spPr>
+          <a:xfrm>
+            <a:off x="731520" y="2697480"/>
+            <a:ext cx="5120640" cy="320040"/>
+          </a:xfrm>
+          <a:prstGeom prst="rect">
+            <a:avLst/>
+          </a:prstGeom>
+          <a:noFill/>
+          <a:ln/>
+        </p:spPr>
+        <p:txBody>
+          <a:bodyPr wrap="square" rtlCol="0" anchor="ctr"/>
+          <a:lstStyle/>
+          <a:p>
+            <a:pPr indent="0" marL="0">
+              <a:buNone/>
+            </a:pPr>
+            <a:r>
+              <a:rPr lang="en-US" sz="1200" b="1" spc="400" kern="0" dirty="0">
+                <a:solidFill>
+                  <a:srgbClr val="F0C64A"/>
+                </a:solidFill>
+                <a:latin typeface="DM Sans" pitchFamily="34" charset="0"/>
+                <a:ea typeface="DM Sans" pitchFamily="34" charset="-122"/>
+                <a:cs typeface="DM Sans" pitchFamily="34" charset="-120"/>
+              </a:rPr>
+              <a:t>MANATILI AT SUMAMBA</a:t>
+            </a:r>
+            <a:endParaRPr lang="en-US" sz="1200" dirty="0"/>
+          </a:p>
+        </p:txBody>
+      </p:sp>
+      <p:sp>
+        <p:nvSpPr>
+          <p:cNvPr id="9" name="Text 7"/>
+          <p:cNvSpPr/>
+          <p:nvPr/>
+        </p:nvSpPr>
+        <p:spPr>
+          <a:xfrm>
+            <a:off x="731520" y="3108960"/>
+            <a:ext cx="5120640" cy="1143000"/>
+          </a:xfrm>
+          <a:prstGeom prst="rect">
+            <a:avLst/>
+          </a:prstGeom>
+          <a:noFill/>
+          <a:ln/>
+        </p:spPr>
+        <p:txBody>
+          <a:bodyPr wrap="square" rtlCol="0" anchor="ctr"/>
+          <a:lstStyle/>
+          <a:p>
+            <a:pPr indent="0" marL="0">
+              <a:buNone/>
+            </a:pPr>
+            <a:r>
+              <a:rPr lang="en-US" sz="1400" i="1" dirty="0">
+                <a:solidFill>
+                  <a:srgbClr val="FFFFFF">
+                    <a:alpha val="90000"/>
+                  </a:srgbClr>
+                </a:solidFill>
+                <a:latin typeface="DM Sans" pitchFamily="34" charset="0"/>
+                <a:ea typeface="DM Sans" pitchFamily="34" charset="-122"/>
+                <a:cs typeface="DM Sans" pitchFamily="34" charset="-120"/>
+              </a:rPr>
+              <a:t>"Hubad akong lumabas sa sinapupunan… Purihin ang pangalan ng Panginoon." — Job 1:20-21</a:t>
+            </a:r>
+            <a:endParaRPr lang="en-US" sz="1400" dirty="0"/>
+          </a:p>
+        </p:txBody>
+      </p:sp>
+      <p:sp>
+        <p:nvSpPr>
+          <p:cNvPr id="10" name="Shape 8"/>
+          <p:cNvSpPr/>
+          <p:nvPr/>
+        </p:nvSpPr>
+        <p:spPr>
+          <a:xfrm>
+            <a:off x="6263640" y="2011680"/>
+            <a:ext cx="5486400" cy="2286000"/>
+          </a:xfrm>
+          <a:prstGeom prst="roundRect">
+            <a:avLst>
+              <a:gd name="adj" fmla="val 3200"/>
+            </a:avLst>
+          </a:prstGeom>
+          <a:solidFill>
+            <a:srgbClr val="1A3A28"/>
+          </a:solidFill>
+          <a:ln w="6350">
+            <a:solidFill>
+              <a:srgbClr val="D4A838"/>
+            </a:solidFill>
+            <a:prstDash val="solid"/>
+          </a:ln>
+        </p:spPr>
+      </p:sp>
+      <p:sp>
+        <p:nvSpPr>
+          <p:cNvPr id="11" name="Shape 9"/>
+          <p:cNvSpPr/>
+          <p:nvPr/>
+        </p:nvSpPr>
+        <p:spPr>
+          <a:xfrm>
+            <a:off x="6263640" y="2011680"/>
+            <a:ext cx="73152" cy="2286000"/>
+          </a:xfrm>
+          <a:prstGeom prst="rect">
+            <a:avLst/>
+          </a:prstGeom>
+          <a:solidFill>
+            <a:srgbClr val="D4A838"/>
+          </a:solidFill>
+          <a:ln/>
+        </p:spPr>
+      </p:sp>
+      <p:sp>
+        <p:nvSpPr>
+          <p:cNvPr id="12" name="Text 10"/>
+          <p:cNvSpPr/>
+          <p:nvPr/>
+        </p:nvSpPr>
+        <p:spPr>
+          <a:xfrm>
+            <a:off x="6537960" y="2148840"/>
+            <a:ext cx="5120640" cy="457200"/>
+          </a:xfrm>
+          <a:prstGeom prst="rect">
+            <a:avLst/>
+          </a:prstGeom>
+          <a:noFill/>
+          <a:ln/>
+        </p:spPr>
+        <p:txBody>
+          <a:bodyPr wrap="square" rtlCol="0" anchor="ctr"/>
+          <a:lstStyle/>
+          <a:p>
+            <a:pPr indent="0" marL="0">
+              <a:buNone/>
+            </a:pPr>
+            <a:r>
+              <a:rPr lang="en-US" sz="2400" b="1" dirty="0">
+                <a:solidFill>
+                  <a:srgbClr val="FFFFFF"/>
+                </a:solidFill>
+                <a:latin typeface="Playfair Display" pitchFamily="34" charset="0"/>
+                <a:ea typeface="Playfair Display" pitchFamily="34" charset="-122"/>
+                <a:cs typeface="Playfair Display" pitchFamily="34" charset="-120"/>
+              </a:rPr>
+              <a:t>Pablo</a:t>
+            </a:r>
+            <a:endParaRPr lang="en-US" sz="2400" dirty="0"/>
+          </a:p>
+        </p:txBody>
+      </p:sp>
+      <p:sp>
+        <p:nvSpPr>
+          <p:cNvPr id="13" name="Text 11"/>
+          <p:cNvSpPr/>
+          <p:nvPr/>
+        </p:nvSpPr>
+        <p:spPr>
+          <a:xfrm>
+            <a:off x="6537960" y="2697480"/>
+            <a:ext cx="5120640" cy="320040"/>
+          </a:xfrm>
+          <a:prstGeom prst="rect">
+            <a:avLst/>
+          </a:prstGeom>
+          <a:noFill/>
+          <a:ln/>
+        </p:spPr>
+        <p:txBody>
+          <a:bodyPr wrap="square" rtlCol="0" anchor="ctr"/>
+          <a:lstStyle/>
+          <a:p>
+            <a:pPr indent="0" marL="0">
+              <a:buNone/>
+            </a:pPr>
+            <a:r>
+              <a:rPr lang="en-US" sz="1200" b="1" spc="400" kern="0" dirty="0">
+                <a:solidFill>
+                  <a:srgbClr val="F0C64A"/>
+                </a:solidFill>
+                <a:latin typeface="DM Sans" pitchFamily="34" charset="0"/>
+                <a:ea typeface="DM Sans" pitchFamily="34" charset="-122"/>
+                <a:cs typeface="DM Sans" pitchFamily="34" charset="-120"/>
+              </a:rPr>
+              <a:t>UMASA SA BIYAYA</a:t>
+            </a:r>
+            <a:endParaRPr lang="en-US" sz="1200" dirty="0"/>
+          </a:p>
+        </p:txBody>
+      </p:sp>
+      <p:sp>
+        <p:nvSpPr>
+          <p:cNvPr id="14" name="Text 12"/>
+          <p:cNvSpPr/>
+          <p:nvPr/>
+        </p:nvSpPr>
+        <p:spPr>
+          <a:xfrm>
+            <a:off x="6537960" y="3108960"/>
+            <a:ext cx="5120640" cy="1143000"/>
+          </a:xfrm>
+          <a:prstGeom prst="rect">
+            <a:avLst/>
+          </a:prstGeom>
+          <a:noFill/>
+          <a:ln/>
+        </p:spPr>
+        <p:txBody>
+          <a:bodyPr wrap="square" rtlCol="0" anchor="ctr"/>
+          <a:lstStyle/>
+          <a:p>
+            <a:pPr indent="0" marL="0">
+              <a:buNone/>
+            </a:pPr>
+            <a:r>
+              <a:rPr lang="en-US" sz="1400" i="1" dirty="0">
+                <a:solidFill>
+                  <a:srgbClr val="FFFFFF">
+                    <a:alpha val="90000"/>
+                  </a:srgbClr>
+                </a:solidFill>
+                <a:latin typeface="DM Sans" pitchFamily="34" charset="0"/>
+                <a:ea typeface="DM Sans" pitchFamily="34" charset="-122"/>
+                <a:cs typeface="DM Sans" pitchFamily="34" charset="-120"/>
+              </a:rPr>
+              <a:t>"Sapat na sa iyo ang aking biyaya, sapagkat ang aking kapangyarihan ay nagiging sakdal sa kahinaan." — 2 Cor 12:9</a:t>
+            </a:r>
+            <a:endParaRPr lang="en-US" sz="1400" dirty="0"/>
+          </a:p>
+        </p:txBody>
+      </p:sp>
+      <p:sp>
+        <p:nvSpPr>
+          <p:cNvPr id="15" name="Shape 13"/>
+          <p:cNvSpPr/>
+          <p:nvPr/>
+        </p:nvSpPr>
+        <p:spPr>
+          <a:xfrm>
+            <a:off x="457200" y="4434840"/>
+            <a:ext cx="5486400" cy="2286000"/>
+          </a:xfrm>
+          <a:prstGeom prst="roundRect">
+            <a:avLst>
+              <a:gd name="adj" fmla="val 3200"/>
+            </a:avLst>
+          </a:prstGeom>
+          <a:solidFill>
+            <a:srgbClr val="1A3A28"/>
+          </a:solidFill>
+          <a:ln w="6350">
+            <a:solidFill>
+              <a:srgbClr val="D4A838"/>
+            </a:solidFill>
+            <a:prstDash val="solid"/>
+          </a:ln>
+        </p:spPr>
+      </p:sp>
+      <p:sp>
+        <p:nvSpPr>
+          <p:cNvPr id="16" name="Shape 14"/>
+          <p:cNvSpPr/>
+          <p:nvPr/>
+        </p:nvSpPr>
+        <p:spPr>
+          <a:xfrm>
+            <a:off x="457200" y="4434840"/>
+            <a:ext cx="73152" cy="2286000"/>
+          </a:xfrm>
+          <a:prstGeom prst="rect">
+            <a:avLst/>
+          </a:prstGeom>
+          <a:solidFill>
+            <a:srgbClr val="D4A838"/>
+          </a:solidFill>
+          <a:ln/>
+        </p:spPr>
+      </p:sp>
+      <p:sp>
+        <p:nvSpPr>
+          <p:cNvPr id="17" name="Text 15"/>
+          <p:cNvSpPr/>
+          <p:nvPr/>
+        </p:nvSpPr>
+        <p:spPr>
+          <a:xfrm>
+            <a:off x="731520" y="4572000"/>
+            <a:ext cx="5120640" cy="457200"/>
+          </a:xfrm>
+          <a:prstGeom prst="rect">
+            <a:avLst/>
+          </a:prstGeom>
+          <a:noFill/>
+          <a:ln/>
+        </p:spPr>
+        <p:txBody>
+          <a:bodyPr wrap="square" rtlCol="0" anchor="ctr"/>
+          <a:lstStyle/>
+          <a:p>
+            <a:pPr indent="0" marL="0">
+              <a:buNone/>
+            </a:pPr>
+            <a:r>
+              <a:rPr lang="en-US" sz="2400" b="1" dirty="0">
+                <a:solidFill>
+                  <a:srgbClr val="FFFFFF"/>
+                </a:solidFill>
+                <a:latin typeface="Playfair Display" pitchFamily="34" charset="0"/>
+                <a:ea typeface="Playfair Display" pitchFamily="34" charset="-122"/>
+                <a:cs typeface="Playfair Display" pitchFamily="34" charset="-120"/>
+              </a:rPr>
+              <a:t>Pedro</a:t>
+            </a:r>
+            <a:endParaRPr lang="en-US" sz="2400" dirty="0"/>
+          </a:p>
+        </p:txBody>
+      </p:sp>
+      <p:sp>
+        <p:nvSpPr>
+          <p:cNvPr id="18" name="Text 16"/>
+          <p:cNvSpPr/>
+          <p:nvPr/>
+        </p:nvSpPr>
+        <p:spPr>
+          <a:xfrm>
+            <a:off x="731520" y="5120640"/>
+            <a:ext cx="5120640" cy="320040"/>
+          </a:xfrm>
+          <a:prstGeom prst="rect">
+            <a:avLst/>
+          </a:prstGeom>
+          <a:noFill/>
+          <a:ln/>
+        </p:spPr>
+        <p:txBody>
+          <a:bodyPr wrap="square" rtlCol="0" anchor="ctr"/>
+          <a:lstStyle/>
+          <a:p>
+            <a:pPr indent="0" marL="0">
+              <a:buNone/>
+            </a:pPr>
+            <a:r>
+              <a:rPr lang="en-US" sz="1200" b="1" spc="400" kern="0" dirty="0">
+                <a:solidFill>
+                  <a:srgbClr val="F0C64A"/>
+                </a:solidFill>
+                <a:latin typeface="DM Sans" pitchFamily="34" charset="0"/>
+                <a:ea typeface="DM Sans" pitchFamily="34" charset="-122"/>
+                <a:cs typeface="DM Sans" pitchFamily="34" charset="-120"/>
+              </a:rPr>
+              <a:t>SUMUNOD AT MAGALAK</a:t>
+            </a:r>
+            <a:endParaRPr lang="en-US" sz="1200" dirty="0"/>
+          </a:p>
+        </p:txBody>
+      </p:sp>
+      <p:sp>
+        <p:nvSpPr>
+          <p:cNvPr id="19" name="Text 17"/>
+          <p:cNvSpPr/>
+          <p:nvPr/>
+        </p:nvSpPr>
+        <p:spPr>
+          <a:xfrm>
+            <a:off x="731520" y="5532120"/>
+            <a:ext cx="5120640" cy="1143000"/>
+          </a:xfrm>
+          <a:prstGeom prst="rect">
+            <a:avLst/>
+          </a:prstGeom>
+          <a:noFill/>
+          <a:ln/>
+        </p:spPr>
+        <p:txBody>
+          <a:bodyPr wrap="square" rtlCol="0" anchor="ctr"/>
+          <a:lstStyle/>
+          <a:p>
+            <a:pPr indent="0" marL="0">
+              <a:buNone/>
+            </a:pPr>
+            <a:r>
+              <a:rPr lang="en-US" sz="1400" i="1" dirty="0">
+                <a:solidFill>
+                  <a:srgbClr val="FFFFFF">
+                    <a:alpha val="90000"/>
+                  </a:srgbClr>
+                </a:solidFill>
+                <a:latin typeface="DM Sans" pitchFamily="34" charset="0"/>
+                <a:ea typeface="DM Sans" pitchFamily="34" charset="-122"/>
+                <a:cs typeface="DM Sans" pitchFamily="34" charset="-120"/>
+              </a:rPr>
+              <a:t>"Magalak kayo, sapagkat nakikibahagi kayo sa mga hirap ni Cristo." — 1 Pet 4:13</a:t>
+            </a:r>
+            <a:endParaRPr lang="en-US" sz="1400" dirty="0"/>
+          </a:p>
+        </p:txBody>
+      </p:sp>
+      <p:sp>
+        <p:nvSpPr>
+          <p:cNvPr id="20" name="Shape 18"/>
+          <p:cNvSpPr/>
+          <p:nvPr/>
+        </p:nvSpPr>
+        <p:spPr>
+          <a:xfrm>
+            <a:off x="6263640" y="4434840"/>
+            <a:ext cx="5486400" cy="2286000"/>
+          </a:xfrm>
+          <a:prstGeom prst="roundRect">
+            <a:avLst>
+              <a:gd name="adj" fmla="val 3200"/>
+            </a:avLst>
+          </a:prstGeom>
+          <a:solidFill>
+            <a:srgbClr val="1A3A28"/>
+          </a:solidFill>
+          <a:ln w="6350">
+            <a:solidFill>
+              <a:srgbClr val="D4A838"/>
+            </a:solidFill>
+            <a:prstDash val="solid"/>
+          </a:ln>
+        </p:spPr>
+      </p:sp>
+      <p:sp>
+        <p:nvSpPr>
+          <p:cNvPr id="21" name="Shape 19"/>
+          <p:cNvSpPr/>
+          <p:nvPr/>
+        </p:nvSpPr>
+        <p:spPr>
+          <a:xfrm>
+            <a:off x="6263640" y="4434840"/>
+            <a:ext cx="73152" cy="2286000"/>
+          </a:xfrm>
+          <a:prstGeom prst="rect">
+            <a:avLst/>
+          </a:prstGeom>
+          <a:solidFill>
+            <a:srgbClr val="D4A838"/>
+          </a:solidFill>
+          <a:ln/>
+        </p:spPr>
+      </p:sp>
+      <p:sp>
+        <p:nvSpPr>
+          <p:cNvPr id="22" name="Text 20"/>
+          <p:cNvSpPr/>
+          <p:nvPr/>
+        </p:nvSpPr>
+        <p:spPr>
+          <a:xfrm>
+            <a:off x="6537960" y="4572000"/>
+            <a:ext cx="5120640" cy="457200"/>
+          </a:xfrm>
+          <a:prstGeom prst="rect">
+            <a:avLst/>
+          </a:prstGeom>
+          <a:noFill/>
+          <a:ln/>
+        </p:spPr>
+        <p:txBody>
+          <a:bodyPr wrap="square" rtlCol="0" anchor="ctr"/>
+          <a:lstStyle/>
+          <a:p>
+            <a:pPr indent="0" marL="0">
+              <a:buNone/>
+            </a:pPr>
+            <a:r>
+              <a:rPr lang="en-US" sz="2400" b="1" dirty="0">
+                <a:solidFill>
+                  <a:srgbClr val="FFFFFF"/>
+                </a:solidFill>
+                <a:latin typeface="Playfair Display" pitchFamily="34" charset="0"/>
+                <a:ea typeface="Playfair Display" pitchFamily="34" charset="-122"/>
+                <a:cs typeface="Playfair Display" pitchFamily="34" charset="-120"/>
+              </a:rPr>
+              <a:t>Jesus</a:t>
+            </a:r>
+            <a:endParaRPr lang="en-US" sz="2400" dirty="0"/>
+          </a:p>
+        </p:txBody>
+      </p:sp>
+      <p:sp>
+        <p:nvSpPr>
+          <p:cNvPr id="23" name="Text 21"/>
+          <p:cNvSpPr/>
+          <p:nvPr/>
+        </p:nvSpPr>
+        <p:spPr>
+          <a:xfrm>
+            <a:off x="6537960" y="5120640"/>
+            <a:ext cx="5120640" cy="320040"/>
+          </a:xfrm>
+          <a:prstGeom prst="rect">
+            <a:avLst/>
+          </a:prstGeom>
+          <a:noFill/>
+          <a:ln/>
+        </p:spPr>
+        <p:txBody>
+          <a:bodyPr wrap="square" rtlCol="0" anchor="ctr"/>
+          <a:lstStyle/>
+          <a:p>
+            <a:pPr indent="0" marL="0">
+              <a:buNone/>
+            </a:pPr>
+            <a:r>
+              <a:rPr lang="en-US" sz="1200" b="1" spc="400" kern="0" dirty="0">
+                <a:solidFill>
+                  <a:srgbClr val="F0C64A"/>
+                </a:solidFill>
+                <a:latin typeface="DM Sans" pitchFamily="34" charset="0"/>
+                <a:ea typeface="DM Sans" pitchFamily="34" charset="-122"/>
+                <a:cs typeface="DM Sans" pitchFamily="34" charset="-120"/>
+              </a:rPr>
+              <a:t>MAGTIWALA AT SUMUKO</a:t>
+            </a:r>
+            <a:endParaRPr lang="en-US" sz="1200" dirty="0"/>
+          </a:p>
+        </p:txBody>
+      </p:sp>
+      <p:sp>
+        <p:nvSpPr>
+          <p:cNvPr id="24" name="Text 22"/>
+          <p:cNvSpPr/>
+          <p:nvPr/>
+        </p:nvSpPr>
+        <p:spPr>
+          <a:xfrm>
+            <a:off x="6537960" y="5532120"/>
+            <a:ext cx="5120640" cy="1143000"/>
+          </a:xfrm>
+          <a:prstGeom prst="rect">
+            <a:avLst/>
+          </a:prstGeom>
+          <a:noFill/>
+          <a:ln/>
+        </p:spPr>
+        <p:txBody>
+          <a:bodyPr wrap="square" rtlCol="0" anchor="ctr"/>
+          <a:lstStyle/>
+          <a:p>
+            <a:pPr indent="0" marL="0">
+              <a:buNone/>
+            </a:pPr>
+            <a:r>
+              <a:rPr lang="en-US" sz="1400" i="1" dirty="0">
+                <a:solidFill>
+                  <a:srgbClr val="FFFFFF">
+                    <a:alpha val="90000"/>
+                  </a:srgbClr>
+                </a:solidFill>
+                <a:latin typeface="DM Sans" pitchFamily="34" charset="0"/>
+                <a:ea typeface="DM Sans" pitchFamily="34" charset="-122"/>
+                <a:cs typeface="DM Sans" pitchFamily="34" charset="-120"/>
+              </a:rPr>
+              <a:t>"Ama ko, kung maaari, lumayo sa akin ang sarong ito; gayon man, hindi ang kalooban ko…" — Lucas 22:42</a:t>
+            </a:r>
+            <a:endParaRPr lang="en-US" sz="1400" dirty="0"/>
+          </a:p>
+        </p:txBody>
+      </p:sp>
+      <p:sp>
+        <p:nvSpPr>
+          <p:cNvPr id="25" name="Rounded Rectangle 24"/>
+          <p:cNvSpPr/>
+          <p:nvPr/>
+        </p:nvSpPr>
+        <p:spPr>
+          <a:xfrm>
+            <a:off x="8763000" y="137160"/>
+            <a:ext cx="3200400" cy="548640"/>
+          </a:xfrm>
+          <a:prstGeom prst="roundRect">
+            <a:avLst/>
+          </a:prstGeom>
+          <a:solidFill>
+            <a:srgbClr val="D4AF37"/>
+          </a:solidFill>
+          <a:ln>
+            <a:noFill/>
+          </a:ln>
+          <a:effectLst/>
+        </p:spPr>
+        <p:style>
+          <a:lnRef idx="1">
+            <a:schemeClr val="accent1"/>
+          </a:lnRef>
+          <a:fillRef idx="3">
+            <a:schemeClr val="accent1"/>
+          </a:fillRef>
+          <a:effectRef idx="2">
+            <a:schemeClr val="accent1"/>
+          </a:effectRef>
+          <a:fontRef idx="minor">
+            <a:schemeClr val="lt1"/>
+          </a:fontRef>
+        </p:style>
+        <p:txBody>
+          <a:bodyPr rtlCol="0" anchor="ctr" wrap="none" tIns="0" bIns="0"/>
+          <a:lstStyle/>
+          <a:p>
+            <a:pPr algn="ctr"/>
+            <a:r>
+              <a:rPr sz="2000" b="1">
+                <a:solidFill>
+                  <a:srgbClr val="141628"/>
+                </a:solidFill>
+                <a:latin typeface="Calibri"/>
+              </a:rPr>
+              <a:t>⏱ 3.5 min · ⌛21:30</a:t>
+            </a:r>
+          </a:p>
+        </p:txBody>
+      </p:sp>
+    </p:spTree>
+  </p:cSld>
+  <p:clrMapOvr>
+    <a:masterClrMapping/>
+  </p:clrMapOvr>
+</p:sld>
+</file>
+
+<file path=ppt/slides/slide11.xml><?xml version="1.0" encoding="utf-8"?>
+<p:sld xmlns:a="http://schemas.openxmlformats.org/drawingml/2006/main" xmlns:r="http://schemas.openxmlformats.org/officeDocument/2006/relationships" xmlns:p="http://schemas.openxmlformats.org/presentationml/2006/main">
+  <p:cSld name="Slide 9">
+    <p:bg>
+      <p:bgPr>
+        <a:solidFill>
+          <a:srgbClr val="9A7820"/>
+        </a:solidFill>
+      </p:bgPr>
+    </p:bg>
+    <p:spTree>
+      <p:nvGrpSpPr>
+        <p:cNvPr id="1" name=""/>
+        <p:cNvGrpSpPr/>
+        <p:nvPr/>
+      </p:nvGrpSpPr>
+      <p:grpSpPr>
+        <a:xfrm>
+          <a:off x="0" y="0"/>
+          <a:ext cx="0" cy="0"/>
+          <a:chOff x="0" y="0"/>
+          <a:chExt cx="0" cy="0"/>
+        </a:xfrm>
+      </p:grpSpPr>
+      <p:sp>
+        <p:nvSpPr>
+          <p:cNvPr id="2" name="Text 0"/>
+          <p:cNvSpPr/>
+          <p:nvPr/>
+        </p:nvSpPr>
+        <p:spPr>
+          <a:xfrm>
+            <a:off x="365760" y="228600"/>
+            <a:ext cx="5486400" cy="274320"/>
+          </a:xfrm>
+          <a:prstGeom prst="rect">
+            <a:avLst/>
+          </a:prstGeom>
+          <a:noFill/>
+          <a:ln/>
+        </p:spPr>
+        <p:txBody>
+          <a:bodyPr wrap="square" rtlCol="0" anchor="ctr"/>
+          <a:lstStyle/>
+          <a:p>
+            <a:pPr indent="0" marL="0">
+              <a:buNone/>
+            </a:pPr>
+            <a:r>
+              <a:rPr lang="en-US" sz="1000" b="1" spc="500" kern="0" dirty="0">
+                <a:solidFill>
+                  <a:srgbClr val="FFFFFF">
+                    <a:alpha val="50000"/>
+                  </a:srgbClr>
+                </a:solidFill>
+                <a:latin typeface="DM Sans" pitchFamily="34" charset="0"/>
+                <a:ea typeface="DM Sans" pitchFamily="34" charset="-122"/>
+                <a:cs typeface="DM Sans" pitchFamily="34" charset="-120"/>
+              </a:rPr>
+              <a:t>TUKLAS · CHARACTER ANCHOR</a:t>
+            </a:r>
+            <a:endParaRPr lang="en-US" sz="1000" dirty="0"/>
+          </a:p>
+        </p:txBody>
+      </p:sp>
+      <p:sp>
+        <p:nvSpPr>
+          <p:cNvPr id="3" name="Text 1"/>
+          <p:cNvSpPr/>
+          <p:nvPr/>
+        </p:nvSpPr>
+        <p:spPr>
+          <a:xfrm>
+            <a:off x="457200" y="1097280"/>
+            <a:ext cx="11247120" cy="365760"/>
+          </a:xfrm>
+          <a:prstGeom prst="rect">
+            <a:avLst/>
+          </a:prstGeom>
+          <a:noFill/>
+          <a:ln/>
+        </p:spPr>
+        <p:txBody>
+          <a:bodyPr wrap="square" rtlCol="0" anchor="ctr"/>
+          <a:lstStyle/>
+          <a:p>
+            <a:pPr algn="ctr" indent="0" marL="0">
+              <a:buNone/>
+            </a:pPr>
+            <a:r>
+              <a:rPr lang="en-US" sz="1300" b="1" spc="600" kern="0" dirty="0">
+                <a:solidFill>
+                  <a:srgbClr val="F0C64A"/>
+                </a:solidFill>
+                <a:latin typeface="DM Sans" pitchFamily="34" charset="0"/>
+                <a:ea typeface="DM Sans" pitchFamily="34" charset="-122"/>
+                <a:cs typeface="DM Sans" pitchFamily="34" charset="-120"/>
+              </a:rPr>
+              <a:t>GALATIANS 5:22 · BUNGA NG ESPIRITU</a:t>
+            </a:r>
+            <a:endParaRPr lang="en-US" sz="1300" dirty="0"/>
+          </a:p>
+        </p:txBody>
+      </p:sp>
+      <p:sp>
+        <p:nvSpPr>
+          <p:cNvPr id="4" name="Text 2"/>
+          <p:cNvSpPr/>
+          <p:nvPr/>
+        </p:nvSpPr>
+        <p:spPr>
+          <a:xfrm>
+            <a:off x="457200" y="1828800"/>
+            <a:ext cx="11247120" cy="1645920"/>
+          </a:xfrm>
+          <a:prstGeom prst="rect">
+            <a:avLst/>
+          </a:prstGeom>
+          <a:noFill/>
+          <a:ln/>
+        </p:spPr>
+        <p:txBody>
+          <a:bodyPr wrap="square" rtlCol="0" anchor="ctr"/>
+          <a:lstStyle/>
+          <a:p>
+            <a:pPr algn="ctr" indent="0" marL="0">
+              <a:buNone/>
+            </a:pPr>
+            <a:r>
+              <a:rPr lang="en-US" sz="11000" b="1" dirty="0">
+                <a:solidFill>
+                  <a:srgbClr val="F0C64A"/>
+                </a:solidFill>
+                <a:latin typeface="Playfair Display" pitchFamily="34" charset="0"/>
+                <a:ea typeface="Playfair Display" pitchFamily="34" charset="-122"/>
+                <a:cs typeface="Playfair Display" pitchFamily="34" charset="-120"/>
+              </a:rPr>
+              <a:t>Pagtitiis</a:t>
+            </a:r>
+            <a:endParaRPr lang="en-US" sz="11000" dirty="0"/>
+          </a:p>
+        </p:txBody>
+      </p:sp>
+      <p:sp>
+        <p:nvSpPr>
+          <p:cNvPr id="5" name="Text 3"/>
+          <p:cNvSpPr/>
+          <p:nvPr/>
+        </p:nvSpPr>
+        <p:spPr>
+          <a:xfrm>
+            <a:off x="457200" y="3657600"/>
+            <a:ext cx="11247120" cy="548640"/>
+          </a:xfrm>
+          <a:prstGeom prst="rect">
+            <a:avLst/>
+          </a:prstGeom>
+          <a:noFill/>
+          <a:ln/>
+        </p:spPr>
+        <p:txBody>
+          <a:bodyPr wrap="square" rtlCol="0" anchor="ctr"/>
+          <a:lstStyle/>
+          <a:p>
+            <a:pPr algn="ctr" indent="0" marL="0">
+              <a:buNone/>
+            </a:pPr>
+            <a:r>
+              <a:rPr lang="en-US" sz="2400" i="1" dirty="0">
+                <a:solidFill>
+                  <a:srgbClr val="FDF6E8">
+                    <a:alpha val="85000"/>
+                  </a:srgbClr>
+                </a:solidFill>
+                <a:latin typeface="Playfair Display" pitchFamily="34" charset="0"/>
+                <a:ea typeface="Playfair Display" pitchFamily="34" charset="-122"/>
+                <a:cs typeface="Playfair Display" pitchFamily="34" charset="-120"/>
+              </a:rPr>
+              <a:t>hypomonē — "to remain under"</a:t>
+            </a:r>
+            <a:endParaRPr lang="en-US" sz="2400" dirty="0"/>
+          </a:p>
+        </p:txBody>
+      </p:sp>
+      <p:sp>
+        <p:nvSpPr>
+          <p:cNvPr id="6" name="Text 4"/>
+          <p:cNvSpPr/>
+          <p:nvPr/>
+        </p:nvSpPr>
+        <p:spPr>
+          <a:xfrm>
+            <a:off x="1371600" y="4572000"/>
+            <a:ext cx="9418320" cy="1097280"/>
+          </a:xfrm>
+          <a:prstGeom prst="rect">
+            <a:avLst/>
+          </a:prstGeom>
+          <a:noFill/>
+          <a:ln/>
+        </p:spPr>
+        <p:txBody>
+          <a:bodyPr wrap="square" rtlCol="0" anchor="ctr"/>
+          <a:lstStyle/>
+          <a:p>
+            <a:pPr algn="ctr" indent="0" marL="0">
+              <a:buNone/>
+            </a:pPr>
+            <a:r>
+              <a:rPr lang="en-US" sz="1800" dirty="0">
+                <a:solidFill>
+                  <a:srgbClr val="FDF6E8"/>
+                </a:solidFill>
+                <a:latin typeface="DM Sans" pitchFamily="34" charset="0"/>
+                <a:ea typeface="DM Sans" pitchFamily="34" charset="-122"/>
+                <a:cs typeface="DM Sans" pitchFamily="34" charset="-120"/>
+              </a:rPr>
+              <a:t>Hindi lang ito kakayahang tiisin. Ito ang aktibong posture sa ilalim ng presyur — ang ginagawa mo habang nagpapatuloy ang hirap.</a:t>
+            </a:r>
+            <a:endParaRPr lang="en-US" sz="1800" dirty="0"/>
+          </a:p>
+        </p:txBody>
+      </p:sp>
+      <p:sp>
+        <p:nvSpPr>
+          <p:cNvPr id="7" name="Text 5"/>
+          <p:cNvSpPr/>
+          <p:nvPr/>
+        </p:nvSpPr>
+        <p:spPr>
+          <a:xfrm>
+            <a:off x="457200" y="5852160"/>
+            <a:ext cx="11247120" cy="457200"/>
+          </a:xfrm>
+          <a:prstGeom prst="rect">
+            <a:avLst/>
+          </a:prstGeom>
+          <a:noFill/>
+          <a:ln/>
+        </p:spPr>
+        <p:txBody>
+          <a:bodyPr wrap="square" rtlCol="0" anchor="ctr"/>
+          <a:lstStyle/>
+          <a:p>
+            <a:pPr algn="ctr" indent="0" marL="0">
+              <a:buNone/>
+            </a:pPr>
+            <a:r>
+              <a:rPr lang="en-US" sz="1500" i="1" dirty="0">
+                <a:solidFill>
+                  <a:srgbClr val="FDF6E8">
+                    <a:alpha val="70000"/>
+                  </a:srgbClr>
+                </a:solidFill>
+                <a:latin typeface="DM Sans" pitchFamily="34" charset="0"/>
+                <a:ea typeface="DM Sans" pitchFamily="34" charset="-122"/>
+                <a:cs typeface="DM Sans" pitchFamily="34" charset="-120"/>
+              </a:rPr>
+              <a:t>Job · Pablo · Pedro · Jesus — apat na bersyon ng iisang Pagtitiis.</a:t>
+            </a:r>
+            <a:endParaRPr lang="en-US" sz="1500" dirty="0"/>
+          </a:p>
+        </p:txBody>
+      </p:sp>
+      <p:sp>
+        <p:nvSpPr>
+          <p:cNvPr id="8" name="Rounded Rectangle 7"/>
+          <p:cNvSpPr/>
+          <p:nvPr/>
+        </p:nvSpPr>
+        <p:spPr>
+          <a:xfrm>
+            <a:off x="8763000" y="137160"/>
+            <a:ext cx="3200400" cy="548640"/>
+          </a:xfrm>
+          <a:prstGeom prst="roundRect">
+            <a:avLst/>
+          </a:prstGeom>
+          <a:solidFill>
+            <a:srgbClr val="D4AF37"/>
+          </a:solidFill>
+          <a:ln>
+            <a:noFill/>
+          </a:ln>
+          <a:effectLst/>
+        </p:spPr>
+        <p:style>
+          <a:lnRef idx="1">
+            <a:schemeClr val="accent1"/>
+          </a:lnRef>
+          <a:fillRef idx="3">
+            <a:schemeClr val="accent1"/>
+          </a:fillRef>
+          <a:effectRef idx="2">
+            <a:schemeClr val="accent1"/>
+          </a:effectRef>
+          <a:fontRef idx="minor">
+            <a:schemeClr val="lt1"/>
+          </a:fontRef>
+        </p:style>
+        <p:txBody>
+          <a:bodyPr rtlCol="0" anchor="ctr" wrap="none" tIns="0" bIns="0"/>
+          <a:lstStyle/>
+          <a:p>
+            <a:pPr algn="ctr"/>
+            <a:r>
+              <a:rPr sz="2000" b="1">
+                <a:solidFill>
+                  <a:srgbClr val="141628"/>
+                </a:solidFill>
+                <a:latin typeface="Calibri"/>
+              </a:rPr>
+              <a:t>⏱ 1.5 min · ⌛23:00</a:t>
+            </a:r>
+          </a:p>
+        </p:txBody>
+      </p:sp>
+    </p:spTree>
+  </p:cSld>
+  <p:clrMapOvr>
+    <a:masterClrMapping/>
+  </p:clrMapOvr>
+</p:sld>
+</file>
+
+<file path=ppt/slides/slide12.xml><?xml version="1.0" encoding="utf-8"?>
 <p:sld xmlns:a="http://schemas.openxmlformats.org/drawingml/2006/main" xmlns:r="http://schemas.openxmlformats.org/officeDocument/2006/relationships" xmlns:p="http://schemas.openxmlformats.org/presentationml/2006/main">
   <p:cSld name="Slide 10">
     <p:bg>
@@ -2474,7 +4200,7 @@
                 <a:ea typeface="DM Sans" pitchFamily="34" charset="-122"/>
                 <a:cs typeface="DM Sans" pitchFamily="34" charset="-120"/>
               </a:rPr>
-              <a:t>TALAKAY · GROUP SHARING</a:t>
+              <a:t>TALAKAY · SAFE SPACE</a:t>
             </a:r>
             <a:endParaRPr lang="en-US" sz="1100" dirty="0"/>
           </a:p>
@@ -2513,7 +4239,7 @@
                 <a:ea typeface="Playfair Display" pitchFamily="34" charset="-122"/>
                 <a:cs typeface="Playfair Display" pitchFamily="34" charset="-120"/>
               </a:rPr>
-              <a:t>Talakayan</a:t>
+              <a:t>Bago tayo mag-share…</a:t>
             </a:r>
             <a:endParaRPr lang="en-US" sz="4800" dirty="0"/>
           </a:p>
@@ -2538,6 +4264,10 @@
           </a:solidFill>
           <a:ln/>
         </p:spPr>
+        <p:txBody>
+          <a:bodyPr/>
+          <a:p/>
+        </p:txBody>
       </p:sp>
       <p:sp>
         <p:nvSpPr>
@@ -2572,13 +4302,65 @@
                 <a:ea typeface="DM Sans" pitchFamily="34" charset="-122"/>
                 <a:cs typeface="DM Sans" pitchFamily="34" charset="-120"/>
               </a:rPr>
-              <a:t>I-share</a:t>
+              <a:t>Volunteer-basis. Walang uutusan.</a:t>
             </a:r>
             <a:pPr indent="0" marL="0">
               <a:buNone/>
             </a:pPr>
-            <a:r>
-              <a:rPr lang="en-US" sz="1900" dirty="0">
+            <a:endParaRPr lang="en-US" sz="1900" dirty="0"/>
+          </a:p>
+        </p:txBody>
+      </p:sp>
+      <p:sp>
+        <p:nvSpPr>
+          <p:cNvPr id="6" name="Shape 4"/>
+          <p:cNvSpPr/>
+          <p:nvPr/>
+        </p:nvSpPr>
+        <p:spPr>
+          <a:xfrm>
+            <a:off x="731520" y="3337560"/>
+            <a:ext cx="164592" cy="164592"/>
+          </a:xfrm>
+          <a:prstGeom prst="ellipse">
+            <a:avLst/>
+          </a:prstGeom>
+          <a:solidFill>
+            <a:srgbClr val="2A5C40"/>
+          </a:solidFill>
+          <a:ln/>
+        </p:spPr>
+        <p:txBody>
+          <a:bodyPr/>
+          <a:p/>
+        </p:txBody>
+      </p:sp>
+      <p:sp>
+        <p:nvSpPr>
+          <p:cNvPr id="7" name="Text 5"/>
+          <p:cNvSpPr/>
+          <p:nvPr/>
+        </p:nvSpPr>
+        <p:spPr>
+          <a:xfrm>
+            <a:off x="1097280" y="3108960"/>
+            <a:ext cx="10058400" cy="731520"/>
+          </a:xfrm>
+          <a:prstGeom prst="rect">
+            <a:avLst/>
+          </a:prstGeom>
+          <a:noFill/>
+          <a:ln/>
+        </p:spPr>
+        <p:txBody>
+          <a:bodyPr wrap="square" rtlCol="0" anchor="ctr"/>
+          <a:lstStyle/>
+          <a:p>
+            <a:pPr indent="0" marL="0">
+              <a:buNone/>
+            </a:pPr>
+            <a:r>
+              <a:rPr lang="en-US" sz="1900" b="1" dirty="0">
                 <a:solidFill>
                   <a:srgbClr val="1A1612"/>
                 </a:solidFill>
@@ -2586,21 +4368,24 @@
                 <a:ea typeface="DM Sans" pitchFamily="34" charset="-122"/>
                 <a:cs typeface="DM Sans" pitchFamily="34" charset="-120"/>
               </a:rPr>
-              <a:t> ang isang pagsubok na dinanas mo o ng malapit sa'yo. (Max 2 sharers.)</a:t>
-            </a:r>
+              <a:t>Walang sasabat, walang magpapayo agad — tumitingin at nakikinig lang tayo.</a:t>
+            </a:r>
+            <a:pPr indent="0" marL="0">
+              <a:buNone/>
+            </a:pPr>
             <a:endParaRPr lang="en-US" sz="1900" dirty="0"/>
           </a:p>
         </p:txBody>
       </p:sp>
       <p:sp>
         <p:nvSpPr>
-          <p:cNvPr id="6" name="Shape 4"/>
-          <p:cNvSpPr/>
-          <p:nvPr/>
-        </p:nvSpPr>
-        <p:spPr>
-          <a:xfrm>
-            <a:off x="731520" y="3337560"/>
+          <p:cNvPr id="8" name="Shape 6"/>
+          <p:cNvSpPr/>
+          <p:nvPr/>
+        </p:nvSpPr>
+        <p:spPr>
+          <a:xfrm>
+            <a:off x="731520" y="4251960"/>
             <a:ext cx="164592" cy="164592"/>
           </a:xfrm>
           <a:prstGeom prst="ellipse">
@@ -2611,16 +4396,20 @@
           </a:solidFill>
           <a:ln/>
         </p:spPr>
-      </p:sp>
-      <p:sp>
-        <p:nvSpPr>
-          <p:cNvPr id="7" name="Text 5"/>
-          <p:cNvSpPr/>
-          <p:nvPr/>
-        </p:nvSpPr>
-        <p:spPr>
-          <a:xfrm>
-            <a:off x="1097280" y="3108960"/>
+        <p:txBody>
+          <a:bodyPr/>
+          <a:p/>
+        </p:txBody>
+      </p:sp>
+      <p:sp>
+        <p:nvSpPr>
+          <p:cNvPr id="9" name="Text 7"/>
+          <p:cNvSpPr/>
+          <p:nvPr/>
+        </p:nvSpPr>
+        <p:spPr>
+          <a:xfrm>
+            <a:off x="1097280" y="4023360"/>
             <a:ext cx="10058400" cy="731520"/>
           </a:xfrm>
           <a:prstGeom prst="rect">
@@ -2645,135 +4434,104 @@
                 <a:ea typeface="DM Sans" pitchFamily="34" charset="-122"/>
                 <a:cs typeface="DM Sans" pitchFamily="34" charset="-120"/>
               </a:rPr>
-              <a:t>Dumating ka na ba</a:t>
+              <a:t>Confidential — hindi lalabas sa apat na pader. Kung sobrang lalim, pwedeng one-on-one after.</a:t>
             </a:r>
             <a:pPr indent="0" marL="0">
               <a:buNone/>
             </a:pPr>
-            <a:r>
-              <a:rPr lang="en-US" sz="1900" dirty="0">
-                <a:solidFill>
-                  <a:srgbClr val="1A1612"/>
+            <a:endParaRPr lang="en-US" sz="1900" dirty="0"/>
+          </a:p>
+        </p:txBody>
+      </p:sp>
+      <p:sp>
+        <p:nvSpPr>
+          <p:cNvPr id="10" name="Text 8"/>
+          <p:cNvSpPr/>
+          <p:nvPr/>
+        </p:nvSpPr>
+        <p:spPr>
+          <a:xfrm>
+            <a:off x="914400" y="5486400"/>
+            <a:ext cx="10332720" cy="640080"/>
+          </a:xfrm>
+          <a:prstGeom prst="rect">
+            <a:avLst/>
+          </a:prstGeom>
+          <a:noFill/>
+          <a:ln/>
+        </p:spPr>
+        <p:txBody>
+          <a:bodyPr wrap="square" rtlCol="0" anchor="ctr"/>
+          <a:lstStyle/>
+          <a:p>
+            <a:pPr algn="ctr" indent="0" marL="0">
+              <a:buNone/>
+            </a:pPr>
+            <a:r>
+              <a:rPr lang="en-US" sz="1400" i="1" dirty="0">
+                <a:solidFill>
+                  <a:srgbClr val="5A6655"/>
                 </a:solidFill>
                 <a:latin typeface="DM Sans" pitchFamily="34" charset="0"/>
                 <a:ea typeface="DM Sans" pitchFamily="34" charset="-122"/>
                 <a:cs typeface="DM Sans" pitchFamily="34" charset="-120"/>
               </a:rPr>
-              <a:t> sa puntos kung saan napatanong ka sa Dios kung BAKIT?</a:t>
-            </a:r>
-            <a:endParaRPr lang="en-US" sz="1900" dirty="0"/>
-          </a:p>
-        </p:txBody>
-      </p:sp>
-      <p:sp>
-        <p:nvSpPr>
-          <p:cNvPr id="8" name="Shape 6"/>
-          <p:cNvSpPr/>
-          <p:nvPr/>
-        </p:nvSpPr>
-        <p:spPr>
-          <a:xfrm>
-            <a:off x="731520" y="4251960"/>
-            <a:ext cx="164592" cy="164592"/>
-          </a:xfrm>
-          <a:prstGeom prst="ellipse">
+              <a:t>Ang kalidad ng susunod na 11 minuto ay nakasalalay sa mga patakarang ito.</a:t>
+            </a:r>
+            <a:endParaRPr lang="en-US" sz="1400" dirty="0"/>
+          </a:p>
+        </p:txBody>
+      </p:sp>
+      <p:sp>
+        <p:nvSpPr>
+          <p:cNvPr id="11" name="Rounded Rectangle 10"/>
+          <p:cNvSpPr/>
+          <p:nvPr/>
+        </p:nvSpPr>
+        <p:spPr>
+          <a:xfrm>
+            <a:off x="8763000" y="137160"/>
+            <a:ext cx="3200400" cy="548640"/>
+          </a:xfrm>
+          <a:prstGeom prst="roundRect">
             <a:avLst/>
           </a:prstGeom>
           <a:solidFill>
-            <a:srgbClr val="2A5C40"/>
+            <a:srgbClr val="D4AF37"/>
           </a:solidFill>
-          <a:ln/>
-        </p:spPr>
-      </p:sp>
-      <p:sp>
-        <p:nvSpPr>
-          <p:cNvPr id="9" name="Text 7"/>
-          <p:cNvSpPr/>
-          <p:nvPr/>
-        </p:nvSpPr>
-        <p:spPr>
-          <a:xfrm>
-            <a:off x="1097280" y="4023360"/>
-            <a:ext cx="10058400" cy="731520"/>
-          </a:xfrm>
-          <a:prstGeom prst="rect">
-            <a:avLst/>
-          </a:prstGeom>
-          <a:noFill/>
-          <a:ln/>
-        </p:spPr>
-        <p:txBody>
-          <a:bodyPr wrap="square" rtlCol="0" anchor="ctr"/>
-          <a:lstStyle/>
-          <a:p>
-            <a:pPr indent="0" marL="0">
-              <a:buNone/>
-            </a:pPr>
-            <a:r>
-              <a:rPr lang="en-US" sz="1900" b="1" dirty="0">
-                <a:solidFill>
-                  <a:srgbClr val="1A1612"/>
-                </a:solidFill>
-                <a:latin typeface="DM Sans" pitchFamily="34" charset="0"/>
-                <a:ea typeface="DM Sans" pitchFamily="34" charset="-122"/>
-                <a:cs typeface="DM Sans" pitchFamily="34" charset="-120"/>
-              </a:rPr>
-              <a:t>Discernment drill: </a:t>
-            </a:r>
-            <a:pPr indent="0" marL="0">
-              <a:buNone/>
-            </a:pPr>
-            <a:r>
-              <a:rPr lang="en-US" sz="1900" dirty="0">
-                <a:solidFill>
-                  <a:srgbClr val="1A1612"/>
-                </a:solidFill>
-                <a:latin typeface="DM Sans" pitchFamily="34" charset="0"/>
-                <a:ea typeface="DM Sans" pitchFamily="34" charset="-122"/>
-                <a:cs typeface="DM Sans" pitchFamily="34" charset="-120"/>
-              </a:rPr>
-              <a:t>Isipin ang isang kasalukuyang hirap mo. Trial? Test? Temptation?</a:t>
-            </a:r>
-            <a:endParaRPr lang="en-US" sz="1900" dirty="0"/>
-          </a:p>
-        </p:txBody>
-      </p:sp>
-      <p:sp>
-        <p:nvSpPr>
-          <p:cNvPr id="10" name="Text 8"/>
-          <p:cNvSpPr/>
-          <p:nvPr/>
-        </p:nvSpPr>
-        <p:spPr>
-          <a:xfrm>
-            <a:off x="914400" y="5486400"/>
-            <a:ext cx="10332720" cy="640080"/>
-          </a:xfrm>
-          <a:prstGeom prst="rect">
-            <a:avLst/>
-          </a:prstGeom>
-          <a:noFill/>
-          <a:ln/>
-        </p:spPr>
-        <p:txBody>
-          <a:bodyPr wrap="square" rtlCol="0" anchor="ctr"/>
-          <a:lstStyle/>
-          <a:p>
-            <a:pPr algn="ctr" indent="0" marL="0">
-              <a:buNone/>
-            </a:pPr>
-            <a:r>
-              <a:rPr lang="en-US" sz="1400" i="1" dirty="0">
-                <a:solidFill>
-                  <a:srgbClr val="5A6655"/>
-                </a:solidFill>
-                <a:latin typeface="DM Sans" pitchFamily="34" charset="0"/>
-                <a:ea typeface="DM Sans" pitchFamily="34" charset="-122"/>
-                <a:cs typeface="DM Sans" pitchFamily="34" charset="-120"/>
-              </a:rPr>
-              <a:t>Safe space. Walang nakikinig na puwedeng mag-judge. Hindi ito problem-solving session — pakikinig ito.</a:t>
-            </a:r>
-            <a:endParaRPr lang="en-US" sz="1400" dirty="0"/>
+          <a:ln>
+            <a:noFill/>
+          </a:ln>
+          <a:effectLst/>
+        </p:spPr>
+        <p:style>
+          <a:lnRef idx="1">
+            <a:schemeClr val="accent1"/>
+          </a:lnRef>
+          <a:fillRef idx="3">
+            <a:schemeClr val="accent1"/>
+          </a:fillRef>
+          <a:effectRef idx="2">
+            <a:schemeClr val="accent1"/>
+          </a:effectRef>
+          <a:fontRef idx="minor">
+            <a:schemeClr val="lt1"/>
+          </a:fontRef>
+        </p:style>
+        <p:txBody>
+          <a:bodyPr rtlCol="0" anchor="ctr" wrap="none" tIns="0" bIns="0"/>
+          <a:lstStyle/>
+          <a:p>
+            <a:pPr algn="ctr"/>
+            <a:r>
+              <a:rPr sz="2000" b="1">
+                <a:solidFill>
+                  <a:srgbClr val="141628"/>
+                </a:solidFill>
+                <a:latin typeface="Calibri"/>
+              </a:rPr>
+              <a:t>⏱ 1 min · ⌛24:00</a:t>
+            </a:r>
           </a:p>
         </p:txBody>
       </p:sp>
@@ -2785,7 +4543,918 @@
 </p:sld>
 </file>
 
-<file path=ppt/slides/slide11.xml><?xml version="1.0" encoding="utf-8"?>
+<file path=ppt/slides/slide13.xml><?xml version="1.0" encoding="utf-8"?>
+<p:sld xmlns:a="http://schemas.openxmlformats.org/drawingml/2006/main" xmlns:r="http://schemas.openxmlformats.org/officeDocument/2006/relationships" xmlns:p="http://schemas.openxmlformats.org/presentationml/2006/main">
+  <p:cSld name="Slide 10">
+    <p:bg>
+      <p:bgPr>
+        <a:solidFill>
+          <a:srgbClr val="FDF6E8"/>
+        </a:solidFill>
+      </p:bgPr>
+    </p:bg>
+    <p:spTree>
+      <p:nvGrpSpPr>
+        <p:cNvPr id="1" name=""/>
+        <p:cNvGrpSpPr/>
+        <p:nvPr/>
+      </p:nvGrpSpPr>
+      <p:grpSpPr>
+        <a:xfrm>
+          <a:off x="0" y="0"/>
+          <a:ext cx="0" cy="0"/>
+          <a:chOff x="0" y="0"/>
+          <a:chExt cx="0" cy="0"/>
+        </a:xfrm>
+      </p:grpSpPr>
+      <p:sp>
+        <p:nvSpPr>
+          <p:cNvPr id="2" name="Text 0"/>
+          <p:cNvSpPr/>
+          <p:nvPr/>
+        </p:nvSpPr>
+        <p:spPr>
+          <a:xfrm>
+            <a:off x="365760" y="274320"/>
+            <a:ext cx="5486400" cy="274320"/>
+          </a:xfrm>
+          <a:prstGeom prst="rect">
+            <a:avLst/>
+          </a:prstGeom>
+          <a:noFill/>
+          <a:ln/>
+        </p:spPr>
+        <p:txBody>
+          <a:bodyPr wrap="square" rtlCol="0" anchor="ctr"/>
+          <a:lstStyle/>
+          <a:p>
+            <a:pPr indent="0" marL="0">
+              <a:buNone/>
+            </a:pPr>
+            <a:r>
+              <a:rPr lang="en-US" sz="1100" b="1" spc="500" kern="0" dirty="0">
+                <a:solidFill>
+                  <a:srgbClr val="2A5C40"/>
+                </a:solidFill>
+                <a:latin typeface="DM Sans" pitchFamily="34" charset="0"/>
+                <a:ea typeface="DM Sans" pitchFamily="34" charset="-122"/>
+                <a:cs typeface="DM Sans" pitchFamily="34" charset="-120"/>
+              </a:rPr>
+              <a:t>TALAKAY · GROUP SHARING</a:t>
+            </a:r>
+            <a:endParaRPr lang="en-US" sz="1100" dirty="0"/>
+          </a:p>
+        </p:txBody>
+      </p:sp>
+      <p:sp>
+        <p:nvSpPr>
+          <p:cNvPr id="3" name="Text 1"/>
+          <p:cNvSpPr/>
+          <p:nvPr/>
+        </p:nvSpPr>
+        <p:spPr>
+          <a:xfrm>
+            <a:off x="457200" y="822960"/>
+            <a:ext cx="11247120" cy="822960"/>
+          </a:xfrm>
+          <a:prstGeom prst="rect">
+            <a:avLst/>
+          </a:prstGeom>
+          <a:noFill/>
+          <a:ln/>
+        </p:spPr>
+        <p:txBody>
+          <a:bodyPr wrap="square" rtlCol="0" anchor="ctr"/>
+          <a:lstStyle/>
+          <a:p>
+            <a:pPr algn="ctr" indent="0" marL="0">
+              <a:buNone/>
+            </a:pPr>
+            <a:r>
+              <a:rPr lang="en-US" sz="4800" b="1" dirty="0">
+                <a:solidFill>
+                  <a:srgbClr val="1A1612"/>
+                </a:solidFill>
+                <a:latin typeface="Playfair Display" pitchFamily="34" charset="0"/>
+                <a:ea typeface="Playfair Display" pitchFamily="34" charset="-122"/>
+                <a:cs typeface="Playfair Display" pitchFamily="34" charset="-120"/>
+              </a:rPr>
+              <a:t>Talakayan</a:t>
+            </a:r>
+            <a:endParaRPr lang="en-US" sz="4800" dirty="0"/>
+          </a:p>
+        </p:txBody>
+      </p:sp>
+      <p:sp>
+        <p:nvSpPr>
+          <p:cNvPr id="4" name="Shape 2"/>
+          <p:cNvSpPr/>
+          <p:nvPr/>
+        </p:nvSpPr>
+        <p:spPr>
+          <a:xfrm>
+            <a:off x="731520" y="2423160"/>
+            <a:ext cx="164592" cy="164592"/>
+          </a:xfrm>
+          <a:prstGeom prst="ellipse">
+            <a:avLst/>
+          </a:prstGeom>
+          <a:solidFill>
+            <a:srgbClr val="2A5C40"/>
+          </a:solidFill>
+          <a:ln/>
+        </p:spPr>
+        <p:txBody>
+          <a:bodyPr/>
+          <a:p/>
+        </p:txBody>
+      </p:sp>
+      <p:sp>
+        <p:nvSpPr>
+          <p:cNvPr id="5" name="Text 3"/>
+          <p:cNvSpPr/>
+          <p:nvPr/>
+        </p:nvSpPr>
+        <p:spPr>
+          <a:xfrm>
+            <a:off x="1097280" y="2194560"/>
+            <a:ext cx="10058400" cy="731520"/>
+          </a:xfrm>
+          <a:prstGeom prst="rect">
+            <a:avLst/>
+          </a:prstGeom>
+          <a:noFill/>
+          <a:ln/>
+        </p:spPr>
+        <p:txBody>
+          <a:bodyPr wrap="square" rtlCol="0" anchor="ctr"/>
+          <a:lstStyle/>
+          <a:p>
+            <a:pPr indent="0" marL="0">
+              <a:buNone/>
+            </a:pPr>
+            <a:r>
+              <a:rPr lang="en-US" sz="1900" b="1" dirty="0">
+                <a:solidFill>
+                  <a:srgbClr val="1A1612"/>
+                </a:solidFill>
+                <a:latin typeface="DM Sans" pitchFamily="34" charset="0"/>
+                <a:ea typeface="DM Sans" pitchFamily="34" charset="-122"/>
+                <a:cs typeface="DM Sans" pitchFamily="34" charset="-120"/>
+              </a:rPr>
+              <a:t>I-share (kung handa ka) ang pinakamatinding pagsubok na dinanas mo — o ng isang taong malapit sa’yo.</a:t>
+            </a:r>
+            <a:pPr indent="0" marL="0">
+              <a:buNone/>
+            </a:pPr>
+            <a:endParaRPr lang="en-US" sz="1900" dirty="0"/>
+          </a:p>
+        </p:txBody>
+      </p:sp>
+      <p:sp>
+        <p:nvSpPr>
+          <p:cNvPr id="6" name="Shape 4"/>
+          <p:cNvSpPr/>
+          <p:nvPr/>
+        </p:nvSpPr>
+        <p:spPr>
+          <a:xfrm>
+            <a:off x="731520" y="3337560"/>
+            <a:ext cx="164592" cy="164592"/>
+          </a:xfrm>
+          <a:prstGeom prst="ellipse">
+            <a:avLst/>
+          </a:prstGeom>
+          <a:solidFill>
+            <a:srgbClr val="2A5C40"/>
+          </a:solidFill>
+          <a:ln/>
+        </p:spPr>
+        <p:txBody>
+          <a:bodyPr/>
+          <a:p/>
+        </p:txBody>
+      </p:sp>
+      <p:sp>
+        <p:nvSpPr>
+          <p:cNvPr id="7" name="Text 5"/>
+          <p:cNvSpPr/>
+          <p:nvPr/>
+        </p:nvSpPr>
+        <p:spPr>
+          <a:xfrm>
+            <a:off x="1097280" y="3108960"/>
+            <a:ext cx="10058400" cy="731520"/>
+          </a:xfrm>
+          <a:prstGeom prst="rect">
+            <a:avLst/>
+          </a:prstGeom>
+          <a:noFill/>
+          <a:ln/>
+        </p:spPr>
+        <p:txBody>
+          <a:bodyPr wrap="square" rtlCol="0" anchor="ctr"/>
+          <a:lstStyle/>
+          <a:p>
+            <a:pPr indent="0" marL="0">
+              <a:buNone/>
+            </a:pPr>
+            <a:r>
+              <a:rPr lang="en-US" sz="1900" b="1" dirty="0">
+                <a:solidFill>
+                  <a:srgbClr val="1A1612"/>
+                </a:solidFill>
+                <a:latin typeface="DM Sans" pitchFamily="34" charset="0"/>
+                <a:ea typeface="DM Sans" pitchFamily="34" charset="-122"/>
+                <a:cs typeface="DM Sans" pitchFamily="34" charset="-120"/>
+              </a:rPr>
+              <a:t>Max 2 sharers. Pagkatapos ng bawat isa, facilitator lang: “Salamat sa pagshare. Naririnig ka namin.”</a:t>
+            </a:r>
+            <a:pPr indent="0" marL="0">
+              <a:buNone/>
+            </a:pPr>
+            <a:endParaRPr lang="en-US" sz="1900" dirty="0"/>
+          </a:p>
+        </p:txBody>
+      </p:sp>
+      <p:sp>
+        <p:nvSpPr>
+          <p:cNvPr id="10" name="Text 8"/>
+          <p:cNvSpPr/>
+          <p:nvPr/>
+        </p:nvSpPr>
+        <p:spPr>
+          <a:xfrm>
+            <a:off x="914400" y="5486400"/>
+            <a:ext cx="10332720" cy="640080"/>
+          </a:xfrm>
+          <a:prstGeom prst="rect">
+            <a:avLst/>
+          </a:prstGeom>
+          <a:noFill/>
+          <a:ln/>
+        </p:spPr>
+        <p:txBody>
+          <a:bodyPr wrap="square" rtlCol="0" anchor="ctr"/>
+          <a:lstStyle/>
+          <a:p>
+            <a:pPr algn="ctr" indent="0" marL="0">
+              <a:buNone/>
+            </a:pPr>
+            <a:r>
+              <a:rPr lang="en-US" sz="1400" i="1" dirty="0">
+                <a:solidFill>
+                  <a:srgbClr val="5A6655"/>
+                </a:solidFill>
+                <a:latin typeface="DM Sans" pitchFamily="34" charset="0"/>
+                <a:ea typeface="DM Sans" pitchFamily="34" charset="-122"/>
+                <a:cs typeface="DM Sans" pitchFamily="34" charset="-120"/>
+              </a:rPr>
+              <a:t>Safe space. Walang nakikinig na puwedeng mag-judge. Hindi ito problem-solving session — pakikinig ito.</a:t>
+            </a:r>
+            <a:endParaRPr lang="en-US" sz="1400" dirty="0"/>
+          </a:p>
+        </p:txBody>
+      </p:sp>
+      <p:sp>
+        <p:nvSpPr>
+          <p:cNvPr id="11" name="Rounded Rectangle 10"/>
+          <p:cNvSpPr/>
+          <p:nvPr/>
+        </p:nvSpPr>
+        <p:spPr>
+          <a:xfrm>
+            <a:off x="8763000" y="137160"/>
+            <a:ext cx="3200400" cy="548640"/>
+          </a:xfrm>
+          <a:prstGeom prst="roundRect">
+            <a:avLst/>
+          </a:prstGeom>
+          <a:solidFill>
+            <a:srgbClr val="D4AF37"/>
+          </a:solidFill>
+          <a:ln>
+            <a:noFill/>
+          </a:ln>
+          <a:effectLst/>
+        </p:spPr>
+        <p:style>
+          <a:lnRef idx="1">
+            <a:schemeClr val="accent1"/>
+          </a:lnRef>
+          <a:fillRef idx="3">
+            <a:schemeClr val="accent1"/>
+          </a:fillRef>
+          <a:effectRef idx="2">
+            <a:schemeClr val="accent1"/>
+          </a:effectRef>
+          <a:fontRef idx="minor">
+            <a:schemeClr val="lt1"/>
+          </a:fontRef>
+        </p:style>
+        <p:txBody>
+          <a:bodyPr rtlCol="0" anchor="ctr" wrap="none" tIns="0" bIns="0"/>
+          <a:lstStyle/>
+          <a:p>
+            <a:pPr algn="ctr"/>
+            <a:r>
+              <a:rPr sz="2000" b="1">
+                <a:solidFill>
+                  <a:srgbClr val="141628"/>
+                </a:solidFill>
+                <a:latin typeface="Calibri"/>
+              </a:rPr>
+              <a:t>⏱ 5 min · ⌛29:00</a:t>
+            </a:r>
+          </a:p>
+        </p:txBody>
+      </p:sp>
+    </p:spTree>
+  </p:cSld>
+  <p:clrMapOvr>
+    <a:masterClrMapping/>
+  </p:clrMapOvr>
+</p:sld>
+</file>
+
+<file path=ppt/slides/slide14.xml><?xml version="1.0" encoding="utf-8"?>
+<p:sld xmlns:a="http://schemas.openxmlformats.org/drawingml/2006/main" xmlns:r="http://schemas.openxmlformats.org/officeDocument/2006/relationships" xmlns:p="http://schemas.openxmlformats.org/presentationml/2006/main">
+  <p:cSld name="Slide 3">
+    <p:bg>
+      <p:bgPr>
+        <a:solidFill>
+          <a:srgbClr val="FDF6E8"/>
+        </a:solidFill>
+      </p:bgPr>
+    </p:bg>
+    <p:spTree>
+      <p:nvGrpSpPr>
+        <p:cNvPr id="1" name=""/>
+        <p:cNvGrpSpPr/>
+        <p:nvPr/>
+      </p:nvGrpSpPr>
+      <p:grpSpPr>
+        <a:xfrm>
+          <a:off x="0" y="0"/>
+          <a:ext cx="0" cy="0"/>
+          <a:chOff x="0" y="0"/>
+          <a:chExt cx="0" cy="0"/>
+        </a:xfrm>
+      </p:grpSpPr>
+      <p:sp>
+        <p:nvSpPr>
+          <p:cNvPr id="2" name="Text 0"/>
+          <p:cNvSpPr/>
+          <p:nvPr/>
+        </p:nvSpPr>
+        <p:spPr>
+          <a:xfrm>
+            <a:off x="365760" y="274320"/>
+            <a:ext cx="5486400" cy="274320"/>
+          </a:xfrm>
+          <a:prstGeom prst="rect">
+            <a:avLst/>
+          </a:prstGeom>
+          <a:noFill/>
+          <a:ln/>
+        </p:spPr>
+        <p:txBody>
+          <a:bodyPr wrap="square" rtlCol="0" anchor="ctr"/>
+          <a:lstStyle/>
+          <a:p>
+            <a:pPr indent="0" marL="0">
+              <a:buNone/>
+            </a:pPr>
+            <a:r>
+              <a:rPr lang="en-US" sz="1100" b="1" spc="500" kern="0" dirty="0">
+                <a:solidFill>
+                  <a:srgbClr val="2A5C40"/>
+                </a:solidFill>
+                <a:latin typeface="DM Sans" pitchFamily="34" charset="0"/>
+                <a:ea typeface="DM Sans" pitchFamily="34" charset="-122"/>
+                <a:cs typeface="DM Sans" pitchFamily="34" charset="-120"/>
+              </a:rPr>
+              <a:t>TALAKAY · ANG TANONG NG PUSO</a:t>
+            </a:r>
+            <a:endParaRPr lang="en-US" sz="1100" dirty="0"/>
+          </a:p>
+        </p:txBody>
+      </p:sp>
+      <p:sp>
+        <p:nvSpPr>
+          <p:cNvPr id="3" name="Text 1"/>
+          <p:cNvSpPr/>
+          <p:nvPr/>
+        </p:nvSpPr>
+        <p:spPr>
+          <a:xfrm>
+            <a:off x="457200" y="1371600"/>
+            <a:ext cx="11247120" cy="1005840"/>
+          </a:xfrm>
+          <a:prstGeom prst="rect">
+            <a:avLst/>
+          </a:prstGeom>
+          <a:noFill/>
+          <a:ln/>
+        </p:spPr>
+        <p:txBody>
+          <a:bodyPr wrap="square" rtlCol="0" anchor="ctr"/>
+          <a:lstStyle/>
+          <a:p>
+            <a:pPr algn="ctr" indent="0" marL="0">
+              <a:buNone/>
+            </a:pPr>
+            <a:r>
+              <a:rPr lang="en-US" sz="5200" b="1" dirty="0">
+                <a:solidFill>
+                  <a:srgbClr val="1A1612"/>
+                </a:solidFill>
+                <a:latin typeface="Playfair Display" pitchFamily="34" charset="0"/>
+                <a:ea typeface="Playfair Display" pitchFamily="34" charset="-122"/>
+                <a:cs typeface="Playfair Display" pitchFamily="34" charset="-120"/>
+              </a:rPr>
+              <a:t>“Bakit ako, Panginoon?”</a:t>
+            </a:r>
+            <a:endParaRPr lang="en-US" sz="5200" dirty="0"/>
+          </a:p>
+        </p:txBody>
+      </p:sp>
+      <p:sp>
+        <p:nvSpPr>
+          <p:cNvPr id="4" name="Text 2"/>
+          <p:cNvSpPr/>
+          <p:nvPr/>
+        </p:nvSpPr>
+        <p:spPr>
+          <a:xfrm>
+            <a:off x="1371600" y="2743200"/>
+            <a:ext cx="9418320" cy="914400"/>
+          </a:xfrm>
+          <a:prstGeom prst="rect">
+            <a:avLst/>
+          </a:prstGeom>
+          <a:noFill/>
+          <a:ln/>
+        </p:spPr>
+        <p:txBody>
+          <a:bodyPr wrap="square" rtlCol="0" anchor="ctr"/>
+          <a:lstStyle/>
+          <a:p>
+            <a:pPr algn="ctr" indent="0" marL="0">
+              <a:buNone/>
+            </a:pPr>
+            <a:r>
+              <a:rPr lang="en-US" sz="2400" dirty="0">
+                <a:solidFill>
+                  <a:srgbClr val="1A1612"/>
+                </a:solidFill>
+                <a:latin typeface="DM Sans" pitchFamily="34" charset="0"/>
+                <a:ea typeface="DM Sans" pitchFamily="34" charset="-122"/>
+                <a:cs typeface="DM Sans" pitchFamily="34" charset="-120"/>
+              </a:rPr>
+              <a:t>Dumating ka na ba sa puntos kung saan napatanong ka sa Dios kung BAKIT mo dinaranas ito?</a:t>
+            </a:r>
+            <a:endParaRPr lang="en-US" sz="2400" dirty="0"/>
+          </a:p>
+        </p:txBody>
+      </p:sp>
+      <p:sp>
+        <p:nvSpPr>
+          <p:cNvPr id="5" name="Text 3"/>
+          <p:cNvSpPr/>
+          <p:nvPr/>
+        </p:nvSpPr>
+        <p:spPr>
+          <a:xfrm>
+            <a:off x="457200" y="4023360"/>
+            <a:ext cx="11247120" cy="731520"/>
+          </a:xfrm>
+          <a:prstGeom prst="rect">
+            <a:avLst/>
+          </a:prstGeom>
+          <a:noFill/>
+          <a:ln/>
+        </p:spPr>
+        <p:txBody>
+          <a:bodyPr wrap="square" rtlCol="0" anchor="ctr"/>
+          <a:lstStyle/>
+          <a:p>
+            <a:pPr algn="ctr" indent="0" marL="0">
+              <a:buNone/>
+            </a:pPr>
+            <a:r>
+              <a:rPr lang="en-US" sz="2800" b="1" i="1" dirty="0">
+                <a:solidFill>
+                  <a:srgbClr val="2A5C40"/>
+                </a:solidFill>
+                <a:latin typeface="Playfair Display" pitchFamily="34" charset="0"/>
+                <a:ea typeface="Playfair Display" pitchFamily="34" charset="-122"/>
+                <a:cs typeface="Playfair Display" pitchFamily="34" charset="-120"/>
+              </a:rPr>
+              <a:t>Round-robin — isang pangungusap bawat isa.</a:t>
+            </a:r>
+            <a:endParaRPr lang="en-US" sz="2800" dirty="0"/>
+          </a:p>
+        </p:txBody>
+      </p:sp>
+      <p:sp>
+        <p:nvSpPr>
+          <p:cNvPr id="6" name="Text 4"/>
+          <p:cNvSpPr/>
+          <p:nvPr/>
+        </p:nvSpPr>
+        <p:spPr>
+          <a:xfrm>
+            <a:off x="457200" y="5303520"/>
+            <a:ext cx="11247120" cy="365760"/>
+          </a:xfrm>
+          <a:prstGeom prst="rect">
+            <a:avLst/>
+          </a:prstGeom>
+          <a:noFill/>
+          <a:ln/>
+        </p:spPr>
+        <p:txBody>
+          <a:bodyPr wrap="square" rtlCol="0" anchor="ctr"/>
+          <a:lstStyle/>
+          <a:p>
+            <a:pPr algn="ctr" indent="0" marL="0">
+              <a:buNone/>
+            </a:pPr>
+            <a:r>
+              <a:rPr lang="en-US" sz="1400" i="1" dirty="0">
+                <a:solidFill>
+                  <a:srgbClr val="5A6655"/>
+                </a:solidFill>
+                <a:latin typeface="DM Sans" pitchFamily="34" charset="0"/>
+                <a:ea typeface="DM Sans" pitchFamily="34" charset="-122"/>
+                <a:cs typeface="DM Sans" pitchFamily="34" charset="-120"/>
+              </a:rPr>
+              <a:t/>
+            </a:r>
+            <a:endParaRPr lang="en-US" sz="1400" dirty="0"/>
+          </a:p>
+        </p:txBody>
+      </p:sp>
+      <p:sp>
+        <p:nvSpPr>
+          <p:cNvPr id="7" name="Rounded Rectangle 6"/>
+          <p:cNvSpPr/>
+          <p:nvPr/>
+        </p:nvSpPr>
+        <p:spPr>
+          <a:xfrm>
+            <a:off x="8763000" y="137160"/>
+            <a:ext cx="3200400" cy="548640"/>
+          </a:xfrm>
+          <a:prstGeom prst="roundRect">
+            <a:avLst/>
+          </a:prstGeom>
+          <a:solidFill>
+            <a:srgbClr val="D4AF37"/>
+          </a:solidFill>
+          <a:ln>
+            <a:noFill/>
+          </a:ln>
+          <a:effectLst/>
+        </p:spPr>
+        <p:style>
+          <a:lnRef idx="1">
+            <a:schemeClr val="accent1"/>
+          </a:lnRef>
+          <a:fillRef idx="3">
+            <a:schemeClr val="accent1"/>
+          </a:fillRef>
+          <a:effectRef idx="2">
+            <a:schemeClr val="accent1"/>
+          </a:effectRef>
+          <a:fontRef idx="minor">
+            <a:schemeClr val="lt1"/>
+          </a:fontRef>
+        </p:style>
+        <p:txBody>
+          <a:bodyPr rtlCol="0" anchor="ctr" wrap="none" tIns="0" bIns="0"/>
+          <a:lstStyle/>
+          <a:p>
+            <a:pPr algn="ctr"/>
+            <a:r>
+              <a:rPr sz="2000" b="1">
+                <a:solidFill>
+                  <a:srgbClr val="141628"/>
+                </a:solidFill>
+                <a:latin typeface="Calibri"/>
+              </a:rPr>
+              <a:t>⏱ 3 min · ⌛32:00</a:t>
+            </a:r>
+          </a:p>
+        </p:txBody>
+      </p:sp>
+    </p:spTree>
+  </p:cSld>
+  <p:clrMapOvr>
+    <a:masterClrMapping/>
+  </p:clrMapOvr>
+</p:sld>
+</file>
+
+<file path=ppt/slides/slide15.xml><?xml version="1.0" encoding="utf-8"?>
+<p:sld xmlns:a="http://schemas.openxmlformats.org/drawingml/2006/main" xmlns:r="http://schemas.openxmlformats.org/officeDocument/2006/relationships" xmlns:p="http://schemas.openxmlformats.org/presentationml/2006/main">
+  <p:cSld name="Slide 3">
+    <p:bg>
+      <p:bgPr>
+        <a:solidFill>
+          <a:srgbClr val="FDF6E8"/>
+        </a:solidFill>
+      </p:bgPr>
+    </p:bg>
+    <p:spTree>
+      <p:nvGrpSpPr>
+        <p:cNvPr id="1" name=""/>
+        <p:cNvGrpSpPr/>
+        <p:nvPr/>
+      </p:nvGrpSpPr>
+      <p:grpSpPr>
+        <a:xfrm>
+          <a:off x="0" y="0"/>
+          <a:ext cx="0" cy="0"/>
+          <a:chOff x="0" y="0"/>
+          <a:chExt cx="0" cy="0"/>
+        </a:xfrm>
+      </p:grpSpPr>
+      <p:sp>
+        <p:nvSpPr>
+          <p:cNvPr id="2" name="Text 0"/>
+          <p:cNvSpPr/>
+          <p:nvPr/>
+        </p:nvSpPr>
+        <p:spPr>
+          <a:xfrm>
+            <a:off x="365760" y="274320"/>
+            <a:ext cx="5486400" cy="274320"/>
+          </a:xfrm>
+          <a:prstGeom prst="rect">
+            <a:avLst/>
+          </a:prstGeom>
+          <a:noFill/>
+          <a:ln/>
+        </p:spPr>
+        <p:txBody>
+          <a:bodyPr wrap="square" rtlCol="0" anchor="ctr"/>
+          <a:lstStyle/>
+          <a:p>
+            <a:pPr indent="0" marL="0">
+              <a:buNone/>
+            </a:pPr>
+            <a:r>
+              <a:rPr lang="en-US" sz="1100" b="1" spc="500" kern="0" dirty="0">
+                <a:solidFill>
+                  <a:srgbClr val="2A5C40"/>
+                </a:solidFill>
+                <a:latin typeface="DM Sans" pitchFamily="34" charset="0"/>
+                <a:ea typeface="DM Sans" pitchFamily="34" charset="-122"/>
+                <a:cs typeface="DM Sans" pitchFamily="34" charset="-120"/>
+              </a:rPr>
+              <a:t>TALAKAY · DISCERNMENT DRILL</a:t>
+            </a:r>
+            <a:endParaRPr lang="en-US" sz="1100" dirty="0"/>
+          </a:p>
+        </p:txBody>
+      </p:sp>
+      <p:sp>
+        <p:nvSpPr>
+          <p:cNvPr id="3" name="Text 1"/>
+          <p:cNvSpPr/>
+          <p:nvPr/>
+        </p:nvSpPr>
+        <p:spPr>
+          <a:xfrm>
+            <a:off x="457200" y="1371600"/>
+            <a:ext cx="11247120" cy="1005840"/>
+          </a:xfrm>
+          <a:prstGeom prst="rect">
+            <a:avLst/>
+          </a:prstGeom>
+          <a:noFill/>
+          <a:ln/>
+        </p:spPr>
+        <p:txBody>
+          <a:bodyPr wrap="square" rtlCol="0" anchor="ctr"/>
+          <a:lstStyle/>
+          <a:p>
+            <a:pPr algn="ctr" indent="0" marL="0">
+              <a:buNone/>
+            </a:pPr>
+            <a:r>
+              <a:rPr lang="en-US" sz="5200" b="1" dirty="0">
+                <a:solidFill>
+                  <a:srgbClr val="1A1612"/>
+                </a:solidFill>
+                <a:latin typeface="Playfair Display" pitchFamily="34" charset="0"/>
+                <a:ea typeface="Playfair Display" pitchFamily="34" charset="-122"/>
+                <a:cs typeface="Playfair Display" pitchFamily="34" charset="-120"/>
+              </a:rPr>
+              <a:t>Trial? Test? Temptation?</a:t>
+            </a:r>
+            <a:endParaRPr lang="en-US" sz="5200" dirty="0"/>
+          </a:p>
+        </p:txBody>
+      </p:sp>
+      <p:sp>
+        <p:nvSpPr>
+          <p:cNvPr id="4" name="Text 2"/>
+          <p:cNvSpPr/>
+          <p:nvPr/>
+        </p:nvSpPr>
+        <p:spPr>
+          <a:xfrm>
+            <a:off x="1371600" y="2743200"/>
+            <a:ext cx="9418320" cy="914400"/>
+          </a:xfrm>
+          <a:prstGeom prst="rect">
+            <a:avLst/>
+          </a:prstGeom>
+          <a:noFill/>
+          <a:ln/>
+        </p:spPr>
+        <p:txBody>
+          <a:bodyPr wrap="square" rtlCol="0" anchor="ctr"/>
+          <a:lstStyle/>
+          <a:p>
+            <a:pPr algn="ctr" indent="0" marL="0">
+              <a:buNone/>
+            </a:pPr>
+            <a:r>
+              <a:rPr lang="en-US" sz="2400" dirty="0">
+                <a:solidFill>
+                  <a:srgbClr val="1A1612"/>
+                </a:solidFill>
+                <a:latin typeface="DM Sans" pitchFamily="34" charset="0"/>
+                <a:ea typeface="DM Sans" pitchFamily="34" charset="-122"/>
+                <a:cs typeface="DM Sans" pitchFamily="34" charset="-120"/>
+              </a:rPr>
+              <a:t>Isipin ang isang hirap mo NGAYON. Alin sa tatlo?</a:t>
+            </a:r>
+            <a:endParaRPr lang="en-US" sz="2400" dirty="0"/>
+          </a:p>
+          <a:p>
+            <a:pPr algn="ctr" indent="0" marL="0">
+              <a:buNone/>
+            </a:pPr>
+            <a:r>
+              <a:rPr lang="en-US" sz="2400" dirty="0">
+                <a:solidFill>
+                  <a:srgbClr val="1A1612"/>
+                </a:solidFill>
+                <a:latin typeface="DM Sans" pitchFamily="34" charset="0"/>
+                <a:ea typeface="DM Sans" pitchFamily="34" charset="-122"/>
+                <a:cs typeface="DM Sans" pitchFamily="34" charset="-120"/>
+              </a:rPr>
+              <a:t>Sa apat na biblical responses — Job, Pablo, Pedro, Jesus — alin ang pinakaangkop sa sitwasyon mo?</a:t>
+            </a:r>
+            <a:endParaRPr lang="en-US" sz="2400" dirty="0"/>
+          </a:p>
+        </p:txBody>
+      </p:sp>
+      <p:sp>
+        <p:nvSpPr>
+          <p:cNvPr id="5" name="Text 3"/>
+          <p:cNvSpPr/>
+          <p:nvPr/>
+        </p:nvSpPr>
+        <p:spPr>
+          <a:xfrm>
+            <a:off x="457200" y="4023360"/>
+            <a:ext cx="11247120" cy="731520"/>
+          </a:xfrm>
+          <a:prstGeom prst="rect">
+            <a:avLst/>
+          </a:prstGeom>
+          <a:noFill/>
+          <a:ln/>
+        </p:spPr>
+        <p:txBody>
+          <a:bodyPr wrap="square" rtlCol="0" anchor="ctr"/>
+          <a:lstStyle/>
+          <a:p>
+            <a:pPr algn="ctr" indent="0" marL="0">
+              <a:buNone/>
+            </a:pPr>
+            <a:r>
+              <a:rPr lang="en-US" sz="2800" b="1" i="1" dirty="0">
+                <a:solidFill>
+                  <a:srgbClr val="2A5C40"/>
+                </a:solidFill>
+                <a:latin typeface="Playfair Display" pitchFamily="34" charset="0"/>
+                <a:ea typeface="Playfair Display" pitchFamily="34" charset="-122"/>
+                <a:cs typeface="Playfair Display" pitchFamily="34" charset="-120"/>
+              </a:rPr>
+              <a:t>2 sharers — ang klasipikasyon lang.</a:t>
+            </a:r>
+            <a:endParaRPr lang="en-US" sz="2800" dirty="0"/>
+          </a:p>
+        </p:txBody>
+      </p:sp>
+      <p:sp>
+        <p:nvSpPr>
+          <p:cNvPr id="6" name="Text 4"/>
+          <p:cNvSpPr/>
+          <p:nvPr/>
+        </p:nvSpPr>
+        <p:spPr>
+          <a:xfrm>
+            <a:off x="457200" y="5303520"/>
+            <a:ext cx="11247120" cy="365760"/>
+          </a:xfrm>
+          <a:prstGeom prst="rect">
+            <a:avLst/>
+          </a:prstGeom>
+          <a:noFill/>
+          <a:ln/>
+        </p:spPr>
+        <p:txBody>
+          <a:bodyPr wrap="square" rtlCol="0" anchor="ctr"/>
+          <a:lstStyle/>
+          <a:p>
+            <a:pPr algn="ctr" indent="0" marL="0">
+              <a:buNone/>
+            </a:pPr>
+            <a:r>
+              <a:rPr lang="en-US" sz="1400" i="1" dirty="0">
+                <a:solidFill>
+                  <a:srgbClr val="5A6655"/>
+                </a:solidFill>
+                <a:latin typeface="DM Sans" pitchFamily="34" charset="0"/>
+                <a:ea typeface="DM Sans" pitchFamily="34" charset="-122"/>
+                <a:cs typeface="DM Sans" pitchFamily="34" charset="-120"/>
+              </a:rPr>
+              <a:t/>
+            </a:r>
+            <a:endParaRPr lang="en-US" sz="1400" dirty="0"/>
+          </a:p>
+        </p:txBody>
+      </p:sp>
+      <p:sp>
+        <p:nvSpPr>
+          <p:cNvPr id="7" name="Rounded Rectangle 6"/>
+          <p:cNvSpPr/>
+          <p:nvPr/>
+        </p:nvSpPr>
+        <p:spPr>
+          <a:xfrm>
+            <a:off x="8763000" y="137160"/>
+            <a:ext cx="3200400" cy="548640"/>
+          </a:xfrm>
+          <a:prstGeom prst="roundRect">
+            <a:avLst/>
+          </a:prstGeom>
+          <a:solidFill>
+            <a:srgbClr val="D4AF37"/>
+          </a:solidFill>
+          <a:ln>
+            <a:noFill/>
+          </a:ln>
+          <a:effectLst/>
+        </p:spPr>
+        <p:style>
+          <a:lnRef idx="1">
+            <a:schemeClr val="accent1"/>
+          </a:lnRef>
+          <a:fillRef idx="3">
+            <a:schemeClr val="accent1"/>
+          </a:fillRef>
+          <a:effectRef idx="2">
+            <a:schemeClr val="accent1"/>
+          </a:effectRef>
+          <a:fontRef idx="minor">
+            <a:schemeClr val="lt1"/>
+          </a:fontRef>
+        </p:style>
+        <p:txBody>
+          <a:bodyPr rtlCol="0" anchor="ctr" wrap="none" tIns="0" bIns="0"/>
+          <a:lstStyle/>
+          <a:p>
+            <a:pPr algn="ctr"/>
+            <a:r>
+              <a:rPr sz="2000" b="1">
+                <a:solidFill>
+                  <a:srgbClr val="141628"/>
+                </a:solidFill>
+                <a:latin typeface="Calibri"/>
+              </a:rPr>
+              <a:t>⏱ 3 min · ⌛35:00</a:t>
+            </a:r>
+          </a:p>
+        </p:txBody>
+      </p:sp>
+    </p:spTree>
+  </p:cSld>
+  <p:clrMapOvr>
+    <a:masterClrMapping/>
+  </p:clrMapOvr>
+</p:sld>
+</file>
+
+<file path=ppt/slides/slide16.xml><?xml version="1.0" encoding="utf-8"?>
 <p:sld xmlns:a="http://schemas.openxmlformats.org/drawingml/2006/main" xmlns:r="http://schemas.openxmlformats.org/officeDocument/2006/relationships" xmlns:p="http://schemas.openxmlformats.org/presentationml/2006/main">
   <p:cSld name="Slide 11">
     <p:bg>
@@ -3036,6 +5705,59 @@
           </a:p>
         </p:txBody>
       </p:sp>
+      <p:sp>
+        <p:nvSpPr>
+          <p:cNvPr id="6" name="Rounded Rectangle 5"/>
+          <p:cNvSpPr/>
+          <p:nvPr/>
+        </p:nvSpPr>
+        <p:spPr>
+          <a:xfrm>
+            <a:off x="8763000" y="137160"/>
+            <a:ext cx="3200400" cy="548640"/>
+          </a:xfrm>
+          <a:prstGeom prst="roundRect">
+            <a:avLst/>
+          </a:prstGeom>
+          <a:solidFill>
+            <a:srgbClr val="D4AF37"/>
+          </a:solidFill>
+          <a:ln>
+            <a:noFill/>
+          </a:ln>
+          <a:effectLst/>
+        </p:spPr>
+        <p:style>
+          <a:lnRef idx="1">
+            <a:schemeClr val="accent1"/>
+          </a:lnRef>
+          <a:fillRef idx="3">
+            <a:schemeClr val="accent1"/>
+          </a:fillRef>
+          <a:effectRef idx="2">
+            <a:schemeClr val="accent1"/>
+          </a:effectRef>
+          <a:fontRef idx="minor">
+            <a:schemeClr val="lt1"/>
+          </a:fontRef>
+        </p:style>
+        <p:txBody>
+          <a:bodyPr rtlCol="0" anchor="ctr" wrap="none" tIns="0" bIns="0"/>
+          <a:lstStyle/>
+          <a:p>
+            <a:pPr algn="ctr"/>
+            <a:r>
+              <a:rPr sz="2000" b="1">
+                <a:solidFill>
+                  <a:srgbClr val="141628"/>
+                </a:solidFill>
+                <a:latin typeface="Calibri"/>
+              </a:rPr>
+              <a:t>⏱ 2 min · ⌛37:00</a:t>
+            </a:r>
+          </a:p>
+        </p:txBody>
+      </p:sp>
     </p:spTree>
   </p:cSld>
   <p:clrMapOvr>
@@ -3044,7 +5766,7 @@
 </p:sld>
 </file>
 
-<file path=ppt/slides/slide12.xml><?xml version="1.0" encoding="utf-8"?>
+<file path=ppt/slides/slide17.xml><?xml version="1.0" encoding="utf-8"?>
 <p:sld xmlns:a="http://schemas.openxmlformats.org/drawingml/2006/main" xmlns:r="http://schemas.openxmlformats.org/officeDocument/2006/relationships" xmlns:p="http://schemas.openxmlformats.org/presentationml/2006/main">
   <p:cSld name="Slide 12">
     <p:bg>
@@ -3402,6 +6124,59 @@
           </a:p>
         </p:txBody>
       </p:sp>
+      <p:sp>
+        <p:nvSpPr>
+          <p:cNvPr id="9" name="Rounded Rectangle 8"/>
+          <p:cNvSpPr/>
+          <p:nvPr/>
+        </p:nvSpPr>
+        <p:spPr>
+          <a:xfrm>
+            <a:off x="8763000" y="137160"/>
+            <a:ext cx="3200400" cy="548640"/>
+          </a:xfrm>
+          <a:prstGeom prst="roundRect">
+            <a:avLst/>
+          </a:prstGeom>
+          <a:solidFill>
+            <a:srgbClr val="D4AF37"/>
+          </a:solidFill>
+          <a:ln>
+            <a:noFill/>
+          </a:ln>
+          <a:effectLst/>
+        </p:spPr>
+        <p:style>
+          <a:lnRef idx="1">
+            <a:schemeClr val="accent1"/>
+          </a:lnRef>
+          <a:fillRef idx="3">
+            <a:schemeClr val="accent1"/>
+          </a:fillRef>
+          <a:effectRef idx="2">
+            <a:schemeClr val="accent1"/>
+          </a:effectRef>
+          <a:fontRef idx="minor">
+            <a:schemeClr val="lt1"/>
+          </a:fontRef>
+        </p:style>
+        <p:txBody>
+          <a:bodyPr rtlCol="0" anchor="ctr" wrap="none" tIns="0" bIns="0"/>
+          <a:lstStyle/>
+          <a:p>
+            <a:pPr algn="ctr"/>
+            <a:r>
+              <a:rPr sz="2000" b="1">
+                <a:solidFill>
+                  <a:srgbClr val="141628"/>
+                </a:solidFill>
+                <a:latin typeface="Calibri"/>
+              </a:rPr>
+              <a:t>⏱ 5 min · ⌛42:00</a:t>
+            </a:r>
+          </a:p>
+        </p:txBody>
+      </p:sp>
     </p:spTree>
   </p:cSld>
   <p:clrMapOvr>
@@ -3410,7 +6185,7 @@
 </p:sld>
 </file>
 
-<file path=ppt/slides/slide13.xml><?xml version="1.0" encoding="utf-8"?>
+<file path=ppt/slides/slide18.xml><?xml version="1.0" encoding="utf-8"?>
 <p:sld xmlns:a="http://schemas.openxmlformats.org/drawingml/2006/main" xmlns:r="http://schemas.openxmlformats.org/officeDocument/2006/relationships" xmlns:p="http://schemas.openxmlformats.org/presentationml/2006/main">
   <p:cSld name="Slide 13">
     <p:bg>
@@ -3674,6 +6449,59 @@
           </a:p>
         </p:txBody>
       </p:sp>
+      <p:sp>
+        <p:nvSpPr>
+          <p:cNvPr id="8" name="Rounded Rectangle 7"/>
+          <p:cNvSpPr/>
+          <p:nvPr/>
+        </p:nvSpPr>
+        <p:spPr>
+          <a:xfrm>
+            <a:off x="8763000" y="137160"/>
+            <a:ext cx="3200400" cy="548640"/>
+          </a:xfrm>
+          <a:prstGeom prst="roundRect">
+            <a:avLst/>
+          </a:prstGeom>
+          <a:solidFill>
+            <a:srgbClr val="D4AF37"/>
+          </a:solidFill>
+          <a:ln>
+            <a:noFill/>
+          </a:ln>
+          <a:effectLst/>
+        </p:spPr>
+        <p:style>
+          <a:lnRef idx="1">
+            <a:schemeClr val="accent1"/>
+          </a:lnRef>
+          <a:fillRef idx="3">
+            <a:schemeClr val="accent1"/>
+          </a:fillRef>
+          <a:effectRef idx="2">
+            <a:schemeClr val="accent1"/>
+          </a:effectRef>
+          <a:fontRef idx="minor">
+            <a:schemeClr val="lt1"/>
+          </a:fontRef>
+        </p:style>
+        <p:txBody>
+          <a:bodyPr rtlCol="0" anchor="ctr" wrap="none" tIns="0" bIns="0"/>
+          <a:lstStyle/>
+          <a:p>
+            <a:pPr algn="ctr"/>
+            <a:r>
+              <a:rPr sz="2000" b="1">
+                <a:solidFill>
+                  <a:srgbClr val="141628"/>
+                </a:solidFill>
+                <a:latin typeface="Calibri"/>
+              </a:rPr>
+              <a:t>⏱ 4 min · ⌛46:00</a:t>
+            </a:r>
+          </a:p>
+        </p:txBody>
+      </p:sp>
     </p:spTree>
   </p:cSld>
   <p:clrMapOvr>
@@ -3682,9 +6510,9 @@
 </p:sld>
 </file>
 
-<file path=ppt/slides/slide14.xml><?xml version="1.0" encoding="utf-8"?>
+<file path=ppt/slides/slide19.xml><?xml version="1.0" encoding="utf-8"?>
 <p:sld xmlns:a="http://schemas.openxmlformats.org/drawingml/2006/main" xmlns:r="http://schemas.openxmlformats.org/officeDocument/2006/relationships" xmlns:p="http://schemas.openxmlformats.org/presentationml/2006/main">
-  <p:cSld name="Slide 14">
+  <p:cSld name="Slide 3">
     <p:bg>
       <p:bgPr>
         <a:solidFill>
@@ -3739,7 +6567,7 @@
                 <a:ea typeface="DM Sans" pitchFamily="34" charset="-122"/>
                 <a:cs typeface="DM Sans" pitchFamily="34" charset="-120"/>
               </a:rPr>
-              <a:t>DALHIN · CARRY HOME</a:t>
+              <a:t>TUGON · PERSONAL WRITING</a:t>
             </a:r>
             <a:endParaRPr lang="en-US" sz="1100" dirty="0"/>
           </a:p>
@@ -3753,8 +6581,8 @@
         </p:nvSpPr>
         <p:spPr>
           <a:xfrm>
-            <a:off x="457200" y="822960"/>
-            <a:ext cx="11247120" cy="822960"/>
+            <a:off x="457200" y="1371600"/>
+            <a:ext cx="11247120" cy="1005840"/>
           </a:xfrm>
           <a:prstGeom prst="rect">
             <a:avLst/>
@@ -3770,7 +6598,7 @@
               <a:buNone/>
             </a:pPr>
             <a:r>
-              <a:rPr lang="en-US" sz="4000" b="1" dirty="0">
+              <a:rPr lang="en-US" sz="5200" b="1" dirty="0">
                 <a:solidFill>
                   <a:srgbClr val="1A1612"/>
                 </a:solidFill>
@@ -3778,58 +6606,38 @@
                 <a:ea typeface="Playfair Display" pitchFamily="34" charset="-122"/>
                 <a:cs typeface="Playfair Display" pitchFamily="34" charset="-120"/>
               </a:rPr>
-              <a:t>Tatlong Bagay sa Linggong Ito</a:t>
-            </a:r>
-            <a:endParaRPr lang="en-US" sz="4000" dirty="0"/>
-          </a:p>
-        </p:txBody>
-      </p:sp>
-      <p:sp>
-        <p:nvSpPr>
-          <p:cNvPr id="4" name="Shape 2"/>
-          <p:cNvSpPr/>
-          <p:nvPr/>
-        </p:nvSpPr>
-        <p:spPr>
-          <a:xfrm>
-            <a:off x="731520" y="2304288"/>
-            <a:ext cx="164592" cy="164592"/>
-          </a:xfrm>
-          <a:prstGeom prst="ellipse">
-            <a:avLst/>
-          </a:prstGeom>
-          <a:solidFill>
-            <a:srgbClr val="2A5C40"/>
-          </a:solidFill>
-          <a:ln/>
-        </p:spPr>
-      </p:sp>
-      <p:sp>
-        <p:nvSpPr>
-          <p:cNvPr id="5" name="Text 3"/>
-          <p:cNvSpPr/>
-          <p:nvPr/>
-        </p:nvSpPr>
-        <p:spPr>
-          <a:xfrm>
-            <a:off x="1097280" y="2103120"/>
-            <a:ext cx="10058400" cy="731520"/>
-          </a:xfrm>
-          <a:prstGeom prst="rect">
-            <a:avLst/>
-          </a:prstGeom>
-          <a:noFill/>
-          <a:ln/>
-        </p:spPr>
-        <p:txBody>
-          <a:bodyPr wrap="square" rtlCol="0" anchor="ctr"/>
-          <a:lstStyle/>
-          <a:p>
-            <a:pPr indent="0" marL="0">
-              <a:buNone/>
-            </a:pPr>
-            <a:r>
-              <a:rPr lang="en-US" sz="1700" b="1" dirty="0">
+              <a:t>Sagutan sa book…</a:t>
+            </a:r>
+            <a:endParaRPr lang="en-US" sz="5200" dirty="0"/>
+          </a:p>
+        </p:txBody>
+      </p:sp>
+      <p:sp>
+        <p:nvSpPr>
+          <p:cNvPr id="4" name="Text 2"/>
+          <p:cNvSpPr/>
+          <p:nvPr/>
+        </p:nvSpPr>
+        <p:spPr>
+          <a:xfrm>
+            <a:off x="1371600" y="2743200"/>
+            <a:ext cx="9418320" cy="914400"/>
+          </a:xfrm>
+          <a:prstGeom prst="rect">
+            <a:avLst/>
+          </a:prstGeom>
+          <a:noFill/>
+          <a:ln/>
+        </p:spPr>
+        <p:txBody>
+          <a:bodyPr wrap="square" rtlCol="0" anchor="ctr"/>
+          <a:lstStyle/>
+          <a:p>
+            <a:pPr algn="ctr" indent="0" marL="0">
+              <a:buNone/>
+            </a:pPr>
+            <a:r>
+              <a:rPr lang="en-US" sz="2400" dirty="0">
                 <a:solidFill>
                   <a:srgbClr val="1A1612"/>
                 </a:solidFill>
@@ -3837,13 +6645,16 @@
                 <a:ea typeface="DM Sans" pitchFamily="34" charset="-122"/>
                 <a:cs typeface="DM Sans" pitchFamily="34" charset="-120"/>
               </a:rPr>
-              <a:t>3-Trial Watch Journal · </a:t>
-            </a:r>
-            <a:pPr indent="0" marL="0">
-              <a:buNone/>
-            </a:pPr>
-            <a:r>
-              <a:rPr lang="en-US" sz="1700" dirty="0">
+              <a:t>Kung dumadaan ka sa pagsubok ngayon: ano ang itinuturo sa’yo ng Panginoon?</a:t>
+            </a:r>
+            <a:endParaRPr lang="en-US" sz="2400" dirty="0"/>
+          </a:p>
+          <a:p>
+            <a:pPr algn="ctr" indent="0" marL="0">
+              <a:buNone/>
+            </a:pPr>
+            <a:r>
+              <a:rPr lang="en-US" sz="2400" dirty="0">
                 <a:solidFill>
                   <a:srgbClr val="1A1612"/>
                 </a:solidFill>
@@ -3851,58 +6662,16 @@
                 <a:ea typeface="DM Sans" pitchFamily="34" charset="-122"/>
                 <a:cs typeface="DM Sans" pitchFamily="34" charset="-120"/>
               </a:rPr>
-              <a:t>Lunes-Linggo. Bawat araw: pangalanan ang hirap, tagain (T/T/T), pangalanan ang response, isulat ang verse.</a:t>
-            </a:r>
-            <a:endParaRPr lang="en-US" sz="1700" dirty="0"/>
-          </a:p>
-        </p:txBody>
-      </p:sp>
-      <p:sp>
-        <p:nvSpPr>
-          <p:cNvPr id="6" name="Shape 4"/>
-          <p:cNvSpPr/>
-          <p:nvPr/>
-        </p:nvSpPr>
-        <p:spPr>
-          <a:xfrm>
-            <a:off x="731520" y="3218688"/>
-            <a:ext cx="164592" cy="164592"/>
-          </a:xfrm>
-          <a:prstGeom prst="ellipse">
-            <a:avLst/>
-          </a:prstGeom>
-          <a:solidFill>
-            <a:srgbClr val="2A5C40"/>
-          </a:solidFill>
-          <a:ln/>
-        </p:spPr>
-      </p:sp>
-      <p:sp>
-        <p:nvSpPr>
-          <p:cNvPr id="7" name="Text 5"/>
-          <p:cNvSpPr/>
-          <p:nvPr/>
-        </p:nvSpPr>
-        <p:spPr>
-          <a:xfrm>
-            <a:off x="1097280" y="3017520"/>
-            <a:ext cx="10058400" cy="731520"/>
-          </a:xfrm>
-          <a:prstGeom prst="rect">
-            <a:avLst/>
-          </a:prstGeom>
-          <a:noFill/>
-          <a:ln/>
-        </p:spPr>
-        <p:txBody>
-          <a:bodyPr wrap="square" rtlCol="0" anchor="ctr"/>
-          <a:lstStyle/>
-          <a:p>
-            <a:pPr indent="0" marL="0">
-              <a:buNone/>
-            </a:pPr>
-            <a:r>
-              <a:rPr lang="en-US" sz="1700" b="1" dirty="0">
+              <a:t>Kung hindi: sumulat ng panalangin para sa kaibigan o kapamilyang naghihirap.</a:t>
+            </a:r>
+            <a:endParaRPr lang="en-US" sz="2400" dirty="0"/>
+          </a:p>
+          <a:p>
+            <a:pPr algn="ctr" indent="0" marL="0">
+              <a:buNone/>
+            </a:pPr>
+            <a:r>
+              <a:rPr lang="en-US" sz="2400" dirty="0">
                 <a:solidFill>
                   <a:srgbClr val="1A1612"/>
                 </a:solidFill>
@@ -3910,822 +6679,140 @@
                 <a:ea typeface="DM Sans" pitchFamily="34" charset="-122"/>
                 <a:cs typeface="DM Sans" pitchFamily="34" charset="-120"/>
               </a:rPr>
-              <a:t>EOLO bridge · </a:t>
-            </a:r>
-            <a:pPr indent="0" marL="0">
-              <a:buNone/>
-            </a:pPr>
-            <a:r>
-              <a:rPr lang="en-US" sz="1700" dirty="0">
-                <a:solidFill>
-                  <a:srgbClr val="1A1612"/>
+              <a:t>LAHAT: sino ang i-e-encourage mo this week? Isulat ang pangalan.</a:t>
+            </a:r>
+            <a:endParaRPr lang="en-US" sz="2400" dirty="0"/>
+          </a:p>
+        </p:txBody>
+      </p:sp>
+      <p:sp>
+        <p:nvSpPr>
+          <p:cNvPr id="5" name="Text 3"/>
+          <p:cNvSpPr/>
+          <p:nvPr/>
+        </p:nvSpPr>
+        <p:spPr>
+          <a:xfrm>
+            <a:off x="457200" y="4023360"/>
+            <a:ext cx="11247120" cy="731520"/>
+          </a:xfrm>
+          <a:prstGeom prst="rect">
+            <a:avLst/>
+          </a:prstGeom>
+          <a:noFill/>
+          <a:ln/>
+        </p:spPr>
+        <p:txBody>
+          <a:bodyPr wrap="square" rtlCol="0" anchor="ctr"/>
+          <a:lstStyle/>
+          <a:p>
+            <a:pPr algn="ctr" indent="0" marL="0">
+              <a:buNone/>
+            </a:pPr>
+            <a:r>
+              <a:rPr lang="en-US" sz="2800" b="1" i="1" dirty="0">
+                <a:solidFill>
+                  <a:srgbClr val="2A5C40"/>
+                </a:solidFill>
+                <a:latin typeface="Playfair Display" pitchFamily="34" charset="0"/>
+                <a:ea typeface="Playfair Display" pitchFamily="34" charset="-122"/>
+                <a:cs typeface="Playfair Display" pitchFamily="34" charset="-120"/>
+              </a:rPr>
+              <a:t>Silent writing · 3–4 minuto.</a:t>
+            </a:r>
+            <a:endParaRPr lang="en-US" sz="2800" dirty="0"/>
+          </a:p>
+        </p:txBody>
+      </p:sp>
+      <p:sp>
+        <p:nvSpPr>
+          <p:cNvPr id="6" name="Text 4"/>
+          <p:cNvSpPr/>
+          <p:nvPr/>
+        </p:nvSpPr>
+        <p:spPr>
+          <a:xfrm>
+            <a:off x="457200" y="5303520"/>
+            <a:ext cx="11247120" cy="365760"/>
+          </a:xfrm>
+          <a:prstGeom prst="rect">
+            <a:avLst/>
+          </a:prstGeom>
+          <a:noFill/>
+          <a:ln/>
+        </p:spPr>
+        <p:txBody>
+          <a:bodyPr wrap="square" rtlCol="0" anchor="ctr"/>
+          <a:lstStyle/>
+          <a:p>
+            <a:pPr algn="ctr" indent="0" marL="0">
+              <a:buNone/>
+            </a:pPr>
+            <a:r>
+              <a:rPr lang="en-US" sz="1400" i="1" dirty="0">
+                <a:solidFill>
+                  <a:srgbClr val="5A6655"/>
                 </a:solidFill>
                 <a:latin typeface="DM Sans" pitchFamily="34" charset="0"/>
                 <a:ea typeface="DM Sans" pitchFamily="34" charset="-122"/>
                 <a:cs typeface="DM Sans" pitchFamily="34" charset="-120"/>
               </a:rPr>
-              <a:t>I-reach out ang taong isinulat mo sa Tugon — chat/text/tawag, sa loob ng 48 oras.</a:t>
-            </a:r>
-            <a:endParaRPr lang="en-US" sz="1700" dirty="0"/>
-          </a:p>
-        </p:txBody>
-      </p:sp>
-      <p:sp>
-        <p:nvSpPr>
-          <p:cNvPr id="8" name="Shape 6"/>
-          <p:cNvSpPr/>
-          <p:nvPr/>
-        </p:nvSpPr>
-        <p:spPr>
-          <a:xfrm>
-            <a:off x="731520" y="4133088"/>
-            <a:ext cx="164592" cy="164592"/>
-          </a:xfrm>
-          <a:prstGeom prst="ellipse">
+              <a:t/>
+            </a:r>
+            <a:endParaRPr lang="en-US" sz="1400" dirty="0"/>
+          </a:p>
+        </p:txBody>
+      </p:sp>
+      <p:sp>
+        <p:nvSpPr>
+          <p:cNvPr id="7" name="Rounded Rectangle 6"/>
+          <p:cNvSpPr/>
+          <p:nvPr/>
+        </p:nvSpPr>
+        <p:spPr>
+          <a:xfrm>
+            <a:off x="8763000" y="137160"/>
+            <a:ext cx="3200400" cy="548640"/>
+          </a:xfrm>
+          <a:prstGeom prst="roundRect">
             <a:avLst/>
           </a:prstGeom>
           <a:solidFill>
-            <a:srgbClr val="2A5C40"/>
+            <a:srgbClr val="D4AF37"/>
           </a:solidFill>
-          <a:ln/>
-        </p:spPr>
-      </p:sp>
-      <p:sp>
-        <p:nvSpPr>
-          <p:cNvPr id="9" name="Text 7"/>
-          <p:cNvSpPr/>
-          <p:nvPr/>
-        </p:nvSpPr>
-        <p:spPr>
-          <a:xfrm>
-            <a:off x="1097280" y="3931920"/>
-            <a:ext cx="10058400" cy="731520"/>
-          </a:xfrm>
-          <a:prstGeom prst="rect">
-            <a:avLst/>
-          </a:prstGeom>
-          <a:noFill/>
-          <a:ln/>
-        </p:spPr>
-        <p:txBody>
-          <a:bodyPr wrap="square" rtlCol="0" anchor="ctr"/>
-          <a:lstStyle/>
-          <a:p>
-            <a:pPr indent="0" marL="0">
-              <a:buNone/>
-            </a:pPr>
-            <a:r>
-              <a:rPr lang="en-US" sz="1700" b="1" dirty="0">
-                <a:solidFill>
-                  <a:srgbClr val="1A1612"/>
-                </a:solidFill>
-                <a:latin typeface="DM Sans" pitchFamily="34" charset="0"/>
-                <a:ea typeface="DM Sans" pitchFamily="34" charset="-122"/>
-                <a:cs typeface="DM Sans" pitchFamily="34" charset="-120"/>
-              </a:rPr>
-              <a:t>Kabisaduhin · </a:t>
-            </a:r>
-            <a:pPr indent="0" marL="0">
-              <a:buNone/>
-            </a:pPr>
-            <a:r>
-              <a:rPr lang="en-US" sz="1700" dirty="0">
-                <a:solidFill>
-                  <a:srgbClr val="1A1612"/>
-                </a:solidFill>
-                <a:latin typeface="DM Sans" pitchFamily="34" charset="0"/>
-                <a:ea typeface="DM Sans" pitchFamily="34" charset="-122"/>
-                <a:cs typeface="DM Sans" pitchFamily="34" charset="-120"/>
-              </a:rPr>
-              <a:t>Juan 16:33 bago ang susunod na lesson.</a:t>
-            </a:r>
-            <a:endParaRPr lang="en-US" sz="1700" dirty="0"/>
-          </a:p>
-        </p:txBody>
-      </p:sp>
-      <p:sp>
-        <p:nvSpPr>
-          <p:cNvPr id="10" name="Text 8"/>
-          <p:cNvSpPr/>
-          <p:nvPr/>
-        </p:nvSpPr>
-        <p:spPr>
-          <a:xfrm>
-            <a:off x="457200" y="5394960"/>
-            <a:ext cx="11247120" cy="548640"/>
-          </a:xfrm>
-          <a:prstGeom prst="rect">
-            <a:avLst/>
-          </a:prstGeom>
-          <a:noFill/>
-          <a:ln/>
-        </p:spPr>
-        <p:txBody>
-          <a:bodyPr wrap="square" rtlCol="0" anchor="ctr"/>
-          <a:lstStyle/>
-          <a:p>
-            <a:pPr algn="ctr" indent="0" marL="0">
-              <a:buNone/>
-            </a:pPr>
-            <a:r>
-              <a:rPr lang="en-US" sz="1800" b="1" i="1" dirty="0">
-                <a:solidFill>
-                  <a:srgbClr val="9A7820"/>
-                </a:solidFill>
-                <a:latin typeface="Playfair Display" pitchFamily="34" charset="0"/>
-                <a:ea typeface="Playfair Display" pitchFamily="34" charset="-122"/>
-                <a:cs typeface="Playfair Display" pitchFamily="34" charset="-120"/>
-              </a:rPr>
-              <a:t>Ang Pagtitiis ay nasa pag-stay — sa hirap mo, at sa hirap ng iba.</a:t>
-            </a:r>
-            <a:endParaRPr lang="en-US" sz="1800" dirty="0"/>
-          </a:p>
-        </p:txBody>
-      </p:sp>
-    </p:spTree>
-  </p:cSld>
-  <p:clrMapOvr>
-    <a:masterClrMapping/>
-  </p:clrMapOvr>
-</p:sld>
-</file>
-
-<file path=ppt/slides/slide15.xml><?xml version="1.0" encoding="utf-8"?>
-<p:sld xmlns:a="http://schemas.openxmlformats.org/drawingml/2006/main" xmlns:r="http://schemas.openxmlformats.org/officeDocument/2006/relationships" xmlns:p="http://schemas.openxmlformats.org/presentationml/2006/main">
-  <p:cSld name="Slide 15">
-    <p:bg>
-      <p:bgPr>
-        <a:solidFill>
-          <a:srgbClr val="1A2E3F"/>
-        </a:solidFill>
-      </p:bgPr>
-    </p:bg>
-    <p:spTree>
-      <p:nvGrpSpPr>
-        <p:cNvPr id="1" name=""/>
-        <p:cNvGrpSpPr/>
-        <p:nvPr/>
-      </p:nvGrpSpPr>
-      <p:grpSpPr>
-        <a:xfrm>
-          <a:off x="0" y="0"/>
-          <a:ext cx="0" cy="0"/>
-          <a:chOff x="0" y="0"/>
-          <a:chExt cx="0" cy="0"/>
-        </a:xfrm>
-      </p:grpSpPr>
-      <p:sp>
-        <p:nvSpPr>
-          <p:cNvPr id="2" name="Text 0"/>
-          <p:cNvSpPr/>
-          <p:nvPr/>
-        </p:nvSpPr>
-        <p:spPr>
-          <a:xfrm>
-            <a:off x="365760" y="228600"/>
-            <a:ext cx="5486400" cy="274320"/>
-          </a:xfrm>
-          <a:prstGeom prst="rect">
-            <a:avLst/>
-          </a:prstGeom>
-          <a:noFill/>
-          <a:ln/>
-        </p:spPr>
-        <p:txBody>
-          <a:bodyPr wrap="square" rtlCol="0" anchor="ctr"/>
-          <a:lstStyle/>
-          <a:p>
-            <a:pPr indent="0" marL="0">
-              <a:buNone/>
-            </a:pPr>
-            <a:r>
-              <a:rPr lang="en-US" sz="1000" b="1" spc="500" kern="0" dirty="0">
-                <a:solidFill>
-                  <a:srgbClr val="FFFFFF">
-                    <a:alpha val="50000"/>
-                  </a:srgbClr>
-                </a:solidFill>
-                <a:latin typeface="DM Sans" pitchFamily="34" charset="0"/>
-                <a:ea typeface="DM Sans" pitchFamily="34" charset="-122"/>
-                <a:cs typeface="DM Sans" pitchFamily="34" charset="-120"/>
-              </a:rPr>
-              <a:t>DALHIN · PANGAKO KO</a:t>
-            </a:r>
-            <a:endParaRPr lang="en-US" sz="1000" dirty="0"/>
-          </a:p>
-        </p:txBody>
-      </p:sp>
-      <p:sp>
-        <p:nvSpPr>
-          <p:cNvPr id="3" name="Shape 1"/>
-          <p:cNvSpPr/>
-          <p:nvPr/>
-        </p:nvSpPr>
-        <p:spPr>
-          <a:xfrm>
-            <a:off x="4572000" y="914400"/>
-            <a:ext cx="3017520" cy="457200"/>
-          </a:xfrm>
-          <a:prstGeom prst="roundRect">
-            <a:avLst>
-              <a:gd name="adj" fmla="val 50000"/>
-            </a:avLst>
-          </a:prstGeom>
-          <a:solidFill>
-            <a:srgbClr val="D4A838"/>
-          </a:solidFill>
-          <a:ln/>
-        </p:spPr>
-      </p:sp>
-      <p:sp>
-        <p:nvSpPr>
-          <p:cNvPr id="4" name="Text 2"/>
-          <p:cNvSpPr/>
-          <p:nvPr/>
-        </p:nvSpPr>
-        <p:spPr>
-          <a:xfrm>
-            <a:off x="4572000" y="960120"/>
-            <a:ext cx="3017520" cy="365760"/>
-          </a:xfrm>
-          <a:prstGeom prst="rect">
-            <a:avLst/>
-          </a:prstGeom>
-          <a:noFill/>
-          <a:ln/>
-        </p:spPr>
-        <p:txBody>
-          <a:bodyPr wrap="square" rtlCol="0" anchor="ctr"/>
-          <a:lstStyle/>
-          <a:p>
-            <a:pPr algn="ctr" indent="0" marL="0">
-              <a:buNone/>
-            </a:pPr>
-            <a:r>
-              <a:rPr lang="en-US" sz="1400" b="1" spc="800" kern="0" dirty="0">
-                <a:solidFill>
-                  <a:srgbClr val="1A2E3F"/>
-                </a:solidFill>
-                <a:latin typeface="DM Sans" pitchFamily="34" charset="0"/>
-                <a:ea typeface="DM Sans" pitchFamily="34" charset="-122"/>
-                <a:cs typeface="DM Sans" pitchFamily="34" charset="-120"/>
-              </a:rPr>
-              <a:t>PANGAKO KO</a:t>
-            </a:r>
-            <a:endParaRPr lang="en-US" sz="1400" dirty="0"/>
-          </a:p>
-        </p:txBody>
-      </p:sp>
-      <p:sp>
-        <p:nvSpPr>
-          <p:cNvPr id="5" name="Text 3"/>
-          <p:cNvSpPr/>
-          <p:nvPr/>
-        </p:nvSpPr>
-        <p:spPr>
-          <a:xfrm>
-            <a:off x="457200" y="1645920"/>
-            <a:ext cx="11247120" cy="731520"/>
-          </a:xfrm>
-          <a:prstGeom prst="rect">
-            <a:avLst/>
-          </a:prstGeom>
-          <a:noFill/>
-          <a:ln/>
-        </p:spPr>
-        <p:txBody>
-          <a:bodyPr wrap="square" rtlCol="0" anchor="ctr"/>
-          <a:lstStyle/>
-          <a:p>
-            <a:pPr algn="ctr" indent="0" marL="0">
-              <a:buNone/>
-            </a:pPr>
-            <a:r>
-              <a:rPr lang="en-US" sz="3400" b="1" dirty="0">
-                <a:solidFill>
-                  <a:srgbClr val="FFFFFF"/>
-                </a:solidFill>
-                <a:latin typeface="Playfair Display" pitchFamily="34" charset="0"/>
-                <a:ea typeface="Playfair Display" pitchFamily="34" charset="-122"/>
-                <a:cs typeface="Playfair Display" pitchFamily="34" charset="-120"/>
-              </a:rPr>
-              <a:t>Isang Pangako, Malakas Sabihin</a:t>
-            </a:r>
-            <a:endParaRPr lang="en-US" sz="3400" dirty="0"/>
-          </a:p>
-        </p:txBody>
-      </p:sp>
-      <p:sp>
-        <p:nvSpPr>
-          <p:cNvPr id="6" name="Text 4"/>
-          <p:cNvSpPr/>
-          <p:nvPr/>
-        </p:nvSpPr>
-        <p:spPr>
-          <a:xfrm>
-            <a:off x="457200" y="2560320"/>
-            <a:ext cx="11247120" cy="457200"/>
-          </a:xfrm>
-          <a:prstGeom prst="rect">
-            <a:avLst/>
-          </a:prstGeom>
-          <a:noFill/>
-          <a:ln/>
-        </p:spPr>
-        <p:txBody>
-          <a:bodyPr wrap="square" rtlCol="0" anchor="ctr"/>
-          <a:lstStyle/>
-          <a:p>
-            <a:pPr algn="ctr" indent="0" marL="0">
-              <a:buNone/>
-            </a:pPr>
-            <a:r>
-              <a:rPr lang="en-US" sz="2000" dirty="0">
-                <a:solidFill>
-                  <a:srgbClr val="FFFFFF">
-                    <a:alpha val="85000"/>
-                  </a:srgbClr>
-                </a:solidFill>
-                <a:latin typeface="DM Sans" pitchFamily="34" charset="0"/>
-                <a:ea typeface="DM Sans" pitchFamily="34" charset="-122"/>
-                <a:cs typeface="DM Sans" pitchFamily="34" charset="-120"/>
-              </a:rPr>
-              <a:t>Sa loob ng linggong ito, kapag dumating ang hirap…</a:t>
-            </a:r>
-            <a:endParaRPr lang="en-US" sz="2000" dirty="0"/>
-          </a:p>
-        </p:txBody>
-      </p:sp>
-      <p:sp>
-        <p:nvSpPr>
-          <p:cNvPr id="7" name="Text 5"/>
-          <p:cNvSpPr/>
-          <p:nvPr/>
-        </p:nvSpPr>
-        <p:spPr>
-          <a:xfrm>
-            <a:off x="457200" y="3291840"/>
-            <a:ext cx="11247120" cy="2194560"/>
-          </a:xfrm>
-          <a:prstGeom prst="rect">
-            <a:avLst/>
-          </a:prstGeom>
-          <a:noFill/>
-          <a:ln/>
-        </p:spPr>
-        <p:txBody>
-          <a:bodyPr wrap="square" rtlCol="0" anchor="ctr"/>
-          <a:lstStyle/>
-          <a:p>
-            <a:pPr algn="ctr" indent="0" marL="0">
-              <a:buNone/>
-            </a:pPr>
-            <a:r>
-              <a:rPr lang="en-US" sz="3600" b="1" i="1" dirty="0">
-                <a:solidFill>
-                  <a:srgbClr val="F0C64A"/>
-                </a:solidFill>
-                <a:latin typeface="Playfair Display" pitchFamily="34" charset="0"/>
-                <a:ea typeface="Playfair Display" pitchFamily="34" charset="-122"/>
-                <a:cs typeface="Playfair Display" pitchFamily="34" charset="-120"/>
-              </a:rPr>
-              <a:t>"Mananatili ako.</a:t>
-            </a:r>
-            <a:endParaRPr lang="en-US" sz="3600" dirty="0"/>
-          </a:p>
-          <a:p>
-            <a:pPr algn="ctr" indent="0" marL="0">
-              <a:buNone/>
-            </a:pPr>
-            <a:r>
-              <a:rPr lang="en-US" sz="3600" b="1" i="1" dirty="0">
-                <a:solidFill>
-                  <a:srgbClr val="F0C64A"/>
-                </a:solidFill>
-                <a:latin typeface="Playfair Display" pitchFamily="34" charset="0"/>
-                <a:ea typeface="Playfair Display" pitchFamily="34" charset="-122"/>
-                <a:cs typeface="Playfair Display" pitchFamily="34" charset="-120"/>
-              </a:rPr>
-              <a:t>Hindi ako tatakas.</a:t>
-            </a:r>
-            <a:endParaRPr lang="en-US" sz="3600" dirty="0"/>
-          </a:p>
-          <a:p>
-            <a:pPr algn="ctr" indent="0" marL="0">
-              <a:buNone/>
-            </a:pPr>
-            <a:r>
-              <a:rPr lang="en-US" sz="3600" b="1" i="1" dirty="0">
-                <a:solidFill>
-                  <a:srgbClr val="F0C64A"/>
-                </a:solidFill>
-                <a:latin typeface="Playfair Display" pitchFamily="34" charset="0"/>
-                <a:ea typeface="Playfair Display" pitchFamily="34" charset="-122"/>
-                <a:cs typeface="Playfair Display" pitchFamily="34" charset="-120"/>
-              </a:rPr>
-              <a:t>Sasamba ako sa Dios kahit sa dilim."</a:t>
-            </a:r>
-            <a:endParaRPr lang="en-US" sz="3600" dirty="0"/>
-          </a:p>
-        </p:txBody>
-      </p:sp>
-      <p:sp>
-        <p:nvSpPr>
-          <p:cNvPr id="8" name="Text 6"/>
-          <p:cNvSpPr/>
-          <p:nvPr/>
-        </p:nvSpPr>
-        <p:spPr>
-          <a:xfrm>
-            <a:off x="457200" y="5852160"/>
-            <a:ext cx="11247120" cy="365760"/>
-          </a:xfrm>
-          <a:prstGeom prst="rect">
-            <a:avLst/>
-          </a:prstGeom>
-          <a:noFill/>
-          <a:ln/>
-        </p:spPr>
-        <p:txBody>
-          <a:bodyPr wrap="square" rtlCol="0" anchor="ctr"/>
-          <a:lstStyle/>
-          <a:p>
-            <a:pPr algn="ctr" indent="0" marL="0">
-              <a:buNone/>
-            </a:pPr>
-            <a:r>
-              <a:rPr lang="en-US" sz="1400" i="1" dirty="0">
-                <a:solidFill>
-                  <a:srgbClr val="FFFFFF">
-                    <a:alpha val="65000"/>
-                  </a:srgbClr>
-                </a:solidFill>
-                <a:latin typeface="DM Sans" pitchFamily="34" charset="0"/>
-                <a:ea typeface="DM Sans" pitchFamily="34" charset="-122"/>
-                <a:cs typeface="DM Sans" pitchFamily="34" charset="-120"/>
-              </a:rPr>
-              <a:t>— Sasabihin sa LCG; isasaksi ng kapatid.</a:t>
-            </a:r>
-            <a:endParaRPr lang="en-US" sz="1400" dirty="0"/>
-          </a:p>
-        </p:txBody>
-      </p:sp>
-    </p:spTree>
-  </p:cSld>
-  <p:clrMapOvr>
-    <a:masterClrMapping/>
-  </p:clrMapOvr>
-</p:sld>
-</file>
-
-<file path=ppt/slides/slide16.xml><?xml version="1.0" encoding="utf-8"?>
-<p:sld xmlns:a="http://schemas.openxmlformats.org/drawingml/2006/main" xmlns:r="http://schemas.openxmlformats.org/officeDocument/2006/relationships" xmlns:p="http://schemas.openxmlformats.org/presentationml/2006/main">
-  <p:cSld name="Slide 16">
-    <p:bg>
-      <p:bgPr>
-        <a:solidFill>
-          <a:srgbClr val="1F4830"/>
-        </a:solidFill>
-      </p:bgPr>
-    </p:bg>
-    <p:spTree>
-      <p:nvGrpSpPr>
-        <p:cNvPr id="1" name=""/>
-        <p:cNvGrpSpPr/>
-        <p:nvPr/>
-      </p:nvGrpSpPr>
-      <p:grpSpPr>
-        <a:xfrm>
-          <a:off x="0" y="0"/>
-          <a:ext cx="0" cy="0"/>
-          <a:chOff x="0" y="0"/>
-          <a:chExt cx="0" cy="0"/>
-        </a:xfrm>
-      </p:grpSpPr>
-      <p:sp>
-        <p:nvSpPr>
-          <p:cNvPr id="2" name="Text 0"/>
-          <p:cNvSpPr/>
-          <p:nvPr/>
-        </p:nvSpPr>
-        <p:spPr>
-          <a:xfrm>
-            <a:off x="365760" y="228600"/>
-            <a:ext cx="5486400" cy="274320"/>
-          </a:xfrm>
-          <a:prstGeom prst="rect">
-            <a:avLst/>
-          </a:prstGeom>
-          <a:noFill/>
-          <a:ln/>
-        </p:spPr>
-        <p:txBody>
-          <a:bodyPr wrap="square" rtlCol="0" anchor="ctr"/>
-          <a:lstStyle/>
-          <a:p>
-            <a:pPr indent="0" marL="0">
-              <a:buNone/>
-            </a:pPr>
-            <a:r>
-              <a:rPr lang="en-US" sz="1000" b="1" spc="500" kern="0" dirty="0">
-                <a:solidFill>
-                  <a:srgbClr val="FFFFFF">
-                    <a:alpha val="50000"/>
-                  </a:srgbClr>
-                </a:solidFill>
-                <a:latin typeface="DM Sans" pitchFamily="34" charset="0"/>
-                <a:ea typeface="DM Sans" pitchFamily="34" charset="-122"/>
-                <a:cs typeface="DM Sans" pitchFamily="34" charset="-120"/>
-              </a:rPr>
-              <a:t>SUSUNOD NA HAKBANG</a:t>
-            </a:r>
-            <a:endParaRPr lang="en-US" sz="1000" dirty="0"/>
-          </a:p>
-        </p:txBody>
-      </p:sp>
-      <p:sp>
-        <p:nvSpPr>
-          <p:cNvPr id="3" name="Text 1"/>
-          <p:cNvSpPr/>
-          <p:nvPr/>
-        </p:nvSpPr>
-        <p:spPr>
-          <a:xfrm>
-            <a:off x="457200" y="914400"/>
-            <a:ext cx="11247120" cy="365760"/>
-          </a:xfrm>
-          <a:prstGeom prst="rect">
-            <a:avLst/>
-          </a:prstGeom>
-          <a:noFill/>
-          <a:ln/>
-        </p:spPr>
-        <p:txBody>
-          <a:bodyPr wrap="square" rtlCol="0" anchor="ctr"/>
-          <a:lstStyle/>
-          <a:p>
-            <a:pPr algn="ctr" indent="0" marL="0">
-              <a:buNone/>
-            </a:pPr>
-            <a:r>
-              <a:rPr lang="en-US" sz="1300" b="1" spc="800" kern="0" dirty="0">
-                <a:solidFill>
-                  <a:srgbClr val="F0C64A"/>
-                </a:solidFill>
-                <a:latin typeface="DM Sans" pitchFamily="34" charset="0"/>
-                <a:ea typeface="DM Sans" pitchFamily="34" charset="-122"/>
-                <a:cs typeface="DM Sans" pitchFamily="34" charset="-120"/>
-              </a:rPr>
-              <a:t>L6 PREVIEW</a:t>
-            </a:r>
-            <a:endParaRPr lang="en-US" sz="1300" dirty="0"/>
-          </a:p>
-        </p:txBody>
-      </p:sp>
-      <p:sp>
-        <p:nvSpPr>
-          <p:cNvPr id="4" name="Text 2"/>
-          <p:cNvSpPr/>
-          <p:nvPr/>
-        </p:nvSpPr>
-        <p:spPr>
-          <a:xfrm>
-            <a:off x="457200" y="1463040"/>
-            <a:ext cx="11247120" cy="822960"/>
-          </a:xfrm>
-          <a:prstGeom prst="rect">
-            <a:avLst/>
-          </a:prstGeom>
-          <a:noFill/>
-          <a:ln/>
-        </p:spPr>
-        <p:txBody>
-          <a:bodyPr wrap="square" rtlCol="0" anchor="ctr"/>
-          <a:lstStyle/>
-          <a:p>
-            <a:pPr algn="ctr" indent="0" marL="0">
-              <a:buNone/>
-            </a:pPr>
-            <a:r>
-              <a:rPr lang="en-US" sz="4000" b="1" dirty="0">
-                <a:solidFill>
-                  <a:srgbClr val="FFFFFF"/>
-                </a:solidFill>
-                <a:latin typeface="Playfair Display" pitchFamily="34" charset="0"/>
-                <a:ea typeface="Playfair Display" pitchFamily="34" charset="-122"/>
-                <a:cs typeface="Playfair Display" pitchFamily="34" charset="-120"/>
-              </a:rPr>
-              <a:t>Christian Fellowship</a:t>
-            </a:r>
-            <a:endParaRPr lang="en-US" sz="4000" dirty="0"/>
-          </a:p>
-        </p:txBody>
-      </p:sp>
-      <p:sp>
-        <p:nvSpPr>
-          <p:cNvPr id="5" name="Text 3"/>
-          <p:cNvSpPr/>
-          <p:nvPr/>
-        </p:nvSpPr>
-        <p:spPr>
-          <a:xfrm>
-            <a:off x="914400" y="2468880"/>
-            <a:ext cx="10332720" cy="731520"/>
-          </a:xfrm>
-          <a:prstGeom prst="rect">
-            <a:avLst/>
-          </a:prstGeom>
-          <a:noFill/>
-          <a:ln/>
-        </p:spPr>
-        <p:txBody>
-          <a:bodyPr wrap="square" rtlCol="0" anchor="ctr"/>
-          <a:lstStyle/>
-          <a:p>
-            <a:pPr algn="ctr" indent="0" marL="0">
-              <a:buNone/>
-            </a:pPr>
-            <a:r>
-              <a:rPr lang="en-US" sz="1800" i="1" dirty="0">
-                <a:solidFill>
-                  <a:srgbClr val="FFFFFF">
-                    <a:alpha val="90000"/>
-                  </a:srgbClr>
-                </a:solidFill>
-                <a:latin typeface="DM Sans" pitchFamily="34" charset="0"/>
-                <a:ea typeface="DM Sans" pitchFamily="34" charset="-122"/>
-                <a:cs typeface="DM Sans" pitchFamily="34" charset="-120"/>
-              </a:rPr>
-              <a:t>"Hindi mo kailangang harapin nang mag-isa ang hirap — may community ka."</a:t>
-            </a:r>
-            <a:endParaRPr lang="en-US" sz="1800" dirty="0"/>
-          </a:p>
-        </p:txBody>
-      </p:sp>
-      <p:sp>
-        <p:nvSpPr>
-          <p:cNvPr id="6" name="Text 4"/>
-          <p:cNvSpPr/>
-          <p:nvPr/>
-        </p:nvSpPr>
-        <p:spPr>
-          <a:xfrm>
-            <a:off x="457200" y="3657600"/>
-            <a:ext cx="11247120" cy="1828800"/>
-          </a:xfrm>
-          <a:prstGeom prst="rect">
-            <a:avLst/>
-          </a:prstGeom>
-          <a:noFill/>
-          <a:ln/>
-        </p:spPr>
-        <p:txBody>
-          <a:bodyPr wrap="square" rtlCol="0" anchor="ctr"/>
-          <a:lstStyle/>
-          <a:p>
-            <a:pPr algn="ctr" indent="0" marL="0">
-              <a:buNone/>
-            </a:pPr>
-            <a:r>
-              <a:rPr lang="en-US" sz="2800" i="1" dirty="0">
-                <a:solidFill>
-                  <a:srgbClr val="FFFFFF"/>
-                </a:solidFill>
-                <a:latin typeface="Playfair Display" pitchFamily="34" charset="0"/>
-                <a:ea typeface="Playfair Display" pitchFamily="34" charset="-122"/>
-                <a:cs typeface="Playfair Display" pitchFamily="34" charset="-120"/>
-              </a:rPr>
-              <a:t>"Sa sanlibutan ay magkakaroon kayo ng kapighatian;</a:t>
-            </a:r>
-            <a:endParaRPr lang="en-US" sz="2800" dirty="0"/>
-          </a:p>
-          <a:p>
-            <a:pPr algn="ctr" indent="0" marL="0">
-              <a:buNone/>
-            </a:pPr>
-            <a:r>
-              <a:rPr lang="en-US" sz="2800" i="1" dirty="0">
-                <a:solidFill>
-                  <a:srgbClr val="FFFFFF"/>
-                </a:solidFill>
-                <a:latin typeface="Playfair Display" pitchFamily="34" charset="0"/>
-                <a:ea typeface="Playfair Display" pitchFamily="34" charset="-122"/>
-                <a:cs typeface="Playfair Display" pitchFamily="34" charset="-120"/>
-              </a:rPr>
-              <a:t>ngunit laksan ninyo ang inyong loob, </a:t>
-            </a:r>
-            <a:endParaRPr lang="en-US" sz="2800" dirty="0"/>
-          </a:p>
-          <a:p>
-            <a:pPr algn="ctr" indent="0" marL="0">
-              <a:buNone/>
-            </a:pPr>
-            <a:r>
-              <a:rPr lang="en-US" sz="2800" b="1" i="1" dirty="0">
-                <a:solidFill>
-                  <a:srgbClr val="F0C64A"/>
-                </a:solidFill>
-                <a:latin typeface="Playfair Display" pitchFamily="34" charset="0"/>
-                <a:ea typeface="Playfair Display" pitchFamily="34" charset="-122"/>
-                <a:cs typeface="Playfair Display" pitchFamily="34" charset="-120"/>
-              </a:rPr>
-              <a:t>dinaig ko na ang sanlibutan</a:t>
-            </a:r>
-            <a:pPr algn="ctr" indent="0" marL="0">
-              <a:buNone/>
-            </a:pPr>
-            <a:r>
-              <a:rPr lang="en-US" sz="2800" i="1" dirty="0">
-                <a:solidFill>
-                  <a:srgbClr val="FFFFFF"/>
-                </a:solidFill>
-                <a:latin typeface="Playfair Display" pitchFamily="34" charset="0"/>
-                <a:ea typeface="Playfair Display" pitchFamily="34" charset="-122"/>
-                <a:cs typeface="Playfair Display" pitchFamily="34" charset="-120"/>
-              </a:rPr>
-              <a:t>."</a:t>
-            </a:r>
-            <a:endParaRPr lang="en-US" sz="2800" dirty="0"/>
-          </a:p>
-        </p:txBody>
-      </p:sp>
-      <p:sp>
-        <p:nvSpPr>
-          <p:cNvPr id="7" name="Text 5"/>
-          <p:cNvSpPr/>
-          <p:nvPr/>
-        </p:nvSpPr>
-        <p:spPr>
-          <a:xfrm>
-            <a:off x="457200" y="5577840"/>
-            <a:ext cx="11247120" cy="365760"/>
-          </a:xfrm>
-          <a:prstGeom prst="rect">
-            <a:avLst/>
-          </a:prstGeom>
-          <a:noFill/>
-          <a:ln/>
-        </p:spPr>
-        <p:txBody>
-          <a:bodyPr wrap="square" rtlCol="0" anchor="ctr"/>
-          <a:lstStyle/>
-          <a:p>
-            <a:pPr algn="ctr" indent="0" marL="0">
-              <a:buNone/>
-            </a:pPr>
-            <a:r>
-              <a:rPr lang="en-US" sz="1300" b="1" spc="800" kern="0" dirty="0">
-                <a:solidFill>
-                  <a:srgbClr val="D4A838"/>
-                </a:solidFill>
-                <a:latin typeface="DM Sans" pitchFamily="34" charset="0"/>
-                <a:ea typeface="DM Sans" pitchFamily="34" charset="-122"/>
-                <a:cs typeface="DM Sans" pitchFamily="34" charset="-120"/>
-              </a:rPr>
-              <a:t>— JUAN 16:33</a:t>
-            </a:r>
-            <a:endParaRPr lang="en-US" sz="1300" dirty="0"/>
-          </a:p>
-        </p:txBody>
-      </p:sp>
-      <p:sp>
-        <p:nvSpPr>
-          <p:cNvPr id="8" name="Text 6"/>
-          <p:cNvSpPr/>
-          <p:nvPr/>
-        </p:nvSpPr>
-        <p:spPr>
-          <a:xfrm>
-            <a:off x="457200" y="6263640"/>
-            <a:ext cx="11247120" cy="274320"/>
-          </a:xfrm>
-          <a:prstGeom prst="rect">
-            <a:avLst/>
-          </a:prstGeom>
-          <a:noFill/>
-          <a:ln/>
-        </p:spPr>
-        <p:txBody>
-          <a:bodyPr wrap="square" rtlCol="0" anchor="ctr"/>
-          <a:lstStyle/>
-          <a:p>
-            <a:pPr algn="ctr" indent="0" marL="0">
-              <a:buNone/>
-            </a:pPr>
-            <a:r>
-              <a:rPr lang="en-US" sz="1100" spc="400" kern="0" dirty="0">
-                <a:solidFill>
-                  <a:srgbClr val="FFFFFF">
-                    <a:alpha val="60000"/>
-                  </a:srgbClr>
-                </a:solidFill>
-                <a:latin typeface="DM Sans" pitchFamily="34" charset="0"/>
-                <a:ea typeface="DM Sans" pitchFamily="34" charset="-122"/>
-                <a:cs typeface="DM Sans" pitchFamily="34" charset="-120"/>
-              </a:rPr>
-              <a:t>Salamat, kapatid.</a:t>
-            </a:r>
-            <a:endParaRPr lang="en-US" sz="1100" dirty="0"/>
+          <a:ln>
+            <a:noFill/>
+          </a:ln>
+          <a:effectLst/>
+        </p:spPr>
+        <p:style>
+          <a:lnRef idx="1">
+            <a:schemeClr val="accent1"/>
+          </a:lnRef>
+          <a:fillRef idx="3">
+            <a:schemeClr val="accent1"/>
+          </a:fillRef>
+          <a:effectRef idx="2">
+            <a:schemeClr val="accent1"/>
+          </a:effectRef>
+          <a:fontRef idx="minor">
+            <a:schemeClr val="lt1"/>
+          </a:fontRef>
+        </p:style>
+        <p:txBody>
+          <a:bodyPr rtlCol="0" anchor="ctr" wrap="none" tIns="0" bIns="0"/>
+          <a:lstStyle/>
+          <a:p>
+            <a:pPr algn="ctr"/>
+            <a:r>
+              <a:rPr sz="2000" b="1">
+                <a:solidFill>
+                  <a:srgbClr val="141628"/>
+                </a:solidFill>
+                <a:latin typeface="Calibri"/>
+              </a:rPr>
+              <a:t>⏱ 4 min · ⌛50:00</a:t>
+            </a:r>
           </a:p>
         </p:txBody>
       </p:sp>
@@ -4960,6 +7047,1273 @@
           </a:p>
         </p:txBody>
       </p:sp>
+      <p:sp>
+        <p:nvSpPr>
+          <p:cNvPr id="7" name="Rounded Rectangle 6"/>
+          <p:cNvSpPr/>
+          <p:nvPr/>
+        </p:nvSpPr>
+        <p:spPr>
+          <a:xfrm>
+            <a:off x="8763000" y="137160"/>
+            <a:ext cx="3200400" cy="548640"/>
+          </a:xfrm>
+          <a:prstGeom prst="roundRect">
+            <a:avLst/>
+          </a:prstGeom>
+          <a:solidFill>
+            <a:srgbClr val="D4AF37"/>
+          </a:solidFill>
+          <a:ln>
+            <a:noFill/>
+          </a:ln>
+          <a:effectLst/>
+        </p:spPr>
+        <p:style>
+          <a:lnRef idx="1">
+            <a:schemeClr val="accent1"/>
+          </a:lnRef>
+          <a:fillRef idx="3">
+            <a:schemeClr val="accent1"/>
+          </a:fillRef>
+          <a:effectRef idx="2">
+            <a:schemeClr val="accent1"/>
+          </a:effectRef>
+          <a:fontRef idx="minor">
+            <a:schemeClr val="lt1"/>
+          </a:fontRef>
+        </p:style>
+        <p:txBody>
+          <a:bodyPr rtlCol="0" anchor="ctr" wrap="none" tIns="0" bIns="0"/>
+          <a:lstStyle/>
+          <a:p>
+            <a:pPr algn="ctr"/>
+            <a:r>
+              <a:rPr sz="2000" b="1">
+                <a:solidFill>
+                  <a:srgbClr val="141628"/>
+                </a:solidFill>
+                <a:latin typeface="Calibri"/>
+              </a:rPr>
+              <a:t>⏱ 1 min · ⌛1:00</a:t>
+            </a:r>
+          </a:p>
+        </p:txBody>
+      </p:sp>
+    </p:spTree>
+  </p:cSld>
+  <p:clrMapOvr>
+    <a:masterClrMapping/>
+  </p:clrMapOvr>
+</p:sld>
+</file>
+
+<file path=ppt/slides/slide20.xml><?xml version="1.0" encoding="utf-8"?>
+<p:sld xmlns:a="http://schemas.openxmlformats.org/drawingml/2006/main" xmlns:r="http://schemas.openxmlformats.org/officeDocument/2006/relationships" xmlns:p="http://schemas.openxmlformats.org/presentationml/2006/main">
+  <p:cSld name="Slide 14">
+    <p:bg>
+      <p:bgPr>
+        <a:solidFill>
+          <a:srgbClr val="FDF6E8"/>
+        </a:solidFill>
+      </p:bgPr>
+    </p:bg>
+    <p:spTree>
+      <p:nvGrpSpPr>
+        <p:cNvPr id="1" name=""/>
+        <p:cNvGrpSpPr/>
+        <p:nvPr/>
+      </p:nvGrpSpPr>
+      <p:grpSpPr>
+        <a:xfrm>
+          <a:off x="0" y="0"/>
+          <a:ext cx="0" cy="0"/>
+          <a:chOff x="0" y="0"/>
+          <a:chExt cx="0" cy="0"/>
+        </a:xfrm>
+      </p:grpSpPr>
+      <p:sp>
+        <p:nvSpPr>
+          <p:cNvPr id="2" name="Text 0"/>
+          <p:cNvSpPr/>
+          <p:nvPr/>
+        </p:nvSpPr>
+        <p:spPr>
+          <a:xfrm>
+            <a:off x="365760" y="274320"/>
+            <a:ext cx="5486400" cy="274320"/>
+          </a:xfrm>
+          <a:prstGeom prst="rect">
+            <a:avLst/>
+          </a:prstGeom>
+          <a:noFill/>
+          <a:ln/>
+        </p:spPr>
+        <p:txBody>
+          <a:bodyPr wrap="square" rtlCol="0" anchor="ctr"/>
+          <a:lstStyle/>
+          <a:p>
+            <a:pPr indent="0" marL="0">
+              <a:buNone/>
+            </a:pPr>
+            <a:r>
+              <a:rPr lang="en-US" sz="1100" b="1" spc="500" kern="0" dirty="0">
+                <a:solidFill>
+                  <a:srgbClr val="2A5C40"/>
+                </a:solidFill>
+                <a:latin typeface="DM Sans" pitchFamily="34" charset="0"/>
+                <a:ea typeface="DM Sans" pitchFamily="34" charset="-122"/>
+                <a:cs typeface="DM Sans" pitchFamily="34" charset="-120"/>
+              </a:rPr>
+              <a:t>DALHIN · CARRY HOME</a:t>
+            </a:r>
+            <a:endParaRPr lang="en-US" sz="1100" dirty="0"/>
+          </a:p>
+        </p:txBody>
+      </p:sp>
+      <p:sp>
+        <p:nvSpPr>
+          <p:cNvPr id="3" name="Text 1"/>
+          <p:cNvSpPr/>
+          <p:nvPr/>
+        </p:nvSpPr>
+        <p:spPr>
+          <a:xfrm>
+            <a:off x="457200" y="822960"/>
+            <a:ext cx="11247120" cy="822960"/>
+          </a:xfrm>
+          <a:prstGeom prst="rect">
+            <a:avLst/>
+          </a:prstGeom>
+          <a:noFill/>
+          <a:ln/>
+        </p:spPr>
+        <p:txBody>
+          <a:bodyPr wrap="square" rtlCol="0" anchor="ctr"/>
+          <a:lstStyle/>
+          <a:p>
+            <a:pPr algn="ctr" indent="0" marL="0">
+              <a:buNone/>
+            </a:pPr>
+            <a:r>
+              <a:rPr lang="en-US" sz="4000" b="1" dirty="0">
+                <a:solidFill>
+                  <a:srgbClr val="1A1612"/>
+                </a:solidFill>
+                <a:latin typeface="Playfair Display" pitchFamily="34" charset="0"/>
+                <a:ea typeface="Playfair Display" pitchFamily="34" charset="-122"/>
+                <a:cs typeface="Playfair Display" pitchFamily="34" charset="-120"/>
+              </a:rPr>
+              <a:t>Tatlong Bagay sa Linggong Ito</a:t>
+            </a:r>
+            <a:endParaRPr lang="en-US" sz="4000" dirty="0"/>
+          </a:p>
+        </p:txBody>
+      </p:sp>
+      <p:sp>
+        <p:nvSpPr>
+          <p:cNvPr id="4" name="Shape 2"/>
+          <p:cNvSpPr/>
+          <p:nvPr/>
+        </p:nvSpPr>
+        <p:spPr>
+          <a:xfrm>
+            <a:off x="731520" y="2304288"/>
+            <a:ext cx="164592" cy="164592"/>
+          </a:xfrm>
+          <a:prstGeom prst="ellipse">
+            <a:avLst/>
+          </a:prstGeom>
+          <a:solidFill>
+            <a:srgbClr val="2A5C40"/>
+          </a:solidFill>
+          <a:ln/>
+        </p:spPr>
+      </p:sp>
+      <p:sp>
+        <p:nvSpPr>
+          <p:cNvPr id="5" name="Text 3"/>
+          <p:cNvSpPr/>
+          <p:nvPr/>
+        </p:nvSpPr>
+        <p:spPr>
+          <a:xfrm>
+            <a:off x="1097280" y="2103120"/>
+            <a:ext cx="10058400" cy="731520"/>
+          </a:xfrm>
+          <a:prstGeom prst="rect">
+            <a:avLst/>
+          </a:prstGeom>
+          <a:noFill/>
+          <a:ln/>
+        </p:spPr>
+        <p:txBody>
+          <a:bodyPr wrap="square" rtlCol="0" anchor="ctr"/>
+          <a:lstStyle/>
+          <a:p>
+            <a:pPr indent="0" marL="0">
+              <a:buNone/>
+            </a:pPr>
+            <a:r>
+              <a:rPr lang="en-US" sz="1700" b="1" dirty="0">
+                <a:solidFill>
+                  <a:srgbClr val="1A1612"/>
+                </a:solidFill>
+                <a:latin typeface="DM Sans" pitchFamily="34" charset="0"/>
+                <a:ea typeface="DM Sans" pitchFamily="34" charset="-122"/>
+                <a:cs typeface="DM Sans" pitchFamily="34" charset="-120"/>
+              </a:rPr>
+              <a:t>3-Trial Watch Journal · </a:t>
+            </a:r>
+            <a:pPr indent="0" marL="0">
+              <a:buNone/>
+            </a:pPr>
+            <a:r>
+              <a:rPr lang="en-US" sz="1700" dirty="0">
+                <a:solidFill>
+                  <a:srgbClr val="1A1612"/>
+                </a:solidFill>
+                <a:latin typeface="DM Sans" pitchFamily="34" charset="0"/>
+                <a:ea typeface="DM Sans" pitchFamily="34" charset="-122"/>
+                <a:cs typeface="DM Sans" pitchFamily="34" charset="-120"/>
+              </a:rPr>
+              <a:t>Lunes-Linggo. Bawat araw: pangalanan ang hirap, tagain (T/T/T), pangalanan ang response, isulat ang verse.</a:t>
+            </a:r>
+            <a:endParaRPr lang="en-US" sz="1700" dirty="0"/>
+          </a:p>
+        </p:txBody>
+      </p:sp>
+      <p:sp>
+        <p:nvSpPr>
+          <p:cNvPr id="6" name="Shape 4"/>
+          <p:cNvSpPr/>
+          <p:nvPr/>
+        </p:nvSpPr>
+        <p:spPr>
+          <a:xfrm>
+            <a:off x="731520" y="3218688"/>
+            <a:ext cx="164592" cy="164592"/>
+          </a:xfrm>
+          <a:prstGeom prst="ellipse">
+            <a:avLst/>
+          </a:prstGeom>
+          <a:solidFill>
+            <a:srgbClr val="2A5C40"/>
+          </a:solidFill>
+          <a:ln/>
+        </p:spPr>
+      </p:sp>
+      <p:sp>
+        <p:nvSpPr>
+          <p:cNvPr id="7" name="Text 5"/>
+          <p:cNvSpPr/>
+          <p:nvPr/>
+        </p:nvSpPr>
+        <p:spPr>
+          <a:xfrm>
+            <a:off x="1097280" y="3017520"/>
+            <a:ext cx="10058400" cy="731520"/>
+          </a:xfrm>
+          <a:prstGeom prst="rect">
+            <a:avLst/>
+          </a:prstGeom>
+          <a:noFill/>
+          <a:ln/>
+        </p:spPr>
+        <p:txBody>
+          <a:bodyPr wrap="square" rtlCol="0" anchor="ctr"/>
+          <a:lstStyle/>
+          <a:p>
+            <a:pPr indent="0" marL="0">
+              <a:buNone/>
+            </a:pPr>
+            <a:r>
+              <a:rPr lang="en-US" sz="1700" b="1" dirty="0">
+                <a:solidFill>
+                  <a:srgbClr val="1A1612"/>
+                </a:solidFill>
+                <a:latin typeface="DM Sans" pitchFamily="34" charset="0"/>
+                <a:ea typeface="DM Sans" pitchFamily="34" charset="-122"/>
+                <a:cs typeface="DM Sans" pitchFamily="34" charset="-120"/>
+              </a:rPr>
+              <a:t>EOLO bridge · </a:t>
+            </a:r>
+            <a:pPr indent="0" marL="0">
+              <a:buNone/>
+            </a:pPr>
+            <a:r>
+              <a:rPr lang="en-US" sz="1700" dirty="0">
+                <a:solidFill>
+                  <a:srgbClr val="1A1612"/>
+                </a:solidFill>
+                <a:latin typeface="DM Sans" pitchFamily="34" charset="0"/>
+                <a:ea typeface="DM Sans" pitchFamily="34" charset="-122"/>
+                <a:cs typeface="DM Sans" pitchFamily="34" charset="-120"/>
+              </a:rPr>
+              <a:t>I-reach out ang taong isinulat mo sa Tugon — chat/text/tawag, sa loob ng 48 oras.</a:t>
+            </a:r>
+            <a:endParaRPr lang="en-US" sz="1700" dirty="0"/>
+          </a:p>
+        </p:txBody>
+      </p:sp>
+      <p:sp>
+        <p:nvSpPr>
+          <p:cNvPr id="8" name="Shape 6"/>
+          <p:cNvSpPr/>
+          <p:nvPr/>
+        </p:nvSpPr>
+        <p:spPr>
+          <a:xfrm>
+            <a:off x="731520" y="4133088"/>
+            <a:ext cx="164592" cy="164592"/>
+          </a:xfrm>
+          <a:prstGeom prst="ellipse">
+            <a:avLst/>
+          </a:prstGeom>
+          <a:solidFill>
+            <a:srgbClr val="2A5C40"/>
+          </a:solidFill>
+          <a:ln/>
+        </p:spPr>
+      </p:sp>
+      <p:sp>
+        <p:nvSpPr>
+          <p:cNvPr id="9" name="Text 7"/>
+          <p:cNvSpPr/>
+          <p:nvPr/>
+        </p:nvSpPr>
+        <p:spPr>
+          <a:xfrm>
+            <a:off x="1097280" y="3931920"/>
+            <a:ext cx="10058400" cy="731520"/>
+          </a:xfrm>
+          <a:prstGeom prst="rect">
+            <a:avLst/>
+          </a:prstGeom>
+          <a:noFill/>
+          <a:ln/>
+        </p:spPr>
+        <p:txBody>
+          <a:bodyPr wrap="square" rtlCol="0" anchor="ctr"/>
+          <a:lstStyle/>
+          <a:p>
+            <a:pPr indent="0" marL="0">
+              <a:buNone/>
+            </a:pPr>
+            <a:r>
+              <a:rPr lang="en-US" sz="1700" b="1" dirty="0">
+                <a:solidFill>
+                  <a:srgbClr val="1A1612"/>
+                </a:solidFill>
+                <a:latin typeface="DM Sans" pitchFamily="34" charset="0"/>
+                <a:ea typeface="DM Sans" pitchFamily="34" charset="-122"/>
+                <a:cs typeface="DM Sans" pitchFamily="34" charset="-120"/>
+              </a:rPr>
+              <a:t>Kabisaduhin · </a:t>
+            </a:r>
+            <a:pPr indent="0" marL="0">
+              <a:buNone/>
+            </a:pPr>
+            <a:r>
+              <a:rPr lang="en-US" sz="1700" dirty="0">
+                <a:solidFill>
+                  <a:srgbClr val="1A1612"/>
+                </a:solidFill>
+                <a:latin typeface="DM Sans" pitchFamily="34" charset="0"/>
+                <a:ea typeface="DM Sans" pitchFamily="34" charset="-122"/>
+                <a:cs typeface="DM Sans" pitchFamily="34" charset="-120"/>
+              </a:rPr>
+              <a:t>Juan 16:33 bago ang susunod na lesson.</a:t>
+            </a:r>
+            <a:endParaRPr lang="en-US" sz="1700" dirty="0"/>
+          </a:p>
+        </p:txBody>
+      </p:sp>
+      <p:sp>
+        <p:nvSpPr>
+          <p:cNvPr id="10" name="Text 8"/>
+          <p:cNvSpPr/>
+          <p:nvPr/>
+        </p:nvSpPr>
+        <p:spPr>
+          <a:xfrm>
+            <a:off x="457200" y="5394960"/>
+            <a:ext cx="11247120" cy="548640"/>
+          </a:xfrm>
+          <a:prstGeom prst="rect">
+            <a:avLst/>
+          </a:prstGeom>
+          <a:noFill/>
+          <a:ln/>
+        </p:spPr>
+        <p:txBody>
+          <a:bodyPr wrap="square" rtlCol="0" anchor="ctr"/>
+          <a:lstStyle/>
+          <a:p>
+            <a:pPr algn="ctr" indent="0" marL="0">
+              <a:buNone/>
+            </a:pPr>
+            <a:r>
+              <a:rPr lang="en-US" sz="1800" b="1" i="1" dirty="0">
+                <a:solidFill>
+                  <a:srgbClr val="9A7820"/>
+                </a:solidFill>
+                <a:latin typeface="Playfair Display" pitchFamily="34" charset="0"/>
+                <a:ea typeface="Playfair Display" pitchFamily="34" charset="-122"/>
+                <a:cs typeface="Playfair Display" pitchFamily="34" charset="-120"/>
+              </a:rPr>
+              <a:t>Ang Pagtitiis ay nasa pag-stay — sa hirap mo, at sa hirap ng iba.</a:t>
+            </a:r>
+            <a:endParaRPr lang="en-US" sz="1800" dirty="0"/>
+          </a:p>
+        </p:txBody>
+      </p:sp>
+      <p:sp>
+        <p:nvSpPr>
+          <p:cNvPr id="11" name="Rounded Rectangle 10"/>
+          <p:cNvSpPr/>
+          <p:nvPr/>
+        </p:nvSpPr>
+        <p:spPr>
+          <a:xfrm>
+            <a:off x="8763000" y="137160"/>
+            <a:ext cx="3200400" cy="548640"/>
+          </a:xfrm>
+          <a:prstGeom prst="roundRect">
+            <a:avLst/>
+          </a:prstGeom>
+          <a:solidFill>
+            <a:srgbClr val="D4AF37"/>
+          </a:solidFill>
+          <a:ln>
+            <a:noFill/>
+          </a:ln>
+          <a:effectLst/>
+        </p:spPr>
+        <p:style>
+          <a:lnRef idx="1">
+            <a:schemeClr val="accent1"/>
+          </a:lnRef>
+          <a:fillRef idx="3">
+            <a:schemeClr val="accent1"/>
+          </a:fillRef>
+          <a:effectRef idx="2">
+            <a:schemeClr val="accent1"/>
+          </a:effectRef>
+          <a:fontRef idx="minor">
+            <a:schemeClr val="lt1"/>
+          </a:fontRef>
+        </p:style>
+        <p:txBody>
+          <a:bodyPr rtlCol="0" anchor="ctr" wrap="none" tIns="0" bIns="0"/>
+          <a:lstStyle/>
+          <a:p>
+            <a:pPr algn="ctr"/>
+            <a:r>
+              <a:rPr sz="2000" b="1">
+                <a:solidFill>
+                  <a:srgbClr val="141628"/>
+                </a:solidFill>
+                <a:latin typeface="Calibri"/>
+              </a:rPr>
+              <a:t>⏱ 6 min · ⌛56:00</a:t>
+            </a:r>
+          </a:p>
+        </p:txBody>
+      </p:sp>
+    </p:spTree>
+  </p:cSld>
+  <p:clrMapOvr>
+    <a:masterClrMapping/>
+  </p:clrMapOvr>
+</p:sld>
+</file>
+
+<file path=ppt/slides/slide21.xml><?xml version="1.0" encoding="utf-8"?>
+<p:sld xmlns:a="http://schemas.openxmlformats.org/drawingml/2006/main" xmlns:r="http://schemas.openxmlformats.org/officeDocument/2006/relationships" xmlns:p="http://schemas.openxmlformats.org/presentationml/2006/main">
+  <p:cSld name="Slide 15">
+    <p:bg>
+      <p:bgPr>
+        <a:solidFill>
+          <a:srgbClr val="1A2E3F"/>
+        </a:solidFill>
+      </p:bgPr>
+    </p:bg>
+    <p:spTree>
+      <p:nvGrpSpPr>
+        <p:cNvPr id="1" name=""/>
+        <p:cNvGrpSpPr/>
+        <p:nvPr/>
+      </p:nvGrpSpPr>
+      <p:grpSpPr>
+        <a:xfrm>
+          <a:off x="0" y="0"/>
+          <a:ext cx="0" cy="0"/>
+          <a:chOff x="0" y="0"/>
+          <a:chExt cx="0" cy="0"/>
+        </a:xfrm>
+      </p:grpSpPr>
+      <p:sp>
+        <p:nvSpPr>
+          <p:cNvPr id="2" name="Text 0"/>
+          <p:cNvSpPr/>
+          <p:nvPr/>
+        </p:nvSpPr>
+        <p:spPr>
+          <a:xfrm>
+            <a:off x="365760" y="228600"/>
+            <a:ext cx="5486400" cy="274320"/>
+          </a:xfrm>
+          <a:prstGeom prst="rect">
+            <a:avLst/>
+          </a:prstGeom>
+          <a:noFill/>
+          <a:ln/>
+        </p:spPr>
+        <p:txBody>
+          <a:bodyPr wrap="square" rtlCol="0" anchor="ctr"/>
+          <a:lstStyle/>
+          <a:p>
+            <a:pPr indent="0" marL="0">
+              <a:buNone/>
+            </a:pPr>
+            <a:r>
+              <a:rPr lang="en-US" sz="1000" b="1" spc="500" kern="0" dirty="0">
+                <a:solidFill>
+                  <a:srgbClr val="FFFFFF">
+                    <a:alpha val="50000"/>
+                  </a:srgbClr>
+                </a:solidFill>
+                <a:latin typeface="DM Sans" pitchFamily="34" charset="0"/>
+                <a:ea typeface="DM Sans" pitchFamily="34" charset="-122"/>
+                <a:cs typeface="DM Sans" pitchFamily="34" charset="-120"/>
+              </a:rPr>
+              <a:t>DALHIN · PANGAKO KO</a:t>
+            </a:r>
+            <a:endParaRPr lang="en-US" sz="1000" dirty="0"/>
+          </a:p>
+        </p:txBody>
+      </p:sp>
+      <p:sp>
+        <p:nvSpPr>
+          <p:cNvPr id="3" name="Shape 1"/>
+          <p:cNvSpPr/>
+          <p:nvPr/>
+        </p:nvSpPr>
+        <p:spPr>
+          <a:xfrm>
+            <a:off x="4572000" y="914400"/>
+            <a:ext cx="3017520" cy="457200"/>
+          </a:xfrm>
+          <a:prstGeom prst="roundRect">
+            <a:avLst>
+              <a:gd name="adj" fmla="val 50000"/>
+            </a:avLst>
+          </a:prstGeom>
+          <a:solidFill>
+            <a:srgbClr val="D4A838"/>
+          </a:solidFill>
+          <a:ln/>
+        </p:spPr>
+      </p:sp>
+      <p:sp>
+        <p:nvSpPr>
+          <p:cNvPr id="4" name="Text 2"/>
+          <p:cNvSpPr/>
+          <p:nvPr/>
+        </p:nvSpPr>
+        <p:spPr>
+          <a:xfrm>
+            <a:off x="4572000" y="960120"/>
+            <a:ext cx="3017520" cy="365760"/>
+          </a:xfrm>
+          <a:prstGeom prst="rect">
+            <a:avLst/>
+          </a:prstGeom>
+          <a:noFill/>
+          <a:ln/>
+        </p:spPr>
+        <p:txBody>
+          <a:bodyPr wrap="square" rtlCol="0" anchor="ctr"/>
+          <a:lstStyle/>
+          <a:p>
+            <a:pPr algn="ctr" indent="0" marL="0">
+              <a:buNone/>
+            </a:pPr>
+            <a:r>
+              <a:rPr lang="en-US" sz="1400" b="1" spc="800" kern="0" dirty="0">
+                <a:solidFill>
+                  <a:srgbClr val="1A2E3F"/>
+                </a:solidFill>
+                <a:latin typeface="DM Sans" pitchFamily="34" charset="0"/>
+                <a:ea typeface="DM Sans" pitchFamily="34" charset="-122"/>
+                <a:cs typeface="DM Sans" pitchFamily="34" charset="-120"/>
+              </a:rPr>
+              <a:t>PANGAKO KO</a:t>
+            </a:r>
+            <a:endParaRPr lang="en-US" sz="1400" dirty="0"/>
+          </a:p>
+        </p:txBody>
+      </p:sp>
+      <p:sp>
+        <p:nvSpPr>
+          <p:cNvPr id="5" name="Text 3"/>
+          <p:cNvSpPr/>
+          <p:nvPr/>
+        </p:nvSpPr>
+        <p:spPr>
+          <a:xfrm>
+            <a:off x="457200" y="1645920"/>
+            <a:ext cx="11247120" cy="731520"/>
+          </a:xfrm>
+          <a:prstGeom prst="rect">
+            <a:avLst/>
+          </a:prstGeom>
+          <a:noFill/>
+          <a:ln/>
+        </p:spPr>
+        <p:txBody>
+          <a:bodyPr wrap="square" rtlCol="0" anchor="ctr"/>
+          <a:lstStyle/>
+          <a:p>
+            <a:pPr algn="ctr" indent="0" marL="0">
+              <a:buNone/>
+            </a:pPr>
+            <a:r>
+              <a:rPr lang="en-US" sz="3400" b="1" dirty="0">
+                <a:solidFill>
+                  <a:srgbClr val="FFFFFF"/>
+                </a:solidFill>
+                <a:latin typeface="Playfair Display" pitchFamily="34" charset="0"/>
+                <a:ea typeface="Playfair Display" pitchFamily="34" charset="-122"/>
+                <a:cs typeface="Playfair Display" pitchFamily="34" charset="-120"/>
+              </a:rPr>
+              <a:t>Isang Pangako, Malakas Sabihin</a:t>
+            </a:r>
+            <a:endParaRPr lang="en-US" sz="3400" dirty="0"/>
+          </a:p>
+        </p:txBody>
+      </p:sp>
+      <p:sp>
+        <p:nvSpPr>
+          <p:cNvPr id="6" name="Text 4"/>
+          <p:cNvSpPr/>
+          <p:nvPr/>
+        </p:nvSpPr>
+        <p:spPr>
+          <a:xfrm>
+            <a:off x="457200" y="2560320"/>
+            <a:ext cx="11247120" cy="457200"/>
+          </a:xfrm>
+          <a:prstGeom prst="rect">
+            <a:avLst/>
+          </a:prstGeom>
+          <a:noFill/>
+          <a:ln/>
+        </p:spPr>
+        <p:txBody>
+          <a:bodyPr wrap="square" rtlCol="0" anchor="ctr"/>
+          <a:lstStyle/>
+          <a:p>
+            <a:pPr algn="ctr" indent="0" marL="0">
+              <a:buNone/>
+            </a:pPr>
+            <a:r>
+              <a:rPr lang="en-US" sz="2000" dirty="0">
+                <a:solidFill>
+                  <a:srgbClr val="FFFFFF">
+                    <a:alpha val="85000"/>
+                  </a:srgbClr>
+                </a:solidFill>
+                <a:latin typeface="DM Sans" pitchFamily="34" charset="0"/>
+                <a:ea typeface="DM Sans" pitchFamily="34" charset="-122"/>
+                <a:cs typeface="DM Sans" pitchFamily="34" charset="-120"/>
+              </a:rPr>
+              <a:t>Sa loob ng linggong ito, kapag dumating ang hirap…</a:t>
+            </a:r>
+            <a:endParaRPr lang="en-US" sz="2000" dirty="0"/>
+          </a:p>
+        </p:txBody>
+      </p:sp>
+      <p:sp>
+        <p:nvSpPr>
+          <p:cNvPr id="7" name="Text 5"/>
+          <p:cNvSpPr/>
+          <p:nvPr/>
+        </p:nvSpPr>
+        <p:spPr>
+          <a:xfrm>
+            <a:off x="457200" y="3291840"/>
+            <a:ext cx="11247120" cy="2194560"/>
+          </a:xfrm>
+          <a:prstGeom prst="rect">
+            <a:avLst/>
+          </a:prstGeom>
+          <a:noFill/>
+          <a:ln/>
+        </p:spPr>
+        <p:txBody>
+          <a:bodyPr wrap="square" rtlCol="0" anchor="ctr"/>
+          <a:lstStyle/>
+          <a:p>
+            <a:pPr algn="ctr" indent="0" marL="0">
+              <a:buNone/>
+            </a:pPr>
+            <a:r>
+              <a:rPr lang="en-US" sz="3600" b="1" i="1" dirty="0">
+                <a:solidFill>
+                  <a:srgbClr val="F0C64A"/>
+                </a:solidFill>
+                <a:latin typeface="Playfair Display" pitchFamily="34" charset="0"/>
+                <a:ea typeface="Playfair Display" pitchFamily="34" charset="-122"/>
+                <a:cs typeface="Playfair Display" pitchFamily="34" charset="-120"/>
+              </a:rPr>
+              <a:t>"Mananatili ako.</a:t>
+            </a:r>
+            <a:endParaRPr lang="en-US" sz="3600" dirty="0"/>
+          </a:p>
+          <a:p>
+            <a:pPr algn="ctr" indent="0" marL="0">
+              <a:buNone/>
+            </a:pPr>
+            <a:r>
+              <a:rPr lang="en-US" sz="3600" b="1" i="1" dirty="0">
+                <a:solidFill>
+                  <a:srgbClr val="F0C64A"/>
+                </a:solidFill>
+                <a:latin typeface="Playfair Display" pitchFamily="34" charset="0"/>
+                <a:ea typeface="Playfair Display" pitchFamily="34" charset="-122"/>
+                <a:cs typeface="Playfair Display" pitchFamily="34" charset="-120"/>
+              </a:rPr>
+              <a:t>Hindi ako tatakas.</a:t>
+            </a:r>
+            <a:endParaRPr lang="en-US" sz="3600" dirty="0"/>
+          </a:p>
+          <a:p>
+            <a:pPr algn="ctr" indent="0" marL="0">
+              <a:buNone/>
+            </a:pPr>
+            <a:r>
+              <a:rPr lang="en-US" sz="3600" b="1" i="1" dirty="0">
+                <a:solidFill>
+                  <a:srgbClr val="F0C64A"/>
+                </a:solidFill>
+                <a:latin typeface="Playfair Display" pitchFamily="34" charset="0"/>
+                <a:ea typeface="Playfair Display" pitchFamily="34" charset="-122"/>
+                <a:cs typeface="Playfair Display" pitchFamily="34" charset="-120"/>
+              </a:rPr>
+              <a:t>Sasamba ako sa Dios kahit sa dilim."</a:t>
+            </a:r>
+            <a:endParaRPr lang="en-US" sz="3600" dirty="0"/>
+          </a:p>
+        </p:txBody>
+      </p:sp>
+      <p:sp>
+        <p:nvSpPr>
+          <p:cNvPr id="8" name="Text 6"/>
+          <p:cNvSpPr/>
+          <p:nvPr/>
+        </p:nvSpPr>
+        <p:spPr>
+          <a:xfrm>
+            <a:off x="457200" y="5852160"/>
+            <a:ext cx="11247120" cy="365760"/>
+          </a:xfrm>
+          <a:prstGeom prst="rect">
+            <a:avLst/>
+          </a:prstGeom>
+          <a:noFill/>
+          <a:ln/>
+        </p:spPr>
+        <p:txBody>
+          <a:bodyPr wrap="square" rtlCol="0" anchor="ctr"/>
+          <a:lstStyle/>
+          <a:p>
+            <a:pPr algn="ctr" indent="0" marL="0">
+              <a:buNone/>
+            </a:pPr>
+            <a:r>
+              <a:rPr lang="en-US" sz="1400" i="1" dirty="0">
+                <a:solidFill>
+                  <a:srgbClr val="FFFFFF">
+                    <a:alpha val="65000"/>
+                  </a:srgbClr>
+                </a:solidFill>
+                <a:latin typeface="DM Sans" pitchFamily="34" charset="0"/>
+                <a:ea typeface="DM Sans" pitchFamily="34" charset="-122"/>
+                <a:cs typeface="DM Sans" pitchFamily="34" charset="-120"/>
+              </a:rPr>
+              <a:t>— Sasabihin sa LCG; isasaksi ng kapatid.</a:t>
+            </a:r>
+            <a:endParaRPr lang="en-US" sz="1400" dirty="0"/>
+          </a:p>
+        </p:txBody>
+      </p:sp>
+      <p:sp>
+        <p:nvSpPr>
+          <p:cNvPr id="9" name="Rounded Rectangle 8"/>
+          <p:cNvSpPr/>
+          <p:nvPr/>
+        </p:nvSpPr>
+        <p:spPr>
+          <a:xfrm>
+            <a:off x="8763000" y="137160"/>
+            <a:ext cx="3200400" cy="548640"/>
+          </a:xfrm>
+          <a:prstGeom prst="roundRect">
+            <a:avLst/>
+          </a:prstGeom>
+          <a:solidFill>
+            <a:srgbClr val="D4AF37"/>
+          </a:solidFill>
+          <a:ln>
+            <a:noFill/>
+          </a:ln>
+          <a:effectLst/>
+        </p:spPr>
+        <p:style>
+          <a:lnRef idx="1">
+            <a:schemeClr val="accent1"/>
+          </a:lnRef>
+          <a:fillRef idx="3">
+            <a:schemeClr val="accent1"/>
+          </a:fillRef>
+          <a:effectRef idx="2">
+            <a:schemeClr val="accent1"/>
+          </a:effectRef>
+          <a:fontRef idx="minor">
+            <a:schemeClr val="lt1"/>
+          </a:fontRef>
+        </p:style>
+        <p:txBody>
+          <a:bodyPr rtlCol="0" anchor="ctr" wrap="none" tIns="0" bIns="0"/>
+          <a:lstStyle/>
+          <a:p>
+            <a:pPr algn="ctr"/>
+            <a:r>
+              <a:rPr sz="2000" b="1">
+                <a:solidFill>
+                  <a:srgbClr val="141628"/>
+                </a:solidFill>
+                <a:latin typeface="Calibri"/>
+              </a:rPr>
+              <a:t>⏱ 3 min · ⌛59:00</a:t>
+            </a:r>
+          </a:p>
+        </p:txBody>
+      </p:sp>
+    </p:spTree>
+  </p:cSld>
+  <p:clrMapOvr>
+    <a:masterClrMapping/>
+  </p:clrMapOvr>
+</p:sld>
+</file>
+
+<file path=ppt/slides/slide22.xml><?xml version="1.0" encoding="utf-8"?>
+<p:sld xmlns:a="http://schemas.openxmlformats.org/drawingml/2006/main" xmlns:r="http://schemas.openxmlformats.org/officeDocument/2006/relationships" xmlns:p="http://schemas.openxmlformats.org/presentationml/2006/main">
+  <p:cSld name="Slide 16">
+    <p:bg>
+      <p:bgPr>
+        <a:solidFill>
+          <a:srgbClr val="1F4830"/>
+        </a:solidFill>
+      </p:bgPr>
+    </p:bg>
+    <p:spTree>
+      <p:nvGrpSpPr>
+        <p:cNvPr id="1" name=""/>
+        <p:cNvGrpSpPr/>
+        <p:nvPr/>
+      </p:nvGrpSpPr>
+      <p:grpSpPr>
+        <a:xfrm>
+          <a:off x="0" y="0"/>
+          <a:ext cx="0" cy="0"/>
+          <a:chOff x="0" y="0"/>
+          <a:chExt cx="0" cy="0"/>
+        </a:xfrm>
+      </p:grpSpPr>
+      <p:sp>
+        <p:nvSpPr>
+          <p:cNvPr id="2" name="Text 0"/>
+          <p:cNvSpPr/>
+          <p:nvPr/>
+        </p:nvSpPr>
+        <p:spPr>
+          <a:xfrm>
+            <a:off x="365760" y="228600"/>
+            <a:ext cx="5486400" cy="274320"/>
+          </a:xfrm>
+          <a:prstGeom prst="rect">
+            <a:avLst/>
+          </a:prstGeom>
+          <a:noFill/>
+          <a:ln/>
+        </p:spPr>
+        <p:txBody>
+          <a:bodyPr wrap="square" rtlCol="0" anchor="ctr"/>
+          <a:lstStyle/>
+          <a:p>
+            <a:pPr indent="0" marL="0">
+              <a:buNone/>
+            </a:pPr>
+            <a:r>
+              <a:rPr lang="en-US" sz="1000" b="1" spc="500" kern="0" dirty="0">
+                <a:solidFill>
+                  <a:srgbClr val="FFFFFF">
+                    <a:alpha val="50000"/>
+                  </a:srgbClr>
+                </a:solidFill>
+                <a:latin typeface="DM Sans" pitchFamily="34" charset="0"/>
+                <a:ea typeface="DM Sans" pitchFamily="34" charset="-122"/>
+                <a:cs typeface="DM Sans" pitchFamily="34" charset="-120"/>
+              </a:rPr>
+              <a:t>SUSUNOD NA HAKBANG</a:t>
+            </a:r>
+            <a:endParaRPr lang="en-US" sz="1000" dirty="0"/>
+          </a:p>
+        </p:txBody>
+      </p:sp>
+      <p:sp>
+        <p:nvSpPr>
+          <p:cNvPr id="3" name="Text 1"/>
+          <p:cNvSpPr/>
+          <p:nvPr/>
+        </p:nvSpPr>
+        <p:spPr>
+          <a:xfrm>
+            <a:off x="457200" y="914400"/>
+            <a:ext cx="11247120" cy="365760"/>
+          </a:xfrm>
+          <a:prstGeom prst="rect">
+            <a:avLst/>
+          </a:prstGeom>
+          <a:noFill/>
+          <a:ln/>
+        </p:spPr>
+        <p:txBody>
+          <a:bodyPr wrap="square" rtlCol="0" anchor="ctr"/>
+          <a:lstStyle/>
+          <a:p>
+            <a:pPr algn="ctr" indent="0" marL="0">
+              <a:buNone/>
+            </a:pPr>
+            <a:r>
+              <a:rPr lang="en-US" sz="1300" b="1" spc="800" kern="0" dirty="0">
+                <a:solidFill>
+                  <a:srgbClr val="F0C64A"/>
+                </a:solidFill>
+                <a:latin typeface="DM Sans" pitchFamily="34" charset="0"/>
+                <a:ea typeface="DM Sans" pitchFamily="34" charset="-122"/>
+                <a:cs typeface="DM Sans" pitchFamily="34" charset="-120"/>
+              </a:rPr>
+              <a:t>L6 PREVIEW</a:t>
+            </a:r>
+            <a:endParaRPr lang="en-US" sz="1300" dirty="0"/>
+          </a:p>
+        </p:txBody>
+      </p:sp>
+      <p:sp>
+        <p:nvSpPr>
+          <p:cNvPr id="4" name="Text 2"/>
+          <p:cNvSpPr/>
+          <p:nvPr/>
+        </p:nvSpPr>
+        <p:spPr>
+          <a:xfrm>
+            <a:off x="457200" y="1463040"/>
+            <a:ext cx="11247120" cy="822960"/>
+          </a:xfrm>
+          <a:prstGeom prst="rect">
+            <a:avLst/>
+          </a:prstGeom>
+          <a:noFill/>
+          <a:ln/>
+        </p:spPr>
+        <p:txBody>
+          <a:bodyPr wrap="square" rtlCol="0" anchor="ctr"/>
+          <a:lstStyle/>
+          <a:p>
+            <a:pPr algn="ctr" indent="0" marL="0">
+              <a:buNone/>
+            </a:pPr>
+            <a:r>
+              <a:rPr lang="en-US" sz="4000" b="1" dirty="0">
+                <a:solidFill>
+                  <a:srgbClr val="FFFFFF"/>
+                </a:solidFill>
+                <a:latin typeface="Playfair Display" pitchFamily="34" charset="0"/>
+                <a:ea typeface="Playfair Display" pitchFamily="34" charset="-122"/>
+                <a:cs typeface="Playfair Display" pitchFamily="34" charset="-120"/>
+              </a:rPr>
+              <a:t>Christian Fellowship</a:t>
+            </a:r>
+            <a:endParaRPr lang="en-US" sz="4000" dirty="0"/>
+          </a:p>
+        </p:txBody>
+      </p:sp>
+      <p:sp>
+        <p:nvSpPr>
+          <p:cNvPr id="5" name="Text 3"/>
+          <p:cNvSpPr/>
+          <p:nvPr/>
+        </p:nvSpPr>
+        <p:spPr>
+          <a:xfrm>
+            <a:off x="914400" y="2468880"/>
+            <a:ext cx="10332720" cy="731520"/>
+          </a:xfrm>
+          <a:prstGeom prst="rect">
+            <a:avLst/>
+          </a:prstGeom>
+          <a:noFill/>
+          <a:ln/>
+        </p:spPr>
+        <p:txBody>
+          <a:bodyPr wrap="square" rtlCol="0" anchor="ctr"/>
+          <a:lstStyle/>
+          <a:p>
+            <a:pPr algn="ctr" indent="0" marL="0">
+              <a:buNone/>
+            </a:pPr>
+            <a:r>
+              <a:rPr lang="en-US" sz="1800" i="1" dirty="0">
+                <a:solidFill>
+                  <a:srgbClr val="FFFFFF">
+                    <a:alpha val="90000"/>
+                  </a:srgbClr>
+                </a:solidFill>
+                <a:latin typeface="DM Sans" pitchFamily="34" charset="0"/>
+                <a:ea typeface="DM Sans" pitchFamily="34" charset="-122"/>
+                <a:cs typeface="DM Sans" pitchFamily="34" charset="-120"/>
+              </a:rPr>
+              <a:t>"Hindi mo kailangang harapin nang mag-isa ang hirap — may community ka."</a:t>
+            </a:r>
+            <a:endParaRPr lang="en-US" sz="1800" dirty="0"/>
+          </a:p>
+        </p:txBody>
+      </p:sp>
+      <p:sp>
+        <p:nvSpPr>
+          <p:cNvPr id="6" name="Text 4"/>
+          <p:cNvSpPr/>
+          <p:nvPr/>
+        </p:nvSpPr>
+        <p:spPr>
+          <a:xfrm>
+            <a:off x="457200" y="3657600"/>
+            <a:ext cx="11247120" cy="1828800"/>
+          </a:xfrm>
+          <a:prstGeom prst="rect">
+            <a:avLst/>
+          </a:prstGeom>
+          <a:noFill/>
+          <a:ln/>
+        </p:spPr>
+        <p:txBody>
+          <a:bodyPr wrap="square" rtlCol="0" anchor="ctr"/>
+          <a:lstStyle/>
+          <a:p>
+            <a:pPr algn="ctr" indent="0" marL="0">
+              <a:buNone/>
+            </a:pPr>
+            <a:r>
+              <a:rPr lang="en-US" sz="2800" i="1" dirty="0">
+                <a:solidFill>
+                  <a:srgbClr val="FFFFFF"/>
+                </a:solidFill>
+                <a:latin typeface="Playfair Display" pitchFamily="34" charset="0"/>
+                <a:ea typeface="Playfair Display" pitchFamily="34" charset="-122"/>
+                <a:cs typeface="Playfair Display" pitchFamily="34" charset="-120"/>
+              </a:rPr>
+              <a:t>"Sa sanlibutan ay magkakaroon kayo ng kapighatian;</a:t>
+            </a:r>
+            <a:endParaRPr lang="en-US" sz="2800" dirty="0"/>
+          </a:p>
+          <a:p>
+            <a:pPr algn="ctr" indent="0" marL="0">
+              <a:buNone/>
+            </a:pPr>
+            <a:r>
+              <a:rPr lang="en-US" sz="2800" i="1" dirty="0">
+                <a:solidFill>
+                  <a:srgbClr val="FFFFFF"/>
+                </a:solidFill>
+                <a:latin typeface="Playfair Display" pitchFamily="34" charset="0"/>
+                <a:ea typeface="Playfair Display" pitchFamily="34" charset="-122"/>
+                <a:cs typeface="Playfair Display" pitchFamily="34" charset="-120"/>
+              </a:rPr>
+              <a:t>ngunit laksan ninyo ang inyong loob, </a:t>
+            </a:r>
+            <a:endParaRPr lang="en-US" sz="2800" dirty="0"/>
+          </a:p>
+          <a:p>
+            <a:pPr algn="ctr" indent="0" marL="0">
+              <a:buNone/>
+            </a:pPr>
+            <a:r>
+              <a:rPr lang="en-US" sz="2800" b="1" i="1" dirty="0">
+                <a:solidFill>
+                  <a:srgbClr val="F0C64A"/>
+                </a:solidFill>
+                <a:latin typeface="Playfair Display" pitchFamily="34" charset="0"/>
+                <a:ea typeface="Playfair Display" pitchFamily="34" charset="-122"/>
+                <a:cs typeface="Playfair Display" pitchFamily="34" charset="-120"/>
+              </a:rPr>
+              <a:t>dinaig ko na ang sanlibutan</a:t>
+            </a:r>
+            <a:pPr algn="ctr" indent="0" marL="0">
+              <a:buNone/>
+            </a:pPr>
+            <a:r>
+              <a:rPr lang="en-US" sz="2800" i="1" dirty="0">
+                <a:solidFill>
+                  <a:srgbClr val="FFFFFF"/>
+                </a:solidFill>
+                <a:latin typeface="Playfair Display" pitchFamily="34" charset="0"/>
+                <a:ea typeface="Playfair Display" pitchFamily="34" charset="-122"/>
+                <a:cs typeface="Playfair Display" pitchFamily="34" charset="-120"/>
+              </a:rPr>
+              <a:t>."</a:t>
+            </a:r>
+            <a:endParaRPr lang="en-US" sz="2800" dirty="0"/>
+          </a:p>
+        </p:txBody>
+      </p:sp>
+      <p:sp>
+        <p:nvSpPr>
+          <p:cNvPr id="7" name="Text 5"/>
+          <p:cNvSpPr/>
+          <p:nvPr/>
+        </p:nvSpPr>
+        <p:spPr>
+          <a:xfrm>
+            <a:off x="457200" y="5577840"/>
+            <a:ext cx="11247120" cy="365760"/>
+          </a:xfrm>
+          <a:prstGeom prst="rect">
+            <a:avLst/>
+          </a:prstGeom>
+          <a:noFill/>
+          <a:ln/>
+        </p:spPr>
+        <p:txBody>
+          <a:bodyPr wrap="square" rtlCol="0" anchor="ctr"/>
+          <a:lstStyle/>
+          <a:p>
+            <a:pPr algn="ctr" indent="0" marL="0">
+              <a:buNone/>
+            </a:pPr>
+            <a:r>
+              <a:rPr lang="en-US" sz="1300" b="1" spc="800" kern="0" dirty="0">
+                <a:solidFill>
+                  <a:srgbClr val="D4A838"/>
+                </a:solidFill>
+                <a:latin typeface="DM Sans" pitchFamily="34" charset="0"/>
+                <a:ea typeface="DM Sans" pitchFamily="34" charset="-122"/>
+                <a:cs typeface="DM Sans" pitchFamily="34" charset="-120"/>
+              </a:rPr>
+              <a:t>— JUAN 16:33</a:t>
+            </a:r>
+            <a:endParaRPr lang="en-US" sz="1300" dirty="0"/>
+          </a:p>
+        </p:txBody>
+      </p:sp>
+      <p:sp>
+        <p:nvSpPr>
+          <p:cNvPr id="8" name="Text 6"/>
+          <p:cNvSpPr/>
+          <p:nvPr/>
+        </p:nvSpPr>
+        <p:spPr>
+          <a:xfrm>
+            <a:off x="457200" y="6263640"/>
+            <a:ext cx="11247120" cy="274320"/>
+          </a:xfrm>
+          <a:prstGeom prst="rect">
+            <a:avLst/>
+          </a:prstGeom>
+          <a:noFill/>
+          <a:ln/>
+        </p:spPr>
+        <p:txBody>
+          <a:bodyPr wrap="square" rtlCol="0" anchor="ctr"/>
+          <a:lstStyle/>
+          <a:p>
+            <a:pPr algn="ctr" indent="0" marL="0">
+              <a:buNone/>
+            </a:pPr>
+            <a:r>
+              <a:rPr lang="en-US" sz="1100" spc="400" kern="0" dirty="0">
+                <a:solidFill>
+                  <a:srgbClr val="FFFFFF">
+                    <a:alpha val="60000"/>
+                  </a:srgbClr>
+                </a:solidFill>
+                <a:latin typeface="DM Sans" pitchFamily="34" charset="0"/>
+                <a:ea typeface="DM Sans" pitchFamily="34" charset="-122"/>
+                <a:cs typeface="DM Sans" pitchFamily="34" charset="-120"/>
+              </a:rPr>
+              <a:t>Salamat, kapatid.</a:t>
+            </a:r>
+            <a:endParaRPr lang="en-US" sz="1100" dirty="0"/>
+          </a:p>
+        </p:txBody>
+      </p:sp>
+      <p:sp>
+        <p:nvSpPr>
+          <p:cNvPr id="9" name="Rounded Rectangle 8"/>
+          <p:cNvSpPr/>
+          <p:nvPr/>
+        </p:nvSpPr>
+        <p:spPr>
+          <a:xfrm>
+            <a:off x="8763000" y="137160"/>
+            <a:ext cx="3200400" cy="548640"/>
+          </a:xfrm>
+          <a:prstGeom prst="roundRect">
+            <a:avLst/>
+          </a:prstGeom>
+          <a:solidFill>
+            <a:srgbClr val="D4AF37"/>
+          </a:solidFill>
+          <a:ln>
+            <a:noFill/>
+          </a:ln>
+          <a:effectLst/>
+        </p:spPr>
+        <p:style>
+          <a:lnRef idx="1">
+            <a:schemeClr val="accent1"/>
+          </a:lnRef>
+          <a:fillRef idx="3">
+            <a:schemeClr val="accent1"/>
+          </a:fillRef>
+          <a:effectRef idx="2">
+            <a:schemeClr val="accent1"/>
+          </a:effectRef>
+          <a:fontRef idx="minor">
+            <a:schemeClr val="lt1"/>
+          </a:fontRef>
+        </p:style>
+        <p:txBody>
+          <a:bodyPr rtlCol="0" anchor="ctr" wrap="none" tIns="0" bIns="0"/>
+          <a:lstStyle/>
+          <a:p>
+            <a:pPr algn="ctr"/>
+            <a:r>
+              <a:rPr sz="2000" b="1">
+                <a:solidFill>
+                  <a:srgbClr val="141628"/>
+                </a:solidFill>
+                <a:latin typeface="Calibri"/>
+              </a:rPr>
+              <a:t>⏱ 1 min · ⌛60:00</a:t>
+            </a:r>
+          </a:p>
+        </p:txBody>
+      </p:sp>
     </p:spTree>
   </p:cSld>
   <p:clrMapOvr>
@@ -5025,7 +8379,7 @@
                 <a:ea typeface="DM Sans" pitchFamily="34" charset="-122"/>
                 <a:cs typeface="DM Sans" pitchFamily="34" charset="-120"/>
               </a:rPr>
-              <a:t>PUKAW · OPENING</a:t>
+              <a:t>PUKAW · L4 CALLBACK</a:t>
             </a:r>
             <a:endParaRPr lang="en-US" sz="1100" dirty="0"/>
           </a:p>
@@ -5064,7 +8418,7 @@
                 <a:ea typeface="Playfair Display" pitchFamily="34" charset="-122"/>
                 <a:cs typeface="Playfair Display" pitchFamily="34" charset="-120"/>
               </a:rPr>
-              <a:t>Base sa karanasan mo…</a:t>
+              <a:t>Kumusta ang SRPIU journal natin?</a:t>
             </a:r>
             <a:endParaRPr lang="en-US" sz="5200" dirty="0"/>
           </a:p>
@@ -5103,7 +8457,7 @@
                 <a:ea typeface="DM Sans" pitchFamily="34" charset="-122"/>
                 <a:cs typeface="DM Sans" pitchFamily="34" charset="-120"/>
               </a:rPr>
-              <a:t>May dulot bang pakinabang ang pagsubok at paghihirap sa isang tao?</a:t>
+              <a:t>Sino ang naka-journal kahit isang araw ngayong linggo — Pananalita, Pag-iisip, o Sekswalidad watch?</a:t>
             </a:r>
             <a:endParaRPr lang="en-US" sz="2400" dirty="0"/>
           </a:p>
@@ -5142,7 +8496,7 @@
                 <a:ea typeface="Playfair Display" pitchFamily="34" charset="-122"/>
                 <a:cs typeface="Playfair Display" pitchFamily="34" charset="-120"/>
               </a:rPr>
-              <a:t>Kung meron, ano?</a:t>
+              <a:t>2 volunteers lang.</a:t>
             </a:r>
             <a:endParaRPr lang="en-US" sz="2800" dirty="0"/>
           </a:p>
@@ -5181,9 +8535,62 @@
                 <a:ea typeface="DM Sans" pitchFamily="34" charset="-122"/>
                 <a:cs typeface="DM Sans" pitchFamily="34" charset="-120"/>
               </a:rPr>
-              <a:t>— Pansamantalang pag-isipan; isa-isang sasagot.</a:t>
+              <a:t/>
             </a:r>
             <a:endParaRPr lang="en-US" sz="1400" dirty="0"/>
+          </a:p>
+        </p:txBody>
+      </p:sp>
+      <p:sp>
+        <p:nvSpPr>
+          <p:cNvPr id="7" name="Rounded Rectangle 6"/>
+          <p:cNvSpPr/>
+          <p:nvPr/>
+        </p:nvSpPr>
+        <p:spPr>
+          <a:xfrm>
+            <a:off x="8763000" y="137160"/>
+            <a:ext cx="3200400" cy="548640"/>
+          </a:xfrm>
+          <a:prstGeom prst="roundRect">
+            <a:avLst/>
+          </a:prstGeom>
+          <a:solidFill>
+            <a:srgbClr val="D4AF37"/>
+          </a:solidFill>
+          <a:ln>
+            <a:noFill/>
+          </a:ln>
+          <a:effectLst/>
+        </p:spPr>
+        <p:style>
+          <a:lnRef idx="1">
+            <a:schemeClr val="accent1"/>
+          </a:lnRef>
+          <a:fillRef idx="3">
+            <a:schemeClr val="accent1"/>
+          </a:fillRef>
+          <a:effectRef idx="2">
+            <a:schemeClr val="accent1"/>
+          </a:effectRef>
+          <a:fontRef idx="minor">
+            <a:schemeClr val="lt1"/>
+          </a:fontRef>
+        </p:style>
+        <p:txBody>
+          <a:bodyPr rtlCol="0" anchor="ctr" wrap="none" tIns="0" bIns="0"/>
+          <a:lstStyle/>
+          <a:p>
+            <a:pPr algn="ctr"/>
+            <a:r>
+              <a:rPr sz="2000" b="1">
+                <a:solidFill>
+                  <a:srgbClr val="141628"/>
+                </a:solidFill>
+                <a:latin typeface="Calibri"/>
+              </a:rPr>
+              <a:t>⏱ 2 min · ⌛3:00</a:t>
+            </a:r>
           </a:p>
         </p:txBody>
       </p:sp>
@@ -5415,6 +8822,59 @@
           </a:p>
         </p:txBody>
       </p:sp>
+      <p:sp>
+        <p:nvSpPr>
+          <p:cNvPr id="7" name="Rounded Rectangle 6"/>
+          <p:cNvSpPr/>
+          <p:nvPr/>
+        </p:nvSpPr>
+        <p:spPr>
+          <a:xfrm>
+            <a:off x="8763000" y="137160"/>
+            <a:ext cx="3200400" cy="548640"/>
+          </a:xfrm>
+          <a:prstGeom prst="roundRect">
+            <a:avLst/>
+          </a:prstGeom>
+          <a:solidFill>
+            <a:srgbClr val="D4AF37"/>
+          </a:solidFill>
+          <a:ln>
+            <a:noFill/>
+          </a:ln>
+          <a:effectLst/>
+        </p:spPr>
+        <p:style>
+          <a:lnRef idx="1">
+            <a:schemeClr val="accent1"/>
+          </a:lnRef>
+          <a:fillRef idx="3">
+            <a:schemeClr val="accent1"/>
+          </a:fillRef>
+          <a:effectRef idx="2">
+            <a:schemeClr val="accent1"/>
+          </a:effectRef>
+          <a:fontRef idx="minor">
+            <a:schemeClr val="lt1"/>
+          </a:fontRef>
+        </p:style>
+        <p:txBody>
+          <a:bodyPr rtlCol="0" anchor="ctr" wrap="none" tIns="0" bIns="0"/>
+          <a:lstStyle/>
+          <a:p>
+            <a:pPr algn="ctr"/>
+            <a:r>
+              <a:rPr sz="2000" b="1">
+                <a:solidFill>
+                  <a:srgbClr val="141628"/>
+                </a:solidFill>
+                <a:latin typeface="Calibri"/>
+              </a:rPr>
+              <a:t>⏱ 4 min · ⌛7:00</a:t>
+            </a:r>
+          </a:p>
+        </p:txBody>
+      </p:sp>
     </p:spTree>
   </p:cSld>
   <p:clrMapOvr>
@@ -5424,6 +8884,286 @@
 </file>
 
 <file path=ppt/slides/slide5.xml><?xml version="1.0" encoding="utf-8"?>
+<p:sld xmlns:a="http://schemas.openxmlformats.org/drawingml/2006/main" xmlns:r="http://schemas.openxmlformats.org/officeDocument/2006/relationships" xmlns:p="http://schemas.openxmlformats.org/presentationml/2006/main">
+  <p:cSld name="Slide 3">
+    <p:bg>
+      <p:bgPr>
+        <a:solidFill>
+          <a:srgbClr val="FDF6E8"/>
+        </a:solidFill>
+      </p:bgPr>
+    </p:bg>
+    <p:spTree>
+      <p:nvGrpSpPr>
+        <p:cNvPr id="1" name=""/>
+        <p:cNvGrpSpPr/>
+        <p:nvPr/>
+      </p:nvGrpSpPr>
+      <p:grpSpPr>
+        <a:xfrm>
+          <a:off x="0" y="0"/>
+          <a:ext cx="0" cy="0"/>
+          <a:chOff x="0" y="0"/>
+          <a:chExt cx="0" cy="0"/>
+        </a:xfrm>
+      </p:grpSpPr>
+      <p:sp>
+        <p:nvSpPr>
+          <p:cNvPr id="2" name="Text 0"/>
+          <p:cNvSpPr/>
+          <p:nvPr/>
+        </p:nvSpPr>
+        <p:spPr>
+          <a:xfrm>
+            <a:off x="365760" y="274320"/>
+            <a:ext cx="5486400" cy="274320"/>
+          </a:xfrm>
+          <a:prstGeom prst="rect">
+            <a:avLst/>
+          </a:prstGeom>
+          <a:noFill/>
+          <a:ln/>
+        </p:spPr>
+        <p:txBody>
+          <a:bodyPr wrap="square" rtlCol="0" anchor="ctr"/>
+          <a:lstStyle/>
+          <a:p>
+            <a:pPr indent="0" marL="0">
+              <a:buNone/>
+            </a:pPr>
+            <a:r>
+              <a:rPr lang="en-US" sz="1100" b="1" spc="500" kern="0" dirty="0">
+                <a:solidFill>
+                  <a:srgbClr val="2A5C40"/>
+                </a:solidFill>
+                <a:latin typeface="DM Sans" pitchFamily="34" charset="0"/>
+                <a:ea typeface="DM Sans" pitchFamily="34" charset="-122"/>
+                <a:cs typeface="DM Sans" pitchFamily="34" charset="-120"/>
+              </a:rPr>
+              <a:t>PUKAW · OPENING</a:t>
+            </a:r>
+            <a:endParaRPr lang="en-US" sz="1100" dirty="0"/>
+          </a:p>
+        </p:txBody>
+      </p:sp>
+      <p:sp>
+        <p:nvSpPr>
+          <p:cNvPr id="3" name="Text 1"/>
+          <p:cNvSpPr/>
+          <p:nvPr/>
+        </p:nvSpPr>
+        <p:spPr>
+          <a:xfrm>
+            <a:off x="457200" y="1371600"/>
+            <a:ext cx="11247120" cy="1005840"/>
+          </a:xfrm>
+          <a:prstGeom prst="rect">
+            <a:avLst/>
+          </a:prstGeom>
+          <a:noFill/>
+          <a:ln/>
+        </p:spPr>
+        <p:txBody>
+          <a:bodyPr wrap="square" rtlCol="0" anchor="ctr"/>
+          <a:lstStyle/>
+          <a:p>
+            <a:pPr algn="ctr" indent="0" marL="0">
+              <a:buNone/>
+            </a:pPr>
+            <a:r>
+              <a:rPr lang="en-US" sz="5200" b="1" dirty="0">
+                <a:solidFill>
+                  <a:srgbClr val="1A1612"/>
+                </a:solidFill>
+                <a:latin typeface="Playfair Display" pitchFamily="34" charset="0"/>
+                <a:ea typeface="Playfair Display" pitchFamily="34" charset="-122"/>
+                <a:cs typeface="Playfair Display" pitchFamily="34" charset="-120"/>
+              </a:rPr>
+              <a:t>Base sa karanasan mo…</a:t>
+            </a:r>
+            <a:endParaRPr lang="en-US" sz="5200" dirty="0"/>
+          </a:p>
+        </p:txBody>
+      </p:sp>
+      <p:sp>
+        <p:nvSpPr>
+          <p:cNvPr id="4" name="Text 2"/>
+          <p:cNvSpPr/>
+          <p:nvPr/>
+        </p:nvSpPr>
+        <p:spPr>
+          <a:xfrm>
+            <a:off x="1371600" y="2743200"/>
+            <a:ext cx="9418320" cy="914400"/>
+          </a:xfrm>
+          <a:prstGeom prst="rect">
+            <a:avLst/>
+          </a:prstGeom>
+          <a:noFill/>
+          <a:ln/>
+        </p:spPr>
+        <p:txBody>
+          <a:bodyPr wrap="square" rtlCol="0" anchor="ctr"/>
+          <a:lstStyle/>
+          <a:p>
+            <a:pPr algn="ctr" indent="0" marL="0">
+              <a:buNone/>
+            </a:pPr>
+            <a:r>
+              <a:rPr lang="en-US" sz="2400" dirty="0">
+                <a:solidFill>
+                  <a:srgbClr val="1A1612"/>
+                </a:solidFill>
+                <a:latin typeface="DM Sans" pitchFamily="34" charset="0"/>
+                <a:ea typeface="DM Sans" pitchFamily="34" charset="-122"/>
+                <a:cs typeface="DM Sans" pitchFamily="34" charset="-120"/>
+              </a:rPr>
+              <a:t>May dulot bang pakinabang ang pagsubok at paghihirap sa isang tao?</a:t>
+            </a:r>
+            <a:endParaRPr lang="en-US" sz="2400" dirty="0"/>
+          </a:p>
+        </p:txBody>
+      </p:sp>
+      <p:sp>
+        <p:nvSpPr>
+          <p:cNvPr id="5" name="Text 3"/>
+          <p:cNvSpPr/>
+          <p:nvPr/>
+        </p:nvSpPr>
+        <p:spPr>
+          <a:xfrm>
+            <a:off x="457200" y="4023360"/>
+            <a:ext cx="11247120" cy="731520"/>
+          </a:xfrm>
+          <a:prstGeom prst="rect">
+            <a:avLst/>
+          </a:prstGeom>
+          <a:noFill/>
+          <a:ln/>
+        </p:spPr>
+        <p:txBody>
+          <a:bodyPr wrap="square" rtlCol="0" anchor="ctr"/>
+          <a:lstStyle/>
+          <a:p>
+            <a:pPr algn="ctr" indent="0" marL="0">
+              <a:buNone/>
+            </a:pPr>
+            <a:r>
+              <a:rPr lang="en-US" sz="2800" b="1" i="1" dirty="0">
+                <a:solidFill>
+                  <a:srgbClr val="2A5C40"/>
+                </a:solidFill>
+                <a:latin typeface="Playfair Display" pitchFamily="34" charset="0"/>
+                <a:ea typeface="Playfair Display" pitchFamily="34" charset="-122"/>
+                <a:cs typeface="Playfair Display" pitchFamily="34" charset="-120"/>
+              </a:rPr>
+              <a:t>Kung meron, ano?</a:t>
+            </a:r>
+            <a:endParaRPr lang="en-US" sz="2800" dirty="0"/>
+          </a:p>
+        </p:txBody>
+      </p:sp>
+      <p:sp>
+        <p:nvSpPr>
+          <p:cNvPr id="6" name="Text 4"/>
+          <p:cNvSpPr/>
+          <p:nvPr/>
+        </p:nvSpPr>
+        <p:spPr>
+          <a:xfrm>
+            <a:off x="457200" y="5303520"/>
+            <a:ext cx="11247120" cy="365760"/>
+          </a:xfrm>
+          <a:prstGeom prst="rect">
+            <a:avLst/>
+          </a:prstGeom>
+          <a:noFill/>
+          <a:ln/>
+        </p:spPr>
+        <p:txBody>
+          <a:bodyPr wrap="square" rtlCol="0" anchor="ctr"/>
+          <a:lstStyle/>
+          <a:p>
+            <a:pPr algn="ctr" indent="0" marL="0">
+              <a:buNone/>
+            </a:pPr>
+            <a:r>
+              <a:rPr lang="en-US" sz="1400" i="1" dirty="0">
+                <a:solidFill>
+                  <a:srgbClr val="5A6655"/>
+                </a:solidFill>
+                <a:latin typeface="DM Sans" pitchFamily="34" charset="0"/>
+                <a:ea typeface="DM Sans" pitchFamily="34" charset="-122"/>
+                <a:cs typeface="DM Sans" pitchFamily="34" charset="-120"/>
+              </a:rPr>
+              <a:t>— Pansamantalang pag-isipan; isa-isang sasagot.</a:t>
+            </a:r>
+            <a:endParaRPr lang="en-US" sz="1400" dirty="0"/>
+          </a:p>
+        </p:txBody>
+      </p:sp>
+      <p:sp>
+        <p:nvSpPr>
+          <p:cNvPr id="7" name="Rounded Rectangle 6"/>
+          <p:cNvSpPr/>
+          <p:nvPr/>
+        </p:nvSpPr>
+        <p:spPr>
+          <a:xfrm>
+            <a:off x="8763000" y="137160"/>
+            <a:ext cx="3200400" cy="548640"/>
+          </a:xfrm>
+          <a:prstGeom prst="roundRect">
+            <a:avLst/>
+          </a:prstGeom>
+          <a:solidFill>
+            <a:srgbClr val="D4AF37"/>
+          </a:solidFill>
+          <a:ln>
+            <a:noFill/>
+          </a:ln>
+          <a:effectLst/>
+        </p:spPr>
+        <p:style>
+          <a:lnRef idx="1">
+            <a:schemeClr val="accent1"/>
+          </a:lnRef>
+          <a:fillRef idx="3">
+            <a:schemeClr val="accent1"/>
+          </a:fillRef>
+          <a:effectRef idx="2">
+            <a:schemeClr val="accent1"/>
+          </a:effectRef>
+          <a:fontRef idx="minor">
+            <a:schemeClr val="lt1"/>
+          </a:fontRef>
+        </p:style>
+        <p:txBody>
+          <a:bodyPr rtlCol="0" anchor="ctr" wrap="none" tIns="0" bIns="0"/>
+          <a:lstStyle/>
+          <a:p>
+            <a:pPr algn="ctr"/>
+            <a:r>
+              <a:rPr sz="2000" b="1">
+                <a:solidFill>
+                  <a:srgbClr val="141628"/>
+                </a:solidFill>
+                <a:latin typeface="Calibri"/>
+              </a:rPr>
+              <a:t>⏱ 1 min · ⌛8:00</a:t>
+            </a:r>
+          </a:p>
+        </p:txBody>
+      </p:sp>
+    </p:spTree>
+  </p:cSld>
+  <p:clrMapOvr>
+    <a:masterClrMapping/>
+  </p:clrMapOvr>
+</p:sld>
+</file>
+
+<file path=ppt/slides/slide6.xml><?xml version="1.0" encoding="utf-8"?>
 <p:sld xmlns:a="http://schemas.openxmlformats.org/drawingml/2006/main" xmlns:r="http://schemas.openxmlformats.org/officeDocument/2006/relationships" xmlns:p="http://schemas.openxmlformats.org/presentationml/2006/main">
   <p:cSld name="Slide 5">
     <p:bg>
@@ -5622,6 +9362,59 @@
           </a:p>
         </p:txBody>
       </p:sp>
+      <p:sp>
+        <p:nvSpPr>
+          <p:cNvPr id="6" name="Rounded Rectangle 5"/>
+          <p:cNvSpPr/>
+          <p:nvPr/>
+        </p:nvSpPr>
+        <p:spPr>
+          <a:xfrm>
+            <a:off x="8763000" y="137160"/>
+            <a:ext cx="3200400" cy="548640"/>
+          </a:xfrm>
+          <a:prstGeom prst="roundRect">
+            <a:avLst/>
+          </a:prstGeom>
+          <a:solidFill>
+            <a:srgbClr val="D4AF37"/>
+          </a:solidFill>
+          <a:ln>
+            <a:noFill/>
+          </a:ln>
+          <a:effectLst/>
+        </p:spPr>
+        <p:style>
+          <a:lnRef idx="1">
+            <a:schemeClr val="accent1"/>
+          </a:lnRef>
+          <a:fillRef idx="3">
+            <a:schemeClr val="accent1"/>
+          </a:fillRef>
+          <a:effectRef idx="2">
+            <a:schemeClr val="accent1"/>
+          </a:effectRef>
+          <a:fontRef idx="minor">
+            <a:schemeClr val="lt1"/>
+          </a:fontRef>
+        </p:style>
+        <p:txBody>
+          <a:bodyPr rtlCol="0" anchor="ctr" wrap="none" tIns="0" bIns="0"/>
+          <a:lstStyle/>
+          <a:p>
+            <a:pPr algn="ctr"/>
+            <a:r>
+              <a:rPr sz="2000" b="1">
+                <a:solidFill>
+                  <a:srgbClr val="141628"/>
+                </a:solidFill>
+                <a:latin typeface="Calibri"/>
+              </a:rPr>
+              <a:t>⏱ 1.5 min · ⌛9:30</a:t>
+            </a:r>
+          </a:p>
+        </p:txBody>
+      </p:sp>
     </p:spTree>
   </p:cSld>
   <p:clrMapOvr>
@@ -5630,7 +9423,7 @@
 </p:sld>
 </file>
 
-<file path=ppt/slides/slide6.xml><?xml version="1.0" encoding="utf-8"?>
+<file path=ppt/slides/slide7.xml><?xml version="1.0" encoding="utf-8"?>
 <p:sld xmlns:a="http://schemas.openxmlformats.org/drawingml/2006/main" xmlns:r="http://schemas.openxmlformats.org/officeDocument/2006/relationships" xmlns:p="http://schemas.openxmlformats.org/presentationml/2006/main">
   <p:cSld name="Slide 6">
     <p:bg>
@@ -6334,6 +10127,59 @@
           </a:p>
         </p:txBody>
       </p:sp>
+      <p:sp>
+        <p:nvSpPr>
+          <p:cNvPr id="17" name="Rounded Rectangle 16"/>
+          <p:cNvSpPr/>
+          <p:nvPr/>
+        </p:nvSpPr>
+        <p:spPr>
+          <a:xfrm>
+            <a:off x="8763000" y="137160"/>
+            <a:ext cx="3200400" cy="548640"/>
+          </a:xfrm>
+          <a:prstGeom prst="roundRect">
+            <a:avLst/>
+          </a:prstGeom>
+          <a:solidFill>
+            <a:srgbClr val="D4AF37"/>
+          </a:solidFill>
+          <a:ln>
+            <a:noFill/>
+          </a:ln>
+          <a:effectLst/>
+        </p:spPr>
+        <p:style>
+          <a:lnRef idx="1">
+            <a:schemeClr val="accent1"/>
+          </a:lnRef>
+          <a:fillRef idx="3">
+            <a:schemeClr val="accent1"/>
+          </a:fillRef>
+          <a:effectRef idx="2">
+            <a:schemeClr val="accent1"/>
+          </a:effectRef>
+          <a:fontRef idx="minor">
+            <a:schemeClr val="lt1"/>
+          </a:fontRef>
+        </p:style>
+        <p:txBody>
+          <a:bodyPr rtlCol="0" anchor="ctr" wrap="none" tIns="0" bIns="0"/>
+          <a:lstStyle/>
+          <a:p>
+            <a:pPr algn="ctr"/>
+            <a:r>
+              <a:rPr sz="2000" b="1">
+                <a:solidFill>
+                  <a:srgbClr val="141628"/>
+                </a:solidFill>
+                <a:latin typeface="Calibri"/>
+              </a:rPr>
+              <a:t>⏱ 4.5 min · ⌛14:00</a:t>
+            </a:r>
+          </a:p>
+        </p:txBody>
+      </p:sp>
     </p:spTree>
   </p:cSld>
   <p:clrMapOvr>
@@ -6342,7 +10188,304 @@
 </p:sld>
 </file>
 
-<file path=ppt/slides/slide7.xml><?xml version="1.0" encoding="utf-8"?>
+<file path=ppt/slides/slide8.xml><?xml version="1.0" encoding="utf-8"?>
+<p:sld xmlns:a="http://schemas.openxmlformats.org/drawingml/2006/main" xmlns:r="http://schemas.openxmlformats.org/officeDocument/2006/relationships" xmlns:p="http://schemas.openxmlformats.org/presentationml/2006/main">
+  <p:cSld name="Slide 3">
+    <p:bg>
+      <p:bgPr>
+        <a:solidFill>
+          <a:srgbClr val="FDF6E8"/>
+        </a:solidFill>
+      </p:bgPr>
+    </p:bg>
+    <p:spTree>
+      <p:nvGrpSpPr>
+        <p:cNvPr id="1" name=""/>
+        <p:cNvGrpSpPr/>
+        <p:nvPr/>
+      </p:nvGrpSpPr>
+      <p:grpSpPr>
+        <a:xfrm>
+          <a:off x="0" y="0"/>
+          <a:ext cx="0" cy="0"/>
+          <a:chOff x="0" y="0"/>
+          <a:chExt cx="0" cy="0"/>
+        </a:xfrm>
+      </p:grpSpPr>
+      <p:sp>
+        <p:nvSpPr>
+          <p:cNvPr id="2" name="Text 0"/>
+          <p:cNvSpPr/>
+          <p:nvPr/>
+        </p:nvSpPr>
+        <p:spPr>
+          <a:xfrm>
+            <a:off x="365760" y="274320"/>
+            <a:ext cx="5486400" cy="274320"/>
+          </a:xfrm>
+          <a:prstGeom prst="rect">
+            <a:avLst/>
+          </a:prstGeom>
+          <a:noFill/>
+          <a:ln/>
+        </p:spPr>
+        <p:txBody>
+          <a:bodyPr wrap="square" rtlCol="0" anchor="ctr"/>
+          <a:lstStyle/>
+          <a:p>
+            <a:pPr indent="0" marL="0">
+              <a:buNone/>
+            </a:pPr>
+            <a:r>
+              <a:rPr lang="en-US" sz="1100" b="1" spc="500" kern="0" dirty="0">
+                <a:solidFill>
+                  <a:srgbClr val="2A5C40"/>
+                </a:solidFill>
+                <a:latin typeface="DM Sans" pitchFamily="34" charset="0"/>
+                <a:ea typeface="DM Sans" pitchFamily="34" charset="-122"/>
+                <a:cs typeface="DM Sans" pitchFamily="34" charset="-120"/>
+              </a:rPr>
+              <a:t>TUKLAS · PERSONAL REFLECTION</a:t>
+            </a:r>
+            <a:endParaRPr lang="en-US" sz="1100" dirty="0"/>
+          </a:p>
+        </p:txBody>
+      </p:sp>
+      <p:sp>
+        <p:nvSpPr>
+          <p:cNvPr id="3" name="Text 1"/>
+          <p:cNvSpPr/>
+          <p:nvPr/>
+        </p:nvSpPr>
+        <p:spPr>
+          <a:xfrm>
+            <a:off x="457200" y="1371600"/>
+            <a:ext cx="11247120" cy="1005840"/>
+          </a:xfrm>
+          <a:prstGeom prst="rect">
+            <a:avLst/>
+          </a:prstGeom>
+          <a:noFill/>
+          <a:ln/>
+        </p:spPr>
+        <p:txBody>
+          <a:bodyPr wrap="square" rtlCol="0" anchor="ctr"/>
+          <a:lstStyle/>
+          <a:p>
+            <a:pPr algn="ctr" indent="0" marL="0">
+              <a:buNone/>
+            </a:pPr>
+            <a:r>
+              <a:rPr lang="en-US" sz="5200" b="1" dirty="0">
+                <a:solidFill>
+                  <a:srgbClr val="1A1612"/>
+                </a:solidFill>
+                <a:latin typeface="Playfair Display" pitchFamily="34" charset="0"/>
+                <a:ea typeface="Playfair Display" pitchFamily="34" charset="-122"/>
+                <a:cs typeface="Playfair Display" pitchFamily="34" charset="-120"/>
+              </a:rPr>
+              <a:t>Isang minutong katahimikan…</a:t>
+            </a:r>
+            <a:endParaRPr lang="en-US" sz="5200" dirty="0"/>
+          </a:p>
+        </p:txBody>
+      </p:sp>
+      <p:sp>
+        <p:nvSpPr>
+          <p:cNvPr id="4" name="Text 2"/>
+          <p:cNvSpPr/>
+          <p:nvPr/>
+        </p:nvSpPr>
+        <p:spPr>
+          <a:xfrm>
+            <a:off x="1371600" y="2743200"/>
+            <a:ext cx="9418320" cy="914400"/>
+          </a:xfrm>
+          <a:prstGeom prst="rect">
+            <a:avLst/>
+          </a:prstGeom>
+          <a:noFill/>
+          <a:ln/>
+        </p:spPr>
+        <p:txBody>
+          <a:bodyPr wrap="square" rtlCol="0" anchor="ctr"/>
+          <a:lstStyle/>
+          <a:p>
+            <a:pPr algn="ctr" indent="0" marL="0">
+              <a:buNone/>
+            </a:pPr>
+            <a:r>
+              <a:rPr lang="en-US" sz="2400" dirty="0">
+                <a:solidFill>
+                  <a:srgbClr val="1A1612"/>
+                </a:solidFill>
+                <a:latin typeface="DM Sans" pitchFamily="34" charset="0"/>
+                <a:ea typeface="DM Sans" pitchFamily="34" charset="-122"/>
+                <a:cs typeface="DM Sans" pitchFamily="34" charset="-120"/>
+              </a:rPr>
+              <a:t>Mag-isip ng isang specific na hirap na naranasan mo kamakailan — pwedeng maliit, pwedeng malaki.</a:t>
+            </a:r>
+            <a:endParaRPr lang="en-US" sz="2400" dirty="0"/>
+          </a:p>
+          <a:p>
+            <a:pPr algn="ctr" indent="0" marL="0">
+              <a:buNone/>
+            </a:pPr>
+            <a:r>
+              <a:rPr lang="en-US" sz="2400" dirty="0">
+                <a:solidFill>
+                  <a:srgbClr val="1A1612"/>
+                </a:solidFill>
+                <a:latin typeface="DM Sans" pitchFamily="34" charset="0"/>
+                <a:ea typeface="DM Sans" pitchFamily="34" charset="-122"/>
+                <a:cs typeface="DM Sans" pitchFamily="34" charset="-120"/>
+              </a:rPr>
+              <a:t>Pagkatapos: 2–3 volunteers — magbahagi ng testimony na naging challenge AT blessing.</a:t>
+            </a:r>
+            <a:endParaRPr lang="en-US" sz="2400" dirty="0"/>
+          </a:p>
+        </p:txBody>
+      </p:sp>
+      <p:sp>
+        <p:nvSpPr>
+          <p:cNvPr id="5" name="Text 3"/>
+          <p:cNvSpPr/>
+          <p:nvPr/>
+        </p:nvSpPr>
+        <p:spPr>
+          <a:xfrm>
+            <a:off x="457200" y="4023360"/>
+            <a:ext cx="11247120" cy="731520"/>
+          </a:xfrm>
+          <a:prstGeom prst="rect">
+            <a:avLst/>
+          </a:prstGeom>
+          <a:noFill/>
+          <a:ln/>
+        </p:spPr>
+        <p:txBody>
+          <a:bodyPr wrap="square" rtlCol="0" anchor="ctr"/>
+          <a:lstStyle/>
+          <a:p>
+            <a:pPr algn="ctr" indent="0" marL="0">
+              <a:buNone/>
+            </a:pPr>
+            <a:r>
+              <a:rPr lang="en-US" sz="2800" b="1" i="1" dirty="0">
+                <a:solidFill>
+                  <a:srgbClr val="2A5C40"/>
+                </a:solidFill>
+                <a:latin typeface="Playfair Display" pitchFamily="34" charset="0"/>
+                <a:ea typeface="Playfair Display" pitchFamily="34" charset="-122"/>
+                <a:cs typeface="Playfair Display" pitchFamily="34" charset="-120"/>
+              </a:rPr>
+              <a:t>2–3 volunteers pagkatapos ng 1 minuto.</a:t>
+            </a:r>
+            <a:endParaRPr lang="en-US" sz="2800" dirty="0"/>
+          </a:p>
+        </p:txBody>
+      </p:sp>
+      <p:sp>
+        <p:nvSpPr>
+          <p:cNvPr id="6" name="Text 4"/>
+          <p:cNvSpPr/>
+          <p:nvPr/>
+        </p:nvSpPr>
+        <p:spPr>
+          <a:xfrm>
+            <a:off x="457200" y="5303520"/>
+            <a:ext cx="11247120" cy="365760"/>
+          </a:xfrm>
+          <a:prstGeom prst="rect">
+            <a:avLst/>
+          </a:prstGeom>
+          <a:noFill/>
+          <a:ln/>
+        </p:spPr>
+        <p:txBody>
+          <a:bodyPr wrap="square" rtlCol="0" anchor="ctr"/>
+          <a:lstStyle/>
+          <a:p>
+            <a:pPr algn="ctr" indent="0" marL="0">
+              <a:buNone/>
+            </a:pPr>
+            <a:r>
+              <a:rPr lang="en-US" sz="1400" i="1" dirty="0">
+                <a:solidFill>
+                  <a:srgbClr val="5A6655"/>
+                </a:solidFill>
+                <a:latin typeface="DM Sans" pitchFamily="34" charset="0"/>
+                <a:ea typeface="DM Sans" pitchFamily="34" charset="-122"/>
+                <a:cs typeface="DM Sans" pitchFamily="34" charset="-120"/>
+              </a:rPr>
+              <a:t/>
+            </a:r>
+            <a:endParaRPr lang="en-US" sz="1400" dirty="0"/>
+          </a:p>
+        </p:txBody>
+      </p:sp>
+      <p:sp>
+        <p:nvSpPr>
+          <p:cNvPr id="7" name="Rounded Rectangle 6"/>
+          <p:cNvSpPr/>
+          <p:nvPr/>
+        </p:nvSpPr>
+        <p:spPr>
+          <a:xfrm>
+            <a:off x="8763000" y="137160"/>
+            <a:ext cx="3200400" cy="548640"/>
+          </a:xfrm>
+          <a:prstGeom prst="roundRect">
+            <a:avLst/>
+          </a:prstGeom>
+          <a:solidFill>
+            <a:srgbClr val="D4AF37"/>
+          </a:solidFill>
+          <a:ln>
+            <a:noFill/>
+          </a:ln>
+          <a:effectLst/>
+        </p:spPr>
+        <p:style>
+          <a:lnRef idx="1">
+            <a:schemeClr val="accent1"/>
+          </a:lnRef>
+          <a:fillRef idx="3">
+            <a:schemeClr val="accent1"/>
+          </a:fillRef>
+          <a:effectRef idx="2">
+            <a:schemeClr val="accent1"/>
+          </a:effectRef>
+          <a:fontRef idx="minor">
+            <a:schemeClr val="lt1"/>
+          </a:fontRef>
+        </p:style>
+        <p:txBody>
+          <a:bodyPr rtlCol="0" anchor="ctr" wrap="none" tIns="0" bIns="0"/>
+          <a:lstStyle/>
+          <a:p>
+            <a:pPr algn="ctr"/>
+            <a:r>
+              <a:rPr sz="2000" b="1">
+                <a:solidFill>
+                  <a:srgbClr val="141628"/>
+                </a:solidFill>
+                <a:latin typeface="Calibri"/>
+              </a:rPr>
+              <a:t>⏱ 3 min · ⌛17:00</a:t>
+            </a:r>
+          </a:p>
+        </p:txBody>
+      </p:sp>
+    </p:spTree>
+  </p:cSld>
+  <p:clrMapOvr>
+    <a:masterClrMapping/>
+  </p:clrMapOvr>
+</p:sld>
+</file>
+
+<file path=ppt/slides/slide9.xml><?xml version="1.0" encoding="utf-8"?>
 <p:sld xmlns:a="http://schemas.openxmlformats.org/drawingml/2006/main" xmlns:r="http://schemas.openxmlformats.org/officeDocument/2006/relationships" xmlns:p="http://schemas.openxmlformats.org/presentationml/2006/main">
   <p:cSld name="Slide 7">
     <p:bg>
@@ -6565,1092 +10708,56 @@
           </a:p>
         </p:txBody>
       </p:sp>
-    </p:spTree>
-  </p:cSld>
-  <p:clrMapOvr>
-    <a:masterClrMapping/>
-  </p:clrMapOvr>
-</p:sld>
-</file>
-
-<file path=ppt/slides/slide8.xml><?xml version="1.0" encoding="utf-8"?>
-<p:sld xmlns:a="http://schemas.openxmlformats.org/drawingml/2006/main" xmlns:r="http://schemas.openxmlformats.org/officeDocument/2006/relationships" xmlns:p="http://schemas.openxmlformats.org/presentationml/2006/main">
-  <p:cSld name="Slide 8">
-    <p:bg>
-      <p:bgPr>
-        <a:solidFill>
-          <a:srgbClr val="1F4830"/>
-        </a:solidFill>
-      </p:bgPr>
-    </p:bg>
-    <p:spTree>
-      <p:nvGrpSpPr>
-        <p:cNvPr id="1" name=""/>
-        <p:cNvGrpSpPr/>
-        <p:nvPr/>
-      </p:nvGrpSpPr>
-      <p:grpSpPr>
-        <a:xfrm>
-          <a:off x="0" y="0"/>
-          <a:ext cx="0" cy="0"/>
-          <a:chOff x="0" y="0"/>
-          <a:chExt cx="0" cy="0"/>
-        </a:xfrm>
-      </p:grpSpPr>
-      <p:sp>
-        <p:nvSpPr>
-          <p:cNvPr id="2" name="Text 0"/>
-          <p:cNvSpPr/>
-          <p:nvPr/>
-        </p:nvSpPr>
-        <p:spPr>
-          <a:xfrm>
-            <a:off x="365760" y="228600"/>
-            <a:ext cx="5486400" cy="274320"/>
-          </a:xfrm>
-          <a:prstGeom prst="rect">
-            <a:avLst/>
-          </a:prstGeom>
-          <a:noFill/>
-          <a:ln/>
-        </p:spPr>
-        <p:txBody>
-          <a:bodyPr wrap="square" rtlCol="0" anchor="ctr"/>
-          <a:lstStyle/>
-          <a:p>
-            <a:pPr indent="0" marL="0">
-              <a:buNone/>
-            </a:pPr>
-            <a:r>
-              <a:rPr lang="en-US" sz="1000" b="1" spc="500" kern="0" dirty="0">
-                <a:solidFill>
-                  <a:srgbClr val="FFFFFF">
-                    <a:alpha val="50000"/>
-                  </a:srgbClr>
-                </a:solidFill>
-                <a:latin typeface="DM Sans" pitchFamily="34" charset="0"/>
-                <a:ea typeface="DM Sans" pitchFamily="34" charset="-122"/>
-                <a:cs typeface="DM Sans" pitchFamily="34" charset="-120"/>
-              </a:rPr>
-              <a:t>TUKLAS · APAT NA TUGON</a:t>
-            </a:r>
-            <a:endParaRPr lang="en-US" sz="1000" dirty="0"/>
-          </a:p>
-        </p:txBody>
-      </p:sp>
-      <p:sp>
-        <p:nvSpPr>
-          <p:cNvPr id="3" name="Text 1"/>
-          <p:cNvSpPr/>
-          <p:nvPr/>
-        </p:nvSpPr>
-        <p:spPr>
-          <a:xfrm>
-            <a:off x="457200" y="731520"/>
-            <a:ext cx="11247120" cy="640080"/>
-          </a:xfrm>
-          <a:prstGeom prst="rect">
-            <a:avLst/>
-          </a:prstGeom>
-          <a:noFill/>
-          <a:ln/>
-        </p:spPr>
-        <p:txBody>
-          <a:bodyPr wrap="square" rtlCol="0" anchor="ctr"/>
-          <a:lstStyle/>
-          <a:p>
-            <a:pPr algn="ctr" indent="0" marL="0">
-              <a:buNone/>
-            </a:pPr>
-            <a:r>
-              <a:rPr lang="en-US" sz="3400" b="1" dirty="0">
-                <a:solidFill>
-                  <a:srgbClr val="FFFFFF"/>
-                </a:solidFill>
-                <a:latin typeface="Playfair Display" pitchFamily="34" charset="0"/>
-                <a:ea typeface="Playfair Display" pitchFamily="34" charset="-122"/>
-                <a:cs typeface="Playfair Display" pitchFamily="34" charset="-120"/>
-              </a:rPr>
-              <a:t>Apat na Biblikal na Tugon</a:t>
-            </a:r>
-            <a:endParaRPr lang="en-US" sz="3400" dirty="0"/>
-          </a:p>
-        </p:txBody>
-      </p:sp>
-      <p:sp>
-        <p:nvSpPr>
-          <p:cNvPr id="4" name="Text 2"/>
-          <p:cNvSpPr/>
-          <p:nvPr/>
-        </p:nvSpPr>
-        <p:spPr>
-          <a:xfrm>
-            <a:off x="457200" y="1463040"/>
-            <a:ext cx="11247120" cy="365760"/>
-          </a:xfrm>
-          <a:prstGeom prst="rect">
-            <a:avLst/>
-          </a:prstGeom>
-          <a:noFill/>
-          <a:ln/>
-        </p:spPr>
-        <p:txBody>
-          <a:bodyPr wrap="square" rtlCol="0" anchor="ctr"/>
-          <a:lstStyle/>
-          <a:p>
-            <a:pPr algn="ctr" indent="0" marL="0">
-              <a:buNone/>
-            </a:pPr>
-            <a:r>
-              <a:rPr lang="en-US" sz="1500" dirty="0">
-                <a:solidFill>
-                  <a:srgbClr val="FFFFFF">
-                    <a:alpha val="80000"/>
-                  </a:srgbClr>
-                </a:solidFill>
-                <a:latin typeface="DM Sans" pitchFamily="34" charset="0"/>
-                <a:ea typeface="DM Sans" pitchFamily="34" charset="-122"/>
-                <a:cs typeface="DM Sans" pitchFamily="34" charset="-120"/>
-              </a:rPr>
-              <a:t>Apat na tao. Apat na karanasan. Iisang fruit: Pagtitiis (hypomonē).</a:t>
-            </a:r>
-            <a:endParaRPr lang="en-US" sz="1500" dirty="0"/>
-          </a:p>
-        </p:txBody>
-      </p:sp>
-      <p:sp>
-        <p:nvSpPr>
-          <p:cNvPr id="5" name="Shape 3"/>
-          <p:cNvSpPr/>
-          <p:nvPr/>
-        </p:nvSpPr>
-        <p:spPr>
-          <a:xfrm>
-            <a:off x="457200" y="2011680"/>
-            <a:ext cx="5486400" cy="2286000"/>
+      <p:sp>
+        <p:nvSpPr>
+          <p:cNvPr id="7" name="Rounded Rectangle 6"/>
+          <p:cNvSpPr/>
+          <p:nvPr/>
+        </p:nvSpPr>
+        <p:spPr>
+          <a:xfrm>
+            <a:off x="8763000" y="137160"/>
+            <a:ext cx="3200400" cy="548640"/>
           </a:xfrm>
           <a:prstGeom prst="roundRect">
-            <a:avLst>
-              <a:gd name="adj" fmla="val 3200"/>
-            </a:avLst>
+            <a:avLst/>
           </a:prstGeom>
           <a:solidFill>
-            <a:srgbClr val="1A3A28"/>
+            <a:srgbClr val="D4AF37"/>
           </a:solidFill>
-          <a:ln w="6350">
-            <a:solidFill>
-              <a:srgbClr val="D4A838"/>
-            </a:solidFill>
-            <a:prstDash val="solid"/>
+          <a:ln>
+            <a:noFill/>
           </a:ln>
-        </p:spPr>
-      </p:sp>
-      <p:sp>
-        <p:nvSpPr>
-          <p:cNvPr id="6" name="Shape 4"/>
-          <p:cNvSpPr/>
-          <p:nvPr/>
-        </p:nvSpPr>
-        <p:spPr>
-          <a:xfrm>
-            <a:off x="457200" y="2011680"/>
-            <a:ext cx="73152" cy="2286000"/>
-          </a:xfrm>
-          <a:prstGeom prst="rect">
-            <a:avLst/>
-          </a:prstGeom>
-          <a:solidFill>
-            <a:srgbClr val="D4A838"/>
-          </a:solidFill>
-          <a:ln/>
-        </p:spPr>
-      </p:sp>
-      <p:sp>
-        <p:nvSpPr>
-          <p:cNvPr id="7" name="Text 5"/>
-          <p:cNvSpPr/>
-          <p:nvPr/>
-        </p:nvSpPr>
-        <p:spPr>
-          <a:xfrm>
-            <a:off x="731520" y="2148840"/>
-            <a:ext cx="5120640" cy="457200"/>
-          </a:xfrm>
-          <a:prstGeom prst="rect">
-            <a:avLst/>
-          </a:prstGeom>
-          <a:noFill/>
-          <a:ln/>
-        </p:spPr>
-        <p:txBody>
-          <a:bodyPr wrap="square" rtlCol="0" anchor="ctr"/>
-          <a:lstStyle/>
-          <a:p>
-            <a:pPr indent="0" marL="0">
-              <a:buNone/>
-            </a:pPr>
-            <a:r>
-              <a:rPr lang="en-US" sz="2400" b="1" dirty="0">
-                <a:solidFill>
-                  <a:srgbClr val="FFFFFF"/>
-                </a:solidFill>
-                <a:latin typeface="Playfair Display" pitchFamily="34" charset="0"/>
-                <a:ea typeface="Playfair Display" pitchFamily="34" charset="-122"/>
-                <a:cs typeface="Playfair Display" pitchFamily="34" charset="-120"/>
-              </a:rPr>
-              <a:t>Job</a:t>
-            </a:r>
-            <a:endParaRPr lang="en-US" sz="2400" dirty="0"/>
-          </a:p>
-        </p:txBody>
-      </p:sp>
-      <p:sp>
-        <p:nvSpPr>
-          <p:cNvPr id="8" name="Text 6"/>
-          <p:cNvSpPr/>
-          <p:nvPr/>
-        </p:nvSpPr>
-        <p:spPr>
-          <a:xfrm>
-            <a:off x="731520" y="2697480"/>
-            <a:ext cx="5120640" cy="320040"/>
-          </a:xfrm>
-          <a:prstGeom prst="rect">
-            <a:avLst/>
-          </a:prstGeom>
-          <a:noFill/>
-          <a:ln/>
-        </p:spPr>
-        <p:txBody>
-          <a:bodyPr wrap="square" rtlCol="0" anchor="ctr"/>
-          <a:lstStyle/>
-          <a:p>
-            <a:pPr indent="0" marL="0">
-              <a:buNone/>
-            </a:pPr>
-            <a:r>
-              <a:rPr lang="en-US" sz="1200" b="1" spc="400" kern="0" dirty="0">
-                <a:solidFill>
-                  <a:srgbClr val="F0C64A"/>
-                </a:solidFill>
-                <a:latin typeface="DM Sans" pitchFamily="34" charset="0"/>
-                <a:ea typeface="DM Sans" pitchFamily="34" charset="-122"/>
-                <a:cs typeface="DM Sans" pitchFamily="34" charset="-120"/>
-              </a:rPr>
-              <a:t>MANATILI AT SUMAMBA</a:t>
-            </a:r>
-            <a:endParaRPr lang="en-US" sz="1200" dirty="0"/>
-          </a:p>
-        </p:txBody>
-      </p:sp>
-      <p:sp>
-        <p:nvSpPr>
-          <p:cNvPr id="9" name="Text 7"/>
-          <p:cNvSpPr/>
-          <p:nvPr/>
-        </p:nvSpPr>
-        <p:spPr>
-          <a:xfrm>
-            <a:off x="731520" y="3108960"/>
-            <a:ext cx="5120640" cy="1143000"/>
-          </a:xfrm>
-          <a:prstGeom prst="rect">
-            <a:avLst/>
-          </a:prstGeom>
-          <a:noFill/>
-          <a:ln/>
-        </p:spPr>
-        <p:txBody>
-          <a:bodyPr wrap="square" rtlCol="0" anchor="ctr"/>
-          <a:lstStyle/>
-          <a:p>
-            <a:pPr indent="0" marL="0">
-              <a:buNone/>
-            </a:pPr>
-            <a:r>
-              <a:rPr lang="en-US" sz="1400" i="1" dirty="0">
-                <a:solidFill>
-                  <a:srgbClr val="FFFFFF">
-                    <a:alpha val="90000"/>
-                  </a:srgbClr>
-                </a:solidFill>
-                <a:latin typeface="DM Sans" pitchFamily="34" charset="0"/>
-                <a:ea typeface="DM Sans" pitchFamily="34" charset="-122"/>
-                <a:cs typeface="DM Sans" pitchFamily="34" charset="-120"/>
-              </a:rPr>
-              <a:t>"Hubad akong lumabas sa sinapupunan… Purihin ang pangalan ng Panginoon." — Job 1:20-21</a:t>
-            </a:r>
-            <a:endParaRPr lang="en-US" sz="1400" dirty="0"/>
-          </a:p>
-        </p:txBody>
-      </p:sp>
-      <p:sp>
-        <p:nvSpPr>
-          <p:cNvPr id="10" name="Shape 8"/>
-          <p:cNvSpPr/>
-          <p:nvPr/>
-        </p:nvSpPr>
-        <p:spPr>
-          <a:xfrm>
-            <a:off x="6263640" y="2011680"/>
-            <a:ext cx="5486400" cy="2286000"/>
-          </a:xfrm>
-          <a:prstGeom prst="roundRect">
-            <a:avLst>
-              <a:gd name="adj" fmla="val 3200"/>
-            </a:avLst>
-          </a:prstGeom>
-          <a:solidFill>
-            <a:srgbClr val="1A3A28"/>
-          </a:solidFill>
-          <a:ln w="6350">
-            <a:solidFill>
-              <a:srgbClr val="D4A838"/>
-            </a:solidFill>
-            <a:prstDash val="solid"/>
-          </a:ln>
-        </p:spPr>
-      </p:sp>
-      <p:sp>
-        <p:nvSpPr>
-          <p:cNvPr id="11" name="Shape 9"/>
-          <p:cNvSpPr/>
-          <p:nvPr/>
-        </p:nvSpPr>
-        <p:spPr>
-          <a:xfrm>
-            <a:off x="6263640" y="2011680"/>
-            <a:ext cx="73152" cy="2286000"/>
-          </a:xfrm>
-          <a:prstGeom prst="rect">
-            <a:avLst/>
-          </a:prstGeom>
-          <a:solidFill>
-            <a:srgbClr val="D4A838"/>
-          </a:solidFill>
-          <a:ln/>
-        </p:spPr>
-      </p:sp>
-      <p:sp>
-        <p:nvSpPr>
-          <p:cNvPr id="12" name="Text 10"/>
-          <p:cNvSpPr/>
-          <p:nvPr/>
-        </p:nvSpPr>
-        <p:spPr>
-          <a:xfrm>
-            <a:off x="6537960" y="2148840"/>
-            <a:ext cx="5120640" cy="457200"/>
-          </a:xfrm>
-          <a:prstGeom prst="rect">
-            <a:avLst/>
-          </a:prstGeom>
-          <a:noFill/>
-          <a:ln/>
-        </p:spPr>
-        <p:txBody>
-          <a:bodyPr wrap="square" rtlCol="0" anchor="ctr"/>
-          <a:lstStyle/>
-          <a:p>
-            <a:pPr indent="0" marL="0">
-              <a:buNone/>
-            </a:pPr>
-            <a:r>
-              <a:rPr lang="en-US" sz="2400" b="1" dirty="0">
-                <a:solidFill>
-                  <a:srgbClr val="FFFFFF"/>
-                </a:solidFill>
-                <a:latin typeface="Playfair Display" pitchFamily="34" charset="0"/>
-                <a:ea typeface="Playfair Display" pitchFamily="34" charset="-122"/>
-                <a:cs typeface="Playfair Display" pitchFamily="34" charset="-120"/>
-              </a:rPr>
-              <a:t>Pablo</a:t>
-            </a:r>
-            <a:endParaRPr lang="en-US" sz="2400" dirty="0"/>
-          </a:p>
-        </p:txBody>
-      </p:sp>
-      <p:sp>
-        <p:nvSpPr>
-          <p:cNvPr id="13" name="Text 11"/>
-          <p:cNvSpPr/>
-          <p:nvPr/>
-        </p:nvSpPr>
-        <p:spPr>
-          <a:xfrm>
-            <a:off x="6537960" y="2697480"/>
-            <a:ext cx="5120640" cy="320040"/>
-          </a:xfrm>
-          <a:prstGeom prst="rect">
-            <a:avLst/>
-          </a:prstGeom>
-          <a:noFill/>
-          <a:ln/>
-        </p:spPr>
-        <p:txBody>
-          <a:bodyPr wrap="square" rtlCol="0" anchor="ctr"/>
-          <a:lstStyle/>
-          <a:p>
-            <a:pPr indent="0" marL="0">
-              <a:buNone/>
-            </a:pPr>
-            <a:r>
-              <a:rPr lang="en-US" sz="1200" b="1" spc="400" kern="0" dirty="0">
-                <a:solidFill>
-                  <a:srgbClr val="F0C64A"/>
-                </a:solidFill>
-                <a:latin typeface="DM Sans" pitchFamily="34" charset="0"/>
-                <a:ea typeface="DM Sans" pitchFamily="34" charset="-122"/>
-                <a:cs typeface="DM Sans" pitchFamily="34" charset="-120"/>
-              </a:rPr>
-              <a:t>UMASA SA BIYAYA</a:t>
-            </a:r>
-            <a:endParaRPr lang="en-US" sz="1200" dirty="0"/>
-          </a:p>
-        </p:txBody>
-      </p:sp>
-      <p:sp>
-        <p:nvSpPr>
-          <p:cNvPr id="14" name="Text 12"/>
-          <p:cNvSpPr/>
-          <p:nvPr/>
-        </p:nvSpPr>
-        <p:spPr>
-          <a:xfrm>
-            <a:off x="6537960" y="3108960"/>
-            <a:ext cx="5120640" cy="1143000"/>
-          </a:xfrm>
-          <a:prstGeom prst="rect">
-            <a:avLst/>
-          </a:prstGeom>
-          <a:noFill/>
-          <a:ln/>
-        </p:spPr>
-        <p:txBody>
-          <a:bodyPr wrap="square" rtlCol="0" anchor="ctr"/>
-          <a:lstStyle/>
-          <a:p>
-            <a:pPr indent="0" marL="0">
-              <a:buNone/>
-            </a:pPr>
-            <a:r>
-              <a:rPr lang="en-US" sz="1400" i="1" dirty="0">
-                <a:solidFill>
-                  <a:srgbClr val="FFFFFF">
-                    <a:alpha val="90000"/>
-                  </a:srgbClr>
-                </a:solidFill>
-                <a:latin typeface="DM Sans" pitchFamily="34" charset="0"/>
-                <a:ea typeface="DM Sans" pitchFamily="34" charset="-122"/>
-                <a:cs typeface="DM Sans" pitchFamily="34" charset="-120"/>
-              </a:rPr>
-              <a:t>"Sapat na sa iyo ang aking biyaya, sapagkat ang aking kapangyarihan ay nagiging sakdal sa kahinaan." — 2 Cor 12:9</a:t>
-            </a:r>
-            <a:endParaRPr lang="en-US" sz="1400" dirty="0"/>
-          </a:p>
-        </p:txBody>
-      </p:sp>
-      <p:sp>
-        <p:nvSpPr>
-          <p:cNvPr id="15" name="Shape 13"/>
-          <p:cNvSpPr/>
-          <p:nvPr/>
-        </p:nvSpPr>
-        <p:spPr>
-          <a:xfrm>
-            <a:off x="457200" y="4434840"/>
-            <a:ext cx="5486400" cy="2286000"/>
-          </a:xfrm>
-          <a:prstGeom prst="roundRect">
-            <a:avLst>
-              <a:gd name="adj" fmla="val 3200"/>
-            </a:avLst>
-          </a:prstGeom>
-          <a:solidFill>
-            <a:srgbClr val="1A3A28"/>
-          </a:solidFill>
-          <a:ln w="6350">
-            <a:solidFill>
-              <a:srgbClr val="D4A838"/>
-            </a:solidFill>
-            <a:prstDash val="solid"/>
-          </a:ln>
-        </p:spPr>
-      </p:sp>
-      <p:sp>
-        <p:nvSpPr>
-          <p:cNvPr id="16" name="Shape 14"/>
-          <p:cNvSpPr/>
-          <p:nvPr/>
-        </p:nvSpPr>
-        <p:spPr>
-          <a:xfrm>
-            <a:off x="457200" y="4434840"/>
-            <a:ext cx="73152" cy="2286000"/>
-          </a:xfrm>
-          <a:prstGeom prst="rect">
-            <a:avLst/>
-          </a:prstGeom>
-          <a:solidFill>
-            <a:srgbClr val="D4A838"/>
-          </a:solidFill>
-          <a:ln/>
-        </p:spPr>
-      </p:sp>
-      <p:sp>
-        <p:nvSpPr>
-          <p:cNvPr id="17" name="Text 15"/>
-          <p:cNvSpPr/>
-          <p:nvPr/>
-        </p:nvSpPr>
-        <p:spPr>
-          <a:xfrm>
-            <a:off x="731520" y="4572000"/>
-            <a:ext cx="5120640" cy="457200"/>
-          </a:xfrm>
-          <a:prstGeom prst="rect">
-            <a:avLst/>
-          </a:prstGeom>
-          <a:noFill/>
-          <a:ln/>
-        </p:spPr>
-        <p:txBody>
-          <a:bodyPr wrap="square" rtlCol="0" anchor="ctr"/>
-          <a:lstStyle/>
-          <a:p>
-            <a:pPr indent="0" marL="0">
-              <a:buNone/>
-            </a:pPr>
-            <a:r>
-              <a:rPr lang="en-US" sz="2400" b="1" dirty="0">
-                <a:solidFill>
-                  <a:srgbClr val="FFFFFF"/>
-                </a:solidFill>
-                <a:latin typeface="Playfair Display" pitchFamily="34" charset="0"/>
-                <a:ea typeface="Playfair Display" pitchFamily="34" charset="-122"/>
-                <a:cs typeface="Playfair Display" pitchFamily="34" charset="-120"/>
-              </a:rPr>
-              <a:t>Pedro</a:t>
-            </a:r>
-            <a:endParaRPr lang="en-US" sz="2400" dirty="0"/>
-          </a:p>
-        </p:txBody>
-      </p:sp>
-      <p:sp>
-        <p:nvSpPr>
-          <p:cNvPr id="18" name="Text 16"/>
-          <p:cNvSpPr/>
-          <p:nvPr/>
-        </p:nvSpPr>
-        <p:spPr>
-          <a:xfrm>
-            <a:off x="731520" y="5120640"/>
-            <a:ext cx="5120640" cy="320040"/>
-          </a:xfrm>
-          <a:prstGeom prst="rect">
-            <a:avLst/>
-          </a:prstGeom>
-          <a:noFill/>
-          <a:ln/>
-        </p:spPr>
-        <p:txBody>
-          <a:bodyPr wrap="square" rtlCol="0" anchor="ctr"/>
-          <a:lstStyle/>
-          <a:p>
-            <a:pPr indent="0" marL="0">
-              <a:buNone/>
-            </a:pPr>
-            <a:r>
-              <a:rPr lang="en-US" sz="1200" b="1" spc="400" kern="0" dirty="0">
-                <a:solidFill>
-                  <a:srgbClr val="F0C64A"/>
-                </a:solidFill>
-                <a:latin typeface="DM Sans" pitchFamily="34" charset="0"/>
-                <a:ea typeface="DM Sans" pitchFamily="34" charset="-122"/>
-                <a:cs typeface="DM Sans" pitchFamily="34" charset="-120"/>
-              </a:rPr>
-              <a:t>SUMUNOD AT MAGALAK</a:t>
-            </a:r>
-            <a:endParaRPr lang="en-US" sz="1200" dirty="0"/>
-          </a:p>
-        </p:txBody>
-      </p:sp>
-      <p:sp>
-        <p:nvSpPr>
-          <p:cNvPr id="19" name="Text 17"/>
-          <p:cNvSpPr/>
-          <p:nvPr/>
-        </p:nvSpPr>
-        <p:spPr>
-          <a:xfrm>
-            <a:off x="731520" y="5532120"/>
-            <a:ext cx="5120640" cy="1143000"/>
-          </a:xfrm>
-          <a:prstGeom prst="rect">
-            <a:avLst/>
-          </a:prstGeom>
-          <a:noFill/>
-          <a:ln/>
-        </p:spPr>
-        <p:txBody>
-          <a:bodyPr wrap="square" rtlCol="0" anchor="ctr"/>
-          <a:lstStyle/>
-          <a:p>
-            <a:pPr indent="0" marL="0">
-              <a:buNone/>
-            </a:pPr>
-            <a:r>
-              <a:rPr lang="en-US" sz="1400" i="1" dirty="0">
-                <a:solidFill>
-                  <a:srgbClr val="FFFFFF">
-                    <a:alpha val="90000"/>
-                  </a:srgbClr>
-                </a:solidFill>
-                <a:latin typeface="DM Sans" pitchFamily="34" charset="0"/>
-                <a:ea typeface="DM Sans" pitchFamily="34" charset="-122"/>
-                <a:cs typeface="DM Sans" pitchFamily="34" charset="-120"/>
-              </a:rPr>
-              <a:t>"Magalak kayo, sapagkat nakikibahagi kayo sa mga hirap ni Cristo." — 1 Pet 4:13</a:t>
-            </a:r>
-            <a:endParaRPr lang="en-US" sz="1400" dirty="0"/>
-          </a:p>
-        </p:txBody>
-      </p:sp>
-      <p:sp>
-        <p:nvSpPr>
-          <p:cNvPr id="20" name="Shape 18"/>
-          <p:cNvSpPr/>
-          <p:nvPr/>
-        </p:nvSpPr>
-        <p:spPr>
-          <a:xfrm>
-            <a:off x="6263640" y="4434840"/>
-            <a:ext cx="5486400" cy="2286000"/>
-          </a:xfrm>
-          <a:prstGeom prst="roundRect">
-            <a:avLst>
-              <a:gd name="adj" fmla="val 3200"/>
-            </a:avLst>
-          </a:prstGeom>
-          <a:solidFill>
-            <a:srgbClr val="1A3A28"/>
-          </a:solidFill>
-          <a:ln w="6350">
-            <a:solidFill>
-              <a:srgbClr val="D4A838"/>
-            </a:solidFill>
-            <a:prstDash val="solid"/>
-          </a:ln>
-        </p:spPr>
-      </p:sp>
-      <p:sp>
-        <p:nvSpPr>
-          <p:cNvPr id="21" name="Shape 19"/>
-          <p:cNvSpPr/>
-          <p:nvPr/>
-        </p:nvSpPr>
-        <p:spPr>
-          <a:xfrm>
-            <a:off x="6263640" y="4434840"/>
-            <a:ext cx="73152" cy="2286000"/>
-          </a:xfrm>
-          <a:prstGeom prst="rect">
-            <a:avLst/>
-          </a:prstGeom>
-          <a:solidFill>
-            <a:srgbClr val="D4A838"/>
-          </a:solidFill>
-          <a:ln/>
-        </p:spPr>
-      </p:sp>
-      <p:sp>
-        <p:nvSpPr>
-          <p:cNvPr id="22" name="Text 20"/>
-          <p:cNvSpPr/>
-          <p:nvPr/>
-        </p:nvSpPr>
-        <p:spPr>
-          <a:xfrm>
-            <a:off x="6537960" y="4572000"/>
-            <a:ext cx="5120640" cy="457200"/>
-          </a:xfrm>
-          <a:prstGeom prst="rect">
-            <a:avLst/>
-          </a:prstGeom>
-          <a:noFill/>
-          <a:ln/>
-        </p:spPr>
-        <p:txBody>
-          <a:bodyPr wrap="square" rtlCol="0" anchor="ctr"/>
-          <a:lstStyle/>
-          <a:p>
-            <a:pPr indent="0" marL="0">
-              <a:buNone/>
-            </a:pPr>
-            <a:r>
-              <a:rPr lang="en-US" sz="2400" b="1" dirty="0">
-                <a:solidFill>
-                  <a:srgbClr val="FFFFFF"/>
-                </a:solidFill>
-                <a:latin typeface="Playfair Display" pitchFamily="34" charset="0"/>
-                <a:ea typeface="Playfair Display" pitchFamily="34" charset="-122"/>
-                <a:cs typeface="Playfair Display" pitchFamily="34" charset="-120"/>
-              </a:rPr>
-              <a:t>Jesus</a:t>
-            </a:r>
-            <a:endParaRPr lang="en-US" sz="2400" dirty="0"/>
-          </a:p>
-        </p:txBody>
-      </p:sp>
-      <p:sp>
-        <p:nvSpPr>
-          <p:cNvPr id="23" name="Text 21"/>
-          <p:cNvSpPr/>
-          <p:nvPr/>
-        </p:nvSpPr>
-        <p:spPr>
-          <a:xfrm>
-            <a:off x="6537960" y="5120640"/>
-            <a:ext cx="5120640" cy="320040"/>
-          </a:xfrm>
-          <a:prstGeom prst="rect">
-            <a:avLst/>
-          </a:prstGeom>
-          <a:noFill/>
-          <a:ln/>
-        </p:spPr>
-        <p:txBody>
-          <a:bodyPr wrap="square" rtlCol="0" anchor="ctr"/>
-          <a:lstStyle/>
-          <a:p>
-            <a:pPr indent="0" marL="0">
-              <a:buNone/>
-            </a:pPr>
-            <a:r>
-              <a:rPr lang="en-US" sz="1200" b="1" spc="400" kern="0" dirty="0">
-                <a:solidFill>
-                  <a:srgbClr val="F0C64A"/>
-                </a:solidFill>
-                <a:latin typeface="DM Sans" pitchFamily="34" charset="0"/>
-                <a:ea typeface="DM Sans" pitchFamily="34" charset="-122"/>
-                <a:cs typeface="DM Sans" pitchFamily="34" charset="-120"/>
-              </a:rPr>
-              <a:t>MAGTIWALA AT SUMUKO</a:t>
-            </a:r>
-            <a:endParaRPr lang="en-US" sz="1200" dirty="0"/>
-          </a:p>
-        </p:txBody>
-      </p:sp>
-      <p:sp>
-        <p:nvSpPr>
-          <p:cNvPr id="24" name="Text 22"/>
-          <p:cNvSpPr/>
-          <p:nvPr/>
-        </p:nvSpPr>
-        <p:spPr>
-          <a:xfrm>
-            <a:off x="6537960" y="5532120"/>
-            <a:ext cx="5120640" cy="1143000"/>
-          </a:xfrm>
-          <a:prstGeom prst="rect">
-            <a:avLst/>
-          </a:prstGeom>
-          <a:noFill/>
-          <a:ln/>
-        </p:spPr>
-        <p:txBody>
-          <a:bodyPr wrap="square" rtlCol="0" anchor="ctr"/>
-          <a:lstStyle/>
-          <a:p>
-            <a:pPr indent="0" marL="0">
-              <a:buNone/>
-            </a:pPr>
-            <a:r>
-              <a:rPr lang="en-US" sz="1400" i="1" dirty="0">
-                <a:solidFill>
-                  <a:srgbClr val="FFFFFF">
-                    <a:alpha val="90000"/>
-                  </a:srgbClr>
-                </a:solidFill>
-                <a:latin typeface="DM Sans" pitchFamily="34" charset="0"/>
-                <a:ea typeface="DM Sans" pitchFamily="34" charset="-122"/>
-                <a:cs typeface="DM Sans" pitchFamily="34" charset="-120"/>
-              </a:rPr>
-              <a:t>"Ama ko, kung maaari, lumayo sa akin ang sarong ito; gayon man, hindi ang kalooban ko…" — Lucas 22:42</a:t>
-            </a:r>
-            <a:endParaRPr lang="en-US" sz="1400" dirty="0"/>
-          </a:p>
-        </p:txBody>
-      </p:sp>
-    </p:spTree>
-  </p:cSld>
-  <p:clrMapOvr>
-    <a:masterClrMapping/>
-  </p:clrMapOvr>
-</p:sld>
-</file>
-
-<file path=ppt/slides/slide9.xml><?xml version="1.0" encoding="utf-8"?>
-<p:sld xmlns:a="http://schemas.openxmlformats.org/drawingml/2006/main" xmlns:r="http://schemas.openxmlformats.org/officeDocument/2006/relationships" xmlns:p="http://schemas.openxmlformats.org/presentationml/2006/main">
-  <p:cSld name="Slide 9">
-    <p:bg>
-      <p:bgPr>
-        <a:solidFill>
-          <a:srgbClr val="9A7820"/>
-        </a:solidFill>
-      </p:bgPr>
-    </p:bg>
-    <p:spTree>
-      <p:nvGrpSpPr>
-        <p:cNvPr id="1" name=""/>
-        <p:cNvGrpSpPr/>
-        <p:nvPr/>
-      </p:nvGrpSpPr>
-      <p:grpSpPr>
-        <a:xfrm>
-          <a:off x="0" y="0"/>
-          <a:ext cx="0" cy="0"/>
-          <a:chOff x="0" y="0"/>
-          <a:chExt cx="0" cy="0"/>
-        </a:xfrm>
-      </p:grpSpPr>
-      <p:sp>
-        <p:nvSpPr>
-          <p:cNvPr id="2" name="Text 0"/>
-          <p:cNvSpPr/>
-          <p:nvPr/>
-        </p:nvSpPr>
-        <p:spPr>
-          <a:xfrm>
-            <a:off x="365760" y="228600"/>
-            <a:ext cx="5486400" cy="274320"/>
-          </a:xfrm>
-          <a:prstGeom prst="rect">
-            <a:avLst/>
-          </a:prstGeom>
-          <a:noFill/>
-          <a:ln/>
-        </p:spPr>
-        <p:txBody>
-          <a:bodyPr wrap="square" rtlCol="0" anchor="ctr"/>
-          <a:lstStyle/>
-          <a:p>
-            <a:pPr indent="0" marL="0">
-              <a:buNone/>
-            </a:pPr>
-            <a:r>
-              <a:rPr lang="en-US" sz="1000" b="1" spc="500" kern="0" dirty="0">
-                <a:solidFill>
-                  <a:srgbClr val="FFFFFF">
-                    <a:alpha val="50000"/>
-                  </a:srgbClr>
-                </a:solidFill>
-                <a:latin typeface="DM Sans" pitchFamily="34" charset="0"/>
-                <a:ea typeface="DM Sans" pitchFamily="34" charset="-122"/>
-                <a:cs typeface="DM Sans" pitchFamily="34" charset="-120"/>
-              </a:rPr>
-              <a:t>TUKLAS · CHARACTER ANCHOR</a:t>
-            </a:r>
-            <a:endParaRPr lang="en-US" sz="1000" dirty="0"/>
-          </a:p>
-        </p:txBody>
-      </p:sp>
-      <p:sp>
-        <p:nvSpPr>
-          <p:cNvPr id="3" name="Text 1"/>
-          <p:cNvSpPr/>
-          <p:nvPr/>
-        </p:nvSpPr>
-        <p:spPr>
-          <a:xfrm>
-            <a:off x="457200" y="1097280"/>
-            <a:ext cx="11247120" cy="365760"/>
-          </a:xfrm>
-          <a:prstGeom prst="rect">
-            <a:avLst/>
-          </a:prstGeom>
-          <a:noFill/>
-          <a:ln/>
-        </p:spPr>
-        <p:txBody>
-          <a:bodyPr wrap="square" rtlCol="0" anchor="ctr"/>
-          <a:lstStyle/>
-          <a:p>
-            <a:pPr algn="ctr" indent="0" marL="0">
-              <a:buNone/>
-            </a:pPr>
-            <a:r>
-              <a:rPr lang="en-US" sz="1300" b="1" spc="600" kern="0" dirty="0">
-                <a:solidFill>
-                  <a:srgbClr val="F0C64A"/>
-                </a:solidFill>
-                <a:latin typeface="DM Sans" pitchFamily="34" charset="0"/>
-                <a:ea typeface="DM Sans" pitchFamily="34" charset="-122"/>
-                <a:cs typeface="DM Sans" pitchFamily="34" charset="-120"/>
-              </a:rPr>
-              <a:t>GALATIANS 5:22 · BUNGA NG ESPIRITU</a:t>
-            </a:r>
-            <a:endParaRPr lang="en-US" sz="1300" dirty="0"/>
-          </a:p>
-        </p:txBody>
-      </p:sp>
-      <p:sp>
-        <p:nvSpPr>
-          <p:cNvPr id="4" name="Text 2"/>
-          <p:cNvSpPr/>
-          <p:nvPr/>
-        </p:nvSpPr>
-        <p:spPr>
-          <a:xfrm>
-            <a:off x="457200" y="1828800"/>
-            <a:ext cx="11247120" cy="1645920"/>
-          </a:xfrm>
-          <a:prstGeom prst="rect">
-            <a:avLst/>
-          </a:prstGeom>
-          <a:noFill/>
-          <a:ln/>
-        </p:spPr>
-        <p:txBody>
-          <a:bodyPr wrap="square" rtlCol="0" anchor="ctr"/>
-          <a:lstStyle/>
-          <a:p>
-            <a:pPr algn="ctr" indent="0" marL="0">
-              <a:buNone/>
-            </a:pPr>
-            <a:r>
-              <a:rPr lang="en-US" sz="11000" b="1" dirty="0">
-                <a:solidFill>
-                  <a:srgbClr val="F0C64A"/>
-                </a:solidFill>
-                <a:latin typeface="Playfair Display" pitchFamily="34" charset="0"/>
-                <a:ea typeface="Playfair Display" pitchFamily="34" charset="-122"/>
-                <a:cs typeface="Playfair Display" pitchFamily="34" charset="-120"/>
-              </a:rPr>
-              <a:t>Pagtitiis</a:t>
-            </a:r>
-            <a:endParaRPr lang="en-US" sz="11000" dirty="0"/>
-          </a:p>
-        </p:txBody>
-      </p:sp>
-      <p:sp>
-        <p:nvSpPr>
-          <p:cNvPr id="5" name="Text 3"/>
-          <p:cNvSpPr/>
-          <p:nvPr/>
-        </p:nvSpPr>
-        <p:spPr>
-          <a:xfrm>
-            <a:off x="457200" y="3657600"/>
-            <a:ext cx="11247120" cy="548640"/>
-          </a:xfrm>
-          <a:prstGeom prst="rect">
-            <a:avLst/>
-          </a:prstGeom>
-          <a:noFill/>
-          <a:ln/>
-        </p:spPr>
-        <p:txBody>
-          <a:bodyPr wrap="square" rtlCol="0" anchor="ctr"/>
-          <a:lstStyle/>
-          <a:p>
-            <a:pPr algn="ctr" indent="0" marL="0">
-              <a:buNone/>
-            </a:pPr>
-            <a:r>
-              <a:rPr lang="en-US" sz="2400" i="1" dirty="0">
-                <a:solidFill>
-                  <a:srgbClr val="FDF6E8">
-                    <a:alpha val="85000"/>
-                  </a:srgbClr>
-                </a:solidFill>
-                <a:latin typeface="Playfair Display" pitchFamily="34" charset="0"/>
-                <a:ea typeface="Playfair Display" pitchFamily="34" charset="-122"/>
-                <a:cs typeface="Playfair Display" pitchFamily="34" charset="-120"/>
-              </a:rPr>
-              <a:t>hypomonē — "to remain under"</a:t>
-            </a:r>
-            <a:endParaRPr lang="en-US" sz="2400" dirty="0"/>
-          </a:p>
-        </p:txBody>
-      </p:sp>
-      <p:sp>
-        <p:nvSpPr>
-          <p:cNvPr id="6" name="Text 4"/>
-          <p:cNvSpPr/>
-          <p:nvPr/>
-        </p:nvSpPr>
-        <p:spPr>
-          <a:xfrm>
-            <a:off x="1371600" y="4572000"/>
-            <a:ext cx="9418320" cy="1097280"/>
-          </a:xfrm>
-          <a:prstGeom prst="rect">
-            <a:avLst/>
-          </a:prstGeom>
-          <a:noFill/>
-          <a:ln/>
-        </p:spPr>
-        <p:txBody>
-          <a:bodyPr wrap="square" rtlCol="0" anchor="ctr"/>
-          <a:lstStyle/>
-          <a:p>
-            <a:pPr algn="ctr" indent="0" marL="0">
-              <a:buNone/>
-            </a:pPr>
-            <a:r>
-              <a:rPr lang="en-US" sz="1800" dirty="0">
-                <a:solidFill>
-                  <a:srgbClr val="FDF6E8"/>
-                </a:solidFill>
-                <a:latin typeface="DM Sans" pitchFamily="34" charset="0"/>
-                <a:ea typeface="DM Sans" pitchFamily="34" charset="-122"/>
-                <a:cs typeface="DM Sans" pitchFamily="34" charset="-120"/>
-              </a:rPr>
-              <a:t>Hindi lang ito kakayahang tiisin. Ito ang aktibong posture sa ilalim ng presyur — ang ginagawa mo habang nagpapatuloy ang hirap.</a:t>
-            </a:r>
-            <a:endParaRPr lang="en-US" sz="1800" dirty="0"/>
-          </a:p>
-        </p:txBody>
-      </p:sp>
-      <p:sp>
-        <p:nvSpPr>
-          <p:cNvPr id="7" name="Text 5"/>
-          <p:cNvSpPr/>
-          <p:nvPr/>
-        </p:nvSpPr>
-        <p:spPr>
-          <a:xfrm>
-            <a:off x="457200" y="5852160"/>
-            <a:ext cx="11247120" cy="457200"/>
-          </a:xfrm>
-          <a:prstGeom prst="rect">
-            <a:avLst/>
-          </a:prstGeom>
-          <a:noFill/>
-          <a:ln/>
-        </p:spPr>
-        <p:txBody>
-          <a:bodyPr wrap="square" rtlCol="0" anchor="ctr"/>
-          <a:lstStyle/>
-          <a:p>
-            <a:pPr algn="ctr" indent="0" marL="0">
-              <a:buNone/>
-            </a:pPr>
-            <a:r>
-              <a:rPr lang="en-US" sz="1500" i="1" dirty="0">
-                <a:solidFill>
-                  <a:srgbClr val="FDF6E8">
-                    <a:alpha val="70000"/>
-                  </a:srgbClr>
-                </a:solidFill>
-                <a:latin typeface="DM Sans" pitchFamily="34" charset="0"/>
-                <a:ea typeface="DM Sans" pitchFamily="34" charset="-122"/>
-                <a:cs typeface="DM Sans" pitchFamily="34" charset="-120"/>
-              </a:rPr>
-              <a:t>Job · Pablo · Pedro · Jesus — apat na bersyon ng iisang Pagtitiis.</a:t>
-            </a:r>
-            <a:endParaRPr lang="en-US" sz="1500" dirty="0"/>
+          <a:effectLst/>
+        </p:spPr>
+        <p:style>
+          <a:lnRef idx="1">
+            <a:schemeClr val="accent1"/>
+          </a:lnRef>
+          <a:fillRef idx="3">
+            <a:schemeClr val="accent1"/>
+          </a:fillRef>
+          <a:effectRef idx="2">
+            <a:schemeClr val="accent1"/>
+          </a:effectRef>
+          <a:fontRef idx="minor">
+            <a:schemeClr val="lt1"/>
+          </a:fontRef>
+        </p:style>
+        <p:txBody>
+          <a:bodyPr rtlCol="0" anchor="ctr" wrap="none" tIns="0" bIns="0"/>
+          <a:lstStyle/>
+          <a:p>
+            <a:pPr algn="ctr"/>
+            <a:r>
+              <a:rPr sz="2000" b="1">
+                <a:solidFill>
+                  <a:srgbClr val="141628"/>
+                </a:solidFill>
+                <a:latin typeface="Calibri"/>
+              </a:rPr>
+              <a:t>⏱ 1 min · ⌛18:00</a:t>
+            </a:r>
           </a:p>
         </p:txBody>
       </p:sp>

--- a/lessons/btli101_xrw5fg/btli1_l5_slides.pptx
+++ b/lessons/btli101_xrw5fg/btli1_l5_slides.pptx
@@ -4,33 +4,33 @@
   <p:sldMasterIdLst>
     <p:sldMasterId id="2147483648" r:id="rId1"/>
   </p:sldMasterIdLst>
+  <p:notesMasterIdLst>
+    <p:notesMasterId r:id="rId24"/>
+  </p:notesMasterIdLst>
   <p:sldIdLst>
     <p:sldId id="256" r:id="rId2"/>
     <p:sldId id="257" r:id="rId3"/>
-    <p:sldId id="272" r:id="rId23"/>
+    <p:sldId id="272" r:id="rId4"/>
     <p:sldId id="259" r:id="rId5"/>
-    <p:sldId id="258" r:id="rId4"/>
-    <p:sldId id="260" r:id="rId6"/>
-    <p:sldId id="261" r:id="rId7"/>
-    <p:sldId id="273" r:id="rId24"/>
-    <p:sldId id="262" r:id="rId8"/>
-    <p:sldId id="263" r:id="rId9"/>
-    <p:sldId id="264" r:id="rId10"/>
-    <p:sldId id="277" r:id="rId28"/>
-    <p:sldId id="265" r:id="rId11"/>
-    <p:sldId id="275" r:id="rId26"/>
-    <p:sldId id="276" r:id="rId27"/>
-    <p:sldId id="266" r:id="rId12"/>
-    <p:sldId id="267" r:id="rId13"/>
-    <p:sldId id="268" r:id="rId14"/>
-    <p:sldId id="274" r:id="rId25"/>
-    <p:sldId id="269" r:id="rId15"/>
-    <p:sldId id="270" r:id="rId16"/>
-    <p:sldId id="271" r:id="rId17"/>
+    <p:sldId id="258" r:id="rId6"/>
+    <p:sldId id="260" r:id="rId7"/>
+    <p:sldId id="261" r:id="rId8"/>
+    <p:sldId id="273" r:id="rId9"/>
+    <p:sldId id="262" r:id="rId10"/>
+    <p:sldId id="263" r:id="rId11"/>
+    <p:sldId id="264" r:id="rId12"/>
+    <p:sldId id="277" r:id="rId13"/>
+    <p:sldId id="265" r:id="rId14"/>
+    <p:sldId id="275" r:id="rId15"/>
+    <p:sldId id="276" r:id="rId16"/>
+    <p:sldId id="266" r:id="rId17"/>
+    <p:sldId id="267" r:id="rId18"/>
+    <p:sldId id="268" r:id="rId19"/>
+    <p:sldId id="274" r:id="rId20"/>
+    <p:sldId id="269" r:id="rId21"/>
+    <p:sldId id="270" r:id="rId22"/>
+    <p:sldId id="271" r:id="rId23"/>
   </p:sldIdLst>
-  <p:notesMasterIdLst>
-    <p:notesMasterId r:id="rId18"/>
-  </p:notesMasterIdLst>
   <p:sldSz cx="12192000" cy="6858000"/>
   <p:notesSz cx="6858000" cy="12192000"/>
   <p:defaultTextStyle>
@@ -125,6 +125,11 @@
       </a:defRPr>
     </a:lvl9pPr>
   </p:defaultTextStyle>
+  <p:extLst>
+    <p:ext uri="{EFAFB233-063F-42B5-8137-9DF3F51BA10A}">
+      <p15:sldGuideLst xmlns:p15="http://schemas.microsoft.com/office/powerpoint/2012/main"/>
+    </p:ext>
+  </p:extLst>
 </p:presentation>
 </file>
 
@@ -150,234 +155,10 @@
           <a:chExt cx="0" cy="0"/>
         </a:xfrm>
       </p:grpSpPr>
-      <p:sp>
-        <p:nvSpPr>
-          <p:cNvPr id="2" name="Header Placeholder 1"/>
-          <p:cNvSpPr>
-            <a:spLocks noGrp="1"/>
-          </p:cNvSpPr>
-          <p:nvPr>
-            <p:ph type="hdr" sz="quarter"/>
-          </p:nvPr>
-        </p:nvSpPr>
-        <p:spPr>
-          <a:xfrm>
-            <a:off x="0" y="0"/>
-            <a:ext cx="2971800" cy="458788"/>
-          </a:xfrm>
-          <a:prstGeom prst="rect">
-            <a:avLst/>
-          </a:prstGeom>
-        </p:spPr>
-        <p:txBody>
-          <a:bodyPr vert="horz" lIns="91440" tIns="45720" rIns="91440" bIns="45720" rtlCol="0"/>
-          <a:lstStyle>
-            <a:lvl1pPr algn="l">
-              <a:defRPr sz="1200"/>
-            </a:lvl1pPr>
-          </a:lstStyle>
-          <a:p>
-            <a:endParaRPr lang="en-US"/>
-          </a:p>
-        </p:txBody>
-      </p:sp>
-      <p:sp>
-        <p:nvSpPr>
-          <p:cNvPr id="3" name="Date Placeholder 2"/>
-          <p:cNvSpPr>
-            <a:spLocks noGrp="1"/>
-          </p:cNvSpPr>
-          <p:nvPr>
-            <p:ph type="dt" idx="1"/>
-          </p:nvPr>
-        </p:nvSpPr>
-        <p:spPr>
-          <a:xfrm>
-            <a:off x="3884613" y="0"/>
-            <a:ext cx="2971800" cy="458788"/>
-          </a:xfrm>
-          <a:prstGeom prst="rect">
-            <a:avLst/>
-          </a:prstGeom>
-        </p:spPr>
-        <p:txBody>
-          <a:bodyPr vert="horz" lIns="91440" tIns="45720" rIns="91440" bIns="45720" rtlCol="0"/>
-          <a:lstStyle>
-            <a:lvl1pPr algn="r">
-              <a:defRPr sz="1200"/>
-            </a:lvl1pPr>
-          </a:lstStyle>
-          <a:p>
-            <a:fld id="{5282F153-3F37-0F45-9E97-73ACFA13230C}" type="datetimeFigureOut">
-              <a:rPr lang="en-US"/>
-              <a:t>7/23/19</a:t>
-            </a:fld>
-            <a:endParaRPr lang="en-US"/>
-          </a:p>
-        </p:txBody>
-      </p:sp>
-      <p:sp>
-        <p:nvSpPr>
-          <p:cNvPr id="4" name="Slide Image Placeholder 3"/>
-          <p:cNvSpPr>
-            <a:spLocks noGrp="1" noRot="1" noChangeAspect="1"/>
-          </p:cNvSpPr>
-          <p:nvPr>
-            <p:ph type="sldImg" idx="2"/>
-          </p:nvPr>
-        </p:nvSpPr>
-        <p:spPr>
-          <a:xfrm>
-            <a:off x="685800" y="1143000"/>
-            <a:ext cx="5486400" cy="3086100"/>
-          </a:xfrm>
-          <a:prstGeom prst="rect">
-            <a:avLst/>
-          </a:prstGeom>
-          <a:noFill/>
-          <a:ln w="12700">
-            <a:solidFill>
-              <a:prstClr val="black"/>
-            </a:solidFill>
-          </a:ln>
-        </p:spPr>
-        <p:txBody>
-          <a:bodyPr vert="horz" lIns="91440" tIns="45720" rIns="91440" bIns="45720" rtlCol="0" anchor="ctr"/>
-          <a:lstStyle/>
-          <a:p>
-            <a:endParaRPr lang="en-US"/>
-          </a:p>
-        </p:txBody>
-      </p:sp>
-      <p:sp>
-        <p:nvSpPr>
-          <p:cNvPr id="5" name="Notes Placeholder 4"/>
-          <p:cNvSpPr>
-            <a:spLocks noGrp="1"/>
-          </p:cNvSpPr>
-          <p:nvPr>
-            <p:ph type="body" sz="quarter" idx="3"/>
-          </p:nvPr>
-        </p:nvSpPr>
-        <p:spPr>
-          <a:xfrm>
-            <a:off x="685800" y="4400550"/>
-            <a:ext cx="5486400" cy="3600450"/>
-          </a:xfrm>
-          <a:prstGeom prst="rect">
-            <a:avLst/>
-          </a:prstGeom>
-        </p:spPr>
-        <p:txBody>
-          <a:bodyPr vert="horz" lIns="91440" tIns="45720" rIns="91440" bIns="45720" rtlCol="0"/>
-          <a:lstStyle/>
-          <a:p>
-            <a:pPr lvl="0"/>
-            <a:r>
-              <a:rPr lang="en-US"/>
-              <a:t>Click to edit Master text styles</a:t>
-            </a:r>
-          </a:p>
-          <a:p>
-            <a:pPr lvl="1"/>
-            <a:r>
-              <a:rPr lang="en-US"/>
-              <a:t>Second level</a:t>
-            </a:r>
-          </a:p>
-          <a:p>
-            <a:pPr lvl="2"/>
-            <a:r>
-              <a:rPr lang="en-US"/>
-              <a:t>Third level</a:t>
-            </a:r>
-          </a:p>
-          <a:p>
-            <a:pPr lvl="3"/>
-            <a:r>
-              <a:rPr lang="en-US"/>
-              <a:t>Fourth level</a:t>
-            </a:r>
-          </a:p>
-          <a:p>
-            <a:pPr lvl="4"/>
-            <a:r>
-              <a:rPr lang="en-US"/>
-              <a:t>Fifth level</a:t>
-            </a:r>
-          </a:p>
-        </p:txBody>
-      </p:sp>
-      <p:sp>
-        <p:nvSpPr>
-          <p:cNvPr id="6" name="Footer Placeholder 5"/>
-          <p:cNvSpPr>
-            <a:spLocks noGrp="1"/>
-          </p:cNvSpPr>
-          <p:nvPr>
-            <p:ph type="ftr" sz="quarter" idx="4"/>
-          </p:nvPr>
-        </p:nvSpPr>
-        <p:spPr>
-          <a:xfrm>
-            <a:off x="0" y="8685213"/>
-            <a:ext cx="2971800" cy="458787"/>
-          </a:xfrm>
-          <a:prstGeom prst="rect">
-            <a:avLst/>
-          </a:prstGeom>
-        </p:spPr>
-        <p:txBody>
-          <a:bodyPr vert="horz" lIns="91440" tIns="45720" rIns="91440" bIns="45720" rtlCol="0" anchor="b"/>
-          <a:lstStyle>
-            <a:lvl1pPr algn="l">
-              <a:defRPr sz="1200"/>
-            </a:lvl1pPr>
-          </a:lstStyle>
-          <a:p>
-            <a:endParaRPr lang="en-US"/>
-          </a:p>
-        </p:txBody>
-      </p:sp>
-      <p:sp>
-        <p:nvSpPr>
-          <p:cNvPr id="7" name="Slide Number Placeholder 6"/>
-          <p:cNvSpPr>
-            <a:spLocks noGrp="1"/>
-          </p:cNvSpPr>
-          <p:nvPr>
-            <p:ph type="sldNum" sz="quarter" idx="5"/>
-          </p:nvPr>
-        </p:nvSpPr>
-        <p:spPr>
-          <a:xfrm>
-            <a:off x="3884613" y="8685213"/>
-            <a:ext cx="2971800" cy="458787"/>
-          </a:xfrm>
-          <a:prstGeom prst="rect">
-            <a:avLst/>
-          </a:prstGeom>
-        </p:spPr>
-        <p:txBody>
-          <a:bodyPr vert="horz" lIns="91440" tIns="45720" rIns="91440" bIns="45720" rtlCol="0" anchor="b"/>
-          <a:lstStyle>
-            <a:lvl1pPr algn="r">
-              <a:defRPr sz="1200"/>
-            </a:lvl1pPr>
-          </a:lstStyle>
-          <a:p>
-            <a:fld id="{CE5E9CC1-C706-0F49-92D6-E571CC5EEA8F}" type="slidenum">
-              <a:rPr lang="en-US"/>
-              <a:t>‹#›</a:t>
-            </a:fld>
-            <a:endParaRPr lang="en-US"/>
-          </a:p>
-        </p:txBody>
-      </p:sp>
     </p:spTree>
     <p:extLst>
       <p:ext uri="{BB962C8B-B14F-4D97-AF65-F5344CB8AC3E}">
-        <p14:creationId xmlns:p14="http://schemas.microsoft.com/office/powerpoint/2010/main" val="1024086991"/>
+        <p14:creationId xmlns:p14="http://schemas.microsoft.com/office/powerpoint/2010/main" val="3841492222"/>
       </p:ext>
     </p:extLst>
   </p:cSld>
@@ -525,7 +306,9 @@
               <a:t>Welcome session. Set the tone: We are not here to fix anyone's hardship today. We are here to learn to FACE it well. Estimated 60 min total: PUKAW 8 · TUKLAS 15 · TALAKAY 12 · TUGON 15 · DALHIN 10. Memory verse: John 16:33. Character anchor: PATIENCE (Pagtitiis). Open in prayer asking for honest hearts and safe space.</a:t>
             </a:r>
           </a:p>
-          <a:p/>
+          <a:p>
+            <a:endParaRPr/>
+          </a:p>
           <a:p>
             <a:r>
               <a:t>FLOW CHECKPOINTS (cumulative): PUKAW ends 8:00 | TUKLAS 23:00 | TALAKAY 35:00 | TUGON 50:00 | DALHIN 60:00. The gold pill on every slide is the pace-keeper: '⏱ slide minutes · ⌛cumulative target'. If the room is behind at a checkpoint, reclaim time from Spafford (5-&gt;4) or sharing (5-&gt;4), never from safe-space or silent writing.</a:t>
@@ -614,13 +397,15 @@
           <a:lstStyle/>
           <a:p>
             <a:r>
-              <a:t>TALAKAY (~12 min). CRITICAL: facilitator must enforce safe-space rules BEFORE anyone shares: (1) no rushing to fix, (2) no 'I have a worse story' comparisons, (3) no advice unless asked, (4) what's shared here stays here. Use the safe-space framing card from facilitator guide. Limit to 2 sharers max — quality over quantity. Discernment drill is the load-bearing exercise: each person silently classifies one current hardship as T/T/T. Don't force them to share which one — just the classification.</a:t>
-            </a:r>
-          </a:p>
-          <a:p/>
-          <a:p>
-            <a:r>
-              <a:t>PITFALL (from guide): huwag mag-'ako rin kasi noon...' -- imbis na affirm, nagiging usapan-tungkol-sa'yo. Pati 'kaya mo yan!' minsan tumatama bilang dismissal. Facilitator says ONLY: 'Salamat sa pagshare. Naririnig ka namin.' Walang payo. Walang follow-up questions.</a:t>
+              <a:t>Walk through each of the 4. (1) JOB - read Job 1:20-21 aloud; note the 5 verbs: lumuhod, sumamba, hinubad, hinubdan, sinabi. He didn't deny pain — he worshipped through it. (2) PAUL - the thorn was NOT removed; the grace was sufficient. The hardship didn't end; Paul got new strength inside it. (3) PETER - 'magalak kayo' is shocking. Not 'magtiis kayo.' REJOICE. Why? Because sharing Christ's sufferings. (4) JESUS - the ultimate model. He asked for the cup to pass. Then surrendered. Patience includes asking honestly + then surrendering wholly.</a:t>
+            </a:r>
+          </a:p>
+          <a:p>
+            <a:endParaRPr/>
+          </a:p>
+          <a:p>
+            <a:r>
+              <a:t>Guide amplifications: JOB -- hindi sumuko, SUMUKOB; naglaksa pero nagpuri; sumamba imbis na sumumpa. PABLO -- hindi pinapayagang gumaan ang problema; pinapayagang DUMAMI ang biyaya. PEDRO -- karangalan ang ma-identify sa Kaniya; hindi pa permanenteng tahanan ang lupa. JESUS -- pagtitiwala + pagsuko, kahit sa pinakamatinding hirap.</a:t>
             </a:r>
           </a:p>
         </p:txBody>
@@ -707,9 +492,8 @@
           <a:p>
             <a:r>
               <a:rPr lang="en-US" dirty="0"/>
-              <a:t>TUGON opens with Lewis. Pause after 'shouts in our pain.' The point: God doesn't CAUSE the pain (per James 1:13) but He USES it — to get the attention of a deaf world (us included). The hardship is a megaphone, not the message. The message is: 'I AM HERE. STILL HERE.' Don't moralize the quote. Let it land.</a:t>
-            </a:r>
-            <a:endParaRPr lang="en-US" dirty="0"/>
+              <a:t>Now we explicitly name what all 4 share: HYPOMONE — Greek for 'to remain under.' Not passive resignation. Active staying. Patience is what you DO while the hardship continues. This is the character anchor of L5. Connect back to L1-L4: prayer + bible + surrender + holiness — all these disciplines build the muscle that gets used HERE, under pressure.</a:t>
+            </a:r>
           </a:p>
         </p:txBody>
       </p:sp>
@@ -773,7 +557,7 @@
             <a:spLocks noGrp="1" noRot="1" noChangeAspect="1"/>
           </p:cNvSpPr>
           <p:nvPr>
-            <p:ph type="sldImg"/>
+            <p:ph type="sldImg" idx="2"/>
           </p:nvPr>
         </p:nvSpPr>
         <p:spPr/>
@@ -785,7 +569,7 @@
             <a:spLocks noGrp="1"/>
           </p:cNvSpPr>
           <p:nvPr>
-            <p:ph type="body" idx="1"/>
+            <p:ph type="body" sz="quarter" idx="3"/>
           </p:nvPr>
         </p:nvSpPr>
         <p:spPr/>
@@ -794,13 +578,88 @@
           <a:lstStyle/>
           <a:p>
             <a:r>
-              <a:t>Spafford — tell slowly. Three losses: business (1871), son (1873), four daughters (Nov 1873). His wife Anna survived; the cable she sent him from Wales read just two words: 'Saved alone.' He sailed to meet her. The captain pointed out the spot where the Ville du Havre went down. Spafford wrote 'It Is Well' there — or shortly after. The hymn is not denial of grief. It is faith in the midst of grief. Both real at once.</a:t>
-            </a:r>
-          </a:p>
-          <a:p/>
-          <a:p>
-            <a:r>
-              <a:t>Spafford detail from guide: si Ann lang ang nakaligtas; ang cable niya mula Wales, dalawang salita lang -- 'Saved alone.' Ikuwento, huwag basahin. Tatlong pagkawala: negosyo (1871), anak na lalaki (1873), apat na anak na babae (Nov 1873).</a:t>
+              <a:rPr dirty="0"/>
+              <a:t>SAFE-SPACE FRAMING ~1 min (target 24:00). SABIHIN BEFORE anyone shares -- </a:t>
+            </a:r>
+            <a:r>
+              <a:rPr dirty="0" err="1"/>
+              <a:t>basahin</a:t>
+            </a:r>
+            <a:r>
+              <a:rPr dirty="0"/>
+              <a:t> ang 4 rules </a:t>
+            </a:r>
+            <a:r>
+              <a:rPr dirty="0" err="1"/>
+              <a:t>mula</a:t>
+            </a:r>
+            <a:r>
+              <a:rPr dirty="0"/>
+              <a:t> </a:t>
+            </a:r>
+            <a:r>
+              <a:rPr dirty="0" err="1"/>
+              <a:t>sa</a:t>
+            </a:r>
+            <a:r>
+              <a:rPr dirty="0"/>
+              <a:t> slide, </a:t>
+            </a:r>
+            <a:r>
+              <a:rPr dirty="0" err="1"/>
+              <a:t>dahan-dahan</a:t>
+            </a:r>
+            <a:r>
+              <a:rPr dirty="0"/>
+              <a:t>. Ito ang protective act ng facilitator; </a:t>
+            </a:r>
+            <a:r>
+              <a:rPr dirty="0" err="1"/>
+              <a:t>dito</a:t>
+            </a:r>
+            <a:r>
+              <a:rPr dirty="0"/>
+              <a:t> </a:t>
+            </a:r>
+            <a:r>
+              <a:rPr dirty="0" err="1"/>
+              <a:t>nakasalalay</a:t>
+            </a:r>
+            <a:r>
+              <a:rPr dirty="0"/>
+              <a:t> ang </a:t>
+            </a:r>
+            <a:r>
+              <a:rPr dirty="0" err="1"/>
+              <a:t>lalim</a:t>
+            </a:r>
+            <a:r>
+              <a:rPr dirty="0"/>
+              <a:t> ng </a:t>
+            </a:r>
+            <a:r>
+              <a:rPr dirty="0" err="1"/>
+              <a:t>susunod</a:t>
+            </a:r>
+            <a:r>
+              <a:rPr dirty="0"/>
+              <a:t> </a:t>
+            </a:r>
+            <a:r>
+              <a:rPr dirty="0" err="1"/>
+              <a:t>na</a:t>
+            </a:r>
+            <a:r>
+              <a:rPr dirty="0"/>
+              <a:t> 11 </a:t>
+            </a:r>
+            <a:r>
+              <a:rPr dirty="0" err="1"/>
+              <a:t>minuto</a:t>
+            </a:r>
+            <a:r>
+              <a:rPr dirty="0"/>
+              <a:t>. Tissue ready (pre-session checklist).</a:t>
             </a:r>
           </a:p>
         </p:txBody>
@@ -812,28 +671,12 @@
             <a:spLocks noGrp="1"/>
           </p:cNvSpPr>
           <p:nvPr>
-            <p:ph type="sldNum" sz="quarter" idx="10"/>
+            <p:ph type="sldNum" sz="quarter" idx="5"/>
           </p:nvPr>
         </p:nvSpPr>
         <p:spPr/>
-        <p:txBody>
-          <a:bodyPr/>
-          <a:lstStyle/>
-          <a:p>
-            <a:fld id="{F7021451-1387-4CA6-816F-3879F97B5CBC}" type="slidenum">
-              <a:rPr lang="en-US"/>
-              <a:t>12</a:t>
-            </a:fld>
-            <a:endParaRPr lang="en-US"/>
-          </a:p>
-        </p:txBody>
       </p:sp>
     </p:spTree>
-    <p:extLst>
-      <p:ext uri="{BB962C8B-B14F-4D97-AF65-F5344CB8AC3E}">
-        <p14:creationId xmlns:p14="http://schemas.microsoft.com/office/powerpoint/2010/main" val="1024086991"/>
-      </p:ext>
-    </p:extLst>
   </p:cSld>
   <p:clrMapOvr>
     <a:masterClrMapping/>
@@ -886,13 +729,15 @@
           <a:lstStyle/>
           <a:p>
             <a:r>
-              <a:t>Play Anthem Lights cover (YouTube jcp6w4zaW7U) — ~4 min. Display lyrics on screen if possible. Facilitator's call: sing along OR silent listen. While playing, participants write in the in-group GAWIN box: (a) what God is teaching you through current hardship, OR (b) prayer for someone you know in hardship + commitment to encourage that person this week. End with 60 sec silence after the hymn closes — no rushed transition.</a:t>
-            </a:r>
-          </a:p>
-          <a:p/>
-          <a:p>
-            <a:r>
-              <a:t>Facilitator's call: silent listen O sing along softly. Karaniwan, SILENT LISTEN ang pinakamabigat at pinaka-naghahanap-loob. Display lyrics. 60 sec silence after the hymn -- no rushed transition.</a:t>
+              <a:t>TALAKAY (~12 min). CRITICAL: facilitator must enforce safe-space rules BEFORE anyone shares: (1) no rushing to fix, (2) no 'I have a worse story' comparisons, (3) no advice unless asked, (4) what's shared here stays here. Use the safe-space framing card from facilitator guide. Limit to 2 sharers max — quality over quantity. Discernment drill is the load-bearing exercise: each person silently classifies one current hardship as T/T/T. Don't force them to share which one — just the classification.</a:t>
+            </a:r>
+          </a:p>
+          <a:p>
+            <a:endParaRPr/>
+          </a:p>
+          <a:p>
+            <a:r>
+              <a:t>PITFALL (from guide): huwag mag-'ako rin kasi noon...' -- imbis na affirm, nagiging usapan-tungkol-sa'yo. Pati 'kaya mo yan!' minsan tumatama bilang dismissal. Facilitator says ONLY: 'Salamat sa pagshare. Naririnig ka namin.' Walang payo. Walang follow-up questions.</a:t>
             </a:r>
           </a:p>
         </p:txBody>
@@ -957,7 +802,7 @@
             <a:spLocks noGrp="1" noRot="1" noChangeAspect="1"/>
           </p:cNvSpPr>
           <p:nvPr>
-            <p:ph type="sldImg"/>
+            <p:ph type="sldImg" idx="2"/>
           </p:nvPr>
         </p:nvSpPr>
         <p:spPr/>
@@ -969,7 +814,7 @@
             <a:spLocks noGrp="1"/>
           </p:cNvSpPr>
           <p:nvPr>
-            <p:ph type="body" idx="1"/>
+            <p:ph type="body" sz="quarter" idx="3"/>
           </p:nvPr>
         </p:nvSpPr>
         <p:spPr/>
@@ -978,13 +823,7 @@
           <a:lstStyle/>
           <a:p>
             <a:r>
-              <a:t>DALHIN (~10 min). Three concrete carry-homes. Walk through each: (1) 3-Trial Watch — 7-day journal. Honor the rhythm: nightly is fine; morning + night is better. (2) EOLO bridge — 48 hours. Make it specific. 'I will message _____ by Saturday night.' Patience isn't only enduring my own pain — it's STAYING PRESENT with someone else's. (3) John 16:33 memorize — by next LCG. Note: end-of-lesson 1-10 snapshot in participant guide; revisit start vs end.</a:t>
-            </a:r>
-          </a:p>
-          <a:p/>
-          <a:p>
-            <a:r>
-              <a:t>Covers DALHIN steps 5.1-5.3 (6 min): verse lock (recite together once) + 7-day 3-Trial Watch grid (isang hirap bawat araw: pangalanan, uriin T/T/T, response, verse) + EOLO 48-hour bridge ('tawagan/textan/chat-an ang taong isinulat mo sa writing box -- sa loob ng 48 oras. Hindi magpapayo. Maglilingap. Presence muna.')</a:t>
+              <a:t>"BAKIT AKO?" ~3 min (target 32:00). Round-robin, isang pangungusap. Ang tanong ay NORMAL at BIBLICAL -- Job, David, Asaph, at si Jesus mismo ("Ama, bakit Mo Ako pinabayaan?"). Hindi kasalanan ang magtanong. CRITICAL: bilang facilitator, HUWAG sasagutin ang tanong. I-validate lang na valid ito.</a:t>
             </a:r>
           </a:p>
         </p:txBody>
@@ -996,28 +835,12 @@
             <a:spLocks noGrp="1"/>
           </p:cNvSpPr>
           <p:nvPr>
-            <p:ph type="sldNum" sz="quarter" idx="10"/>
+            <p:ph type="sldNum" sz="quarter" idx="5"/>
           </p:nvPr>
         </p:nvSpPr>
         <p:spPr/>
-        <p:txBody>
-          <a:bodyPr/>
-          <a:lstStyle/>
-          <a:p>
-            <a:fld id="{F7021451-1387-4CA6-816F-3879F97B5CBC}" type="slidenum">
-              <a:rPr lang="en-US"/>
-              <a:t>14</a:t>
-            </a:fld>
-            <a:endParaRPr lang="en-US"/>
-          </a:p>
-        </p:txBody>
       </p:sp>
     </p:spTree>
-    <p:extLst>
-      <p:ext uri="{BB962C8B-B14F-4D97-AF65-F5344CB8AC3E}">
-        <p14:creationId xmlns:p14="http://schemas.microsoft.com/office/powerpoint/2010/main" val="1024086991"/>
-      </p:ext>
-    </p:extLst>
   </p:cSld>
   <p:clrMapOvr>
     <a:masterClrMapping/>
@@ -1049,7 +872,7 @@
             <a:spLocks noGrp="1" noRot="1" noChangeAspect="1"/>
           </p:cNvSpPr>
           <p:nvPr>
-            <p:ph type="sldImg"/>
+            <p:ph type="sldImg" idx="2"/>
           </p:nvPr>
         </p:nvSpPr>
         <p:spPr/>
@@ -1061,7 +884,7 @@
             <a:spLocks noGrp="1"/>
           </p:cNvSpPr>
           <p:nvPr>
-            <p:ph type="body" idx="1"/>
+            <p:ph type="body" sz="quarter" idx="3"/>
           </p:nvPr>
         </p:nvSpPr>
         <p:spPr/>
@@ -1070,13 +893,7 @@
           <a:lstStyle/>
           <a:p>
             <a:r>
-              <a:t>Pangako Ko — Filipino disciple-making convention. Spoken commitment in front of witnesses binds the disciple socially in addition to spiritually. Each participant says the 3-line pangako aloud. Witness affirms with 'Amen' or 'I will pray for you, kapatid.' Don't make it long or theatrical — short and serious.</a:t>
-            </a:r>
-          </a:p>
-          <a:p/>
-          <a:p>
-            <a:r>
-              <a:t>Round-robin format from guide: 'Sa darating na linggo, susubukan kong ...' Sa kulturang Filipino, mas binding ang sinasabi nang malakas kaysa nasusulat lang. Short and serious -- hindi theatrical.</a:t>
+              <a:t>DISCERNMENT DRILL ~3 min (target 35:00 -- TALAKAY ends here). Everyone classifies silently; 2 sharers state only the CLASSIFICATION, not the details. Facilitator note: madami ang magsasabing 'trial' -- at minsan trial nga lang talaga (sakit, accident). Hindi lahat may hidden meaning. Kapag hindi malinaw: 'Manatili at Sumamba. Hindi ko maintindihan, pero pinupuri pa rin Kita.'</a:t>
             </a:r>
           </a:p>
         </p:txBody>
@@ -1088,28 +905,12 @@
             <a:spLocks noGrp="1"/>
           </p:cNvSpPr>
           <p:nvPr>
-            <p:ph type="sldNum" sz="quarter" idx="10"/>
+            <p:ph type="sldNum" sz="quarter" idx="5"/>
           </p:nvPr>
         </p:nvSpPr>
         <p:spPr/>
-        <p:txBody>
-          <a:bodyPr/>
-          <a:lstStyle/>
-          <a:p>
-            <a:fld id="{F7021451-1387-4CA6-816F-3879F97B5CBC}" type="slidenum">
-              <a:rPr lang="en-US"/>
-              <a:t>15</a:t>
-            </a:fld>
-            <a:endParaRPr lang="en-US"/>
-          </a:p>
-        </p:txBody>
       </p:sp>
     </p:spTree>
-    <p:extLst>
-      <p:ext uri="{BB962C8B-B14F-4D97-AF65-F5344CB8AC3E}">
-        <p14:creationId xmlns:p14="http://schemas.microsoft.com/office/powerpoint/2010/main" val="1024086991"/>
-      </p:ext>
-    </p:extLst>
   </p:cSld>
   <p:clrMapOvr>
     <a:masterClrMapping/>
@@ -1162,13 +963,8 @@
           <a:lstStyle/>
           <a:p>
             <a:r>
-              <a:t>Closing. Preview L6 — Christian Fellowship. The bridge: 'Hindi mo dapat haharapin ang hirap nang mag-isa. Yan ang topic next week — community as God's main way of carrying us through.' Close with John 16:33 recited together aloud. End with prayer of blessing — thank God for honest sharing, ask for strength for those carrying current hardship, dismiss in peace.</a:t>
-            </a:r>
-          </a:p>
-          <a:p/>
-          <a:p>
-            <a:r>
-              <a:t>Closing beats (1 min): snapshot 'Saang puntos ka na ngayon, 1-10?' quick check vs start-of-lesson; closing prayer (volunteer o ikaw); L6 preview line: 'Hindi ka dapat mag-isa sa hirap -- may community ka.'</a:t>
+              <a:rPr lang="en-US" dirty="0"/>
+              <a:t>TUGON opens with Lewis. Pause after 'shouts in our pain.' The point: God doesn't CAUSE the pain (per James 1:13) but He USES it — to get the attention of a deaf world (us included). The hardship is a megaphone, not the message. The message is: 'I AM HERE. STILL HERE.' Don't moralize the quote. Let it land.</a:t>
             </a:r>
           </a:p>
         </p:txBody>
@@ -1210,7 +1006,7 @@
 </file>
 
 <file path=ppt/notesSlides/notesSlide17.xml><?xml version="1.0" encoding="utf-8"?>
-<p:notes xmlns:a="http://schemas.openxmlformats.org/drawingml/2006/main" xmlns:p="http://schemas.openxmlformats.org/presentationml/2006/main" xmlns:r="http://schemas.openxmlformats.org/officeDocument/2006/relationships">
+<p:notes xmlns:a="http://schemas.openxmlformats.org/drawingml/2006/main" xmlns:r="http://schemas.openxmlformats.org/officeDocument/2006/relationships" xmlns:p="http://schemas.openxmlformats.org/presentationml/2006/main">
   <p:cSld>
     <p:spTree>
       <p:nvGrpSpPr>
@@ -1230,10 +1026,10 @@
         <p:nvSpPr>
           <p:cNvPr id="2" name="Slide Image Placeholder 1"/>
           <p:cNvSpPr>
-            <a:spLocks noGrp="1"/>
+            <a:spLocks noGrp="1" noRot="1" noChangeAspect="1"/>
           </p:cNvSpPr>
           <p:nvPr>
-            <p:ph type="sldImg" idx="2"/>
+            <p:ph type="sldImg"/>
           </p:nvPr>
         </p:nvSpPr>
         <p:spPr/>
@@ -1245,7 +1041,7 @@
             <a:spLocks noGrp="1"/>
           </p:cNvSpPr>
           <p:nvPr>
-            <p:ph type="body" idx="3" sz="quarter"/>
+            <p:ph type="body" idx="1"/>
           </p:nvPr>
         </p:nvSpPr>
         <p:spPr/>
@@ -1254,7 +1050,15 @@
           <a:lstStyle/>
           <a:p>
             <a:r>
-              <a:t>L4 CALLBACK ~2 min (target 3:00). Maikling kumustahan lang -- hindi ito ang focus. Pumili ng 2 volunteers, HUWAG i-pressure. Celebration culture: kahit isang panalo, papalakpakan. Pitfall: don't let this stretch past 2 min; the monarch video needs its full window.</a:t>
+              <a:t>Spafford — tell slowly. Three losses: business (1871), son (1873), four daughters (Nov 1873). His wife Anna survived; the cable she sent him from Wales read just two words: 'Saved alone.' He sailed to meet her. The captain pointed out the spot where the Ville du Havre went down. Spafford wrote 'It Is Well' there — or shortly after. The hymn is not denial of grief. It is faith in the midst of grief. Both real at once.</a:t>
+            </a:r>
+          </a:p>
+          <a:p>
+            <a:endParaRPr/>
+          </a:p>
+          <a:p>
+            <a:r>
+              <a:t>Spafford detail from guide: si Ann lang ang nakaligtas; ang cable niya mula Wales, dalawang salita lang -- 'Saved alone.' Ikuwento, huwag basahin. Tatlong pagkawala: negosyo (1871), anak na lalaki (1873), apat na anak na babae (Nov 1873).</a:t>
             </a:r>
           </a:p>
         </p:txBody>
@@ -1266,12 +1070,28 @@
             <a:spLocks noGrp="1"/>
           </p:cNvSpPr>
           <p:nvPr>
-            <p:ph type="sldNum" idx="5" sz="quarter"/>
+            <p:ph type="sldNum" sz="quarter" idx="10"/>
           </p:nvPr>
         </p:nvSpPr>
         <p:spPr/>
+        <p:txBody>
+          <a:bodyPr/>
+          <a:lstStyle/>
+          <a:p>
+            <a:fld id="{F7021451-1387-4CA6-816F-3879F97B5CBC}" type="slidenum">
+              <a:rPr lang="en-US"/>
+              <a:t>17</a:t>
+            </a:fld>
+            <a:endParaRPr lang="en-US"/>
+          </a:p>
+        </p:txBody>
       </p:sp>
     </p:spTree>
+    <p:extLst>
+      <p:ext uri="{BB962C8B-B14F-4D97-AF65-F5344CB8AC3E}">
+        <p14:creationId xmlns:p14="http://schemas.microsoft.com/office/powerpoint/2010/main" val="1024086991"/>
+      </p:ext>
+    </p:extLst>
   </p:cSld>
   <p:clrMapOvr>
     <a:masterClrMapping/>
@@ -1280,7 +1100,7 @@
 </file>
 
 <file path=ppt/notesSlides/notesSlide18.xml><?xml version="1.0" encoding="utf-8"?>
-<p:notes xmlns:a="http://schemas.openxmlformats.org/drawingml/2006/main" xmlns:p="http://schemas.openxmlformats.org/presentationml/2006/main" xmlns:r="http://schemas.openxmlformats.org/officeDocument/2006/relationships">
+<p:notes xmlns:a="http://schemas.openxmlformats.org/drawingml/2006/main" xmlns:r="http://schemas.openxmlformats.org/officeDocument/2006/relationships" xmlns:p="http://schemas.openxmlformats.org/presentationml/2006/main">
   <p:cSld>
     <p:spTree>
       <p:nvGrpSpPr>
@@ -1300,10 +1120,10 @@
         <p:nvSpPr>
           <p:cNvPr id="2" name="Slide Image Placeholder 1"/>
           <p:cNvSpPr>
-            <a:spLocks noGrp="1"/>
+            <a:spLocks noGrp="1" noRot="1" noChangeAspect="1"/>
           </p:cNvSpPr>
           <p:nvPr>
-            <p:ph type="sldImg" idx="2"/>
+            <p:ph type="sldImg"/>
           </p:nvPr>
         </p:nvSpPr>
         <p:spPr/>
@@ -1315,7 +1135,7 @@
             <a:spLocks noGrp="1"/>
           </p:cNvSpPr>
           <p:nvPr>
-            <p:ph type="body" idx="3" sz="quarter"/>
+            <p:ph type="body" idx="1"/>
           </p:nvPr>
         </p:nvSpPr>
         <p:spPr/>
@@ -1324,7 +1144,15 @@
           <a:lstStyle/>
           <a:p>
             <a:r>
-              <a:t>PERSONAL REFLECTION ~3 min (target 17:00). 1 minuto ganap na katahimikan muna -- bantayan sa timer, huwag putulin nang maaga. Pagkatapos, 2-3 volunteers. Mas dadami ang nag-she-share kapag nakita nilang walang nahuhusgahan. Testimony prompt: challenge AT blessing sa iisang kuwento.</a:t>
+              <a:t>Play Anthem Lights cover (YouTube jcp6w4zaW7U) — ~4 min. Display lyrics on screen if possible. Facilitator's call: sing along OR silent listen. While playing, participants write in the in-group GAWIN box: (a) what God is teaching you through current hardship, OR (b) prayer for someone you know in hardship + commitment to encourage that person this week. End with 60 sec silence after the hymn closes — no rushed transition.</a:t>
+            </a:r>
+          </a:p>
+          <a:p>
+            <a:endParaRPr/>
+          </a:p>
+          <a:p>
+            <a:r>
+              <a:t>Facilitator's call: silent listen O sing along softly. Karaniwan, SILENT LISTEN ang pinakamabigat at pinaka-naghahanap-loob. Display lyrics. 60 sec silence after the hymn -- no rushed transition.</a:t>
             </a:r>
           </a:p>
         </p:txBody>
@@ -1336,12 +1164,28 @@
             <a:spLocks noGrp="1"/>
           </p:cNvSpPr>
           <p:nvPr>
-            <p:ph type="sldNum" idx="5" sz="quarter"/>
+            <p:ph type="sldNum" sz="quarter" idx="10"/>
           </p:nvPr>
         </p:nvSpPr>
         <p:spPr/>
+        <p:txBody>
+          <a:bodyPr/>
+          <a:lstStyle/>
+          <a:p>
+            <a:fld id="{F7021451-1387-4CA6-816F-3879F97B5CBC}" type="slidenum">
+              <a:rPr lang="en-US"/>
+              <a:t>18</a:t>
+            </a:fld>
+            <a:endParaRPr lang="en-US"/>
+          </a:p>
+        </p:txBody>
       </p:sp>
     </p:spTree>
+    <p:extLst>
+      <p:ext uri="{BB962C8B-B14F-4D97-AF65-F5344CB8AC3E}">
+        <p14:creationId xmlns:p14="http://schemas.microsoft.com/office/powerpoint/2010/main" val="1024086991"/>
+      </p:ext>
+    </p:extLst>
   </p:cSld>
   <p:clrMapOvr>
     <a:masterClrMapping/>
@@ -1350,7 +1194,7 @@
 </file>
 
 <file path=ppt/notesSlides/notesSlide19.xml><?xml version="1.0" encoding="utf-8"?>
-<p:notes xmlns:a="http://schemas.openxmlformats.org/drawingml/2006/main" xmlns:p="http://schemas.openxmlformats.org/presentationml/2006/main" xmlns:r="http://schemas.openxmlformats.org/officeDocument/2006/relationships">
+<p:notes xmlns:a="http://schemas.openxmlformats.org/drawingml/2006/main" xmlns:r="http://schemas.openxmlformats.org/officeDocument/2006/relationships" xmlns:p="http://schemas.openxmlformats.org/presentationml/2006/main">
   <p:cSld>
     <p:spTree>
       <p:nvGrpSpPr>
@@ -1370,7 +1214,7 @@
         <p:nvSpPr>
           <p:cNvPr id="2" name="Slide Image Placeholder 1"/>
           <p:cNvSpPr>
-            <a:spLocks noGrp="1"/>
+            <a:spLocks noGrp="1" noRot="1" noChangeAspect="1"/>
           </p:cNvSpPr>
           <p:nvPr>
             <p:ph type="sldImg" idx="2"/>
@@ -1385,7 +1229,7 @@
             <a:spLocks noGrp="1"/>
           </p:cNvSpPr>
           <p:nvPr>
-            <p:ph type="body" idx="3" sz="quarter"/>
+            <p:ph type="body" sz="quarter" idx="3"/>
           </p:nvPr>
         </p:nvSpPr>
         <p:spPr/>
@@ -1406,7 +1250,7 @@
             <a:spLocks noGrp="1"/>
           </p:cNvSpPr>
           <p:nvPr>
-            <p:ph type="sldNum" idx="5" sz="quarter"/>
+            <p:ph type="sldNum" sz="quarter" idx="5"/>
           </p:nvPr>
         </p:nvSpPr>
         <p:spPr/>
@@ -1467,7 +1311,9 @@
               <a:t>Read John 16:33 aloud — slowly. Note Jesus said 'magkakaroon' (will have) not 'baka magkaroon' (might have). Hardship is promised. But the second clause is also promised: 'dinaig ko na.' Past tense. Already won. This frames everything we'll discuss.</a:t>
             </a:r>
           </a:p>
-          <a:p/>
+          <a:p>
+            <a:endParaRPr/>
+          </a:p>
           <a:p>
             <a:r>
               <a:t>Pace note: 1 min only -- read slowly ONCE, no exposition yet; the exposition returns at DALHIN verse lock.</a:t>
@@ -1512,7 +1358,7 @@
 </file>
 
 <file path=ppt/notesSlides/notesSlide20.xml><?xml version="1.0" encoding="utf-8"?>
-<p:notes xmlns:a="http://schemas.openxmlformats.org/drawingml/2006/main" xmlns:p="http://schemas.openxmlformats.org/presentationml/2006/main" xmlns:r="http://schemas.openxmlformats.org/officeDocument/2006/relationships">
+<p:notes xmlns:a="http://schemas.openxmlformats.org/drawingml/2006/main" xmlns:r="http://schemas.openxmlformats.org/officeDocument/2006/relationships" xmlns:p="http://schemas.openxmlformats.org/presentationml/2006/main">
   <p:cSld>
     <p:spTree>
       <p:nvGrpSpPr>
@@ -1532,10 +1378,10 @@
         <p:nvSpPr>
           <p:cNvPr id="2" name="Slide Image Placeholder 1"/>
           <p:cNvSpPr>
-            <a:spLocks noGrp="1"/>
+            <a:spLocks noGrp="1" noRot="1" noChangeAspect="1"/>
           </p:cNvSpPr>
           <p:nvPr>
-            <p:ph type="sldImg" idx="2"/>
+            <p:ph type="sldImg"/>
           </p:nvPr>
         </p:nvSpPr>
         <p:spPr/>
@@ -1547,7 +1393,7 @@
             <a:spLocks noGrp="1"/>
           </p:cNvSpPr>
           <p:nvPr>
-            <p:ph type="body" idx="3" sz="quarter"/>
+            <p:ph type="body" idx="1"/>
           </p:nvPr>
         </p:nvSpPr>
         <p:spPr/>
@@ -1556,7 +1402,15 @@
           <a:lstStyle/>
           <a:p>
             <a:r>
-              <a:t>"BAKIT AKO?" ~3 min (target 32:00). Round-robin, isang pangungusap. Ang tanong ay NORMAL at BIBLICAL -- Job, David, Asaph, at si Jesus mismo ("Ama, bakit Mo Ako pinabayaan?"). Hindi kasalanan ang magtanong. CRITICAL: bilang facilitator, HUWAG sasagutin ang tanong. I-validate lang na valid ito.</a:t>
+              <a:t>DALHIN (~10 min). Three concrete carry-homes. Walk through each: (1) 3-Trial Watch — 7-day journal. Honor the rhythm: nightly is fine; morning + night is better. (2) EOLO bridge — 48 hours. Make it specific. 'I will message _____ by Saturday night.' Patience isn't only enduring my own pain — it's STAYING PRESENT with someone else's. (3) John 16:33 memorize — by next LCG. Note: end-of-lesson 1-10 snapshot in participant guide; revisit start vs end.</a:t>
+            </a:r>
+          </a:p>
+          <a:p>
+            <a:endParaRPr/>
+          </a:p>
+          <a:p>
+            <a:r>
+              <a:t>Covers DALHIN steps 5.1-5.3 (6 min): verse lock (recite together once) + 7-day 3-Trial Watch grid (isang hirap bawat araw: pangalanan, uriin T/T/T, response, verse) + EOLO 48-hour bridge ('tawagan/textan/chat-an ang taong isinulat mo sa writing box -- sa loob ng 48 oras. Hindi magpapayo. Maglilingap. Presence muna.')</a:t>
             </a:r>
           </a:p>
         </p:txBody>
@@ -1568,12 +1422,28 @@
             <a:spLocks noGrp="1"/>
           </p:cNvSpPr>
           <p:nvPr>
-            <p:ph type="sldNum" idx="5" sz="quarter"/>
+            <p:ph type="sldNum" sz="quarter" idx="10"/>
           </p:nvPr>
         </p:nvSpPr>
         <p:spPr/>
+        <p:txBody>
+          <a:bodyPr/>
+          <a:lstStyle/>
+          <a:p>
+            <a:fld id="{F7021451-1387-4CA6-816F-3879F97B5CBC}" type="slidenum">
+              <a:rPr lang="en-US"/>
+              <a:t>20</a:t>
+            </a:fld>
+            <a:endParaRPr lang="en-US"/>
+          </a:p>
+        </p:txBody>
       </p:sp>
     </p:spTree>
+    <p:extLst>
+      <p:ext uri="{BB962C8B-B14F-4D97-AF65-F5344CB8AC3E}">
+        <p14:creationId xmlns:p14="http://schemas.microsoft.com/office/powerpoint/2010/main" val="1024086991"/>
+      </p:ext>
+    </p:extLst>
   </p:cSld>
   <p:clrMapOvr>
     <a:masterClrMapping/>
@@ -1582,7 +1452,7 @@
 </file>
 
 <file path=ppt/notesSlides/notesSlide21.xml><?xml version="1.0" encoding="utf-8"?>
-<p:notes xmlns:a="http://schemas.openxmlformats.org/drawingml/2006/main" xmlns:p="http://schemas.openxmlformats.org/presentationml/2006/main" xmlns:r="http://schemas.openxmlformats.org/officeDocument/2006/relationships">
+<p:notes xmlns:a="http://schemas.openxmlformats.org/drawingml/2006/main" xmlns:r="http://schemas.openxmlformats.org/officeDocument/2006/relationships" xmlns:p="http://schemas.openxmlformats.org/presentationml/2006/main">
   <p:cSld>
     <p:spTree>
       <p:nvGrpSpPr>
@@ -1602,10 +1472,10 @@
         <p:nvSpPr>
           <p:cNvPr id="2" name="Slide Image Placeholder 1"/>
           <p:cNvSpPr>
-            <a:spLocks noGrp="1"/>
+            <a:spLocks noGrp="1" noRot="1" noChangeAspect="1"/>
           </p:cNvSpPr>
           <p:nvPr>
-            <p:ph type="sldImg" idx="2"/>
+            <p:ph type="sldImg"/>
           </p:nvPr>
         </p:nvSpPr>
         <p:spPr/>
@@ -1617,7 +1487,7 @@
             <a:spLocks noGrp="1"/>
           </p:cNvSpPr>
           <p:nvPr>
-            <p:ph type="body" idx="3" sz="quarter"/>
+            <p:ph type="body" idx="1"/>
           </p:nvPr>
         </p:nvSpPr>
         <p:spPr/>
@@ -1626,7 +1496,15 @@
           <a:lstStyle/>
           <a:p>
             <a:r>
-              <a:t>DISCERNMENT DRILL ~3 min (target 35:00 -- TALAKAY ends here). Everyone classifies silently; 2 sharers state only the CLASSIFICATION, not the details. Facilitator note: madami ang magsasabing 'trial' -- at minsan trial nga lang talaga (sakit, accident). Hindi lahat may hidden meaning. Kapag hindi malinaw: 'Manatili at Sumamba. Hindi ko maintindihan, pero pinupuri pa rin Kita.'</a:t>
+              <a:t>Pangako Ko — Filipino disciple-making convention. Spoken commitment in front of witnesses binds the disciple socially in addition to spiritually. Each participant says the 3-line pangako aloud. Witness affirms with 'Amen' or 'I will pray for you, kapatid.' Don't make it long or theatrical — short and serious.</a:t>
+            </a:r>
+          </a:p>
+          <a:p>
+            <a:endParaRPr/>
+          </a:p>
+          <a:p>
+            <a:r>
+              <a:t>Round-robin format from guide: 'Sa darating na linggo, susubukan kong ...' Sa kulturang Filipino, mas binding ang sinasabi nang malakas kaysa nasusulat lang. Short and serious -- hindi theatrical.</a:t>
             </a:r>
           </a:p>
         </p:txBody>
@@ -1638,12 +1516,28 @@
             <a:spLocks noGrp="1"/>
           </p:cNvSpPr>
           <p:nvPr>
-            <p:ph type="sldNum" idx="5" sz="quarter"/>
+            <p:ph type="sldNum" sz="quarter" idx="10"/>
           </p:nvPr>
         </p:nvSpPr>
         <p:spPr/>
+        <p:txBody>
+          <a:bodyPr/>
+          <a:lstStyle/>
+          <a:p>
+            <a:fld id="{F7021451-1387-4CA6-816F-3879F97B5CBC}" type="slidenum">
+              <a:rPr lang="en-US"/>
+              <a:t>21</a:t>
+            </a:fld>
+            <a:endParaRPr lang="en-US"/>
+          </a:p>
+        </p:txBody>
       </p:sp>
     </p:spTree>
+    <p:extLst>
+      <p:ext uri="{BB962C8B-B14F-4D97-AF65-F5344CB8AC3E}">
+        <p14:creationId xmlns:p14="http://schemas.microsoft.com/office/powerpoint/2010/main" val="1024086991"/>
+      </p:ext>
+    </p:extLst>
   </p:cSld>
   <p:clrMapOvr>
     <a:masterClrMapping/>
@@ -1652,7 +1546,7 @@
 </file>
 
 <file path=ppt/notesSlides/notesSlide22.xml><?xml version="1.0" encoding="utf-8"?>
-<p:notes xmlns:a="http://schemas.openxmlformats.org/drawingml/2006/main" xmlns:p="http://schemas.openxmlformats.org/presentationml/2006/main" xmlns:r="http://schemas.openxmlformats.org/officeDocument/2006/relationships">
+<p:notes xmlns:a="http://schemas.openxmlformats.org/drawingml/2006/main" xmlns:r="http://schemas.openxmlformats.org/officeDocument/2006/relationships" xmlns:p="http://schemas.openxmlformats.org/presentationml/2006/main">
   <p:cSld>
     <p:spTree>
       <p:nvGrpSpPr>
@@ -1672,10 +1566,10 @@
         <p:nvSpPr>
           <p:cNvPr id="2" name="Slide Image Placeholder 1"/>
           <p:cNvSpPr>
-            <a:spLocks noGrp="1"/>
+            <a:spLocks noGrp="1" noRot="1" noChangeAspect="1"/>
           </p:cNvSpPr>
           <p:nvPr>
-            <p:ph type="sldImg" idx="2"/>
+            <p:ph type="sldImg"/>
           </p:nvPr>
         </p:nvSpPr>
         <p:spPr/>
@@ -1687,7 +1581,7 @@
             <a:spLocks noGrp="1"/>
           </p:cNvSpPr>
           <p:nvPr>
-            <p:ph type="body" idx="3" sz="quarter"/>
+            <p:ph type="body" idx="1"/>
           </p:nvPr>
         </p:nvSpPr>
         <p:spPr/>
@@ -1696,7 +1590,15 @@
           <a:lstStyle/>
           <a:p>
             <a:r>
-              <a:t>SAFE-SPACE FRAMING ~1 min (target 24:00). SABIHIN BEFORE anyone shares -- basahin ang 4 rules mula sa slide, dahan-dahan. Ito ang protective act ng facilitator; dito nakasalalay ang lalim ng susunod na 11 minuto. Tissue ready (pre-session checklist).</a:t>
+              <a:t>Closing. Preview L6 — Christian Fellowship. The bridge: 'Hindi mo dapat haharapin ang hirap nang mag-isa. Yan ang topic next week — community as God's main way of carrying us through.' Close with John 16:33 recited together aloud. End with prayer of blessing — thank God for honest sharing, ask for strength for those carrying current hardship, dismiss in peace.</a:t>
+            </a:r>
+          </a:p>
+          <a:p>
+            <a:endParaRPr/>
+          </a:p>
+          <a:p>
+            <a:r>
+              <a:t>Closing beats (1 min): snapshot 'Saang puntos ka na ngayon, 1-10?' quick check vs start-of-lesson; closing prayer (volunteer o ikaw); L6 preview line: 'Hindi ka dapat mag-isa sa hirap -- may community ka.'</a:t>
             </a:r>
           </a:p>
         </p:txBody>
@@ -1708,12 +1610,28 @@
             <a:spLocks noGrp="1"/>
           </p:cNvSpPr>
           <p:nvPr>
-            <p:ph type="sldNum" idx="5" sz="quarter"/>
+            <p:ph type="sldNum" sz="quarter" idx="10"/>
           </p:nvPr>
         </p:nvSpPr>
         <p:spPr/>
+        <p:txBody>
+          <a:bodyPr/>
+          <a:lstStyle/>
+          <a:p>
+            <a:fld id="{F7021451-1387-4CA6-816F-3879F97B5CBC}" type="slidenum">
+              <a:rPr lang="en-US"/>
+              <a:t>22</a:t>
+            </a:fld>
+            <a:endParaRPr lang="en-US"/>
+          </a:p>
+        </p:txBody>
       </p:sp>
     </p:spTree>
+    <p:extLst>
+      <p:ext uri="{BB962C8B-B14F-4D97-AF65-F5344CB8AC3E}">
+        <p14:creationId xmlns:p14="http://schemas.microsoft.com/office/powerpoint/2010/main" val="1024086991"/>
+      </p:ext>
+    </p:extLst>
   </p:cSld>
   <p:clrMapOvr>
     <a:masterClrMapping/>
@@ -1745,7 +1663,7 @@
             <a:spLocks noGrp="1" noRot="1" noChangeAspect="1"/>
           </p:cNvSpPr>
           <p:nvPr>
-            <p:ph type="sldImg"/>
+            <p:ph type="sldImg" idx="2"/>
           </p:nvPr>
         </p:nvSpPr>
         <p:spPr/>
@@ -1757,7 +1675,7 @@
             <a:spLocks noGrp="1"/>
           </p:cNvSpPr>
           <p:nvPr>
-            <p:ph type="body" idx="1"/>
+            <p:ph type="body" sz="quarter" idx="3"/>
           </p:nvPr>
         </p:nvSpPr>
         <p:spPr/>
@@ -1766,14 +1684,131 @@
           <a:lstStyle/>
           <a:p>
             <a:r>
-              <a:t>PUKAW (~3 of 8 min). Open with last week's L4 SRPIU follow-up first — 'Kumusta ang Pananalita / Pag-iisip / Sekswalidad watch ninyo?' — celebrate honest answers. Then transition: 'Now, totoo na holiness is hard. But may isa pang klase ng hirap — yung hindi mo pinili. Yan ang topic natin ngayon.' Let 2-3 share briefly. Don't force consensus.</a:t>
-            </a:r>
-          </a:p>
-          <a:p/>
-          <a:p>
-            <a:r>
-              <a:t>Round-robin (1 sentence each) o volunteer-based depende sa laki ng grupo. Walang fix mode -- tumitingin at tumatango lang. PUKAW ends here: check the pill -- 8:00.</a:t>
-            </a:r>
+              <a:rPr dirty="0"/>
+              <a:t>L4 CALLBACK ~2 min (target 3:00). </a:t>
+            </a:r>
+            <a:r>
+              <a:rPr dirty="0" err="1"/>
+              <a:t>Maikling</a:t>
+            </a:r>
+            <a:r>
+              <a:rPr dirty="0"/>
+              <a:t> </a:t>
+            </a:r>
+            <a:r>
+              <a:rPr dirty="0" err="1"/>
+              <a:t>kumustahan</a:t>
+            </a:r>
+            <a:r>
+              <a:rPr dirty="0"/>
+              <a:t> lang -- </a:t>
+            </a:r>
+            <a:r>
+              <a:rPr dirty="0" err="1"/>
+              <a:t>hindi</a:t>
+            </a:r>
+            <a:r>
+              <a:rPr dirty="0"/>
+              <a:t> </a:t>
+            </a:r>
+            <a:r>
+              <a:rPr dirty="0" err="1"/>
+              <a:t>ito</a:t>
+            </a:r>
+            <a:r>
+              <a:rPr dirty="0"/>
+              <a:t> ang focus. </a:t>
+            </a:r>
+            <a:r>
+              <a:rPr dirty="0" err="1"/>
+              <a:t>Pumili</a:t>
+            </a:r>
+            <a:r>
+              <a:rPr dirty="0"/>
+              <a:t> ng 2 volunteers, HUWAG </a:t>
+            </a:r>
+            <a:r>
+              <a:rPr dirty="0" err="1"/>
+              <a:t>i</a:t>
+            </a:r>
+            <a:r>
+              <a:rPr dirty="0"/>
+              <a:t>-pressure. Celebration culture: </a:t>
+            </a:r>
+            <a:r>
+              <a:rPr dirty="0" err="1"/>
+              <a:t>kahit</a:t>
+            </a:r>
+            <a:r>
+              <a:rPr dirty="0"/>
+              <a:t> </a:t>
+            </a:r>
+            <a:r>
+              <a:rPr dirty="0" err="1"/>
+              <a:t>isang</a:t>
+            </a:r>
+            <a:r>
+              <a:rPr dirty="0"/>
+              <a:t> </a:t>
+            </a:r>
+            <a:r>
+              <a:rPr dirty="0" err="1"/>
+              <a:t>panalo</a:t>
+            </a:r>
+            <a:r>
+              <a:rPr dirty="0"/>
+              <a:t>, </a:t>
+            </a:r>
+            <a:r>
+              <a:rPr dirty="0" err="1"/>
+              <a:t>papalakpakan</a:t>
+            </a:r>
+            <a:r>
+              <a:rPr dirty="0"/>
+              <a:t>. Pitfall: don't let this stretch past 2 min; the monarch video needs its full window.</a:t>
+            </a:r>
+            <a:endParaRPr lang="en-US" dirty="0"/>
+          </a:p>
+          <a:p>
+            <a:r>
+              <a:rPr lang="en-US" dirty="0"/>
+              <a:t>SRPIU (</a:t>
+            </a:r>
+            <a:r>
+              <a:rPr lang="en-US" dirty="0" err="1"/>
+              <a:t>Sekswalidad</a:t>
+            </a:r>
+            <a:r>
+              <a:rPr lang="en-US" dirty="0"/>
+              <a:t> / </a:t>
+            </a:r>
+            <a:r>
+              <a:rPr lang="en-US" dirty="0" err="1"/>
+              <a:t>Relasyon</a:t>
+            </a:r>
+            <a:r>
+              <a:rPr lang="en-US" dirty="0"/>
+              <a:t> / </a:t>
+            </a:r>
+            <a:r>
+              <a:rPr lang="en-US" dirty="0" err="1"/>
+              <a:t>Pananalita</a:t>
+            </a:r>
+            <a:r>
+              <a:rPr lang="en-US" dirty="0"/>
+              <a:t> / Pag-</a:t>
+            </a:r>
+            <a:r>
+              <a:rPr lang="en-US" dirty="0" err="1"/>
+              <a:t>iisip</a:t>
+            </a:r>
+            <a:r>
+              <a:rPr lang="en-US" dirty="0"/>
+              <a:t> / Ugali).</a:t>
+            </a:r>
+          </a:p>
+          <a:p>
+            <a:endParaRPr dirty="0"/>
           </a:p>
         </p:txBody>
       </p:sp>
@@ -1784,28 +1819,12 @@
             <a:spLocks noGrp="1"/>
           </p:cNvSpPr>
           <p:nvPr>
-            <p:ph type="sldNum" sz="quarter" idx="10"/>
+            <p:ph type="sldNum" sz="quarter" idx="5"/>
           </p:nvPr>
         </p:nvSpPr>
         <p:spPr/>
-        <p:txBody>
-          <a:bodyPr/>
-          <a:lstStyle/>
-          <a:p>
-            <a:fld id="{F7021451-1387-4CA6-816F-3879F97B5CBC}" type="slidenum">
-              <a:rPr lang="en-US"/>
-              <a:t>3</a:t>
-            </a:fld>
-            <a:endParaRPr lang="en-US"/>
-          </a:p>
-        </p:txBody>
       </p:sp>
     </p:spTree>
-    <p:extLst>
-      <p:ext uri="{BB962C8B-B14F-4D97-AF65-F5344CB8AC3E}">
-        <p14:creationId xmlns:p14="http://schemas.microsoft.com/office/powerpoint/2010/main" val="1024086991"/>
-      </p:ext>
-    </p:extLst>
   </p:cSld>
   <p:clrMapOvr>
     <a:masterClrMapping/>
@@ -1861,7 +1880,9 @@
               <a:t>TANAW story from USAD p.36. If possible, play YouTube pgtmlVqCKxc (Monarch butterfly time-lapse) for ~60 seconds. Then tell the bata-gunting story: a child saw a butterfly struggling in its cocoon and cut it open to help. The butterfly emerged — but never flew. The struggle WAS the strengthening. The pressure pushes the fluid into the wings. Spiritual application: hindi lahat ng kaginhawaan ay biyaya. Hindi lahat ng hirap ay sumpa.</a:t>
             </a:r>
           </a:p>
-          <a:p/>
+          <a:p>
+            <a:endParaRPr/>
+          </a:p>
           <a:p>
             <a:r>
               <a:t>Combined window 4 min: Monarch video ~2.5 (walang commentary habang tumutugtog; highlight AFTER: 'Ang fluids na nagpupuno sa pakpak ay nailalabas lang sa PAGPILIT. Walang shortcut.') + bata-gunting story ~1.5 (IKUWENTO, huwag basahin). Punchline: 'Ang well-intentioned na tulong, pwedeng masamang dulot -- kung sira ang process.'</a:t>
@@ -1950,13 +1971,225 @@
           <a:lstStyle/>
           <a:p>
             <a:r>
-              <a:t>TUKLAS opening. Read the Big Idea slowly. Pause. Then deliver the punch line: 'pag-USAD ay nakadepende sa response, HINDI sa danas.' This is the thesis of the entire lesson. Every storm is real. But every response is a CHOICE. The disciple cannot control the weather; can only choose the posture under it.</a:t>
-            </a:r>
-          </a:p>
-          <a:p/>
-          <a:p>
-            <a:r>
-              <a:t>Frame with the USAD saying: 'SANGKAP ng pag-USAD ang DUSA.' Hindi mo kayang takasan ang hirap; kayang i-respond lang nang tama.</a:t>
+              <a:rPr dirty="0"/>
+              <a:t>PUKAW (~3 of 8 min). Open with last week's L4 SRPIU follow-up first — '</a:t>
+            </a:r>
+            <a:r>
+              <a:rPr dirty="0" err="1"/>
+              <a:t>Kumusta</a:t>
+            </a:r>
+            <a:r>
+              <a:rPr dirty="0"/>
+              <a:t> ang </a:t>
+            </a:r>
+            <a:r>
+              <a:rPr dirty="0" err="1"/>
+              <a:t>Pananalita</a:t>
+            </a:r>
+            <a:r>
+              <a:rPr dirty="0"/>
+              <a:t> / Pag-</a:t>
+            </a:r>
+            <a:r>
+              <a:rPr dirty="0" err="1"/>
+              <a:t>iisip</a:t>
+            </a:r>
+            <a:r>
+              <a:rPr dirty="0"/>
+              <a:t> / </a:t>
+            </a:r>
+            <a:r>
+              <a:rPr dirty="0" err="1"/>
+              <a:t>Sekswalidad</a:t>
+            </a:r>
+            <a:r>
+              <a:rPr dirty="0"/>
+              <a:t> watch </a:t>
+            </a:r>
+            <a:r>
+              <a:rPr dirty="0" err="1"/>
+              <a:t>ninyo</a:t>
+            </a:r>
+            <a:r>
+              <a:rPr dirty="0"/>
+              <a:t>?' — celebrate honest answers. Then transition: 'Now, </a:t>
+            </a:r>
+            <a:r>
+              <a:rPr dirty="0" err="1"/>
+              <a:t>totoo</a:t>
+            </a:r>
+            <a:r>
+              <a:rPr dirty="0"/>
+              <a:t> </a:t>
+            </a:r>
+            <a:r>
+              <a:rPr dirty="0" err="1"/>
+              <a:t>na</a:t>
+            </a:r>
+            <a:r>
+              <a:rPr dirty="0"/>
+              <a:t> holiness is hard. But may isa pang </a:t>
+            </a:r>
+            <a:r>
+              <a:rPr dirty="0" err="1"/>
+              <a:t>klase</a:t>
+            </a:r>
+            <a:r>
+              <a:rPr dirty="0"/>
+              <a:t> ng </a:t>
+            </a:r>
+            <a:r>
+              <a:rPr dirty="0" err="1"/>
+              <a:t>hirap</a:t>
+            </a:r>
+            <a:r>
+              <a:rPr dirty="0"/>
+              <a:t> — </a:t>
+            </a:r>
+            <a:r>
+              <a:rPr dirty="0" err="1"/>
+              <a:t>yung</a:t>
+            </a:r>
+            <a:r>
+              <a:rPr dirty="0"/>
+              <a:t> </a:t>
+            </a:r>
+            <a:r>
+              <a:rPr dirty="0" err="1"/>
+              <a:t>hindi</a:t>
+            </a:r>
+            <a:r>
+              <a:rPr dirty="0"/>
+              <a:t> </a:t>
+            </a:r>
+            <a:r>
+              <a:rPr dirty="0" err="1"/>
+              <a:t>mo</a:t>
+            </a:r>
+            <a:r>
+              <a:rPr dirty="0"/>
+              <a:t> </a:t>
+            </a:r>
+            <a:r>
+              <a:rPr dirty="0" err="1"/>
+              <a:t>pinili</a:t>
+            </a:r>
+            <a:r>
+              <a:rPr dirty="0"/>
+              <a:t>. Yan ang topic natin </a:t>
+            </a:r>
+            <a:r>
+              <a:rPr dirty="0" err="1"/>
+              <a:t>ngayon</a:t>
+            </a:r>
+            <a:r>
+              <a:rPr dirty="0"/>
+              <a:t>.' Let 2-3 share briefly. Don't force consensus.</a:t>
+            </a:r>
+            <a:endParaRPr lang="en-US" dirty="0"/>
+          </a:p>
+          <a:p>
+            <a:r>
+              <a:rPr lang="en-US" dirty="0"/>
+              <a:t>From 1-10 sang punto ka </a:t>
+            </a:r>
+            <a:r>
+              <a:rPr lang="en-US" dirty="0" err="1"/>
+              <a:t>ngayon</a:t>
+            </a:r>
+            <a:r>
+              <a:rPr lang="en-US" dirty="0"/>
+              <a:t> </a:t>
+            </a:r>
+            <a:r>
+              <a:rPr lang="en-US" dirty="0" err="1"/>
+              <a:t>sa</a:t>
+            </a:r>
+            <a:r>
+              <a:rPr lang="en-US" dirty="0"/>
+              <a:t> </a:t>
+            </a:r>
+            <a:r>
+              <a:rPr lang="en-US" dirty="0" err="1"/>
+              <a:t>pagharap</a:t>
+            </a:r>
+            <a:r>
+              <a:rPr lang="en-US" dirty="0"/>
+              <a:t> </a:t>
+            </a:r>
+            <a:r>
+              <a:rPr lang="en-US" dirty="0" err="1"/>
+              <a:t>sa</a:t>
+            </a:r>
+            <a:r>
+              <a:rPr lang="en-US" dirty="0"/>
+              <a:t> </a:t>
+            </a:r>
+            <a:r>
+              <a:rPr lang="en-US" dirty="0" err="1"/>
+              <a:t>hirap</a:t>
+            </a:r>
+            <a:r>
+              <a:rPr lang="en-US" dirty="0"/>
+              <a:t>?</a:t>
+            </a:r>
+            <a:endParaRPr dirty="0"/>
+          </a:p>
+          <a:p>
+            <a:endParaRPr dirty="0"/>
+          </a:p>
+          <a:p>
+            <a:r>
+              <a:rPr dirty="0"/>
+              <a:t>Round-robin (1 sentence each) o volunteer-based </a:t>
+            </a:r>
+            <a:r>
+              <a:rPr dirty="0" err="1"/>
+              <a:t>depende</a:t>
+            </a:r>
+            <a:r>
+              <a:rPr dirty="0"/>
+              <a:t> </a:t>
+            </a:r>
+            <a:r>
+              <a:rPr dirty="0" err="1"/>
+              <a:t>sa</a:t>
+            </a:r>
+            <a:r>
+              <a:rPr dirty="0"/>
+              <a:t> </a:t>
+            </a:r>
+            <a:r>
+              <a:rPr dirty="0" err="1"/>
+              <a:t>laki</a:t>
+            </a:r>
+            <a:r>
+              <a:rPr dirty="0"/>
+              <a:t> ng </a:t>
+            </a:r>
+            <a:r>
+              <a:rPr dirty="0" err="1"/>
+              <a:t>grupo</a:t>
+            </a:r>
+            <a:r>
+              <a:rPr dirty="0"/>
+              <a:t>. Walang fix mode -- </a:t>
+            </a:r>
+            <a:r>
+              <a:rPr dirty="0" err="1"/>
+              <a:t>tumitingin</a:t>
+            </a:r>
+            <a:r>
+              <a:rPr dirty="0"/>
+              <a:t> at </a:t>
+            </a:r>
+            <a:r>
+              <a:rPr dirty="0" err="1"/>
+              <a:t>tumatango</a:t>
+            </a:r>
+            <a:r>
+              <a:rPr dirty="0"/>
+              <a:t> lang. PUKAW ends here: check the pill -- 8:00.</a:t>
             </a:r>
           </a:p>
         </p:txBody>
@@ -2042,13 +2275,15 @@
           <a:lstStyle/>
           <a:p>
             <a:r>
-              <a:t>This is the load-bearing framework of TUKLAS. Walk through all three. EMPHASIS: the wrong diagnosis leads to the wrong response. If you treat a TEMPTATION like a TRIAL ('endure it patiently'), you fall. If you treat a TRIAL like a TEMPTATION ('this is from the devil so rebuke it'), you miss the formation. James 1:13 is critical: God does not tempt anyone. The devil tempts; God tests; the world wounds. Three different sources, three different responses.</a:t>
-            </a:r>
-          </a:p>
-          <a:p/>
-          <a:p>
-            <a:r>
-              <a:t>USAD emphasis: HINDI lahat ng hirap ay test. Minsan trial lang -- bahagi ng pagiging tao sa nawasak na mundo. Minsan temptation -- galing kay Satanas, never sa Dios (Jas 1:13). Ibang klase, ibang tamang tugon.</a:t>
+              <a:t>TUKLAS opening. Read the Big Idea slowly. Pause. Then deliver the punch line: 'pag-USAD ay nakadepende sa response, HINDI sa danas.' This is the thesis of the entire lesson. Every storm is real. But every response is a CHOICE. The disciple cannot control the weather; can only choose the posture under it.</a:t>
+            </a:r>
+          </a:p>
+          <a:p>
+            <a:endParaRPr/>
+          </a:p>
+          <a:p>
+            <a:r>
+              <a:t>Frame with the USAD saying: 'SANGKAP ng pag-USAD ang DUSA.' Hindi mo kayang takasan ang hirap; kayang i-respond lang nang tama.</a:t>
             </a:r>
           </a:p>
         </p:txBody>
@@ -2134,10 +2369,130 @@
           <a:lstStyle/>
           <a:p>
             <a:r>
-              <a:rPr lang="en-US" dirty="0"/>
-              <a:t>Eric Greitens — Navy SEAL turned author of 'Resilience.' Quote frames the next move. Pain itself is neutral; meaning is made by response. This is consistent with biblical theology: Romans 5:3-4 ('suffering produces perseverance') and James 1:2-4 ('the testing of your faith produces patience'). Patience is not innate — it's PRODUCED by trial that's faced well.</a:t>
-            </a:r>
-            <a:endParaRPr lang="en-US" dirty="0"/>
+              <a:rPr dirty="0"/>
+              <a:t>This is the load-bearing framework of TUKLAS. Walk through all three. EMPHASIS: the wrong diagnosis leads to the wrong response. If you treat a TEMPTATION like a TRIAL ('endure it patiently'), you fall. If you treat a TRIAL like a TEMPTATION ('this is from the devil so rebuke it'), you miss the formation. James 1:13 is critical: God does not tempt anyone. The devil tempts; God tests; the world wounds. Three different sources, three different responses.</a:t>
+            </a:r>
+          </a:p>
+          <a:p>
+            <a:endParaRPr dirty="0"/>
+          </a:p>
+          <a:p>
+            <a:r>
+              <a:rPr dirty="0"/>
+              <a:t>USAD emphasis: HINDI lahat ng </a:t>
+            </a:r>
+            <a:r>
+              <a:rPr dirty="0" err="1"/>
+              <a:t>hirap</a:t>
+            </a:r>
+            <a:r>
+              <a:rPr dirty="0"/>
+              <a:t> ay test. Minsan trial lang -- </a:t>
+            </a:r>
+            <a:r>
+              <a:rPr dirty="0" err="1"/>
+              <a:t>bahagi</a:t>
+            </a:r>
+            <a:r>
+              <a:rPr dirty="0"/>
+              <a:t> ng </a:t>
+            </a:r>
+            <a:r>
+              <a:rPr dirty="0" err="1"/>
+              <a:t>pagiging</a:t>
+            </a:r>
+            <a:r>
+              <a:rPr dirty="0"/>
+              <a:t> </a:t>
+            </a:r>
+            <a:r>
+              <a:rPr dirty="0" err="1"/>
+              <a:t>tao</a:t>
+            </a:r>
+            <a:r>
+              <a:rPr dirty="0"/>
+              <a:t> </a:t>
+            </a:r>
+            <a:r>
+              <a:rPr dirty="0" err="1"/>
+              <a:t>sa</a:t>
+            </a:r>
+            <a:r>
+              <a:rPr dirty="0"/>
+              <a:t> </a:t>
+            </a:r>
+            <a:r>
+              <a:rPr dirty="0" err="1"/>
+              <a:t>nawasak</a:t>
+            </a:r>
+            <a:r>
+              <a:rPr dirty="0"/>
+              <a:t> </a:t>
+            </a:r>
+            <a:r>
+              <a:rPr dirty="0" err="1"/>
+              <a:t>na</a:t>
+            </a:r>
+            <a:r>
+              <a:rPr dirty="0"/>
+              <a:t> </a:t>
+            </a:r>
+            <a:r>
+              <a:rPr dirty="0" err="1"/>
+              <a:t>mundo</a:t>
+            </a:r>
+            <a:r>
+              <a:rPr dirty="0"/>
+              <a:t>. Minsan temptation -- </a:t>
+            </a:r>
+            <a:r>
+              <a:rPr dirty="0" err="1"/>
+              <a:t>galing</a:t>
+            </a:r>
+            <a:r>
+              <a:rPr dirty="0"/>
+              <a:t> kay Satanas, never </a:t>
+            </a:r>
+            <a:r>
+              <a:rPr dirty="0" err="1"/>
+              <a:t>sa</a:t>
+            </a:r>
+            <a:r>
+              <a:rPr dirty="0"/>
+              <a:t> Dios (Jas 1:13). Ibang </a:t>
+            </a:r>
+            <a:r>
+              <a:rPr dirty="0" err="1"/>
+              <a:t>klase</a:t>
+            </a:r>
+            <a:r>
+              <a:rPr dirty="0"/>
+              <a:t>, </a:t>
+            </a:r>
+            <a:r>
+              <a:rPr dirty="0" err="1"/>
+              <a:t>ibang</a:t>
+            </a:r>
+            <a:r>
+              <a:rPr dirty="0"/>
+              <a:t> </a:t>
+            </a:r>
+            <a:r>
+              <a:rPr dirty="0" err="1"/>
+              <a:t>tamang</a:t>
+            </a:r>
+            <a:r>
+              <a:rPr dirty="0"/>
+              <a:t> </a:t>
+            </a:r>
+            <a:r>
+              <a:rPr dirty="0" err="1"/>
+              <a:t>tugon</a:t>
+            </a:r>
+            <a:r>
+              <a:rPr dirty="0"/>
+              <a:t>.</a:t>
+            </a:r>
           </a:p>
         </p:txBody>
       </p:sp>
@@ -2201,7 +2556,7 @@
             <a:spLocks noGrp="1" noRot="1" noChangeAspect="1"/>
           </p:cNvSpPr>
           <p:nvPr>
-            <p:ph type="sldImg"/>
+            <p:ph type="sldImg" idx="2"/>
           </p:nvPr>
         </p:nvSpPr>
         <p:spPr/>
@@ -2213,7 +2568,7 @@
             <a:spLocks noGrp="1"/>
           </p:cNvSpPr>
           <p:nvPr>
-            <p:ph type="body" idx="1"/>
+            <p:ph type="body" sz="quarter" idx="3"/>
           </p:nvPr>
         </p:nvSpPr>
         <p:spPr/>
@@ -2222,13 +2577,7 @@
           <a:lstStyle/>
           <a:p>
             <a:r>
-              <a:t>Walk through each of the 4. (1) JOB - read Job 1:20-21 aloud; note the 5 verbs: lumuhod, sumamba, hinubad, hinubdan, sinabi. He didn't deny pain — he worshipped through it. (2) PAUL - the thorn was NOT removed; the grace was sufficient. The hardship didn't end; Paul got new strength inside it. (3) PETER - 'magalak kayo' is shocking. Not 'magtiis kayo.' REJOICE. Why? Because sharing Christ's sufferings. (4) JESUS - the ultimate model. He asked for the cup to pass. Then surrendered. Patience includes asking honestly + then surrendering wholly.</a:t>
-            </a:r>
-          </a:p>
-          <a:p/>
-          <a:p>
-            <a:r>
-              <a:t>Guide amplifications: JOB -- hindi sumuko, SUMUKOB; naglaksa pero nagpuri; sumamba imbis na sumumpa. PABLO -- hindi pinapayagang gumaan ang problema; pinapayagang DUMAMI ang biyaya. PEDRO -- karangalan ang ma-identify sa Kaniya; hindi pa permanenteng tahanan ang lupa. JESUS -- pagtitiwala + pagsuko, kahit sa pinakamatinding hirap.</a:t>
+              <a:t>PERSONAL REFLECTION ~3 min (target 17:00). 1 minuto ganap na katahimikan muna -- bantayan sa timer, huwag putulin nang maaga. Pagkatapos, 2-3 volunteers. Mas dadami ang nag-she-share kapag nakita nilang walang nahuhusgahan. Testimony prompt: challenge AT blessing sa iisang kuwento.</a:t>
             </a:r>
           </a:p>
         </p:txBody>
@@ -2240,28 +2589,12 @@
             <a:spLocks noGrp="1"/>
           </p:cNvSpPr>
           <p:nvPr>
-            <p:ph type="sldNum" sz="quarter" idx="10"/>
+            <p:ph type="sldNum" sz="quarter" idx="5"/>
           </p:nvPr>
         </p:nvSpPr>
         <p:spPr/>
-        <p:txBody>
-          <a:bodyPr/>
-          <a:lstStyle/>
-          <a:p>
-            <a:fld id="{F7021451-1387-4CA6-816F-3879F97B5CBC}" type="slidenum">
-              <a:rPr lang="en-US"/>
-              <a:t>8</a:t>
-            </a:fld>
-            <a:endParaRPr lang="en-US"/>
-          </a:p>
-        </p:txBody>
       </p:sp>
     </p:spTree>
-    <p:extLst>
-      <p:ext uri="{BB962C8B-B14F-4D97-AF65-F5344CB8AC3E}">
-        <p14:creationId xmlns:p14="http://schemas.microsoft.com/office/powerpoint/2010/main" val="1024086991"/>
-      </p:ext>
-    </p:extLst>
   </p:cSld>
   <p:clrMapOvr>
     <a:masterClrMapping/>
@@ -2315,9 +2648,146 @@
           <a:p>
             <a:r>
               <a:rPr lang="en-US" dirty="0"/>
-              <a:t>Now we explicitly name what all 4 share: HYPOMONE — Greek for 'to remain under.' Not passive resignation. Active staying. Patience is what you DO while the hardship continues. This is the character anchor of L5. Connect back to L1-L4: prayer + bible + surrender + holiness — all these disciplines build the muscle that gets used HERE, under pressure.</a:t>
-            </a:r>
-            <a:endParaRPr lang="en-US" dirty="0"/>
+              <a:t>Eric Greitens — Navy SEAL turned author of 'Resilience.’ </a:t>
+            </a:r>
+          </a:p>
+          <a:p>
+            <a:r>
+              <a:rPr lang="en-US" dirty="0"/>
+              <a:t>"Injury does not necessarily lead to insight. Hardship will not automatically make us better. Pain can break us or make us wiser. Suffering can destroy us or make us stronger."</a:t>
+            </a:r>
+          </a:p>
+          <a:p>
+            <a:r>
+              <a:rPr lang="en-US" dirty="0"/>
+              <a:t>Hindi </a:t>
+            </a:r>
+            <a:r>
+              <a:rPr lang="en-US" dirty="0" err="1"/>
+              <a:t>porket</a:t>
+            </a:r>
+            <a:r>
+              <a:rPr lang="en-US" dirty="0"/>
+              <a:t> </a:t>
+            </a:r>
+            <a:r>
+              <a:rPr lang="en-US" dirty="0" err="1"/>
+              <a:t>dumaan</a:t>
+            </a:r>
+            <a:r>
+              <a:rPr lang="en-US" dirty="0"/>
+              <a:t> ka </a:t>
+            </a:r>
+            <a:r>
+              <a:rPr lang="en-US" dirty="0" err="1"/>
+              <a:t>sa</a:t>
+            </a:r>
+            <a:r>
+              <a:rPr lang="en-US" dirty="0"/>
+              <a:t> </a:t>
+            </a:r>
+            <a:r>
+              <a:rPr lang="en-US" dirty="0" err="1"/>
+              <a:t>pagsubok</a:t>
+            </a:r>
+            <a:r>
+              <a:rPr lang="en-US" dirty="0"/>
+              <a:t> ay </a:t>
+            </a:r>
+            <a:r>
+              <a:rPr lang="en-US" dirty="0" err="1"/>
+              <a:t>matatag</a:t>
+            </a:r>
+            <a:r>
+              <a:rPr lang="en-US" dirty="0"/>
+              <a:t> ka </a:t>
+            </a:r>
+            <a:r>
+              <a:rPr lang="en-US" dirty="0" err="1"/>
+              <a:t>na.</a:t>
+            </a:r>
+            <a:r>
+              <a:rPr lang="en-US" dirty="0"/>
+              <a:t> </a:t>
+            </a:r>
+            <a:r>
+              <a:rPr lang="en-US" dirty="0" err="1"/>
+              <a:t>Nakadepende</a:t>
+            </a:r>
+            <a:r>
+              <a:rPr lang="en-US" dirty="0"/>
+              <a:t> </a:t>
+            </a:r>
+            <a:r>
+              <a:rPr lang="en-US" dirty="0" err="1"/>
+              <a:t>sa</a:t>
+            </a:r>
+            <a:r>
+              <a:rPr lang="en-US" dirty="0"/>
+              <a:t> response. </a:t>
+            </a:r>
+            <a:r>
+              <a:rPr lang="en-US" dirty="0" err="1"/>
+              <a:t>Tingnan</a:t>
+            </a:r>
+            <a:r>
+              <a:rPr lang="en-US" dirty="0"/>
+              <a:t> natin ang </a:t>
+            </a:r>
+            <a:r>
+              <a:rPr lang="en-US" dirty="0" err="1"/>
+              <a:t>apat</a:t>
+            </a:r>
+            <a:r>
+              <a:rPr lang="en-US" dirty="0"/>
+              <a:t> </a:t>
+            </a:r>
+            <a:r>
+              <a:rPr lang="en-US" dirty="0" err="1"/>
+              <a:t>na</a:t>
+            </a:r>
+            <a:r>
+              <a:rPr lang="en-US" dirty="0"/>
+              <a:t> biblical responses </a:t>
+            </a:r>
+            <a:r>
+              <a:rPr lang="en-US" dirty="0" err="1"/>
+              <a:t>mula</a:t>
+            </a:r>
+            <a:r>
+              <a:rPr lang="en-US" dirty="0"/>
+              <a:t> </a:t>
+            </a:r>
+            <a:r>
+              <a:rPr lang="en-US" dirty="0" err="1"/>
+              <a:t>sa</a:t>
+            </a:r>
+            <a:r>
+              <a:rPr lang="en-US" dirty="0"/>
+              <a:t> </a:t>
+            </a:r>
+            <a:r>
+              <a:rPr lang="en-US" dirty="0" err="1"/>
+              <a:t>apat</a:t>
+            </a:r>
+            <a:r>
+              <a:rPr lang="en-US" dirty="0"/>
+              <a:t> </a:t>
+            </a:r>
+            <a:r>
+              <a:rPr lang="en-US" dirty="0" err="1"/>
+              <a:t>na</a:t>
+            </a:r>
+            <a:r>
+              <a:rPr lang="en-US" dirty="0"/>
+              <a:t> characters:</a:t>
+            </a:r>
+          </a:p>
+          <a:p>
+            <a:r>
+              <a:rPr lang="en-US" dirty="0"/>
+              <a:t>Quote frames the next move. Pain itself is neutral; meaning is made by response. This is consistent with biblical theology: Romans 5:3-4 ('suffering produces perseverance') and James 1:2-4 ('the testing of your faith produces patience'). Patience is not innate — it's PRODUCED by trial that's faced well.</a:t>
+            </a:r>
           </a:p>
         </p:txBody>
       </p:sp>
@@ -2390,6 +2860,11 @@
 <file path=ppt/slideMasters/slideMaster1.xml><?xml version="1.0" encoding="utf-8"?>
 <p:sldMaster xmlns:a="http://schemas.openxmlformats.org/drawingml/2006/main" xmlns:r="http://schemas.openxmlformats.org/officeDocument/2006/relationships" xmlns:p="http://schemas.openxmlformats.org/presentationml/2006/main">
   <p:cSld>
+    <p:bg>
+      <p:bgRef idx="1001">
+        <a:schemeClr val="bg1"/>
+      </p:bgRef>
+    </p:bg>
     <p:spTree>
       <p:nvGrpSpPr>
         <p:cNvPr id="1" name=""/>
@@ -2672,6 +3147,7 @@
         <a:solidFill>
           <a:srgbClr val="1A2E3F"/>
         </a:solidFill>
+        <a:effectLst/>
       </p:bgPr>
     </p:bg>
     <p:spTree>
@@ -2709,11 +3185,11 @@
           <a:bodyPr wrap="square" rtlCol="0" anchor="ctr"/>
           <a:lstStyle/>
           <a:p>
-            <a:pPr algn="ctr" indent="0" marL="0">
-              <a:buNone/>
-            </a:pPr>
-            <a:r>
-              <a:rPr lang="en-US" sz="1300" b="1" spc="800" kern="0" dirty="0">
+            <a:pPr marL="0" indent="0" algn="ctr">
+              <a:buNone/>
+            </a:pPr>
+            <a:r>
+              <a:rPr lang="en-US" sz="1300" b="1" kern="0" spc="800" dirty="0">
                 <a:solidFill>
                   <a:srgbClr val="F0C64A"/>
                 </a:solidFill>
@@ -2748,7 +3224,7 @@
           <a:bodyPr wrap="square" rtlCol="0" anchor="ctr"/>
           <a:lstStyle/>
           <a:p>
-            <a:pPr algn="ctr" indent="0" marL="0">
+            <a:pPr marL="0" indent="0" algn="ctr">
               <a:buNone/>
             </a:pPr>
             <a:r>
@@ -2787,7 +3263,7 @@
           <a:bodyPr wrap="square" rtlCol="0" anchor="ctr"/>
           <a:lstStyle/>
           <a:p>
-            <a:pPr algn="ctr" indent="0" marL="0">
+            <a:pPr marL="0" indent="0" algn="ctr">
               <a:buNone/>
             </a:pPr>
             <a:r>
@@ -2826,11 +3302,11 @@
           <a:bodyPr wrap="square" rtlCol="0" anchor="ctr"/>
           <a:lstStyle/>
           <a:p>
-            <a:pPr algn="ctr" indent="0" marL="0">
-              <a:buNone/>
-            </a:pPr>
-            <a:r>
-              <a:rPr lang="en-US" sz="1100" spc="300" kern="0" dirty="0">
+            <a:pPr marL="0" indent="0" algn="ctr">
+              <a:buNone/>
+            </a:pPr>
+            <a:r>
+              <a:rPr lang="en-US" sz="1100" kern="0" spc="300" dirty="0">
                 <a:solidFill>
                   <a:srgbClr val="FFFFFF">
                     <a:alpha val="50000"/>
@@ -2867,11 +3343,11 @@
           <a:bodyPr wrap="square" rtlCol="0" anchor="ctr"/>
           <a:lstStyle/>
           <a:p>
-            <a:pPr algn="ctr" indent="0" marL="0">
-              <a:buNone/>
-            </a:pPr>
-            <a:r>
-              <a:rPr lang="en-US" sz="900" b="1" spc="400" kern="0" dirty="0">
+            <a:pPr marL="0" indent="0" algn="ctr">
+              <a:buNone/>
+            </a:pPr>
+            <a:r>
+              <a:rPr lang="en-US" sz="900" b="1" kern="0" spc="400" dirty="0">
                 <a:solidFill>
                   <a:srgbClr val="D4A838">
                     <a:alpha val="70000"/>
@@ -2924,7 +3400,7 @@
           </a:fontRef>
         </p:style>
         <p:txBody>
-          <a:bodyPr rtlCol="0" anchor="ctr" wrap="none" tIns="0" bIns="0"/>
+          <a:bodyPr wrap="none" tIns="0" bIns="0" rtlCol="0" anchor="ctr"/>
           <a:lstStyle/>
           <a:p>
             <a:pPr algn="ctr"/>
@@ -2956,6 +3432,7 @@
         <a:solidFill>
           <a:srgbClr val="1F4830"/>
         </a:solidFill>
+        <a:effectLst/>
       </p:bgPr>
     </p:bg>
     <p:spTree>
@@ -2993,11 +3470,11 @@
           <a:bodyPr wrap="square" rtlCol="0" anchor="ctr"/>
           <a:lstStyle/>
           <a:p>
-            <a:pPr indent="0" marL="0">
-              <a:buNone/>
-            </a:pPr>
-            <a:r>
-              <a:rPr lang="en-US" sz="1000" b="1" spc="500" kern="0" dirty="0">
+            <a:pPr marL="0" indent="0">
+              <a:buNone/>
+            </a:pPr>
+            <a:r>
+              <a:rPr lang="en-US" sz="1000" b="1" kern="0" spc="500" dirty="0">
                 <a:solidFill>
                   <a:srgbClr val="FFFFFF">
                     <a:alpha val="50000"/>
@@ -3034,7 +3511,7 @@
           <a:bodyPr wrap="square" rtlCol="0" anchor="ctr"/>
           <a:lstStyle/>
           <a:p>
-            <a:pPr algn="ctr" indent="0" marL="0">
+            <a:pPr marL="0" indent="0" algn="ctr">
               <a:buNone/>
             </a:pPr>
             <a:r>
@@ -3073,7 +3550,7 @@
           <a:bodyPr wrap="square" rtlCol="0" anchor="ctr"/>
           <a:lstStyle/>
           <a:p>
-            <a:pPr algn="ctr" indent="0" marL="0">
+            <a:pPr marL="0" indent="0" algn="ctr">
               <a:buNone/>
             </a:pPr>
             <a:r>
@@ -3119,6 +3596,13 @@
             <a:prstDash val="solid"/>
           </a:ln>
         </p:spPr>
+        <p:txBody>
+          <a:bodyPr/>
+          <a:lstStyle/>
+          <a:p>
+            <a:endParaRPr lang="en-PH"/>
+          </a:p>
+        </p:txBody>
       </p:sp>
       <p:sp>
         <p:nvSpPr>
@@ -3139,6 +3623,13 @@
           </a:solidFill>
           <a:ln/>
         </p:spPr>
+        <p:txBody>
+          <a:bodyPr/>
+          <a:lstStyle/>
+          <a:p>
+            <a:endParaRPr lang="en-PH"/>
+          </a:p>
+        </p:txBody>
       </p:sp>
       <p:sp>
         <p:nvSpPr>
@@ -3161,7 +3652,7 @@
           <a:bodyPr wrap="square" rtlCol="0" anchor="ctr"/>
           <a:lstStyle/>
           <a:p>
-            <a:pPr indent="0" marL="0">
+            <a:pPr marL="0" indent="0">
               <a:buNone/>
             </a:pPr>
             <a:r>
@@ -3200,11 +3691,11 @@
           <a:bodyPr wrap="square" rtlCol="0" anchor="ctr"/>
           <a:lstStyle/>
           <a:p>
-            <a:pPr indent="0" marL="0">
-              <a:buNone/>
-            </a:pPr>
-            <a:r>
-              <a:rPr lang="en-US" sz="1200" b="1" spc="400" kern="0" dirty="0">
+            <a:pPr marL="0" indent="0">
+              <a:buNone/>
+            </a:pPr>
+            <a:r>
+              <a:rPr lang="en-US" sz="1200" b="1" kern="0" spc="400" dirty="0">
                 <a:solidFill>
                   <a:srgbClr val="F0C64A"/>
                 </a:solidFill>
@@ -3239,7 +3730,7 @@
           <a:bodyPr wrap="square" rtlCol="0" anchor="ctr"/>
           <a:lstStyle/>
           <a:p>
-            <a:pPr indent="0" marL="0">
+            <a:pPr marL="0" indent="0">
               <a:buNone/>
             </a:pPr>
             <a:r>
@@ -3285,6 +3776,13 @@
             <a:prstDash val="solid"/>
           </a:ln>
         </p:spPr>
+        <p:txBody>
+          <a:bodyPr/>
+          <a:lstStyle/>
+          <a:p>
+            <a:endParaRPr lang="en-PH"/>
+          </a:p>
+        </p:txBody>
       </p:sp>
       <p:sp>
         <p:nvSpPr>
@@ -3305,6 +3803,13 @@
           </a:solidFill>
           <a:ln/>
         </p:spPr>
+        <p:txBody>
+          <a:bodyPr/>
+          <a:lstStyle/>
+          <a:p>
+            <a:endParaRPr lang="en-PH"/>
+          </a:p>
+        </p:txBody>
       </p:sp>
       <p:sp>
         <p:nvSpPr>
@@ -3327,7 +3832,7 @@
           <a:bodyPr wrap="square" rtlCol="0" anchor="ctr"/>
           <a:lstStyle/>
           <a:p>
-            <a:pPr indent="0" marL="0">
+            <a:pPr marL="0" indent="0">
               <a:buNone/>
             </a:pPr>
             <a:r>
@@ -3366,11 +3871,11 @@
           <a:bodyPr wrap="square" rtlCol="0" anchor="ctr"/>
           <a:lstStyle/>
           <a:p>
-            <a:pPr indent="0" marL="0">
-              <a:buNone/>
-            </a:pPr>
-            <a:r>
-              <a:rPr lang="en-US" sz="1200" b="1" spc="400" kern="0" dirty="0">
+            <a:pPr marL="0" indent="0">
+              <a:buNone/>
+            </a:pPr>
+            <a:r>
+              <a:rPr lang="en-US" sz="1200" b="1" kern="0" spc="400" dirty="0">
                 <a:solidFill>
                   <a:srgbClr val="F0C64A"/>
                 </a:solidFill>
@@ -3405,7 +3910,7 @@
           <a:bodyPr wrap="square" rtlCol="0" anchor="ctr"/>
           <a:lstStyle/>
           <a:p>
-            <a:pPr indent="0" marL="0">
+            <a:pPr marL="0" indent="0">
               <a:buNone/>
             </a:pPr>
             <a:r>
@@ -3451,6 +3956,13 @@
             <a:prstDash val="solid"/>
           </a:ln>
         </p:spPr>
+        <p:txBody>
+          <a:bodyPr/>
+          <a:lstStyle/>
+          <a:p>
+            <a:endParaRPr lang="en-PH"/>
+          </a:p>
+        </p:txBody>
       </p:sp>
       <p:sp>
         <p:nvSpPr>
@@ -3471,6 +3983,13 @@
           </a:solidFill>
           <a:ln/>
         </p:spPr>
+        <p:txBody>
+          <a:bodyPr/>
+          <a:lstStyle/>
+          <a:p>
+            <a:endParaRPr lang="en-PH"/>
+          </a:p>
+        </p:txBody>
       </p:sp>
       <p:sp>
         <p:nvSpPr>
@@ -3493,7 +4012,7 @@
           <a:bodyPr wrap="square" rtlCol="0" anchor="ctr"/>
           <a:lstStyle/>
           <a:p>
-            <a:pPr indent="0" marL="0">
+            <a:pPr marL="0" indent="0">
               <a:buNone/>
             </a:pPr>
             <a:r>
@@ -3532,11 +4051,11 @@
           <a:bodyPr wrap="square" rtlCol="0" anchor="ctr"/>
           <a:lstStyle/>
           <a:p>
-            <a:pPr indent="0" marL="0">
-              <a:buNone/>
-            </a:pPr>
-            <a:r>
-              <a:rPr lang="en-US" sz="1200" b="1" spc="400" kern="0" dirty="0">
+            <a:pPr marL="0" indent="0">
+              <a:buNone/>
+            </a:pPr>
+            <a:r>
+              <a:rPr lang="en-US" sz="1200" b="1" kern="0" spc="400" dirty="0">
                 <a:solidFill>
                   <a:srgbClr val="F0C64A"/>
                 </a:solidFill>
@@ -3571,7 +4090,7 @@
           <a:bodyPr wrap="square" rtlCol="0" anchor="ctr"/>
           <a:lstStyle/>
           <a:p>
-            <a:pPr indent="0" marL="0">
+            <a:pPr marL="0" indent="0">
               <a:buNone/>
             </a:pPr>
             <a:r>
@@ -3617,6 +4136,13 @@
             <a:prstDash val="solid"/>
           </a:ln>
         </p:spPr>
+        <p:txBody>
+          <a:bodyPr/>
+          <a:lstStyle/>
+          <a:p>
+            <a:endParaRPr lang="en-PH"/>
+          </a:p>
+        </p:txBody>
       </p:sp>
       <p:sp>
         <p:nvSpPr>
@@ -3637,6 +4163,13 @@
           </a:solidFill>
           <a:ln/>
         </p:spPr>
+        <p:txBody>
+          <a:bodyPr/>
+          <a:lstStyle/>
+          <a:p>
+            <a:endParaRPr lang="en-PH"/>
+          </a:p>
+        </p:txBody>
       </p:sp>
       <p:sp>
         <p:nvSpPr>
@@ -3659,7 +4192,7 @@
           <a:bodyPr wrap="square" rtlCol="0" anchor="ctr"/>
           <a:lstStyle/>
           <a:p>
-            <a:pPr indent="0" marL="0">
+            <a:pPr marL="0" indent="0">
               <a:buNone/>
             </a:pPr>
             <a:r>
@@ -3698,11 +4231,11 @@
           <a:bodyPr wrap="square" rtlCol="0" anchor="ctr"/>
           <a:lstStyle/>
           <a:p>
-            <a:pPr indent="0" marL="0">
-              <a:buNone/>
-            </a:pPr>
-            <a:r>
-              <a:rPr lang="en-US" sz="1200" b="1" spc="400" kern="0" dirty="0">
+            <a:pPr marL="0" indent="0">
+              <a:buNone/>
+            </a:pPr>
+            <a:r>
+              <a:rPr lang="en-US" sz="1200" b="1" kern="0" spc="400" dirty="0">
                 <a:solidFill>
                   <a:srgbClr val="F0C64A"/>
                 </a:solidFill>
@@ -3737,7 +4270,7 @@
           <a:bodyPr wrap="square" rtlCol="0" anchor="ctr"/>
           <a:lstStyle/>
           <a:p>
-            <a:pPr indent="0" marL="0">
+            <a:pPr marL="0" indent="0">
               <a:buNone/>
             </a:pPr>
             <a:r>
@@ -3794,7 +4327,7 @@
           </a:fontRef>
         </p:style>
         <p:txBody>
-          <a:bodyPr rtlCol="0" anchor="ctr" wrap="none" tIns="0" bIns="0"/>
+          <a:bodyPr wrap="none" tIns="0" bIns="0" rtlCol="0" anchor="ctr"/>
           <a:lstStyle/>
           <a:p>
             <a:pPr algn="ctr"/>
@@ -3826,6 +4359,7 @@
         <a:solidFill>
           <a:srgbClr val="9A7820"/>
         </a:solidFill>
+        <a:effectLst/>
       </p:bgPr>
     </p:bg>
     <p:spTree>
@@ -3863,11 +4397,11 @@
           <a:bodyPr wrap="square" rtlCol="0" anchor="ctr"/>
           <a:lstStyle/>
           <a:p>
-            <a:pPr indent="0" marL="0">
-              <a:buNone/>
-            </a:pPr>
-            <a:r>
-              <a:rPr lang="en-US" sz="1000" b="1" spc="500" kern="0" dirty="0">
+            <a:pPr marL="0" indent="0">
+              <a:buNone/>
+            </a:pPr>
+            <a:r>
+              <a:rPr lang="en-US" sz="1000" b="1" kern="0" spc="500" dirty="0">
                 <a:solidFill>
                   <a:srgbClr val="FFFFFF">
                     <a:alpha val="50000"/>
@@ -3904,11 +4438,11 @@
           <a:bodyPr wrap="square" rtlCol="0" anchor="ctr"/>
           <a:lstStyle/>
           <a:p>
-            <a:pPr algn="ctr" indent="0" marL="0">
-              <a:buNone/>
-            </a:pPr>
-            <a:r>
-              <a:rPr lang="en-US" sz="1300" b="1" spc="600" kern="0" dirty="0">
+            <a:pPr marL="0" indent="0" algn="ctr">
+              <a:buNone/>
+            </a:pPr>
+            <a:r>
+              <a:rPr lang="en-US" sz="1300" b="1" kern="0" spc="600" dirty="0">
                 <a:solidFill>
                   <a:srgbClr val="F0C64A"/>
                 </a:solidFill>
@@ -3943,7 +4477,7 @@
           <a:bodyPr wrap="square" rtlCol="0" anchor="ctr"/>
           <a:lstStyle/>
           <a:p>
-            <a:pPr algn="ctr" indent="0" marL="0">
+            <a:pPr marL="0" indent="0" algn="ctr">
               <a:buNone/>
             </a:pPr>
             <a:r>
@@ -3982,7 +4516,7 @@
           <a:bodyPr wrap="square" rtlCol="0" anchor="ctr"/>
           <a:lstStyle/>
           <a:p>
-            <a:pPr algn="ctr" indent="0" marL="0">
+            <a:pPr marL="0" indent="0" algn="ctr">
               <a:buNone/>
             </a:pPr>
             <a:r>
@@ -4023,7 +4557,7 @@
           <a:bodyPr wrap="square" rtlCol="0" anchor="ctr"/>
           <a:lstStyle/>
           <a:p>
-            <a:pPr algn="ctr" indent="0" marL="0">
+            <a:pPr marL="0" indent="0" algn="ctr">
               <a:buNone/>
             </a:pPr>
             <a:r>
@@ -4062,7 +4596,7 @@
           <a:bodyPr wrap="square" rtlCol="0" anchor="ctr"/>
           <a:lstStyle/>
           <a:p>
-            <a:pPr algn="ctr" indent="0" marL="0">
+            <a:pPr marL="0" indent="0" algn="ctr">
               <a:buNone/>
             </a:pPr>
             <a:r>
@@ -4119,7 +4653,7 @@
           </a:fontRef>
         </p:style>
         <p:txBody>
-          <a:bodyPr rtlCol="0" anchor="ctr" wrap="none" tIns="0" bIns="0"/>
+          <a:bodyPr wrap="none" tIns="0" bIns="0" rtlCol="0" anchor="ctr"/>
           <a:lstStyle/>
           <a:p>
             <a:pPr algn="ctr"/>
@@ -4151,6 +4685,7 @@
         <a:solidFill>
           <a:srgbClr val="FDF6E8"/>
         </a:solidFill>
+        <a:effectLst/>
       </p:bgPr>
     </p:bg>
     <p:spTree>
@@ -4188,11 +4723,11 @@
           <a:bodyPr wrap="square" rtlCol="0" anchor="ctr"/>
           <a:lstStyle/>
           <a:p>
-            <a:pPr indent="0" marL="0">
-              <a:buNone/>
-            </a:pPr>
-            <a:r>
-              <a:rPr lang="en-US" sz="1100" b="1" spc="500" kern="0" dirty="0">
+            <a:pPr marL="0" indent="0">
+              <a:buNone/>
+            </a:pPr>
+            <a:r>
+              <a:rPr lang="en-US" sz="1100" b="1" kern="0" spc="500" dirty="0">
                 <a:solidFill>
                   <a:srgbClr val="2A5C40"/>
                 </a:solidFill>
@@ -4227,7 +4762,7 @@
           <a:bodyPr wrap="square" rtlCol="0" anchor="ctr"/>
           <a:lstStyle/>
           <a:p>
-            <a:pPr algn="ctr" indent="0" marL="0">
+            <a:pPr marL="0" indent="0" algn="ctr">
               <a:buNone/>
             </a:pPr>
             <a:r>
@@ -4266,7 +4801,10 @@
         </p:spPr>
         <p:txBody>
           <a:bodyPr/>
-          <a:p/>
+          <a:lstStyle/>
+          <a:p>
+            <a:endParaRPr/>
+          </a:p>
         </p:txBody>
       </p:sp>
       <p:sp>
@@ -4290,7 +4828,7 @@
           <a:bodyPr wrap="square" rtlCol="0" anchor="ctr"/>
           <a:lstStyle/>
           <a:p>
-            <a:pPr indent="0" marL="0">
+            <a:pPr marL="0" indent="0">
               <a:buNone/>
             </a:pPr>
             <a:r>
@@ -4304,9 +4842,6 @@
               </a:rPr>
               <a:t>Volunteer-basis. Walang uutusan.</a:t>
             </a:r>
-            <a:pPr indent="0" marL="0">
-              <a:buNone/>
-            </a:pPr>
             <a:endParaRPr lang="en-US" sz="1900" dirty="0"/>
           </a:p>
         </p:txBody>
@@ -4332,7 +4867,10 @@
         </p:spPr>
         <p:txBody>
           <a:bodyPr/>
-          <a:p/>
+          <a:lstStyle/>
+          <a:p>
+            <a:endParaRPr/>
+          </a:p>
         </p:txBody>
       </p:sp>
       <p:sp>
@@ -4356,7 +4894,7 @@
           <a:bodyPr wrap="square" rtlCol="0" anchor="ctr"/>
           <a:lstStyle/>
           <a:p>
-            <a:pPr indent="0" marL="0">
+            <a:pPr marL="0" indent="0">
               <a:buNone/>
             </a:pPr>
             <a:r>
@@ -4370,9 +4908,6 @@
               </a:rPr>
               <a:t>Walang sasabat, walang magpapayo agad — tumitingin at nakikinig lang tayo.</a:t>
             </a:r>
-            <a:pPr indent="0" marL="0">
-              <a:buNone/>
-            </a:pPr>
             <a:endParaRPr lang="en-US" sz="1900" dirty="0"/>
           </a:p>
         </p:txBody>
@@ -4398,7 +4933,10 @@
         </p:spPr>
         <p:txBody>
           <a:bodyPr/>
-          <a:p/>
+          <a:lstStyle/>
+          <a:p>
+            <a:endParaRPr/>
+          </a:p>
         </p:txBody>
       </p:sp>
       <p:sp>
@@ -4422,7 +4960,7 @@
           <a:bodyPr wrap="square" rtlCol="0" anchor="ctr"/>
           <a:lstStyle/>
           <a:p>
-            <a:pPr indent="0" marL="0">
+            <a:pPr marL="0" indent="0">
               <a:buNone/>
             </a:pPr>
             <a:r>
@@ -4436,9 +4974,6 @@
               </a:rPr>
               <a:t>Confidential — hindi lalabas sa apat na pader. Kung sobrang lalim, pwedeng one-on-one after.</a:t>
             </a:r>
-            <a:pPr indent="0" marL="0">
-              <a:buNone/>
-            </a:pPr>
             <a:endParaRPr lang="en-US" sz="1900" dirty="0"/>
           </a:p>
         </p:txBody>
@@ -4464,7 +4999,7 @@
           <a:bodyPr wrap="square" rtlCol="0" anchor="ctr"/>
           <a:lstStyle/>
           <a:p>
-            <a:pPr algn="ctr" indent="0" marL="0">
+            <a:pPr marL="0" indent="0" algn="ctr">
               <a:buNone/>
             </a:pPr>
             <a:r>
@@ -4519,7 +5054,7 @@
           </a:fontRef>
         </p:style>
         <p:txBody>
-          <a:bodyPr rtlCol="0" anchor="ctr" wrap="none" tIns="0" bIns="0"/>
+          <a:bodyPr wrap="none" tIns="0" bIns="0" rtlCol="0" anchor="ctr"/>
           <a:lstStyle/>
           <a:p>
             <a:pPr algn="ctr"/>
@@ -4551,6 +5086,7 @@
         <a:solidFill>
           <a:srgbClr val="FDF6E8"/>
         </a:solidFill>
+        <a:effectLst/>
       </p:bgPr>
     </p:bg>
     <p:spTree>
@@ -4588,11 +5124,11 @@
           <a:bodyPr wrap="square" rtlCol="0" anchor="ctr"/>
           <a:lstStyle/>
           <a:p>
-            <a:pPr indent="0" marL="0">
-              <a:buNone/>
-            </a:pPr>
-            <a:r>
-              <a:rPr lang="en-US" sz="1100" b="1" spc="500" kern="0" dirty="0">
+            <a:pPr marL="0" indent="0">
+              <a:buNone/>
+            </a:pPr>
+            <a:r>
+              <a:rPr lang="en-US" sz="1100" b="1" kern="0" spc="500" dirty="0">
                 <a:solidFill>
                   <a:srgbClr val="2A5C40"/>
                 </a:solidFill>
@@ -4627,7 +5163,7 @@
           <a:bodyPr wrap="square" rtlCol="0" anchor="ctr"/>
           <a:lstStyle/>
           <a:p>
-            <a:pPr algn="ctr" indent="0" marL="0">
+            <a:pPr marL="0" indent="0" algn="ctr">
               <a:buNone/>
             </a:pPr>
             <a:r>
@@ -4666,7 +5202,10 @@
         </p:spPr>
         <p:txBody>
           <a:bodyPr/>
-          <a:p/>
+          <a:lstStyle/>
+          <a:p>
+            <a:endParaRPr/>
+          </a:p>
         </p:txBody>
       </p:sp>
       <p:sp>
@@ -4690,7 +5229,7 @@
           <a:bodyPr wrap="square" rtlCol="0" anchor="ctr"/>
           <a:lstStyle/>
           <a:p>
-            <a:pPr indent="0" marL="0">
+            <a:pPr marL="0" indent="0">
               <a:buNone/>
             </a:pPr>
             <a:r>
@@ -4704,9 +5243,6 @@
               </a:rPr>
               <a:t>I-share (kung handa ka) ang pinakamatinding pagsubok na dinanas mo — o ng isang taong malapit sa’yo.</a:t>
             </a:r>
-            <a:pPr indent="0" marL="0">
-              <a:buNone/>
-            </a:pPr>
             <a:endParaRPr lang="en-US" sz="1900" dirty="0"/>
           </a:p>
         </p:txBody>
@@ -4732,7 +5268,10 @@
         </p:spPr>
         <p:txBody>
           <a:bodyPr/>
-          <a:p/>
+          <a:lstStyle/>
+          <a:p>
+            <a:endParaRPr/>
+          </a:p>
         </p:txBody>
       </p:sp>
       <p:sp>
@@ -4756,7 +5295,7 @@
           <a:bodyPr wrap="square" rtlCol="0" anchor="ctr"/>
           <a:lstStyle/>
           <a:p>
-            <a:pPr indent="0" marL="0">
+            <a:pPr marL="0" indent="0">
               <a:buNone/>
             </a:pPr>
             <a:r>
@@ -4770,9 +5309,6 @@
               </a:rPr>
               <a:t>Max 2 sharers. Pagkatapos ng bawat isa, facilitator lang: “Salamat sa pagshare. Naririnig ka namin.”</a:t>
             </a:r>
-            <a:pPr indent="0" marL="0">
-              <a:buNone/>
-            </a:pPr>
             <a:endParaRPr lang="en-US" sz="1900" dirty="0"/>
           </a:p>
         </p:txBody>
@@ -4798,7 +5334,7 @@
           <a:bodyPr wrap="square" rtlCol="0" anchor="ctr"/>
           <a:lstStyle/>
           <a:p>
-            <a:pPr algn="ctr" indent="0" marL="0">
+            <a:pPr marL="0" indent="0" algn="ctr">
               <a:buNone/>
             </a:pPr>
             <a:r>
@@ -4853,7 +5389,7 @@
           </a:fontRef>
         </p:style>
         <p:txBody>
-          <a:bodyPr rtlCol="0" anchor="ctr" wrap="none" tIns="0" bIns="0"/>
+          <a:bodyPr wrap="none" tIns="0" bIns="0" rtlCol="0" anchor="ctr"/>
           <a:lstStyle/>
           <a:p>
             <a:pPr algn="ctr"/>
@@ -4885,6 +5421,7 @@
         <a:solidFill>
           <a:srgbClr val="FDF6E8"/>
         </a:solidFill>
+        <a:effectLst/>
       </p:bgPr>
     </p:bg>
     <p:spTree>
@@ -4922,11 +5459,11 @@
           <a:bodyPr wrap="square" rtlCol="0" anchor="ctr"/>
           <a:lstStyle/>
           <a:p>
-            <a:pPr indent="0" marL="0">
-              <a:buNone/>
-            </a:pPr>
-            <a:r>
-              <a:rPr lang="en-US" sz="1100" b="1" spc="500" kern="0" dirty="0">
+            <a:pPr marL="0" indent="0">
+              <a:buNone/>
+            </a:pPr>
+            <a:r>
+              <a:rPr lang="en-US" sz="1100" b="1" kern="0" spc="500" dirty="0">
                 <a:solidFill>
                   <a:srgbClr val="2A5C40"/>
                 </a:solidFill>
@@ -4961,7 +5498,7 @@
           <a:bodyPr wrap="square" rtlCol="0" anchor="ctr"/>
           <a:lstStyle/>
           <a:p>
-            <a:pPr algn="ctr" indent="0" marL="0">
+            <a:pPr marL="0" indent="0" algn="ctr">
               <a:buNone/>
             </a:pPr>
             <a:r>
@@ -5000,7 +5537,7 @@
           <a:bodyPr wrap="square" rtlCol="0" anchor="ctr"/>
           <a:lstStyle/>
           <a:p>
-            <a:pPr algn="ctr" indent="0" marL="0">
+            <a:pPr marL="0" indent="0" algn="ctr">
               <a:buNone/>
             </a:pPr>
             <a:r>
@@ -5039,7 +5576,7 @@
           <a:bodyPr wrap="square" rtlCol="0" anchor="ctr"/>
           <a:lstStyle/>
           <a:p>
-            <a:pPr algn="ctr" indent="0" marL="0">
+            <a:pPr marL="0" indent="0" algn="ctr">
               <a:buNone/>
             </a:pPr>
             <a:r>
@@ -5078,20 +5615,9 @@
           <a:bodyPr wrap="square" rtlCol="0" anchor="ctr"/>
           <a:lstStyle/>
           <a:p>
-            <a:pPr algn="ctr" indent="0" marL="0">
-              <a:buNone/>
-            </a:pPr>
-            <a:r>
-              <a:rPr lang="en-US" sz="1400" i="1" dirty="0">
-                <a:solidFill>
-                  <a:srgbClr val="5A6655"/>
-                </a:solidFill>
-                <a:latin typeface="DM Sans" pitchFamily="34" charset="0"/>
-                <a:ea typeface="DM Sans" pitchFamily="34" charset="-122"/>
-                <a:cs typeface="DM Sans" pitchFamily="34" charset="-120"/>
-              </a:rPr>
-              <a:t/>
-            </a:r>
+            <a:pPr marL="0" indent="0" algn="ctr">
+              <a:buNone/>
+            </a:pPr>
             <a:endParaRPr lang="en-US" sz="1400" dirty="0"/>
           </a:p>
         </p:txBody>
@@ -5133,7 +5659,7 @@
           </a:fontRef>
         </p:style>
         <p:txBody>
-          <a:bodyPr rtlCol="0" anchor="ctr" wrap="none" tIns="0" bIns="0"/>
+          <a:bodyPr wrap="none" tIns="0" bIns="0" rtlCol="0" anchor="ctr"/>
           <a:lstStyle/>
           <a:p>
             <a:pPr algn="ctr"/>
@@ -5165,6 +5691,7 @@
         <a:solidFill>
           <a:srgbClr val="FDF6E8"/>
         </a:solidFill>
+        <a:effectLst/>
       </p:bgPr>
     </p:bg>
     <p:spTree>
@@ -5202,11 +5729,11 @@
           <a:bodyPr wrap="square" rtlCol="0" anchor="ctr"/>
           <a:lstStyle/>
           <a:p>
-            <a:pPr indent="0" marL="0">
-              <a:buNone/>
-            </a:pPr>
-            <a:r>
-              <a:rPr lang="en-US" sz="1100" b="1" spc="500" kern="0" dirty="0">
+            <a:pPr marL="0" indent="0">
+              <a:buNone/>
+            </a:pPr>
+            <a:r>
+              <a:rPr lang="en-US" sz="1100" b="1" kern="0" spc="500" dirty="0">
                 <a:solidFill>
                   <a:srgbClr val="2A5C40"/>
                 </a:solidFill>
@@ -5241,7 +5768,7 @@
           <a:bodyPr wrap="square" rtlCol="0" anchor="ctr"/>
           <a:lstStyle/>
           <a:p>
-            <a:pPr algn="ctr" indent="0" marL="0">
+            <a:pPr marL="0" indent="0" algn="ctr">
               <a:buNone/>
             </a:pPr>
             <a:r>
@@ -5280,7 +5807,7 @@
           <a:bodyPr wrap="square" rtlCol="0" anchor="ctr"/>
           <a:lstStyle/>
           <a:p>
-            <a:pPr algn="ctr" indent="0" marL="0">
+            <a:pPr marL="0" indent="0" algn="ctr">
               <a:buNone/>
             </a:pPr>
             <a:r>
@@ -5297,7 +5824,7 @@
             <a:endParaRPr lang="en-US" sz="2400" dirty="0"/>
           </a:p>
           <a:p>
-            <a:pPr algn="ctr" indent="0" marL="0">
+            <a:pPr marL="0" indent="0" algn="ctr">
               <a:buNone/>
             </a:pPr>
             <a:r>
@@ -5336,7 +5863,7 @@
           <a:bodyPr wrap="square" rtlCol="0" anchor="ctr"/>
           <a:lstStyle/>
           <a:p>
-            <a:pPr algn="ctr" indent="0" marL="0">
+            <a:pPr marL="0" indent="0" algn="ctr">
               <a:buNone/>
             </a:pPr>
             <a:r>
@@ -5375,20 +5902,9 @@
           <a:bodyPr wrap="square" rtlCol="0" anchor="ctr"/>
           <a:lstStyle/>
           <a:p>
-            <a:pPr algn="ctr" indent="0" marL="0">
-              <a:buNone/>
-            </a:pPr>
-            <a:r>
-              <a:rPr lang="en-US" sz="1400" i="1" dirty="0">
-                <a:solidFill>
-                  <a:srgbClr val="5A6655"/>
-                </a:solidFill>
-                <a:latin typeface="DM Sans" pitchFamily="34" charset="0"/>
-                <a:ea typeface="DM Sans" pitchFamily="34" charset="-122"/>
-                <a:cs typeface="DM Sans" pitchFamily="34" charset="-120"/>
-              </a:rPr>
-              <a:t/>
-            </a:r>
+            <a:pPr marL="0" indent="0" algn="ctr">
+              <a:buNone/>
+            </a:pPr>
             <a:endParaRPr lang="en-US" sz="1400" dirty="0"/>
           </a:p>
         </p:txBody>
@@ -5430,7 +5946,7 @@
           </a:fontRef>
         </p:style>
         <p:txBody>
-          <a:bodyPr rtlCol="0" anchor="ctr" wrap="none" tIns="0" bIns="0"/>
+          <a:bodyPr wrap="none" tIns="0" bIns="0" rtlCol="0" anchor="ctr"/>
           <a:lstStyle/>
           <a:p>
             <a:pPr algn="ctr"/>
@@ -5462,6 +5978,7 @@
         <a:solidFill>
           <a:srgbClr val="1A2E3F"/>
         </a:solidFill>
+        <a:effectLst/>
       </p:bgPr>
     </p:bg>
     <p:spTree>
@@ -5499,11 +6016,11 @@
           <a:bodyPr wrap="square" rtlCol="0" anchor="ctr"/>
           <a:lstStyle/>
           <a:p>
-            <a:pPr indent="0" marL="0">
-              <a:buNone/>
-            </a:pPr>
-            <a:r>
-              <a:rPr lang="en-US" sz="1000" b="1" spc="500" kern="0" dirty="0">
+            <a:pPr marL="0" indent="0">
+              <a:buNone/>
+            </a:pPr>
+            <a:r>
+              <a:rPr lang="en-US" sz="1000" b="1" kern="0" spc="500" dirty="0">
                 <a:solidFill>
                   <a:srgbClr val="FFFFFF">
                     <a:alpha val="50000"/>
@@ -5540,7 +6057,7 @@
           <a:bodyPr wrap="square" rtlCol="0" anchor="ctr"/>
           <a:lstStyle/>
           <a:p>
-            <a:pPr algn="ctr" indent="0" marL="0">
+            <a:pPr marL="0" indent="0" algn="ctr">
               <a:buNone/>
             </a:pPr>
             <a:r>
@@ -5581,7 +6098,7 @@
           <a:bodyPr wrap="square" rtlCol="0" anchor="ctr"/>
           <a:lstStyle/>
           <a:p>
-            <a:pPr algn="ctr" indent="0" marL="0">
+            <a:pPr marL="0" indent="0" algn="ctr">
               <a:buNone/>
             </a:pPr>
             <a:r>
@@ -5598,7 +6115,7 @@
             <a:endParaRPr lang="en-US" sz="3200" dirty="0"/>
           </a:p>
           <a:p>
-            <a:pPr algn="ctr" indent="0" marL="0">
+            <a:pPr marL="0" indent="0" algn="ctr">
               <a:buNone/>
             </a:pPr>
             <a:r>
@@ -5615,7 +6132,7 @@
             <a:endParaRPr lang="en-US" sz="3200" dirty="0"/>
           </a:p>
           <a:p>
-            <a:pPr algn="ctr" indent="0" marL="0">
+            <a:pPr marL="0" indent="0" algn="ctr">
               <a:buNone/>
             </a:pPr>
             <a:r>
@@ -5632,7 +6149,7 @@
             <a:endParaRPr lang="en-US" sz="3200" dirty="0"/>
           </a:p>
           <a:p>
-            <a:pPr algn="ctr" indent="0" marL="0">
+            <a:pPr marL="0" indent="0" algn="ctr">
               <a:buNone/>
             </a:pPr>
             <a:r>
@@ -5646,9 +6163,6 @@
               </a:rPr>
               <a:t>shouts in our pain</a:t>
             </a:r>
-            <a:pPr algn="ctr" indent="0" marL="0">
-              <a:buNone/>
-            </a:pPr>
             <a:r>
               <a:rPr lang="en-US" sz="3200" i="1" dirty="0">
                 <a:solidFill>
@@ -5685,11 +6199,11 @@
           <a:bodyPr wrap="square" rtlCol="0" anchor="ctr"/>
           <a:lstStyle/>
           <a:p>
-            <a:pPr algn="ctr" indent="0" marL="0">
-              <a:buNone/>
-            </a:pPr>
-            <a:r>
-              <a:rPr lang="en-US" sz="1300" b="1" spc="500" kern="0" dirty="0">
+            <a:pPr marL="0" indent="0" algn="ctr">
+              <a:buNone/>
+            </a:pPr>
+            <a:r>
+              <a:rPr lang="en-US" sz="1300" b="1" kern="0" spc="500" dirty="0">
                 <a:solidFill>
                   <a:srgbClr val="FFFFFF">
                     <a:alpha val="65000"/>
@@ -5742,7 +6256,7 @@
           </a:fontRef>
         </p:style>
         <p:txBody>
-          <a:bodyPr rtlCol="0" anchor="ctr" wrap="none" tIns="0" bIns="0"/>
+          <a:bodyPr wrap="none" tIns="0" bIns="0" rtlCol="0" anchor="ctr"/>
           <a:lstStyle/>
           <a:p>
             <a:pPr algn="ctr"/>
@@ -5774,6 +6288,7 @@
         <a:solidFill>
           <a:srgbClr val="9A7820"/>
         </a:solidFill>
+        <a:effectLst/>
       </p:bgPr>
     </p:bg>
     <p:spTree>
@@ -5811,11 +6326,11 @@
           <a:bodyPr wrap="square" rtlCol="0" anchor="ctr"/>
           <a:lstStyle/>
           <a:p>
-            <a:pPr indent="0" marL="0">
-              <a:buNone/>
-            </a:pPr>
-            <a:r>
-              <a:rPr lang="en-US" sz="1000" b="1" spc="500" kern="0" dirty="0">
+            <a:pPr marL="0" indent="0">
+              <a:buNone/>
+            </a:pPr>
+            <a:r>
+              <a:rPr lang="en-US" sz="1000" b="1" kern="0" spc="500" dirty="0">
                 <a:solidFill>
                   <a:srgbClr val="FFFFFF">
                     <a:alpha val="50000"/>
@@ -5852,7 +6367,7 @@
           <a:bodyPr wrap="square" rtlCol="0" anchor="ctr"/>
           <a:lstStyle/>
           <a:p>
-            <a:pPr algn="ctr" indent="0" marL="0">
+            <a:pPr marL="0" indent="0" algn="ctr">
               <a:buNone/>
             </a:pPr>
             <a:r>
@@ -5891,7 +6406,7 @@
           <a:bodyPr wrap="square" rtlCol="0" anchor="ctr"/>
           <a:lstStyle/>
           <a:p>
-            <a:pPr indent="0" marL="0">
+            <a:pPr marL="0" indent="0">
               <a:buNone/>
             </a:pPr>
             <a:r>
@@ -5905,9 +6420,6 @@
               </a:rPr>
               <a:t>1871</a:t>
             </a:r>
-            <a:pPr indent="0" marL="0">
-              <a:buNone/>
-            </a:pPr>
             <a:r>
               <a:rPr lang="en-US" sz="1700" dirty="0">
                 <a:solidFill>
@@ -5944,7 +6456,7 @@
           <a:bodyPr wrap="square" rtlCol="0" anchor="ctr"/>
           <a:lstStyle/>
           <a:p>
-            <a:pPr indent="0" marL="0">
+            <a:pPr marL="0" indent="0">
               <a:buNone/>
             </a:pPr>
             <a:r>
@@ -5958,9 +6470,6 @@
               </a:rPr>
               <a:t>1873</a:t>
             </a:r>
-            <a:pPr indent="0" marL="0">
-              <a:buNone/>
-            </a:pPr>
             <a:r>
               <a:rPr lang="en-US" sz="1700" dirty="0">
                 <a:solidFill>
@@ -5997,7 +6506,7 @@
           <a:bodyPr wrap="square" rtlCol="0" anchor="ctr"/>
           <a:lstStyle/>
           <a:p>
-            <a:pPr indent="0" marL="0">
+            <a:pPr marL="0" indent="0">
               <a:buNone/>
             </a:pPr>
             <a:r>
@@ -6011,9 +6520,6 @@
               </a:rPr>
               <a:t>Nov 1873</a:t>
             </a:r>
-            <a:pPr indent="0" marL="0">
-              <a:buNone/>
-            </a:pPr>
             <a:r>
               <a:rPr lang="en-US" sz="1700" dirty="0">
                 <a:solidFill>
@@ -6050,7 +6556,7 @@
           <a:bodyPr wrap="square" rtlCol="0" anchor="ctr"/>
           <a:lstStyle/>
           <a:p>
-            <a:pPr algn="ctr" indent="0" marL="0">
+            <a:pPr marL="0" indent="0" algn="ctr">
               <a:buNone/>
             </a:pPr>
             <a:r>
@@ -6089,7 +6595,7 @@
           <a:bodyPr wrap="square" rtlCol="0" anchor="ctr"/>
           <a:lstStyle/>
           <a:p>
-            <a:pPr algn="ctr" indent="0" marL="0">
+            <a:pPr marL="0" indent="0" algn="ctr">
               <a:buNone/>
             </a:pPr>
             <a:r>
@@ -6106,7 +6612,7 @@
             <a:endParaRPr lang="en-US" sz="2800" dirty="0"/>
           </a:p>
           <a:p>
-            <a:pPr algn="ctr" indent="0" marL="0">
+            <a:pPr marL="0" indent="0" algn="ctr">
               <a:buNone/>
             </a:pPr>
             <a:r>
@@ -6161,7 +6667,7 @@
           </a:fontRef>
         </p:style>
         <p:txBody>
-          <a:bodyPr rtlCol="0" anchor="ctr" wrap="none" tIns="0" bIns="0"/>
+          <a:bodyPr wrap="none" tIns="0" bIns="0" rtlCol="0" anchor="ctr"/>
           <a:lstStyle/>
           <a:p>
             <a:pPr algn="ctr"/>
@@ -6193,6 +6699,7 @@
         <a:solidFill>
           <a:srgbClr val="1F4830"/>
         </a:solidFill>
+        <a:effectLst/>
       </p:bgPr>
     </p:bg>
     <p:spTree>
@@ -6230,11 +6737,11 @@
           <a:bodyPr wrap="square" rtlCol="0" anchor="ctr"/>
           <a:lstStyle/>
           <a:p>
-            <a:pPr indent="0" marL="0">
-              <a:buNone/>
-            </a:pPr>
-            <a:r>
-              <a:rPr lang="en-US" sz="1000" b="1" spc="500" kern="0" dirty="0">
+            <a:pPr marL="0" indent="0">
+              <a:buNone/>
+            </a:pPr>
+            <a:r>
+              <a:rPr lang="en-US" sz="1000" b="1" kern="0" spc="500" dirty="0">
                 <a:solidFill>
                   <a:srgbClr val="FFFFFF">
                     <a:alpha val="50000"/>
@@ -6271,11 +6778,11 @@
           <a:bodyPr wrap="square" rtlCol="0" anchor="ctr"/>
           <a:lstStyle/>
           <a:p>
-            <a:pPr algn="ctr" indent="0" marL="0">
-              <a:buNone/>
-            </a:pPr>
-            <a:r>
-              <a:rPr lang="en-US" sz="1300" b="1" spc="600" kern="0" dirty="0">
+            <a:pPr marL="0" indent="0" algn="ctr">
+              <a:buNone/>
+            </a:pPr>
+            <a:r>
+              <a:rPr lang="en-US" sz="1300" b="1" kern="0" spc="600" dirty="0">
                 <a:solidFill>
                   <a:srgbClr val="F0C64A"/>
                 </a:solidFill>
@@ -6310,7 +6817,7 @@
           <a:bodyPr wrap="square" rtlCol="0" anchor="ctr"/>
           <a:lstStyle/>
           <a:p>
-            <a:pPr algn="ctr" indent="0" marL="0">
+            <a:pPr marL="0" indent="0" algn="ctr">
               <a:buNone/>
             </a:pPr>
             <a:r>
@@ -6349,7 +6856,7 @@
           <a:bodyPr wrap="square" rtlCol="0" anchor="ctr"/>
           <a:lstStyle/>
           <a:p>
-            <a:pPr algn="ctr" indent="0" marL="0">
+            <a:pPr marL="0" indent="0" algn="ctr">
               <a:buNone/>
             </a:pPr>
             <a:r>
@@ -6390,7 +6897,7 @@
           <a:bodyPr wrap="square" rtlCol="0" anchor="ctr"/>
           <a:lstStyle/>
           <a:p>
-            <a:pPr algn="ctr" indent="0" marL="0">
+            <a:pPr marL="0" indent="0" algn="ctr">
               <a:buNone/>
             </a:pPr>
             <a:r>
@@ -6429,7 +6936,7 @@
           <a:bodyPr wrap="square" rtlCol="0" anchor="ctr"/>
           <a:lstStyle/>
           <a:p>
-            <a:pPr algn="ctr" indent="0" marL="0">
+            <a:pPr marL="0" indent="0" algn="ctr">
               <a:buNone/>
             </a:pPr>
             <a:r>
@@ -6486,7 +6993,7 @@
           </a:fontRef>
         </p:style>
         <p:txBody>
-          <a:bodyPr rtlCol="0" anchor="ctr" wrap="none" tIns="0" bIns="0"/>
+          <a:bodyPr wrap="none" tIns="0" bIns="0" rtlCol="0" anchor="ctr"/>
           <a:lstStyle/>
           <a:p>
             <a:pPr algn="ctr"/>
@@ -6518,6 +7025,7 @@
         <a:solidFill>
           <a:srgbClr val="FDF6E8"/>
         </a:solidFill>
+        <a:effectLst/>
       </p:bgPr>
     </p:bg>
     <p:spTree>
@@ -6555,11 +7063,11 @@
           <a:bodyPr wrap="square" rtlCol="0" anchor="ctr"/>
           <a:lstStyle/>
           <a:p>
-            <a:pPr indent="0" marL="0">
-              <a:buNone/>
-            </a:pPr>
-            <a:r>
-              <a:rPr lang="en-US" sz="1100" b="1" spc="500" kern="0" dirty="0">
+            <a:pPr marL="0" indent="0">
+              <a:buNone/>
+            </a:pPr>
+            <a:r>
+              <a:rPr lang="en-US" sz="1100" b="1" kern="0" spc="500" dirty="0">
                 <a:solidFill>
                   <a:srgbClr val="2A5C40"/>
                 </a:solidFill>
@@ -6581,7 +7089,7 @@
         </p:nvSpPr>
         <p:spPr>
           <a:xfrm>
-            <a:off x="457200" y="1371600"/>
+            <a:off x="457200" y="828670"/>
             <a:ext cx="11247120" cy="1005840"/>
           </a:xfrm>
           <a:prstGeom prst="rect">
@@ -6594,7 +7102,7 @@
           <a:bodyPr wrap="square" rtlCol="0" anchor="ctr"/>
           <a:lstStyle/>
           <a:p>
-            <a:pPr algn="ctr" indent="0" marL="0">
+            <a:pPr marL="0" indent="0" algn="ctr">
               <a:buNone/>
             </a:pPr>
             <a:r>
@@ -6606,7 +7114,29 @@
                 <a:ea typeface="Playfair Display" pitchFamily="34" charset="-122"/>
                 <a:cs typeface="Playfair Display" pitchFamily="34" charset="-120"/>
               </a:rPr>
-              <a:t>Sagutan sa book…</a:t>
+              <a:t>Sagutan </a:t>
+            </a:r>
+            <a:r>
+              <a:rPr lang="en-US" sz="5200" b="1" dirty="0" err="1">
+                <a:solidFill>
+                  <a:srgbClr val="1A1612"/>
+                </a:solidFill>
+                <a:latin typeface="Playfair Display" pitchFamily="34" charset="0"/>
+                <a:ea typeface="Playfair Display" pitchFamily="34" charset="-122"/>
+                <a:cs typeface="Playfair Display" pitchFamily="34" charset="-120"/>
+              </a:rPr>
+              <a:t>sa</a:t>
+            </a:r>
+            <a:r>
+              <a:rPr lang="en-US" sz="5200" b="1" dirty="0">
+                <a:solidFill>
+                  <a:srgbClr val="1A1612"/>
+                </a:solidFill>
+                <a:latin typeface="Playfair Display" pitchFamily="34" charset="0"/>
+                <a:ea typeface="Playfair Display" pitchFamily="34" charset="-122"/>
+                <a:cs typeface="Playfair Display" pitchFamily="34" charset="-120"/>
+              </a:rPr>
+              <a:t> App…</a:t>
             </a:r>
             <a:endParaRPr lang="en-US" sz="5200" dirty="0"/>
           </a:p>
@@ -6633,7 +7163,7 @@
           <a:bodyPr wrap="square" rtlCol="0" anchor="ctr"/>
           <a:lstStyle/>
           <a:p>
-            <a:pPr algn="ctr" indent="0" marL="0">
+            <a:pPr marL="0" indent="0" algn="ctr">
               <a:buNone/>
             </a:pPr>
             <a:r>
@@ -6650,7 +7180,7 @@
             <a:endParaRPr lang="en-US" sz="2400" dirty="0"/>
           </a:p>
           <a:p>
-            <a:pPr algn="ctr" indent="0" marL="0">
+            <a:pPr marL="0" indent="0" algn="ctr">
               <a:buNone/>
             </a:pPr>
             <a:r>
@@ -6667,7 +7197,7 @@
             <a:endParaRPr lang="en-US" sz="2400" dirty="0"/>
           </a:p>
           <a:p>
-            <a:pPr algn="ctr" indent="0" marL="0">
+            <a:pPr marL="0" indent="0" algn="ctr">
               <a:buNone/>
             </a:pPr>
             <a:r>
@@ -6693,7 +7223,7 @@
         </p:nvSpPr>
         <p:spPr>
           <a:xfrm>
-            <a:off x="457200" y="4023360"/>
+            <a:off x="457200" y="4266251"/>
             <a:ext cx="11247120" cy="731520"/>
           </a:xfrm>
           <a:prstGeom prst="rect">
@@ -6706,7 +7236,7 @@
           <a:bodyPr wrap="square" rtlCol="0" anchor="ctr"/>
           <a:lstStyle/>
           <a:p>
-            <a:pPr algn="ctr" indent="0" marL="0">
+            <a:pPr marL="0" indent="0" algn="ctr">
               <a:buNone/>
             </a:pPr>
             <a:r>
@@ -6745,20 +7275,9 @@
           <a:bodyPr wrap="square" rtlCol="0" anchor="ctr"/>
           <a:lstStyle/>
           <a:p>
-            <a:pPr algn="ctr" indent="0" marL="0">
-              <a:buNone/>
-            </a:pPr>
-            <a:r>
-              <a:rPr lang="en-US" sz="1400" i="1" dirty="0">
-                <a:solidFill>
-                  <a:srgbClr val="5A6655"/>
-                </a:solidFill>
-                <a:latin typeface="DM Sans" pitchFamily="34" charset="0"/>
-                <a:ea typeface="DM Sans" pitchFamily="34" charset="-122"/>
-                <a:cs typeface="DM Sans" pitchFamily="34" charset="-120"/>
-              </a:rPr>
-              <a:t/>
-            </a:r>
+            <a:pPr marL="0" indent="0" algn="ctr">
+              <a:buNone/>
+            </a:pPr>
             <a:endParaRPr lang="en-US" sz="1400" dirty="0"/>
           </a:p>
         </p:txBody>
@@ -6800,7 +7319,7 @@
           </a:fontRef>
         </p:style>
         <p:txBody>
-          <a:bodyPr rtlCol="0" anchor="ctr" wrap="none" tIns="0" bIns="0"/>
+          <a:bodyPr wrap="none" tIns="0" bIns="0" rtlCol="0" anchor="ctr"/>
           <a:lstStyle/>
           <a:p>
             <a:pPr algn="ctr"/>
@@ -6832,6 +7351,7 @@
         <a:solidFill>
           <a:srgbClr val="1F4830"/>
         </a:solidFill>
+        <a:effectLst/>
       </p:bgPr>
     </p:bg>
     <p:spTree>
@@ -6869,11 +7389,11 @@
           <a:bodyPr wrap="square" rtlCol="0" anchor="ctr"/>
           <a:lstStyle/>
           <a:p>
-            <a:pPr indent="0" marL="0">
-              <a:buNone/>
-            </a:pPr>
-            <a:r>
-              <a:rPr lang="en-US" sz="1000" b="1" spc="500" kern="0" dirty="0">
+            <a:pPr marL="0" indent="0">
+              <a:buNone/>
+            </a:pPr>
+            <a:r>
+              <a:rPr lang="en-US" sz="1000" b="1" kern="0" spc="500" dirty="0">
                 <a:solidFill>
                   <a:srgbClr val="FFFFFF">
                     <a:alpha val="50000"/>
@@ -6910,11 +7430,11 @@
           <a:bodyPr wrap="square" rtlCol="0" anchor="ctr"/>
           <a:lstStyle/>
           <a:p>
-            <a:pPr algn="r" indent="0" marL="0">
-              <a:buNone/>
-            </a:pPr>
-            <a:r>
-              <a:rPr lang="en-US" sz="1000" b="1" spc="300" kern="0" dirty="0">
+            <a:pPr marL="0" indent="0" algn="r">
+              <a:buNone/>
+            </a:pPr>
+            <a:r>
+              <a:rPr lang="en-US" sz="1000" b="1" kern="0" spc="300" dirty="0">
                 <a:solidFill>
                   <a:srgbClr val="FFFFFF">
                     <a:alpha val="50000"/>
@@ -6951,11 +7471,11 @@
           <a:bodyPr wrap="square" rtlCol="0" anchor="ctr"/>
           <a:lstStyle/>
           <a:p>
-            <a:pPr algn="ctr" indent="0" marL="0">
-              <a:buNone/>
-            </a:pPr>
-            <a:r>
-              <a:rPr lang="en-US" sz="1400" b="1" spc="800" kern="0" dirty="0">
+            <a:pPr marL="0" indent="0" algn="ctr">
+              <a:buNone/>
+            </a:pPr>
+            <a:r>
+              <a:rPr lang="en-US" sz="1400" b="1" kern="0" spc="800" dirty="0">
                 <a:solidFill>
                   <a:srgbClr val="F0C64A"/>
                 </a:solidFill>
@@ -6990,7 +7510,7 @@
           <a:bodyPr wrap="square" rtlCol="0" anchor="ctr"/>
           <a:lstStyle/>
           <a:p>
-            <a:pPr algn="ctr" indent="0" marL="0">
+            <a:pPr marL="0" indent="0" algn="ctr">
               <a:buNone/>
             </a:pPr>
             <a:r>
@@ -7029,11 +7549,11 @@
           <a:bodyPr wrap="square" rtlCol="0" anchor="ctr"/>
           <a:lstStyle/>
           <a:p>
-            <a:pPr algn="ctr" indent="0" marL="0">
-              <a:buNone/>
-            </a:pPr>
-            <a:r>
-              <a:rPr lang="en-US" sz="1400" b="1" spc="1000" kern="0" dirty="0">
+            <a:pPr marL="0" indent="0" algn="ctr">
+              <a:buNone/>
+            </a:pPr>
+            <a:r>
+              <a:rPr lang="en-US" sz="1400" b="1" kern="0" spc="1000" dirty="0">
                 <a:solidFill>
                   <a:srgbClr val="D4A838"/>
                 </a:solidFill>
@@ -7084,7 +7604,7 @@
           </a:fontRef>
         </p:style>
         <p:txBody>
-          <a:bodyPr rtlCol="0" anchor="ctr" wrap="none" tIns="0" bIns="0"/>
+          <a:bodyPr wrap="none" tIns="0" bIns="0" rtlCol="0" anchor="ctr"/>
           <a:lstStyle/>
           <a:p>
             <a:pPr algn="ctr"/>
@@ -7116,6 +7636,7 @@
         <a:solidFill>
           <a:srgbClr val="FDF6E8"/>
         </a:solidFill>
+        <a:effectLst/>
       </p:bgPr>
     </p:bg>
     <p:spTree>
@@ -7153,11 +7674,11 @@
           <a:bodyPr wrap="square" rtlCol="0" anchor="ctr"/>
           <a:lstStyle/>
           <a:p>
-            <a:pPr indent="0" marL="0">
-              <a:buNone/>
-            </a:pPr>
-            <a:r>
-              <a:rPr lang="en-US" sz="1100" b="1" spc="500" kern="0" dirty="0">
+            <a:pPr marL="0" indent="0">
+              <a:buNone/>
+            </a:pPr>
+            <a:r>
+              <a:rPr lang="en-US" sz="1100" b="1" kern="0" spc="500" dirty="0">
                 <a:solidFill>
                   <a:srgbClr val="2A5C40"/>
                 </a:solidFill>
@@ -7192,7 +7713,7 @@
           <a:bodyPr wrap="square" rtlCol="0" anchor="ctr"/>
           <a:lstStyle/>
           <a:p>
-            <a:pPr algn="ctr" indent="0" marL="0">
+            <a:pPr marL="0" indent="0" algn="ctr">
               <a:buNone/>
             </a:pPr>
             <a:r>
@@ -7229,6 +7750,13 @@
           </a:solidFill>
           <a:ln/>
         </p:spPr>
+        <p:txBody>
+          <a:bodyPr/>
+          <a:lstStyle/>
+          <a:p>
+            <a:endParaRPr lang="en-PH"/>
+          </a:p>
+        </p:txBody>
       </p:sp>
       <p:sp>
         <p:nvSpPr>
@@ -7251,7 +7779,7 @@
           <a:bodyPr wrap="square" rtlCol="0" anchor="ctr"/>
           <a:lstStyle/>
           <a:p>
-            <a:pPr indent="0" marL="0">
+            <a:pPr marL="0" indent="0">
               <a:buNone/>
             </a:pPr>
             <a:r>
@@ -7265,9 +7793,6 @@
               </a:rPr>
               <a:t>3-Trial Watch Journal · </a:t>
             </a:r>
-            <a:pPr indent="0" marL="0">
-              <a:buNone/>
-            </a:pPr>
             <a:r>
               <a:rPr lang="en-US" sz="1700" dirty="0">
                 <a:solidFill>
@@ -7302,6 +7827,13 @@
           </a:solidFill>
           <a:ln/>
         </p:spPr>
+        <p:txBody>
+          <a:bodyPr/>
+          <a:lstStyle/>
+          <a:p>
+            <a:endParaRPr lang="en-PH"/>
+          </a:p>
+        </p:txBody>
       </p:sp>
       <p:sp>
         <p:nvSpPr>
@@ -7324,7 +7856,7 @@
           <a:bodyPr wrap="square" rtlCol="0" anchor="ctr"/>
           <a:lstStyle/>
           <a:p>
-            <a:pPr indent="0" marL="0">
+            <a:pPr marL="0" indent="0">
               <a:buNone/>
             </a:pPr>
             <a:r>
@@ -7338,9 +7870,6 @@
               </a:rPr>
               <a:t>EOLO bridge · </a:t>
             </a:r>
-            <a:pPr indent="0" marL="0">
-              <a:buNone/>
-            </a:pPr>
             <a:r>
               <a:rPr lang="en-US" sz="1700" dirty="0">
                 <a:solidFill>
@@ -7375,6 +7904,13 @@
           </a:solidFill>
           <a:ln/>
         </p:spPr>
+        <p:txBody>
+          <a:bodyPr/>
+          <a:lstStyle/>
+          <a:p>
+            <a:endParaRPr lang="en-PH"/>
+          </a:p>
+        </p:txBody>
       </p:sp>
       <p:sp>
         <p:nvSpPr>
@@ -7397,7 +7933,7 @@
           <a:bodyPr wrap="square" rtlCol="0" anchor="ctr"/>
           <a:lstStyle/>
           <a:p>
-            <a:pPr indent="0" marL="0">
+            <a:pPr marL="0" indent="0">
               <a:buNone/>
             </a:pPr>
             <a:r>
@@ -7411,9 +7947,6 @@
               </a:rPr>
               <a:t>Kabisaduhin · </a:t>
             </a:r>
-            <a:pPr indent="0" marL="0">
-              <a:buNone/>
-            </a:pPr>
             <a:r>
               <a:rPr lang="en-US" sz="1700" dirty="0">
                 <a:solidFill>
@@ -7450,7 +7983,7 @@
           <a:bodyPr wrap="square" rtlCol="0" anchor="ctr"/>
           <a:lstStyle/>
           <a:p>
-            <a:pPr algn="ctr" indent="0" marL="0">
+            <a:pPr marL="0" indent="0" algn="ctr">
               <a:buNone/>
             </a:pPr>
             <a:r>
@@ -7505,7 +8038,7 @@
           </a:fontRef>
         </p:style>
         <p:txBody>
-          <a:bodyPr rtlCol="0" anchor="ctr" wrap="none" tIns="0" bIns="0"/>
+          <a:bodyPr wrap="none" tIns="0" bIns="0" rtlCol="0" anchor="ctr"/>
           <a:lstStyle/>
           <a:p>
             <a:pPr algn="ctr"/>
@@ -7537,6 +8070,7 @@
         <a:solidFill>
           <a:srgbClr val="1A2E3F"/>
         </a:solidFill>
+        <a:effectLst/>
       </p:bgPr>
     </p:bg>
     <p:spTree>
@@ -7574,11 +8108,11 @@
           <a:bodyPr wrap="square" rtlCol="0" anchor="ctr"/>
           <a:lstStyle/>
           <a:p>
-            <a:pPr indent="0" marL="0">
-              <a:buNone/>
-            </a:pPr>
-            <a:r>
-              <a:rPr lang="en-US" sz="1000" b="1" spc="500" kern="0" dirty="0">
+            <a:pPr marL="0" indent="0">
+              <a:buNone/>
+            </a:pPr>
+            <a:r>
+              <a:rPr lang="en-US" sz="1000" b="1" kern="0" spc="500" dirty="0">
                 <a:solidFill>
                   <a:srgbClr val="FFFFFF">
                     <a:alpha val="50000"/>
@@ -7615,6 +8149,13 @@
           </a:solidFill>
           <a:ln/>
         </p:spPr>
+        <p:txBody>
+          <a:bodyPr/>
+          <a:lstStyle/>
+          <a:p>
+            <a:endParaRPr lang="en-PH"/>
+          </a:p>
+        </p:txBody>
       </p:sp>
       <p:sp>
         <p:nvSpPr>
@@ -7637,11 +8178,11 @@
           <a:bodyPr wrap="square" rtlCol="0" anchor="ctr"/>
           <a:lstStyle/>
           <a:p>
-            <a:pPr algn="ctr" indent="0" marL="0">
-              <a:buNone/>
-            </a:pPr>
-            <a:r>
-              <a:rPr lang="en-US" sz="1400" b="1" spc="800" kern="0" dirty="0">
+            <a:pPr marL="0" indent="0" algn="ctr">
+              <a:buNone/>
+            </a:pPr>
+            <a:r>
+              <a:rPr lang="en-US" sz="1400" b="1" kern="0" spc="800" dirty="0">
                 <a:solidFill>
                   <a:srgbClr val="1A2E3F"/>
                 </a:solidFill>
@@ -7676,7 +8217,7 @@
           <a:bodyPr wrap="square" rtlCol="0" anchor="ctr"/>
           <a:lstStyle/>
           <a:p>
-            <a:pPr algn="ctr" indent="0" marL="0">
+            <a:pPr marL="0" indent="0" algn="ctr">
               <a:buNone/>
             </a:pPr>
             <a:r>
@@ -7715,7 +8256,7 @@
           <a:bodyPr wrap="square" rtlCol="0" anchor="ctr"/>
           <a:lstStyle/>
           <a:p>
-            <a:pPr algn="ctr" indent="0" marL="0">
+            <a:pPr marL="0" indent="0" algn="ctr">
               <a:buNone/>
             </a:pPr>
             <a:r>
@@ -7756,7 +8297,7 @@
           <a:bodyPr wrap="square" rtlCol="0" anchor="ctr"/>
           <a:lstStyle/>
           <a:p>
-            <a:pPr algn="ctr" indent="0" marL="0">
+            <a:pPr marL="0" indent="0" algn="ctr">
               <a:buNone/>
             </a:pPr>
             <a:r>
@@ -7773,7 +8314,7 @@
             <a:endParaRPr lang="en-US" sz="3600" dirty="0"/>
           </a:p>
           <a:p>
-            <a:pPr algn="ctr" indent="0" marL="0">
+            <a:pPr marL="0" indent="0" algn="ctr">
               <a:buNone/>
             </a:pPr>
             <a:r>
@@ -7790,7 +8331,7 @@
             <a:endParaRPr lang="en-US" sz="3600" dirty="0"/>
           </a:p>
           <a:p>
-            <a:pPr algn="ctr" indent="0" marL="0">
+            <a:pPr marL="0" indent="0" algn="ctr">
               <a:buNone/>
             </a:pPr>
             <a:r>
@@ -7829,7 +8370,7 @@
           <a:bodyPr wrap="square" rtlCol="0" anchor="ctr"/>
           <a:lstStyle/>
           <a:p>
-            <a:pPr algn="ctr" indent="0" marL="0">
+            <a:pPr marL="0" indent="0" algn="ctr">
               <a:buNone/>
             </a:pPr>
             <a:r>
@@ -7886,7 +8427,7 @@
           </a:fontRef>
         </p:style>
         <p:txBody>
-          <a:bodyPr rtlCol="0" anchor="ctr" wrap="none" tIns="0" bIns="0"/>
+          <a:bodyPr wrap="none" tIns="0" bIns="0" rtlCol="0" anchor="ctr"/>
           <a:lstStyle/>
           <a:p>
             <a:pPr algn="ctr"/>
@@ -7918,6 +8459,7 @@
         <a:solidFill>
           <a:srgbClr val="1F4830"/>
         </a:solidFill>
+        <a:effectLst/>
       </p:bgPr>
     </p:bg>
     <p:spTree>
@@ -7955,11 +8497,11 @@
           <a:bodyPr wrap="square" rtlCol="0" anchor="ctr"/>
           <a:lstStyle/>
           <a:p>
-            <a:pPr indent="0" marL="0">
-              <a:buNone/>
-            </a:pPr>
-            <a:r>
-              <a:rPr lang="en-US" sz="1000" b="1" spc="500" kern="0" dirty="0">
+            <a:pPr marL="0" indent="0">
+              <a:buNone/>
+            </a:pPr>
+            <a:r>
+              <a:rPr lang="en-US" sz="1000" b="1" kern="0" spc="500" dirty="0">
                 <a:solidFill>
                   <a:srgbClr val="FFFFFF">
                     <a:alpha val="50000"/>
@@ -7996,11 +8538,11 @@
           <a:bodyPr wrap="square" rtlCol="0" anchor="ctr"/>
           <a:lstStyle/>
           <a:p>
-            <a:pPr algn="ctr" indent="0" marL="0">
-              <a:buNone/>
-            </a:pPr>
-            <a:r>
-              <a:rPr lang="en-US" sz="1300" b="1" spc="800" kern="0" dirty="0">
+            <a:pPr marL="0" indent="0" algn="ctr">
+              <a:buNone/>
+            </a:pPr>
+            <a:r>
+              <a:rPr lang="en-US" sz="1300" b="1" kern="0" spc="800" dirty="0">
                 <a:solidFill>
                   <a:srgbClr val="F0C64A"/>
                 </a:solidFill>
@@ -8035,7 +8577,7 @@
           <a:bodyPr wrap="square" rtlCol="0" anchor="ctr"/>
           <a:lstStyle/>
           <a:p>
-            <a:pPr algn="ctr" indent="0" marL="0">
+            <a:pPr marL="0" indent="0" algn="ctr">
               <a:buNone/>
             </a:pPr>
             <a:r>
@@ -8074,7 +8616,7 @@
           <a:bodyPr wrap="square" rtlCol="0" anchor="ctr"/>
           <a:lstStyle/>
           <a:p>
-            <a:pPr algn="ctr" indent="0" marL="0">
+            <a:pPr marL="0" indent="0" algn="ctr">
               <a:buNone/>
             </a:pPr>
             <a:r>
@@ -8115,7 +8657,7 @@
           <a:bodyPr wrap="square" rtlCol="0" anchor="ctr"/>
           <a:lstStyle/>
           <a:p>
-            <a:pPr algn="ctr" indent="0" marL="0">
+            <a:pPr marL="0" indent="0" algn="ctr">
               <a:buNone/>
             </a:pPr>
             <a:r>
@@ -8132,7 +8674,7 @@
             <a:endParaRPr lang="en-US" sz="2800" dirty="0"/>
           </a:p>
           <a:p>
-            <a:pPr algn="ctr" indent="0" marL="0">
+            <a:pPr marL="0" indent="0" algn="ctr">
               <a:buNone/>
             </a:pPr>
             <a:r>
@@ -8149,7 +8691,7 @@
             <a:endParaRPr lang="en-US" sz="2800" dirty="0"/>
           </a:p>
           <a:p>
-            <a:pPr algn="ctr" indent="0" marL="0">
+            <a:pPr marL="0" indent="0" algn="ctr">
               <a:buNone/>
             </a:pPr>
             <a:r>
@@ -8163,9 +8705,6 @@
               </a:rPr>
               <a:t>dinaig ko na ang sanlibutan</a:t>
             </a:r>
-            <a:pPr algn="ctr" indent="0" marL="0">
-              <a:buNone/>
-            </a:pPr>
             <a:r>
               <a:rPr lang="en-US" sz="2800" i="1" dirty="0">
                 <a:solidFill>
@@ -8202,11 +8741,11 @@
           <a:bodyPr wrap="square" rtlCol="0" anchor="ctr"/>
           <a:lstStyle/>
           <a:p>
-            <a:pPr algn="ctr" indent="0" marL="0">
-              <a:buNone/>
-            </a:pPr>
-            <a:r>
-              <a:rPr lang="en-US" sz="1300" b="1" spc="800" kern="0" dirty="0">
+            <a:pPr marL="0" indent="0" algn="ctr">
+              <a:buNone/>
+            </a:pPr>
+            <a:r>
+              <a:rPr lang="en-US" sz="1300" b="1" kern="0" spc="800" dirty="0">
                 <a:solidFill>
                   <a:srgbClr val="D4A838"/>
                 </a:solidFill>
@@ -8241,11 +8780,11 @@
           <a:bodyPr wrap="square" rtlCol="0" anchor="ctr"/>
           <a:lstStyle/>
           <a:p>
-            <a:pPr algn="ctr" indent="0" marL="0">
-              <a:buNone/>
-            </a:pPr>
-            <a:r>
-              <a:rPr lang="en-US" sz="1100" spc="400" kern="0" dirty="0">
+            <a:pPr marL="0" indent="0" algn="ctr">
+              <a:buNone/>
+            </a:pPr>
+            <a:r>
+              <a:rPr lang="en-US" sz="1100" kern="0" spc="400" dirty="0">
                 <a:solidFill>
                   <a:srgbClr val="FFFFFF">
                     <a:alpha val="60000"/>
@@ -8298,7 +8837,7 @@
           </a:fontRef>
         </p:style>
         <p:txBody>
-          <a:bodyPr rtlCol="0" anchor="ctr" wrap="none" tIns="0" bIns="0"/>
+          <a:bodyPr wrap="none" tIns="0" bIns="0" rtlCol="0" anchor="ctr"/>
           <a:lstStyle/>
           <a:p>
             <a:pPr algn="ctr"/>
@@ -8330,6 +8869,7 @@
         <a:solidFill>
           <a:srgbClr val="FDF6E8"/>
         </a:solidFill>
+        <a:effectLst/>
       </p:bgPr>
     </p:bg>
     <p:spTree>
@@ -8367,11 +8907,11 @@
           <a:bodyPr wrap="square" rtlCol="0" anchor="ctr"/>
           <a:lstStyle/>
           <a:p>
-            <a:pPr indent="0" marL="0">
-              <a:buNone/>
-            </a:pPr>
-            <a:r>
-              <a:rPr lang="en-US" sz="1100" b="1" spc="500" kern="0" dirty="0">
+            <a:pPr marL="0" indent="0">
+              <a:buNone/>
+            </a:pPr>
+            <a:r>
+              <a:rPr lang="en-US" sz="1100" b="1" kern="0" spc="500" dirty="0">
                 <a:solidFill>
                   <a:srgbClr val="2A5C40"/>
                 </a:solidFill>
@@ -8406,7 +8946,7 @@
           <a:bodyPr wrap="square" rtlCol="0" anchor="ctr"/>
           <a:lstStyle/>
           <a:p>
-            <a:pPr algn="ctr" indent="0" marL="0">
+            <a:pPr marL="0" indent="0" algn="ctr">
               <a:buNone/>
             </a:pPr>
             <a:r>
@@ -8445,7 +8985,7 @@
           <a:bodyPr wrap="square" rtlCol="0" anchor="ctr"/>
           <a:lstStyle/>
           <a:p>
-            <a:pPr algn="ctr" indent="0" marL="0">
+            <a:pPr marL="0" indent="0" algn="ctr">
               <a:buNone/>
             </a:pPr>
             <a:r>
@@ -8484,7 +9024,7 @@
           <a:bodyPr wrap="square" rtlCol="0" anchor="ctr"/>
           <a:lstStyle/>
           <a:p>
-            <a:pPr algn="ctr" indent="0" marL="0">
+            <a:pPr marL="0" indent="0" algn="ctr">
               <a:buNone/>
             </a:pPr>
             <a:r>
@@ -8523,20 +9063,9 @@
           <a:bodyPr wrap="square" rtlCol="0" anchor="ctr"/>
           <a:lstStyle/>
           <a:p>
-            <a:pPr algn="ctr" indent="0" marL="0">
-              <a:buNone/>
-            </a:pPr>
-            <a:r>
-              <a:rPr lang="en-US" sz="1400" i="1" dirty="0">
-                <a:solidFill>
-                  <a:srgbClr val="5A6655"/>
-                </a:solidFill>
-                <a:latin typeface="DM Sans" pitchFamily="34" charset="0"/>
-                <a:ea typeface="DM Sans" pitchFamily="34" charset="-122"/>
-                <a:cs typeface="DM Sans" pitchFamily="34" charset="-120"/>
-              </a:rPr>
-              <a:t/>
-            </a:r>
+            <a:pPr marL="0" indent="0" algn="ctr">
+              <a:buNone/>
+            </a:pPr>
             <a:endParaRPr lang="en-US" sz="1400" dirty="0"/>
           </a:p>
         </p:txBody>
@@ -8578,7 +9107,7 @@
           </a:fontRef>
         </p:style>
         <p:txBody>
-          <a:bodyPr rtlCol="0" anchor="ctr" wrap="none" tIns="0" bIns="0"/>
+          <a:bodyPr wrap="none" tIns="0" bIns="0" rtlCol="0" anchor="ctr"/>
           <a:lstStyle/>
           <a:p>
             <a:pPr algn="ctr"/>
@@ -8610,6 +9139,7 @@
         <a:solidFill>
           <a:srgbClr val="1A2E3F"/>
         </a:solidFill>
+        <a:effectLst/>
       </p:bgPr>
     </p:bg>
     <p:spTree>
@@ -8647,11 +9177,11 @@
           <a:bodyPr wrap="square" rtlCol="0" anchor="ctr"/>
           <a:lstStyle/>
           <a:p>
-            <a:pPr indent="0" marL="0">
-              <a:buNone/>
-            </a:pPr>
-            <a:r>
-              <a:rPr lang="en-US" sz="1000" b="1" spc="500" kern="0" dirty="0">
+            <a:pPr marL="0" indent="0">
+              <a:buNone/>
+            </a:pPr>
+            <a:r>
+              <a:rPr lang="en-US" sz="1000" b="1" kern="0" spc="500" dirty="0">
                 <a:solidFill>
                   <a:srgbClr val="FFFFFF">
                     <a:alpha val="50000"/>
@@ -8688,7 +9218,7 @@
           <a:bodyPr wrap="square" rtlCol="0" anchor="ctr"/>
           <a:lstStyle/>
           <a:p>
-            <a:pPr algn="ctr" indent="0" marL="0">
+            <a:pPr marL="0" indent="0" algn="ctr">
               <a:buNone/>
             </a:pPr>
             <a:r>
@@ -8724,7 +9254,7 @@
           <a:bodyPr wrap="square" rtlCol="0" anchor="ctr"/>
           <a:lstStyle/>
           <a:p>
-            <a:pPr algn="ctr" indent="0" marL="0">
+            <a:pPr marL="0" indent="0" algn="ctr">
               <a:buNone/>
             </a:pPr>
             <a:r>
@@ -8763,7 +9293,7 @@
           <a:bodyPr wrap="square" rtlCol="0" anchor="ctr"/>
           <a:lstStyle/>
           <a:p>
-            <a:pPr algn="ctr" indent="0" marL="0">
+            <a:pPr marL="0" indent="0" algn="ctr">
               <a:buNone/>
             </a:pPr>
             <a:r>
@@ -8804,7 +9334,7 @@
           <a:bodyPr wrap="square" rtlCol="0" anchor="ctr"/>
           <a:lstStyle/>
           <a:p>
-            <a:pPr algn="ctr" indent="0" marL="0">
+            <a:pPr marL="0" indent="0" algn="ctr">
               <a:buNone/>
             </a:pPr>
             <a:r>
@@ -8859,7 +9389,7 @@
           </a:fontRef>
         </p:style>
         <p:txBody>
-          <a:bodyPr rtlCol="0" anchor="ctr" wrap="none" tIns="0" bIns="0"/>
+          <a:bodyPr wrap="none" tIns="0" bIns="0" rtlCol="0" anchor="ctr"/>
           <a:lstStyle/>
           <a:p>
             <a:pPr algn="ctr"/>
@@ -8891,6 +9421,7 @@
         <a:solidFill>
           <a:srgbClr val="FDF6E8"/>
         </a:solidFill>
+        <a:effectLst/>
       </p:bgPr>
     </p:bg>
     <p:spTree>
@@ -8928,11 +9459,11 @@
           <a:bodyPr wrap="square" rtlCol="0" anchor="ctr"/>
           <a:lstStyle/>
           <a:p>
-            <a:pPr indent="0" marL="0">
-              <a:buNone/>
-            </a:pPr>
-            <a:r>
-              <a:rPr lang="en-US" sz="1100" b="1" spc="500" kern="0" dirty="0">
+            <a:pPr marL="0" indent="0">
+              <a:buNone/>
+            </a:pPr>
+            <a:r>
+              <a:rPr lang="en-US" sz="1100" b="1" kern="0" spc="500" dirty="0">
                 <a:solidFill>
                   <a:srgbClr val="2A5C40"/>
                 </a:solidFill>
@@ -8967,7 +9498,7 @@
           <a:bodyPr wrap="square" rtlCol="0" anchor="ctr"/>
           <a:lstStyle/>
           <a:p>
-            <a:pPr algn="ctr" indent="0" marL="0">
+            <a:pPr marL="0" indent="0" algn="ctr">
               <a:buNone/>
             </a:pPr>
             <a:r>
@@ -9006,7 +9537,7 @@
           <a:bodyPr wrap="square" rtlCol="0" anchor="ctr"/>
           <a:lstStyle/>
           <a:p>
-            <a:pPr algn="ctr" indent="0" marL="0">
+            <a:pPr marL="0" indent="0" algn="ctr">
               <a:buNone/>
             </a:pPr>
             <a:r>
@@ -9045,7 +9576,7 @@
           <a:bodyPr wrap="square" rtlCol="0" anchor="ctr"/>
           <a:lstStyle/>
           <a:p>
-            <a:pPr algn="ctr" indent="0" marL="0">
+            <a:pPr marL="0" indent="0" algn="ctr">
               <a:buNone/>
             </a:pPr>
             <a:r>
@@ -9084,7 +9615,7 @@
           <a:bodyPr wrap="square" rtlCol="0" anchor="ctr"/>
           <a:lstStyle/>
           <a:p>
-            <a:pPr algn="ctr" indent="0" marL="0">
+            <a:pPr marL="0" indent="0" algn="ctr">
               <a:buNone/>
             </a:pPr>
             <a:r>
@@ -9139,7 +9670,7 @@
           </a:fontRef>
         </p:style>
         <p:txBody>
-          <a:bodyPr rtlCol="0" anchor="ctr" wrap="none" tIns="0" bIns="0"/>
+          <a:bodyPr wrap="none" tIns="0" bIns="0" rtlCol="0" anchor="ctr"/>
           <a:lstStyle/>
           <a:p>
             <a:pPr algn="ctr"/>
@@ -9171,6 +9702,7 @@
         <a:solidFill>
           <a:srgbClr val="9A7820"/>
         </a:solidFill>
+        <a:effectLst/>
       </p:bgPr>
     </p:bg>
     <p:spTree>
@@ -9208,11 +9740,11 @@
           <a:bodyPr wrap="square" rtlCol="0" anchor="ctr"/>
           <a:lstStyle/>
           <a:p>
-            <a:pPr indent="0" marL="0">
-              <a:buNone/>
-            </a:pPr>
-            <a:r>
-              <a:rPr lang="en-US" sz="1000" b="1" spc="500" kern="0" dirty="0">
+            <a:pPr marL="0" indent="0">
+              <a:buNone/>
+            </a:pPr>
+            <a:r>
+              <a:rPr lang="en-US" sz="1000" b="1" kern="0" spc="500" dirty="0">
                 <a:solidFill>
                   <a:srgbClr val="FFFFFF">
                     <a:alpha val="50000"/>
@@ -9249,11 +9781,11 @@
           <a:bodyPr wrap="square" rtlCol="0" anchor="ctr"/>
           <a:lstStyle/>
           <a:p>
-            <a:pPr algn="ctr" indent="0" marL="0">
-              <a:buNone/>
-            </a:pPr>
-            <a:r>
-              <a:rPr lang="en-US" sz="1400" b="1" spc="1000" kern="0" dirty="0">
+            <a:pPr marL="0" indent="0" algn="ctr">
+              <a:buNone/>
+            </a:pPr>
+            <a:r>
+              <a:rPr lang="en-US" sz="1400" b="1" kern="0" spc="1000" dirty="0">
                 <a:solidFill>
                   <a:srgbClr val="F0C64A"/>
                 </a:solidFill>
@@ -9288,7 +9820,7 @@
           <a:bodyPr wrap="square" rtlCol="0" anchor="ctr"/>
           <a:lstStyle/>
           <a:p>
-            <a:pPr algn="ctr" indent="0" marL="0">
+            <a:pPr marL="0" indent="0" algn="ctr">
               <a:buNone/>
             </a:pPr>
             <a:r>
@@ -9305,7 +9837,7 @@
             <a:endParaRPr lang="en-US" sz="4200" dirty="0"/>
           </a:p>
           <a:p>
-            <a:pPr algn="ctr" indent="0" marL="0">
+            <a:pPr marL="0" indent="0" algn="ctr">
               <a:buNone/>
             </a:pPr>
             <a:r>
@@ -9344,7 +9876,7 @@
           <a:bodyPr wrap="square" rtlCol="0" anchor="ctr"/>
           <a:lstStyle/>
           <a:p>
-            <a:pPr algn="ctr" indent="0" marL="0">
+            <a:pPr marL="0" indent="0" algn="ctr">
               <a:buNone/>
             </a:pPr>
             <a:r>
@@ -9399,7 +9931,7 @@
           </a:fontRef>
         </p:style>
         <p:txBody>
-          <a:bodyPr rtlCol="0" anchor="ctr" wrap="none" tIns="0" bIns="0"/>
+          <a:bodyPr wrap="none" tIns="0" bIns="0" rtlCol="0" anchor="ctr"/>
           <a:lstStyle/>
           <a:p>
             <a:pPr algn="ctr"/>
@@ -9431,6 +9963,7 @@
         <a:solidFill>
           <a:srgbClr val="1A2E3F"/>
         </a:solidFill>
+        <a:effectLst/>
       </p:bgPr>
     </p:bg>
     <p:spTree>
@@ -9468,11 +10001,11 @@
           <a:bodyPr wrap="square" rtlCol="0" anchor="ctr"/>
           <a:lstStyle/>
           <a:p>
-            <a:pPr indent="0" marL="0">
-              <a:buNone/>
-            </a:pPr>
-            <a:r>
-              <a:rPr lang="en-US" sz="1000" b="1" spc="500" kern="0" dirty="0">
+            <a:pPr marL="0" indent="0">
+              <a:buNone/>
+            </a:pPr>
+            <a:r>
+              <a:rPr lang="en-US" sz="1000" b="1" kern="0" spc="500" dirty="0">
                 <a:solidFill>
                   <a:srgbClr val="FFFFFF">
                     <a:alpha val="50000"/>
@@ -9509,7 +10042,7 @@
           <a:bodyPr wrap="square" rtlCol="0" anchor="ctr"/>
           <a:lstStyle/>
           <a:p>
-            <a:pPr algn="ctr" indent="0" marL="0">
+            <a:pPr marL="0" indent="0" algn="ctr">
               <a:buNone/>
             </a:pPr>
             <a:r>
@@ -9548,7 +10081,7 @@
           <a:bodyPr wrap="square" rtlCol="0" anchor="ctr"/>
           <a:lstStyle/>
           <a:p>
-            <a:pPr algn="ctr" indent="0" marL="0">
+            <a:pPr marL="0" indent="0" algn="ctr">
               <a:buNone/>
             </a:pPr>
             <a:r>
@@ -9594,6 +10127,13 @@
             <a:prstDash val="solid"/>
           </a:ln>
         </p:spPr>
+        <p:txBody>
+          <a:bodyPr/>
+          <a:lstStyle/>
+          <a:p>
+            <a:endParaRPr lang="en-PH"/>
+          </a:p>
+        </p:txBody>
       </p:sp>
       <p:sp>
         <p:nvSpPr>
@@ -9616,11 +10156,11 @@
           <a:bodyPr wrap="square" rtlCol="0" anchor="ctr"/>
           <a:lstStyle/>
           <a:p>
-            <a:pPr indent="0" marL="0">
-              <a:buNone/>
-            </a:pPr>
-            <a:r>
-              <a:rPr lang="en-US" sz="1300" b="1" spc="300" kern="0" dirty="0">
+            <a:pPr marL="0" indent="0">
+              <a:buNone/>
+            </a:pPr>
+            <a:r>
+              <a:rPr lang="en-US" sz="1300" b="1" kern="0" spc="300" dirty="0">
                 <a:solidFill>
                   <a:srgbClr val="E89C9C"/>
                 </a:solidFill>
@@ -9655,7 +10195,7 @@
           <a:bodyPr wrap="square" rtlCol="0" anchor="ctr"/>
           <a:lstStyle/>
           <a:p>
-            <a:pPr indent="0" marL="0">
+            <a:pPr marL="0" indent="0">
               <a:buNone/>
             </a:pPr>
             <a:r>
@@ -9671,9 +10211,6 @@
               </a:rPr>
               <a:t>Galing sa: </a:t>
             </a:r>
-            <a:pPr indent="0" marL="0">
-              <a:buNone/>
-            </a:pPr>
             <a:r>
               <a:rPr lang="en-US" sz="1400" b="1" dirty="0">
                 <a:solidFill>
@@ -9710,7 +10247,7 @@
           <a:bodyPr wrap="square" rtlCol="0" anchor="ctr"/>
           <a:lstStyle/>
           <a:p>
-            <a:pPr indent="0" marL="0">
+            <a:pPr marL="0" indent="0">
               <a:buNone/>
             </a:pPr>
             <a:r>
@@ -9729,7 +10266,7 @@
             <a:endParaRPr lang="en-US" sz="1300" dirty="0"/>
           </a:p>
           <a:p>
-            <a:pPr indent="0" marL="0">
+            <a:pPr marL="0" indent="0">
               <a:buNone/>
             </a:pPr>
             <a:r>
@@ -9775,6 +10312,13 @@
             <a:prstDash val="solid"/>
           </a:ln>
         </p:spPr>
+        <p:txBody>
+          <a:bodyPr/>
+          <a:lstStyle/>
+          <a:p>
+            <a:endParaRPr lang="en-PH"/>
+          </a:p>
+        </p:txBody>
       </p:sp>
       <p:sp>
         <p:nvSpPr>
@@ -9797,11 +10341,11 @@
           <a:bodyPr wrap="square" rtlCol="0" anchor="ctr"/>
           <a:lstStyle/>
           <a:p>
-            <a:pPr indent="0" marL="0">
-              <a:buNone/>
-            </a:pPr>
-            <a:r>
-              <a:rPr lang="en-US" sz="1300" b="1" spc="300" kern="0" dirty="0">
+            <a:pPr marL="0" indent="0">
+              <a:buNone/>
+            </a:pPr>
+            <a:r>
+              <a:rPr lang="en-US" sz="1300" b="1" kern="0" spc="300" dirty="0">
                 <a:solidFill>
                   <a:srgbClr val="7FD49A"/>
                 </a:solidFill>
@@ -9809,7 +10353,7 @@
                 <a:ea typeface="DM Sans" pitchFamily="34" charset="-122"/>
                 <a:cs typeface="DM Sans" pitchFamily="34" charset="-120"/>
               </a:rPr>
-              <a:t>🎯 TEST · PAGTITIKIM</a:t>
+              <a:t>🎯 TEST · PAGSASALANG/ PAGSUSULIT</a:t>
             </a:r>
             <a:endParaRPr lang="en-US" sz="1300" dirty="0"/>
           </a:p>
@@ -9836,7 +10380,7 @@
           <a:bodyPr wrap="square" rtlCol="0" anchor="ctr"/>
           <a:lstStyle/>
           <a:p>
-            <a:pPr indent="0" marL="0">
+            <a:pPr marL="0" indent="0">
               <a:buNone/>
             </a:pPr>
             <a:r>
@@ -9852,9 +10396,6 @@
               </a:rPr>
               <a:t>Galing sa: </a:t>
             </a:r>
-            <a:pPr indent="0" marL="0">
-              <a:buNone/>
-            </a:pPr>
             <a:r>
               <a:rPr lang="en-US" sz="1400" b="1" dirty="0">
                 <a:solidFill>
@@ -9891,7 +10432,7 @@
           <a:bodyPr wrap="square" rtlCol="0" anchor="ctr"/>
           <a:lstStyle/>
           <a:p>
-            <a:pPr indent="0" marL="0">
+            <a:pPr marL="0" indent="0">
               <a:buNone/>
             </a:pPr>
             <a:r>
@@ -9910,7 +10451,7 @@
             <a:endParaRPr lang="en-US" sz="1300" dirty="0"/>
           </a:p>
           <a:p>
-            <a:pPr indent="0" marL="0">
+            <a:pPr marL="0" indent="0">
               <a:buNone/>
             </a:pPr>
             <a:r>
@@ -9956,6 +10497,13 @@
             <a:prstDash val="solid"/>
           </a:ln>
         </p:spPr>
+        <p:txBody>
+          <a:bodyPr/>
+          <a:lstStyle/>
+          <a:p>
+            <a:endParaRPr lang="en-PH"/>
+          </a:p>
+        </p:txBody>
       </p:sp>
       <p:sp>
         <p:nvSpPr>
@@ -9978,11 +10526,11 @@
           <a:bodyPr wrap="square" rtlCol="0" anchor="ctr"/>
           <a:lstStyle/>
           <a:p>
-            <a:pPr indent="0" marL="0">
-              <a:buNone/>
-            </a:pPr>
-            <a:r>
-              <a:rPr lang="en-US" sz="1300" b="1" spc="300" kern="0" dirty="0">
+            <a:pPr marL="0" indent="0">
+              <a:buNone/>
+            </a:pPr>
+            <a:r>
+              <a:rPr lang="en-US" sz="1300" b="1" kern="0" spc="300" dirty="0">
                 <a:solidFill>
                   <a:srgbClr val="F0C66A"/>
                 </a:solidFill>
@@ -10017,7 +10565,7 @@
           <a:bodyPr wrap="square" rtlCol="0" anchor="ctr"/>
           <a:lstStyle/>
           <a:p>
-            <a:pPr indent="0" marL="0">
+            <a:pPr marL="0" indent="0">
               <a:buNone/>
             </a:pPr>
             <a:r>
@@ -10033,9 +10581,6 @@
               </a:rPr>
               <a:t>Galing sa: </a:t>
             </a:r>
-            <a:pPr indent="0" marL="0">
-              <a:buNone/>
-            </a:pPr>
             <a:r>
               <a:rPr lang="en-US" sz="1400" b="1" dirty="0">
                 <a:solidFill>
@@ -10047,9 +10592,6 @@
               </a:rPr>
               <a:t>diablo / laman </a:t>
             </a:r>
-            <a:pPr indent="0" marL="0">
-              <a:buNone/>
-            </a:pPr>
             <a:r>
               <a:rPr lang="en-US" sz="1300" i="1" dirty="0">
                 <a:solidFill>
@@ -10088,7 +10630,7 @@
           <a:bodyPr wrap="square" rtlCol="0" anchor="ctr"/>
           <a:lstStyle/>
           <a:p>
-            <a:pPr indent="0" marL="0">
+            <a:pPr marL="0" indent="0">
               <a:buNone/>
             </a:pPr>
             <a:r>
@@ -10107,7 +10649,7 @@
             <a:endParaRPr lang="en-US" sz="1300" dirty="0"/>
           </a:p>
           <a:p>
-            <a:pPr indent="0" marL="0">
+            <a:pPr marL="0" indent="0">
               <a:buNone/>
             </a:pPr>
             <a:r>
@@ -10164,7 +10706,7 @@
           </a:fontRef>
         </p:style>
         <p:txBody>
-          <a:bodyPr rtlCol="0" anchor="ctr" wrap="none" tIns="0" bIns="0"/>
+          <a:bodyPr wrap="none" tIns="0" bIns="0" rtlCol="0" anchor="ctr"/>
           <a:lstStyle/>
           <a:p>
             <a:pPr algn="ctr"/>
@@ -10196,6 +10738,7 @@
         <a:solidFill>
           <a:srgbClr val="FDF6E8"/>
         </a:solidFill>
+        <a:effectLst/>
       </p:bgPr>
     </p:bg>
     <p:spTree>
@@ -10233,11 +10776,11 @@
           <a:bodyPr wrap="square" rtlCol="0" anchor="ctr"/>
           <a:lstStyle/>
           <a:p>
-            <a:pPr indent="0" marL="0">
-              <a:buNone/>
-            </a:pPr>
-            <a:r>
-              <a:rPr lang="en-US" sz="1100" b="1" spc="500" kern="0" dirty="0">
+            <a:pPr marL="0" indent="0">
+              <a:buNone/>
+            </a:pPr>
+            <a:r>
+              <a:rPr lang="en-US" sz="1100" b="1" kern="0" spc="500" dirty="0">
                 <a:solidFill>
                   <a:srgbClr val="2A5C40"/>
                 </a:solidFill>
@@ -10272,7 +10815,7 @@
           <a:bodyPr wrap="square" rtlCol="0" anchor="ctr"/>
           <a:lstStyle/>
           <a:p>
-            <a:pPr algn="ctr" indent="0" marL="0">
+            <a:pPr marL="0" indent="0" algn="ctr">
               <a:buNone/>
             </a:pPr>
             <a:r>
@@ -10311,7 +10854,7 @@
           <a:bodyPr wrap="square" rtlCol="0" anchor="ctr"/>
           <a:lstStyle/>
           <a:p>
-            <a:pPr algn="ctr" indent="0" marL="0">
+            <a:pPr marL="0" indent="0" algn="ctr">
               <a:buNone/>
             </a:pPr>
             <a:r>
@@ -10328,7 +10871,7 @@
             <a:endParaRPr lang="en-US" sz="2400" dirty="0"/>
           </a:p>
           <a:p>
-            <a:pPr algn="ctr" indent="0" marL="0">
+            <a:pPr marL="0" indent="0" algn="ctr">
               <a:buNone/>
             </a:pPr>
             <a:r>
@@ -10367,7 +10910,7 @@
           <a:bodyPr wrap="square" rtlCol="0" anchor="ctr"/>
           <a:lstStyle/>
           <a:p>
-            <a:pPr algn="ctr" indent="0" marL="0">
+            <a:pPr marL="0" indent="0" algn="ctr">
               <a:buNone/>
             </a:pPr>
             <a:r>
@@ -10406,20 +10949,9 @@
           <a:bodyPr wrap="square" rtlCol="0" anchor="ctr"/>
           <a:lstStyle/>
           <a:p>
-            <a:pPr algn="ctr" indent="0" marL="0">
-              <a:buNone/>
-            </a:pPr>
-            <a:r>
-              <a:rPr lang="en-US" sz="1400" i="1" dirty="0">
-                <a:solidFill>
-                  <a:srgbClr val="5A6655"/>
-                </a:solidFill>
-                <a:latin typeface="DM Sans" pitchFamily="34" charset="0"/>
-                <a:ea typeface="DM Sans" pitchFamily="34" charset="-122"/>
-                <a:cs typeface="DM Sans" pitchFamily="34" charset="-120"/>
-              </a:rPr>
-              <a:t/>
-            </a:r>
+            <a:pPr marL="0" indent="0" algn="ctr">
+              <a:buNone/>
+            </a:pPr>
             <a:endParaRPr lang="en-US" sz="1400" dirty="0"/>
           </a:p>
         </p:txBody>
@@ -10461,7 +10993,7 @@
           </a:fontRef>
         </p:style>
         <p:txBody>
-          <a:bodyPr rtlCol="0" anchor="ctr" wrap="none" tIns="0" bIns="0"/>
+          <a:bodyPr wrap="none" tIns="0" bIns="0" rtlCol="0" anchor="ctr"/>
           <a:lstStyle/>
           <a:p>
             <a:pPr algn="ctr"/>
@@ -10493,6 +11025,7 @@
         <a:solidFill>
           <a:srgbClr val="FDF6E8"/>
         </a:solidFill>
+        <a:effectLst/>
       </p:bgPr>
     </p:bg>
     <p:spTree>
@@ -10530,11 +11063,11 @@
           <a:bodyPr wrap="square" rtlCol="0" anchor="ctr"/>
           <a:lstStyle/>
           <a:p>
-            <a:pPr indent="0" marL="0">
-              <a:buNone/>
-            </a:pPr>
-            <a:r>
-              <a:rPr lang="en-US" sz="1100" b="1" spc="500" kern="0" dirty="0">
+            <a:pPr marL="0" indent="0">
+              <a:buNone/>
+            </a:pPr>
+            <a:r>
+              <a:rPr lang="en-US" sz="1100" b="1" kern="0" spc="500" dirty="0">
                 <a:solidFill>
                   <a:srgbClr val="2A5C40"/>
                 </a:solidFill>
@@ -10569,7 +11102,7 @@
           <a:bodyPr wrap="square" rtlCol="0" anchor="ctr"/>
           <a:lstStyle/>
           <a:p>
-            <a:pPr algn="ctr" indent="0" marL="0">
+            <a:pPr marL="0" indent="0" algn="ctr">
               <a:buNone/>
             </a:pPr>
             <a:r>
@@ -10610,7 +11143,7 @@
           <a:bodyPr wrap="square" rtlCol="0" anchor="ctr"/>
           <a:lstStyle/>
           <a:p>
-            <a:pPr algn="ctr" indent="0" marL="0">
+            <a:pPr marL="0" indent="0" algn="ctr">
               <a:buNone/>
             </a:pPr>
             <a:r>
@@ -10649,7 +11182,7 @@
           <a:bodyPr wrap="square" rtlCol="0" anchor="ctr"/>
           <a:lstStyle/>
           <a:p>
-            <a:pPr algn="ctr" indent="0" marL="0">
+            <a:pPr marL="0" indent="0" algn="ctr">
               <a:buNone/>
             </a:pPr>
             <a:r>
@@ -10688,11 +11221,11 @@
           <a:bodyPr wrap="square" rtlCol="0" anchor="ctr"/>
           <a:lstStyle/>
           <a:p>
-            <a:pPr algn="ctr" indent="0" marL="0">
-              <a:buNone/>
-            </a:pPr>
-            <a:r>
-              <a:rPr lang="en-US" sz="1300" b="1" spc="500" kern="0" dirty="0">
+            <a:pPr marL="0" indent="0" algn="ctr">
+              <a:buNone/>
+            </a:pPr>
+            <a:r>
+              <a:rPr lang="en-US" sz="1300" b="1" kern="0" spc="500" dirty="0">
                 <a:solidFill>
                   <a:srgbClr val="1A1612">
                     <a:alpha val="65000"/>
@@ -10745,7 +11278,7 @@
           </a:fontRef>
         </p:style>
         <p:txBody>
-          <a:bodyPr rtlCol="0" anchor="ctr" wrap="none" tIns="0" bIns="0"/>
+          <a:bodyPr wrap="none" tIns="0" bIns="0" rtlCol="0" anchor="ctr"/>
           <a:lstStyle/>
           <a:p>
             <a:pPr algn="ctr"/>
@@ -11062,4 +11595,319 @@
     </a:ext>
   </a:extLst>
 </a:theme>
+</file>
+
+<file path=ppt/theme/theme2.xml><?xml version="1.0" encoding="utf-8"?>
+<a:theme xmlns:a="http://schemas.openxmlformats.org/drawingml/2006/main" name="Office Theme">
+  <a:themeElements>
+    <a:clrScheme name="Office">
+      <a:dk1>
+        <a:sysClr val="windowText" lastClr="000000"/>
+      </a:dk1>
+      <a:lt1>
+        <a:sysClr val="window" lastClr="FFFFFF"/>
+      </a:lt1>
+      <a:dk2>
+        <a:srgbClr val="0E2841"/>
+      </a:dk2>
+      <a:lt2>
+        <a:srgbClr val="E8E8E8"/>
+      </a:lt2>
+      <a:accent1>
+        <a:srgbClr val="156082"/>
+      </a:accent1>
+      <a:accent2>
+        <a:srgbClr val="E97132"/>
+      </a:accent2>
+      <a:accent3>
+        <a:srgbClr val="196B24"/>
+      </a:accent3>
+      <a:accent4>
+        <a:srgbClr val="0F9ED5"/>
+      </a:accent4>
+      <a:accent5>
+        <a:srgbClr val="A02B93"/>
+      </a:accent5>
+      <a:accent6>
+        <a:srgbClr val="4EA72E"/>
+      </a:accent6>
+      <a:hlink>
+        <a:srgbClr val="467886"/>
+      </a:hlink>
+      <a:folHlink>
+        <a:srgbClr val="96607D"/>
+      </a:folHlink>
+    </a:clrScheme>
+    <a:fontScheme name="Office">
+      <a:majorFont>
+        <a:latin typeface="Aptos Display" panose="02110004020202020204"/>
+        <a:ea typeface=""/>
+        <a:cs typeface=""/>
+        <a:font script="Jpan" typeface="游ゴシック Light"/>
+        <a:font script="Hang" typeface="맑은 고딕"/>
+        <a:font script="Hans" typeface="等线 Light"/>
+        <a:font script="Hant" typeface="新細明體"/>
+        <a:font script="Arab" typeface="Times New Roman"/>
+        <a:font script="Hebr" typeface="Times New Roman"/>
+        <a:font script="Thai" typeface="Angsana New"/>
+        <a:font script="Ethi" typeface="Nyala"/>
+        <a:font script="Beng" typeface="Vrinda"/>
+        <a:font script="Gujr" typeface="Shruti"/>
+        <a:font script="Khmr" typeface="MoolBoran"/>
+        <a:font script="Knda" typeface="Tunga"/>
+        <a:font script="Guru" typeface="Raavi"/>
+        <a:font script="Cans" typeface="Euphemia"/>
+        <a:font script="Cher" typeface="Plantagenet Cherokee"/>
+        <a:font script="Yiii" typeface="Microsoft Yi Baiti"/>
+        <a:font script="Tibt" typeface="Microsoft Himalaya"/>
+        <a:font script="Thaa" typeface="MV Boli"/>
+        <a:font script="Deva" typeface="Mangal"/>
+        <a:font script="Telu" typeface="Gautami"/>
+        <a:font script="Taml" typeface="Latha"/>
+        <a:font script="Syrc" typeface="Estrangelo Edessa"/>
+        <a:font script="Orya" typeface="Kalinga"/>
+        <a:font script="Mlym" typeface="Kartika"/>
+        <a:font script="Laoo" typeface="DokChampa"/>
+        <a:font script="Sinh" typeface="Iskoola Pota"/>
+        <a:font script="Mong" typeface="Mongolian Baiti"/>
+        <a:font script="Viet" typeface="Times New Roman"/>
+        <a:font script="Uigh" typeface="Microsoft Uighur"/>
+        <a:font script="Geor" typeface="Sylfaen"/>
+        <a:font script="Armn" typeface="Arial"/>
+        <a:font script="Bugi" typeface="Leelawadee UI"/>
+        <a:font script="Bopo" typeface="Microsoft JhengHei"/>
+        <a:font script="Java" typeface="Javanese Text"/>
+        <a:font script="Lisu" typeface="Segoe UI"/>
+        <a:font script="Mymr" typeface="Myanmar Text"/>
+        <a:font script="Nkoo" typeface="Ebrima"/>
+        <a:font script="Olck" typeface="Nirmala UI"/>
+        <a:font script="Osma" typeface="Ebrima"/>
+        <a:font script="Phag" typeface="Phagspa"/>
+        <a:font script="Syrn" typeface="Estrangelo Edessa"/>
+        <a:font script="Syrj" typeface="Estrangelo Edessa"/>
+        <a:font script="Syre" typeface="Estrangelo Edessa"/>
+        <a:font script="Sora" typeface="Nirmala UI"/>
+        <a:font script="Tale" typeface="Microsoft Tai Le"/>
+        <a:font script="Talu" typeface="Microsoft New Tai Lue"/>
+        <a:font script="Tfng" typeface="Ebrima"/>
+      </a:majorFont>
+      <a:minorFont>
+        <a:latin typeface="Aptos" panose="02110004020202020204"/>
+        <a:ea typeface=""/>
+        <a:cs typeface=""/>
+        <a:font script="Jpan" typeface="游ゴシック"/>
+        <a:font script="Hang" typeface="맑은 고딕"/>
+        <a:font script="Hans" typeface="等线"/>
+        <a:font script="Hant" typeface="新細明體"/>
+        <a:font script="Arab" typeface="Arial"/>
+        <a:font script="Hebr" typeface="Arial"/>
+        <a:font script="Thai" typeface="Cordia New"/>
+        <a:font script="Ethi" typeface="Nyala"/>
+        <a:font script="Beng" typeface="Vrinda"/>
+        <a:font script="Gujr" typeface="Shruti"/>
+        <a:font script="Khmr" typeface="DaunPenh"/>
+        <a:font script="Knda" typeface="Tunga"/>
+        <a:font script="Guru" typeface="Raavi"/>
+        <a:font script="Cans" typeface="Euphemia"/>
+        <a:font script="Cher" typeface="Plantagenet Cherokee"/>
+        <a:font script="Yiii" typeface="Microsoft Yi Baiti"/>
+        <a:font script="Tibt" typeface="Microsoft Himalaya"/>
+        <a:font script="Thaa" typeface="MV Boli"/>
+        <a:font script="Deva" typeface="Mangal"/>
+        <a:font script="Telu" typeface="Gautami"/>
+        <a:font script="Taml" typeface="Latha"/>
+        <a:font script="Syrc" typeface="Estrangelo Edessa"/>
+        <a:font script="Orya" typeface="Kalinga"/>
+        <a:font script="Mlym" typeface="Kartika"/>
+        <a:font script="Laoo" typeface="DokChampa"/>
+        <a:font script="Sinh" typeface="Iskoola Pota"/>
+        <a:font script="Mong" typeface="Mongolian Baiti"/>
+        <a:font script="Viet" typeface="Arial"/>
+        <a:font script="Uigh" typeface="Microsoft Uighur"/>
+        <a:font script="Geor" typeface="Sylfaen"/>
+        <a:font script="Armn" typeface="Arial"/>
+        <a:font script="Bugi" typeface="Leelawadee UI"/>
+        <a:font script="Bopo" typeface="Microsoft JhengHei"/>
+        <a:font script="Java" typeface="Javanese Text"/>
+        <a:font script="Lisu" typeface="Segoe UI"/>
+        <a:font script="Mymr" typeface="Myanmar Text"/>
+        <a:font script="Nkoo" typeface="Ebrima"/>
+        <a:font script="Olck" typeface="Nirmala UI"/>
+        <a:font script="Osma" typeface="Ebrima"/>
+        <a:font script="Phag" typeface="Phagspa"/>
+        <a:font script="Syrn" typeface="Estrangelo Edessa"/>
+        <a:font script="Syrj" typeface="Estrangelo Edessa"/>
+        <a:font script="Syre" typeface="Estrangelo Edessa"/>
+        <a:font script="Sora" typeface="Nirmala UI"/>
+        <a:font script="Tale" typeface="Microsoft Tai Le"/>
+        <a:font script="Talu" typeface="Microsoft New Tai Lue"/>
+        <a:font script="Tfng" typeface="Ebrima"/>
+      </a:minorFont>
+    </a:fontScheme>
+    <a:fmtScheme name="Office">
+      <a:fillStyleLst>
+        <a:solidFill>
+          <a:schemeClr val="phClr"/>
+        </a:solidFill>
+        <a:gradFill rotWithShape="1">
+          <a:gsLst>
+            <a:gs pos="0">
+              <a:schemeClr val="phClr">
+                <a:lumMod val="110000"/>
+                <a:satMod val="105000"/>
+                <a:tint val="67000"/>
+              </a:schemeClr>
+            </a:gs>
+            <a:gs pos="50000">
+              <a:schemeClr val="phClr">
+                <a:lumMod val="105000"/>
+                <a:satMod val="103000"/>
+                <a:tint val="73000"/>
+              </a:schemeClr>
+            </a:gs>
+            <a:gs pos="100000">
+              <a:schemeClr val="phClr">
+                <a:lumMod val="105000"/>
+                <a:satMod val="109000"/>
+                <a:tint val="81000"/>
+              </a:schemeClr>
+            </a:gs>
+          </a:gsLst>
+          <a:lin ang="5400000" scaled="0"/>
+        </a:gradFill>
+        <a:gradFill rotWithShape="1">
+          <a:gsLst>
+            <a:gs pos="0">
+              <a:schemeClr val="phClr">
+                <a:satMod val="103000"/>
+                <a:lumMod val="102000"/>
+                <a:tint val="94000"/>
+              </a:schemeClr>
+            </a:gs>
+            <a:gs pos="50000">
+              <a:schemeClr val="phClr">
+                <a:satMod val="110000"/>
+                <a:lumMod val="100000"/>
+                <a:shade val="100000"/>
+              </a:schemeClr>
+            </a:gs>
+            <a:gs pos="100000">
+              <a:schemeClr val="phClr">
+                <a:lumMod val="99000"/>
+                <a:satMod val="120000"/>
+                <a:shade val="78000"/>
+              </a:schemeClr>
+            </a:gs>
+          </a:gsLst>
+          <a:lin ang="5400000" scaled="0"/>
+        </a:gradFill>
+      </a:fillStyleLst>
+      <a:lnStyleLst>
+        <a:ln w="12700" cap="flat" cmpd="sng" algn="ctr">
+          <a:solidFill>
+            <a:schemeClr val="phClr"/>
+          </a:solidFill>
+          <a:prstDash val="solid"/>
+          <a:miter lim="800000"/>
+        </a:ln>
+        <a:ln w="19050" cap="flat" cmpd="sng" algn="ctr">
+          <a:solidFill>
+            <a:schemeClr val="phClr"/>
+          </a:solidFill>
+          <a:prstDash val="solid"/>
+          <a:miter lim="800000"/>
+        </a:ln>
+        <a:ln w="25400" cap="flat" cmpd="sng" algn="ctr">
+          <a:solidFill>
+            <a:schemeClr val="phClr"/>
+          </a:solidFill>
+          <a:prstDash val="solid"/>
+          <a:miter lim="800000"/>
+        </a:ln>
+      </a:lnStyleLst>
+      <a:effectStyleLst>
+        <a:effectStyle>
+          <a:effectLst/>
+        </a:effectStyle>
+        <a:effectStyle>
+          <a:effectLst/>
+        </a:effectStyle>
+        <a:effectStyle>
+          <a:effectLst>
+            <a:outerShdw blurRad="57150" dist="19050" dir="5400000" algn="ctr" rotWithShape="0">
+              <a:srgbClr val="000000">
+                <a:alpha val="63000"/>
+              </a:srgbClr>
+            </a:outerShdw>
+          </a:effectLst>
+        </a:effectStyle>
+      </a:effectStyleLst>
+      <a:bgFillStyleLst>
+        <a:solidFill>
+          <a:schemeClr val="phClr"/>
+        </a:solidFill>
+        <a:solidFill>
+          <a:schemeClr val="phClr">
+            <a:tint val="95000"/>
+            <a:satMod val="170000"/>
+          </a:schemeClr>
+        </a:solidFill>
+        <a:gradFill rotWithShape="1">
+          <a:gsLst>
+            <a:gs pos="0">
+              <a:schemeClr val="phClr">
+                <a:tint val="93000"/>
+                <a:satMod val="150000"/>
+                <a:shade val="98000"/>
+                <a:lumMod val="102000"/>
+              </a:schemeClr>
+            </a:gs>
+            <a:gs pos="50000">
+              <a:schemeClr val="phClr">
+                <a:tint val="98000"/>
+                <a:satMod val="130000"/>
+                <a:shade val="90000"/>
+                <a:lumMod val="103000"/>
+              </a:schemeClr>
+            </a:gs>
+            <a:gs pos="100000">
+              <a:schemeClr val="phClr">
+                <a:shade val="63000"/>
+                <a:satMod val="120000"/>
+              </a:schemeClr>
+            </a:gs>
+          </a:gsLst>
+          <a:lin ang="5400000" scaled="0"/>
+        </a:gradFill>
+      </a:bgFillStyleLst>
+    </a:fmtScheme>
+  </a:themeElements>
+  <a:objectDefaults>
+    <a:lnDef>
+      <a:spPr/>
+      <a:bodyPr/>
+      <a:lstStyle/>
+      <a:style>
+        <a:lnRef idx="2">
+          <a:schemeClr val="accent1"/>
+        </a:lnRef>
+        <a:fillRef idx="0">
+          <a:schemeClr val="accent1"/>
+        </a:fillRef>
+        <a:effectRef idx="1">
+          <a:schemeClr val="accent1"/>
+        </a:effectRef>
+        <a:fontRef idx="minor">
+          <a:schemeClr val="tx1"/>
+        </a:fontRef>
+      </a:style>
+    </a:lnDef>
+  </a:objectDefaults>
+  <a:extraClrSchemeLst/>
+  <a:extLst>
+    <a:ext uri="{05A4C25C-085E-4340-85A3-A5531E510DB2}">
+      <thm15:themeFamily xmlns:thm15="http://schemas.microsoft.com/office/thememl/2012/main" name="Office Theme" id="{2E142A2C-CD16-42D6-873A-C26D2A0506FA}" vid="{1BDDFF52-6CD6-40A5-AB3C-68EB2F1E4D0A}"/>
+    </a:ext>
+  </a:extLst>
+</a:theme>
 </file>